--- a/Side Meetings/ICON-requirements.pptx
+++ b/Side Meetings/ICON-requirements.pptx
@@ -4,12 +4,17 @@
   <p:sldMasterIdLst>
     <p:sldMasterId id="2147483648" r:id="rId1"/>
   </p:sldMasterIdLst>
+  <p:notesMasterIdLst>
+    <p:notesMasterId r:id="rId9"/>
+  </p:notesMasterIdLst>
   <p:sldIdLst>
     <p:sldId id="256" r:id="rId2"/>
-    <p:sldId id="260" r:id="rId3"/>
-    <p:sldId id="257" r:id="rId4"/>
-    <p:sldId id="258" r:id="rId5"/>
-    <p:sldId id="259" r:id="rId6"/>
+    <p:sldId id="262" r:id="rId3"/>
+    <p:sldId id="260" r:id="rId4"/>
+    <p:sldId id="257" r:id="rId5"/>
+    <p:sldId id="258" r:id="rId6"/>
+    <p:sldId id="259" r:id="rId7"/>
+    <p:sldId id="263" r:id="rId8"/>
   </p:sldIdLst>
   <p:sldSz cx="12192000" cy="6858000"/>
   <p:notesSz cx="6858000" cy="9144000"/>
@@ -108,7 +113,542 @@
       </a:defRPr>
     </a:lvl9pPr>
   </p:defaultTextStyle>
+  <p:extLst>
+    <p:ext uri="{EFAFB233-063F-42B5-8137-9DF3F51BA10A}">
+      <p15:sldGuideLst xmlns:p15="http://schemas.microsoft.com/office/powerpoint/2012/main"/>
+    </p:ext>
+  </p:extLst>
 </p:presentation>
+</file>
+
+<file path=ppt/notesMasters/notesMaster1.xml><?xml version="1.0" encoding="utf-8"?>
+<p:notesMaster xmlns:a="http://schemas.openxmlformats.org/drawingml/2006/main" xmlns:r="http://schemas.openxmlformats.org/officeDocument/2006/relationships" xmlns:p="http://schemas.openxmlformats.org/presentationml/2006/main">
+  <p:cSld>
+    <p:bg>
+      <p:bgRef idx="1001">
+        <a:schemeClr val="bg1"/>
+      </p:bgRef>
+    </p:bg>
+    <p:spTree>
+      <p:nvGrpSpPr>
+        <p:cNvPr id="1" name=""/>
+        <p:cNvGrpSpPr/>
+        <p:nvPr/>
+      </p:nvGrpSpPr>
+      <p:grpSpPr>
+        <a:xfrm>
+          <a:off x="0" y="0"/>
+          <a:ext cx="0" cy="0"/>
+          <a:chOff x="0" y="0"/>
+          <a:chExt cx="0" cy="0"/>
+        </a:xfrm>
+      </p:grpSpPr>
+      <p:sp>
+        <p:nvSpPr>
+          <p:cNvPr id="2" name="页眉占位符 1"/>
+          <p:cNvSpPr>
+            <a:spLocks noGrp="1"/>
+          </p:cNvSpPr>
+          <p:nvPr>
+            <p:ph type="hdr" sz="quarter"/>
+          </p:nvPr>
+        </p:nvSpPr>
+        <p:spPr>
+          <a:xfrm>
+            <a:off x="0" y="0"/>
+            <a:ext cx="2971800" cy="458788"/>
+          </a:xfrm>
+          <a:prstGeom prst="rect">
+            <a:avLst/>
+          </a:prstGeom>
+        </p:spPr>
+        <p:txBody>
+          <a:bodyPr vert="horz" lIns="91440" tIns="45720" rIns="91440" bIns="45720" rtlCol="0"/>
+          <a:lstStyle>
+            <a:lvl1pPr algn="l">
+              <a:defRPr sz="1200"/>
+            </a:lvl1pPr>
+          </a:lstStyle>
+          <a:p>
+            <a:endParaRPr lang="en-US"/>
+          </a:p>
+        </p:txBody>
+      </p:sp>
+      <p:sp>
+        <p:nvSpPr>
+          <p:cNvPr id="3" name="日期占位符 2"/>
+          <p:cNvSpPr>
+            <a:spLocks noGrp="1"/>
+          </p:cNvSpPr>
+          <p:nvPr>
+            <p:ph type="dt" idx="1"/>
+          </p:nvPr>
+        </p:nvSpPr>
+        <p:spPr>
+          <a:xfrm>
+            <a:off x="3884613" y="0"/>
+            <a:ext cx="2971800" cy="458788"/>
+          </a:xfrm>
+          <a:prstGeom prst="rect">
+            <a:avLst/>
+          </a:prstGeom>
+        </p:spPr>
+        <p:txBody>
+          <a:bodyPr vert="horz" lIns="91440" tIns="45720" rIns="91440" bIns="45720" rtlCol="0"/>
+          <a:lstStyle>
+            <a:lvl1pPr algn="r">
+              <a:defRPr sz="1200"/>
+            </a:lvl1pPr>
+          </a:lstStyle>
+          <a:p>
+            <a:fld id="{26FD6D93-B7C5-4886-96FE-E919881FC183}" type="datetimeFigureOut">
+              <a:rPr lang="en-US" smtClean="0"/>
+              <a:t>7/13/2026</a:t>
+            </a:fld>
+            <a:endParaRPr lang="en-US"/>
+          </a:p>
+        </p:txBody>
+      </p:sp>
+      <p:sp>
+        <p:nvSpPr>
+          <p:cNvPr id="4" name="幻灯片图像占位符 3"/>
+          <p:cNvSpPr>
+            <a:spLocks noGrp="1" noRot="1" noChangeAspect="1"/>
+          </p:cNvSpPr>
+          <p:nvPr>
+            <p:ph type="sldImg" idx="2"/>
+          </p:nvPr>
+        </p:nvSpPr>
+        <p:spPr>
+          <a:xfrm>
+            <a:off x="685800" y="1143000"/>
+            <a:ext cx="5486400" cy="3086100"/>
+          </a:xfrm>
+          <a:prstGeom prst="rect">
+            <a:avLst/>
+          </a:prstGeom>
+          <a:noFill/>
+          <a:ln w="12700">
+            <a:solidFill>
+              <a:prstClr val="black"/>
+            </a:solidFill>
+          </a:ln>
+        </p:spPr>
+        <p:txBody>
+          <a:bodyPr vert="horz" lIns="91440" tIns="45720" rIns="91440" bIns="45720" rtlCol="0" anchor="ctr"/>
+          <a:lstStyle/>
+          <a:p>
+            <a:endParaRPr lang="en-US"/>
+          </a:p>
+        </p:txBody>
+      </p:sp>
+      <p:sp>
+        <p:nvSpPr>
+          <p:cNvPr id="5" name="备注占位符 4"/>
+          <p:cNvSpPr>
+            <a:spLocks noGrp="1"/>
+          </p:cNvSpPr>
+          <p:nvPr>
+            <p:ph type="body" sz="quarter" idx="3"/>
+          </p:nvPr>
+        </p:nvSpPr>
+        <p:spPr>
+          <a:xfrm>
+            <a:off x="685800" y="4400550"/>
+            <a:ext cx="5486400" cy="3600450"/>
+          </a:xfrm>
+          <a:prstGeom prst="rect">
+            <a:avLst/>
+          </a:prstGeom>
+        </p:spPr>
+        <p:txBody>
+          <a:bodyPr vert="horz" lIns="91440" tIns="45720" rIns="91440" bIns="45720" rtlCol="0"/>
+          <a:lstStyle/>
+          <a:p>
+            <a:pPr lvl="0"/>
+            <a:r>
+              <a:rPr lang="zh-CN" altLang="en-US" smtClean="0"/>
+              <a:t>单击此处编辑母版文本样式</a:t>
+            </a:r>
+          </a:p>
+          <a:p>
+            <a:pPr lvl="1"/>
+            <a:r>
+              <a:rPr lang="zh-CN" altLang="en-US" smtClean="0"/>
+              <a:t>第二级</a:t>
+            </a:r>
+          </a:p>
+          <a:p>
+            <a:pPr lvl="2"/>
+            <a:r>
+              <a:rPr lang="zh-CN" altLang="en-US" smtClean="0"/>
+              <a:t>第三级</a:t>
+            </a:r>
+          </a:p>
+          <a:p>
+            <a:pPr lvl="3"/>
+            <a:r>
+              <a:rPr lang="zh-CN" altLang="en-US" smtClean="0"/>
+              <a:t>第四级</a:t>
+            </a:r>
+          </a:p>
+          <a:p>
+            <a:pPr lvl="4"/>
+            <a:r>
+              <a:rPr lang="zh-CN" altLang="en-US" smtClean="0"/>
+              <a:t>第五级</a:t>
+            </a:r>
+            <a:endParaRPr lang="en-US"/>
+          </a:p>
+        </p:txBody>
+      </p:sp>
+      <p:sp>
+        <p:nvSpPr>
+          <p:cNvPr id="6" name="页脚占位符 5"/>
+          <p:cNvSpPr>
+            <a:spLocks noGrp="1"/>
+          </p:cNvSpPr>
+          <p:nvPr>
+            <p:ph type="ftr" sz="quarter" idx="4"/>
+          </p:nvPr>
+        </p:nvSpPr>
+        <p:spPr>
+          <a:xfrm>
+            <a:off x="0" y="8685213"/>
+            <a:ext cx="2971800" cy="458787"/>
+          </a:xfrm>
+          <a:prstGeom prst="rect">
+            <a:avLst/>
+          </a:prstGeom>
+        </p:spPr>
+        <p:txBody>
+          <a:bodyPr vert="horz" lIns="91440" tIns="45720" rIns="91440" bIns="45720" rtlCol="0" anchor="b"/>
+          <a:lstStyle>
+            <a:lvl1pPr algn="l">
+              <a:defRPr sz="1200"/>
+            </a:lvl1pPr>
+          </a:lstStyle>
+          <a:p>
+            <a:endParaRPr lang="en-US"/>
+          </a:p>
+        </p:txBody>
+      </p:sp>
+      <p:sp>
+        <p:nvSpPr>
+          <p:cNvPr id="7" name="灯片编号占位符 6"/>
+          <p:cNvSpPr>
+            <a:spLocks noGrp="1"/>
+          </p:cNvSpPr>
+          <p:nvPr>
+            <p:ph type="sldNum" sz="quarter" idx="5"/>
+          </p:nvPr>
+        </p:nvSpPr>
+        <p:spPr>
+          <a:xfrm>
+            <a:off x="3884613" y="8685213"/>
+            <a:ext cx="2971800" cy="458787"/>
+          </a:xfrm>
+          <a:prstGeom prst="rect">
+            <a:avLst/>
+          </a:prstGeom>
+        </p:spPr>
+        <p:txBody>
+          <a:bodyPr vert="horz" lIns="91440" tIns="45720" rIns="91440" bIns="45720" rtlCol="0" anchor="b"/>
+          <a:lstStyle>
+            <a:lvl1pPr algn="r">
+              <a:defRPr sz="1200"/>
+            </a:lvl1pPr>
+          </a:lstStyle>
+          <a:p>
+            <a:fld id="{D18227E5-88AC-47A5-A984-521F15CE18F0}" type="slidenum">
+              <a:rPr lang="en-US" smtClean="0"/>
+              <a:t>‹#›</a:t>
+            </a:fld>
+            <a:endParaRPr lang="en-US"/>
+          </a:p>
+        </p:txBody>
+      </p:sp>
+    </p:spTree>
+    <p:extLst>
+      <p:ext uri="{BB962C8B-B14F-4D97-AF65-F5344CB8AC3E}">
+        <p14:creationId xmlns:p14="http://schemas.microsoft.com/office/powerpoint/2010/main" val="968814014"/>
+      </p:ext>
+    </p:extLst>
+  </p:cSld>
+  <p:clrMap bg1="lt1" tx1="dk1" bg2="lt2" tx2="dk2" accent1="accent1" accent2="accent2" accent3="accent3" accent4="accent4" accent5="accent5" accent6="accent6" hlink="hlink" folHlink="folHlink"/>
+  <p:notesStyle>
+    <a:lvl1pPr marL="0" algn="l" defTabSz="914400" rtl="0" eaLnBrk="1" latinLnBrk="0" hangingPunct="1">
+      <a:defRPr sz="1200" kern="1200">
+        <a:solidFill>
+          <a:schemeClr val="tx1"/>
+        </a:solidFill>
+        <a:latin typeface="+mn-lt"/>
+        <a:ea typeface="+mn-ea"/>
+        <a:cs typeface="+mn-cs"/>
+      </a:defRPr>
+    </a:lvl1pPr>
+    <a:lvl2pPr marL="457200" algn="l" defTabSz="914400" rtl="0" eaLnBrk="1" latinLnBrk="0" hangingPunct="1">
+      <a:defRPr sz="1200" kern="1200">
+        <a:solidFill>
+          <a:schemeClr val="tx1"/>
+        </a:solidFill>
+        <a:latin typeface="+mn-lt"/>
+        <a:ea typeface="+mn-ea"/>
+        <a:cs typeface="+mn-cs"/>
+      </a:defRPr>
+    </a:lvl2pPr>
+    <a:lvl3pPr marL="914400" algn="l" defTabSz="914400" rtl="0" eaLnBrk="1" latinLnBrk="0" hangingPunct="1">
+      <a:defRPr sz="1200" kern="1200">
+        <a:solidFill>
+          <a:schemeClr val="tx1"/>
+        </a:solidFill>
+        <a:latin typeface="+mn-lt"/>
+        <a:ea typeface="+mn-ea"/>
+        <a:cs typeface="+mn-cs"/>
+      </a:defRPr>
+    </a:lvl3pPr>
+    <a:lvl4pPr marL="1371600" algn="l" defTabSz="914400" rtl="0" eaLnBrk="1" latinLnBrk="0" hangingPunct="1">
+      <a:defRPr sz="1200" kern="1200">
+        <a:solidFill>
+          <a:schemeClr val="tx1"/>
+        </a:solidFill>
+        <a:latin typeface="+mn-lt"/>
+        <a:ea typeface="+mn-ea"/>
+        <a:cs typeface="+mn-cs"/>
+      </a:defRPr>
+    </a:lvl4pPr>
+    <a:lvl5pPr marL="1828800" algn="l" defTabSz="914400" rtl="0" eaLnBrk="1" latinLnBrk="0" hangingPunct="1">
+      <a:defRPr sz="1200" kern="1200">
+        <a:solidFill>
+          <a:schemeClr val="tx1"/>
+        </a:solidFill>
+        <a:latin typeface="+mn-lt"/>
+        <a:ea typeface="+mn-ea"/>
+        <a:cs typeface="+mn-cs"/>
+      </a:defRPr>
+    </a:lvl5pPr>
+    <a:lvl6pPr marL="2286000" algn="l" defTabSz="914400" rtl="0" eaLnBrk="1" latinLnBrk="0" hangingPunct="1">
+      <a:defRPr sz="1200" kern="1200">
+        <a:solidFill>
+          <a:schemeClr val="tx1"/>
+        </a:solidFill>
+        <a:latin typeface="+mn-lt"/>
+        <a:ea typeface="+mn-ea"/>
+        <a:cs typeface="+mn-cs"/>
+      </a:defRPr>
+    </a:lvl6pPr>
+    <a:lvl7pPr marL="2743200" algn="l" defTabSz="914400" rtl="0" eaLnBrk="1" latinLnBrk="0" hangingPunct="1">
+      <a:defRPr sz="1200" kern="1200">
+        <a:solidFill>
+          <a:schemeClr val="tx1"/>
+        </a:solidFill>
+        <a:latin typeface="+mn-lt"/>
+        <a:ea typeface="+mn-ea"/>
+        <a:cs typeface="+mn-cs"/>
+      </a:defRPr>
+    </a:lvl7pPr>
+    <a:lvl8pPr marL="3200400" algn="l" defTabSz="914400" rtl="0" eaLnBrk="1" latinLnBrk="0" hangingPunct="1">
+      <a:defRPr sz="1200" kern="1200">
+        <a:solidFill>
+          <a:schemeClr val="tx1"/>
+        </a:solidFill>
+        <a:latin typeface="+mn-lt"/>
+        <a:ea typeface="+mn-ea"/>
+        <a:cs typeface="+mn-cs"/>
+      </a:defRPr>
+    </a:lvl8pPr>
+    <a:lvl9pPr marL="3657600" algn="l" defTabSz="914400" rtl="0" eaLnBrk="1" latinLnBrk="0" hangingPunct="1">
+      <a:defRPr sz="1200" kern="1200">
+        <a:solidFill>
+          <a:schemeClr val="tx1"/>
+        </a:solidFill>
+        <a:latin typeface="+mn-lt"/>
+        <a:ea typeface="+mn-ea"/>
+        <a:cs typeface="+mn-cs"/>
+      </a:defRPr>
+    </a:lvl9pPr>
+  </p:notesStyle>
+</p:notesMaster>
+</file>
+
+<file path=ppt/notesSlides/notesSlide1.xml><?xml version="1.0" encoding="utf-8"?>
+<p:notes xmlns:a="http://schemas.openxmlformats.org/drawingml/2006/main" xmlns:r="http://schemas.openxmlformats.org/officeDocument/2006/relationships" xmlns:p="http://schemas.openxmlformats.org/presentationml/2006/main">
+  <p:cSld>
+    <p:spTree>
+      <p:nvGrpSpPr>
+        <p:cNvPr id="1" name=""/>
+        <p:cNvGrpSpPr/>
+        <p:nvPr/>
+      </p:nvGrpSpPr>
+      <p:grpSpPr>
+        <a:xfrm>
+          <a:off x="0" y="0"/>
+          <a:ext cx="0" cy="0"/>
+          <a:chOff x="0" y="0"/>
+          <a:chExt cx="0" cy="0"/>
+        </a:xfrm>
+      </p:grpSpPr>
+      <p:sp>
+        <p:nvSpPr>
+          <p:cNvPr id="2" name="幻灯片图像占位符 1"/>
+          <p:cNvSpPr>
+            <a:spLocks noGrp="1" noRot="1" noChangeAspect="1"/>
+          </p:cNvSpPr>
+          <p:nvPr>
+            <p:ph type="sldImg"/>
+          </p:nvPr>
+        </p:nvSpPr>
+        <p:spPr/>
+      </p:sp>
+      <p:sp>
+        <p:nvSpPr>
+          <p:cNvPr id="3" name="备注占位符 2"/>
+          <p:cNvSpPr>
+            <a:spLocks noGrp="1"/>
+          </p:cNvSpPr>
+          <p:nvPr>
+            <p:ph type="body" idx="1"/>
+          </p:nvPr>
+        </p:nvSpPr>
+        <p:spPr/>
+        <p:txBody>
+          <a:bodyPr/>
+          <a:lstStyle/>
+          <a:p>
+            <a:r>
+              <a:rPr lang="en-US" dirty="0" smtClean="0"/>
+              <a:t>Orchestration/supervision</a:t>
+            </a:r>
+            <a:endParaRPr lang="en-US" dirty="0"/>
+          </a:p>
+        </p:txBody>
+      </p:sp>
+      <p:sp>
+        <p:nvSpPr>
+          <p:cNvPr id="4" name="灯片编号占位符 3"/>
+          <p:cNvSpPr>
+            <a:spLocks noGrp="1"/>
+          </p:cNvSpPr>
+          <p:nvPr>
+            <p:ph type="sldNum" sz="quarter" idx="10"/>
+          </p:nvPr>
+        </p:nvSpPr>
+        <p:spPr/>
+        <p:txBody>
+          <a:bodyPr/>
+          <a:lstStyle/>
+          <a:p>
+            <a:fld id="{D18227E5-88AC-47A5-A984-521F15CE18F0}" type="slidenum">
+              <a:rPr lang="en-US" smtClean="0"/>
+              <a:t>2</a:t>
+            </a:fld>
+            <a:endParaRPr lang="en-US"/>
+          </a:p>
+        </p:txBody>
+      </p:sp>
+    </p:spTree>
+    <p:extLst>
+      <p:ext uri="{BB962C8B-B14F-4D97-AF65-F5344CB8AC3E}">
+        <p14:creationId xmlns:p14="http://schemas.microsoft.com/office/powerpoint/2010/main" val="1463321380"/>
+      </p:ext>
+    </p:extLst>
+  </p:cSld>
+  <p:clrMapOvr>
+    <a:masterClrMapping/>
+  </p:clrMapOvr>
+</p:notes>
+</file>
+
+<file path=ppt/notesSlides/notesSlide2.xml><?xml version="1.0" encoding="utf-8"?>
+<p:notes xmlns:a="http://schemas.openxmlformats.org/drawingml/2006/main" xmlns:r="http://schemas.openxmlformats.org/officeDocument/2006/relationships" xmlns:p="http://schemas.openxmlformats.org/presentationml/2006/main">
+  <p:cSld>
+    <p:spTree>
+      <p:nvGrpSpPr>
+        <p:cNvPr id="1" name=""/>
+        <p:cNvGrpSpPr/>
+        <p:nvPr/>
+      </p:nvGrpSpPr>
+      <p:grpSpPr>
+        <a:xfrm>
+          <a:off x="0" y="0"/>
+          <a:ext cx="0" cy="0"/>
+          <a:chOff x="0" y="0"/>
+          <a:chExt cx="0" cy="0"/>
+        </a:xfrm>
+      </p:grpSpPr>
+      <p:sp>
+        <p:nvSpPr>
+          <p:cNvPr id="2" name="幻灯片图像占位符 1"/>
+          <p:cNvSpPr>
+            <a:spLocks noGrp="1" noRot="1" noChangeAspect="1"/>
+          </p:cNvSpPr>
+          <p:nvPr>
+            <p:ph type="sldImg"/>
+          </p:nvPr>
+        </p:nvSpPr>
+        <p:spPr/>
+      </p:sp>
+      <p:sp>
+        <p:nvSpPr>
+          <p:cNvPr id="3" name="备注占位符 2"/>
+          <p:cNvSpPr>
+            <a:spLocks noGrp="1"/>
+          </p:cNvSpPr>
+          <p:nvPr>
+            <p:ph type="body" idx="1"/>
+          </p:nvPr>
+        </p:nvSpPr>
+        <p:spPr/>
+        <p:txBody>
+          <a:bodyPr/>
+          <a:lstStyle/>
+          <a:p>
+            <a:r>
+              <a:rPr lang="en-US" dirty="0" smtClean="0"/>
+              <a:t>Examples to How to</a:t>
+            </a:r>
+            <a:r>
+              <a:rPr lang="en-US" baseline="0" dirty="0" smtClean="0"/>
+              <a:t> derive the requirements</a:t>
+            </a:r>
+            <a:endParaRPr lang="en-US" dirty="0"/>
+          </a:p>
+        </p:txBody>
+      </p:sp>
+      <p:sp>
+        <p:nvSpPr>
+          <p:cNvPr id="4" name="灯片编号占位符 3"/>
+          <p:cNvSpPr>
+            <a:spLocks noGrp="1"/>
+          </p:cNvSpPr>
+          <p:nvPr>
+            <p:ph type="sldNum" sz="quarter" idx="10"/>
+          </p:nvPr>
+        </p:nvSpPr>
+        <p:spPr/>
+        <p:txBody>
+          <a:bodyPr/>
+          <a:lstStyle/>
+          <a:p>
+            <a:fld id="{D18227E5-88AC-47A5-A984-521F15CE18F0}" type="slidenum">
+              <a:rPr lang="en-US" smtClean="0"/>
+              <a:t>4</a:t>
+            </a:fld>
+            <a:endParaRPr lang="en-US"/>
+          </a:p>
+        </p:txBody>
+      </p:sp>
+    </p:spTree>
+    <p:extLst>
+      <p:ext uri="{BB962C8B-B14F-4D97-AF65-F5344CB8AC3E}">
+        <p14:creationId xmlns:p14="http://schemas.microsoft.com/office/powerpoint/2010/main" val="3847713879"/>
+      </p:ext>
+    </p:extLst>
+  </p:cSld>
+  <p:clrMapOvr>
+    <a:masterClrMapping/>
+  </p:clrMapOvr>
+</p:notes>
 </file>
 
 <file path=ppt/slideLayouts/slideLayout1.xml><?xml version="1.0" encoding="utf-8"?>
@@ -133,7 +673,7 @@
           <p:cNvPr id="2" name="标题 1">
             <a:extLst>
               <a:ext uri="{FF2B5EF4-FFF2-40B4-BE49-F238E27FC236}">
-                <a16:creationId xmlns:a16="http://schemas.microsoft.com/office/drawing/2014/main" id="{0527A8EF-B618-45FC-A1AB-EAFFA9191F1A}"/>
+                <a16:creationId xmlns="" xmlns:a16="http://schemas.microsoft.com/office/drawing/2014/main" id="{0527A8EF-B618-45FC-A1AB-EAFFA9191F1A}"/>
               </a:ext>
             </a:extLst>
           </p:cNvPr>
@@ -170,7 +710,7 @@
           <p:cNvPr id="3" name="副标题 2">
             <a:extLst>
               <a:ext uri="{FF2B5EF4-FFF2-40B4-BE49-F238E27FC236}">
-                <a16:creationId xmlns:a16="http://schemas.microsoft.com/office/drawing/2014/main" id="{21E61DD0-C5A4-4371-B50E-B1C911772DE4}"/>
+                <a16:creationId xmlns="" xmlns:a16="http://schemas.microsoft.com/office/drawing/2014/main" id="{21E61DD0-C5A4-4371-B50E-B1C911772DE4}"/>
               </a:ext>
             </a:extLst>
           </p:cNvPr>
@@ -240,7 +780,7 @@
           <p:cNvPr id="4" name="日期占位符 3">
             <a:extLst>
               <a:ext uri="{FF2B5EF4-FFF2-40B4-BE49-F238E27FC236}">
-                <a16:creationId xmlns:a16="http://schemas.microsoft.com/office/drawing/2014/main" id="{98C54048-0D74-43DC-9291-DFE94D6775C1}"/>
+                <a16:creationId xmlns="" xmlns:a16="http://schemas.microsoft.com/office/drawing/2014/main" id="{98C54048-0D74-43DC-9291-DFE94D6775C1}"/>
               </a:ext>
             </a:extLst>
           </p:cNvPr>
@@ -258,7 +798,7 @@
           <a:p>
             <a:fld id="{D993279A-1075-4D69-8304-6D9EBC8FBB92}" type="datetimeFigureOut">
               <a:rPr lang="zh-CN" altLang="en-US" smtClean="0"/>
-              <a:t>2026/7/11</a:t>
+              <a:t>2026/7/13</a:t>
             </a:fld>
             <a:endParaRPr lang="zh-CN" altLang="en-US"/>
           </a:p>
@@ -269,7 +809,7 @@
           <p:cNvPr id="5" name="页脚占位符 4">
             <a:extLst>
               <a:ext uri="{FF2B5EF4-FFF2-40B4-BE49-F238E27FC236}">
-                <a16:creationId xmlns:a16="http://schemas.microsoft.com/office/drawing/2014/main" id="{E99BCB19-7E1C-4B3A-A4FE-9C69C3DDAB71}"/>
+                <a16:creationId xmlns="" xmlns:a16="http://schemas.microsoft.com/office/drawing/2014/main" id="{E99BCB19-7E1C-4B3A-A4FE-9C69C3DDAB71}"/>
               </a:ext>
             </a:extLst>
           </p:cNvPr>
@@ -294,7 +834,7 @@
           <p:cNvPr id="6" name="灯片编号占位符 5">
             <a:extLst>
               <a:ext uri="{FF2B5EF4-FFF2-40B4-BE49-F238E27FC236}">
-                <a16:creationId xmlns:a16="http://schemas.microsoft.com/office/drawing/2014/main" id="{9DE0E44A-3DDE-4EF9-92DB-FA0A7CB95089}"/>
+                <a16:creationId xmlns="" xmlns:a16="http://schemas.microsoft.com/office/drawing/2014/main" id="{9DE0E44A-3DDE-4EF9-92DB-FA0A7CB95089}"/>
               </a:ext>
             </a:extLst>
           </p:cNvPr>
@@ -353,7 +893,7 @@
           <p:cNvPr id="2" name="标题 1">
             <a:extLst>
               <a:ext uri="{FF2B5EF4-FFF2-40B4-BE49-F238E27FC236}">
-                <a16:creationId xmlns:a16="http://schemas.microsoft.com/office/drawing/2014/main" id="{B78F8E7F-BBFF-4EB3-A6B8-C4DFA3E73FC0}"/>
+                <a16:creationId xmlns="" xmlns:a16="http://schemas.microsoft.com/office/drawing/2014/main" id="{B78F8E7F-BBFF-4EB3-A6B8-C4DFA3E73FC0}"/>
               </a:ext>
             </a:extLst>
           </p:cNvPr>
@@ -381,7 +921,7 @@
           <p:cNvPr id="3" name="竖排文字占位符 2">
             <a:extLst>
               <a:ext uri="{FF2B5EF4-FFF2-40B4-BE49-F238E27FC236}">
-                <a16:creationId xmlns:a16="http://schemas.microsoft.com/office/drawing/2014/main" id="{AAA5EB40-AAC0-48FC-9AC4-9BD164BE1D4C}"/>
+                <a16:creationId xmlns="" xmlns:a16="http://schemas.microsoft.com/office/drawing/2014/main" id="{AAA5EB40-AAC0-48FC-9AC4-9BD164BE1D4C}"/>
               </a:ext>
             </a:extLst>
           </p:cNvPr>
@@ -438,7 +978,7 @@
           <p:cNvPr id="4" name="日期占位符 3">
             <a:extLst>
               <a:ext uri="{FF2B5EF4-FFF2-40B4-BE49-F238E27FC236}">
-                <a16:creationId xmlns:a16="http://schemas.microsoft.com/office/drawing/2014/main" id="{5034DB7F-6493-4E49-887B-EB5B1D4AD652}"/>
+                <a16:creationId xmlns="" xmlns:a16="http://schemas.microsoft.com/office/drawing/2014/main" id="{5034DB7F-6493-4E49-887B-EB5B1D4AD652}"/>
               </a:ext>
             </a:extLst>
           </p:cNvPr>
@@ -456,7 +996,7 @@
           <a:p>
             <a:fld id="{D993279A-1075-4D69-8304-6D9EBC8FBB92}" type="datetimeFigureOut">
               <a:rPr lang="zh-CN" altLang="en-US" smtClean="0"/>
-              <a:t>2026/7/11</a:t>
+              <a:t>2026/7/13</a:t>
             </a:fld>
             <a:endParaRPr lang="zh-CN" altLang="en-US"/>
           </a:p>
@@ -467,7 +1007,7 @@
           <p:cNvPr id="5" name="页脚占位符 4">
             <a:extLst>
               <a:ext uri="{FF2B5EF4-FFF2-40B4-BE49-F238E27FC236}">
-                <a16:creationId xmlns:a16="http://schemas.microsoft.com/office/drawing/2014/main" id="{F0317DDB-EBD2-459C-869A-0B0DF1E14EF9}"/>
+                <a16:creationId xmlns="" xmlns:a16="http://schemas.microsoft.com/office/drawing/2014/main" id="{F0317DDB-EBD2-459C-869A-0B0DF1E14EF9}"/>
               </a:ext>
             </a:extLst>
           </p:cNvPr>
@@ -492,7 +1032,7 @@
           <p:cNvPr id="6" name="灯片编号占位符 5">
             <a:extLst>
               <a:ext uri="{FF2B5EF4-FFF2-40B4-BE49-F238E27FC236}">
-                <a16:creationId xmlns:a16="http://schemas.microsoft.com/office/drawing/2014/main" id="{49E60790-4E03-4274-B0F8-90FA6860EC54}"/>
+                <a16:creationId xmlns="" xmlns:a16="http://schemas.microsoft.com/office/drawing/2014/main" id="{49E60790-4E03-4274-B0F8-90FA6860EC54}"/>
               </a:ext>
             </a:extLst>
           </p:cNvPr>
@@ -551,7 +1091,7 @@
           <p:cNvPr id="2" name="竖排标题 1">
             <a:extLst>
               <a:ext uri="{FF2B5EF4-FFF2-40B4-BE49-F238E27FC236}">
-                <a16:creationId xmlns:a16="http://schemas.microsoft.com/office/drawing/2014/main" id="{A0062ADF-F931-458A-BBFE-F1CE26EEBA67}"/>
+                <a16:creationId xmlns="" xmlns:a16="http://schemas.microsoft.com/office/drawing/2014/main" id="{A0062ADF-F931-458A-BBFE-F1CE26EEBA67}"/>
               </a:ext>
             </a:extLst>
           </p:cNvPr>
@@ -584,7 +1124,7 @@
           <p:cNvPr id="3" name="竖排文字占位符 2">
             <a:extLst>
               <a:ext uri="{FF2B5EF4-FFF2-40B4-BE49-F238E27FC236}">
-                <a16:creationId xmlns:a16="http://schemas.microsoft.com/office/drawing/2014/main" id="{B7C9C3CE-8F31-4734-9A18-95CCE43809CE}"/>
+                <a16:creationId xmlns="" xmlns:a16="http://schemas.microsoft.com/office/drawing/2014/main" id="{B7C9C3CE-8F31-4734-9A18-95CCE43809CE}"/>
               </a:ext>
             </a:extLst>
           </p:cNvPr>
@@ -646,7 +1186,7 @@
           <p:cNvPr id="4" name="日期占位符 3">
             <a:extLst>
               <a:ext uri="{FF2B5EF4-FFF2-40B4-BE49-F238E27FC236}">
-                <a16:creationId xmlns:a16="http://schemas.microsoft.com/office/drawing/2014/main" id="{3E215F3C-B04A-447A-B93C-963B50E74028}"/>
+                <a16:creationId xmlns="" xmlns:a16="http://schemas.microsoft.com/office/drawing/2014/main" id="{3E215F3C-B04A-447A-B93C-963B50E74028}"/>
               </a:ext>
             </a:extLst>
           </p:cNvPr>
@@ -664,7 +1204,7 @@
           <a:p>
             <a:fld id="{D993279A-1075-4D69-8304-6D9EBC8FBB92}" type="datetimeFigureOut">
               <a:rPr lang="zh-CN" altLang="en-US" smtClean="0"/>
-              <a:t>2026/7/11</a:t>
+              <a:t>2026/7/13</a:t>
             </a:fld>
             <a:endParaRPr lang="zh-CN" altLang="en-US"/>
           </a:p>
@@ -675,7 +1215,7 @@
           <p:cNvPr id="5" name="页脚占位符 4">
             <a:extLst>
               <a:ext uri="{FF2B5EF4-FFF2-40B4-BE49-F238E27FC236}">
-                <a16:creationId xmlns:a16="http://schemas.microsoft.com/office/drawing/2014/main" id="{0FD3474F-AB63-4566-95BD-6967B31910C3}"/>
+                <a16:creationId xmlns="" xmlns:a16="http://schemas.microsoft.com/office/drawing/2014/main" id="{0FD3474F-AB63-4566-95BD-6967B31910C3}"/>
               </a:ext>
             </a:extLst>
           </p:cNvPr>
@@ -700,7 +1240,7 @@
           <p:cNvPr id="6" name="灯片编号占位符 5">
             <a:extLst>
               <a:ext uri="{FF2B5EF4-FFF2-40B4-BE49-F238E27FC236}">
-                <a16:creationId xmlns:a16="http://schemas.microsoft.com/office/drawing/2014/main" id="{3D7254AE-3680-4BA3-8F0D-0484F84EEBC2}"/>
+                <a16:creationId xmlns="" xmlns:a16="http://schemas.microsoft.com/office/drawing/2014/main" id="{3D7254AE-3680-4BA3-8F0D-0484F84EEBC2}"/>
               </a:ext>
             </a:extLst>
           </p:cNvPr>
@@ -759,7 +1299,7 @@
           <p:cNvPr id="2" name="标题 1">
             <a:extLst>
               <a:ext uri="{FF2B5EF4-FFF2-40B4-BE49-F238E27FC236}">
-                <a16:creationId xmlns:a16="http://schemas.microsoft.com/office/drawing/2014/main" id="{90C8A2CC-271D-4F26-9AFD-83EDB19AC239}"/>
+                <a16:creationId xmlns="" xmlns:a16="http://schemas.microsoft.com/office/drawing/2014/main" id="{90C8A2CC-271D-4F26-9AFD-83EDB19AC239}"/>
               </a:ext>
             </a:extLst>
           </p:cNvPr>
@@ -787,7 +1327,7 @@
           <p:cNvPr id="3" name="内容占位符 2">
             <a:extLst>
               <a:ext uri="{FF2B5EF4-FFF2-40B4-BE49-F238E27FC236}">
-                <a16:creationId xmlns:a16="http://schemas.microsoft.com/office/drawing/2014/main" id="{561557DB-2F35-48CD-8644-181EDEDCAE91}"/>
+                <a16:creationId xmlns="" xmlns:a16="http://schemas.microsoft.com/office/drawing/2014/main" id="{561557DB-2F35-48CD-8644-181EDEDCAE91}"/>
               </a:ext>
             </a:extLst>
           </p:cNvPr>
@@ -844,7 +1384,7 @@
           <p:cNvPr id="4" name="日期占位符 3">
             <a:extLst>
               <a:ext uri="{FF2B5EF4-FFF2-40B4-BE49-F238E27FC236}">
-                <a16:creationId xmlns:a16="http://schemas.microsoft.com/office/drawing/2014/main" id="{2C3D0912-A4EB-4D57-94F0-154DE0AF0CD4}"/>
+                <a16:creationId xmlns="" xmlns:a16="http://schemas.microsoft.com/office/drawing/2014/main" id="{2C3D0912-A4EB-4D57-94F0-154DE0AF0CD4}"/>
               </a:ext>
             </a:extLst>
           </p:cNvPr>
@@ -862,7 +1402,7 @@
           <a:p>
             <a:fld id="{D993279A-1075-4D69-8304-6D9EBC8FBB92}" type="datetimeFigureOut">
               <a:rPr lang="zh-CN" altLang="en-US" smtClean="0"/>
-              <a:t>2026/7/11</a:t>
+              <a:t>2026/7/13</a:t>
             </a:fld>
             <a:endParaRPr lang="zh-CN" altLang="en-US"/>
           </a:p>
@@ -873,7 +1413,7 @@
           <p:cNvPr id="5" name="页脚占位符 4">
             <a:extLst>
               <a:ext uri="{FF2B5EF4-FFF2-40B4-BE49-F238E27FC236}">
-                <a16:creationId xmlns:a16="http://schemas.microsoft.com/office/drawing/2014/main" id="{504DCB4C-4AED-4A07-B1DE-F90E28D38655}"/>
+                <a16:creationId xmlns="" xmlns:a16="http://schemas.microsoft.com/office/drawing/2014/main" id="{504DCB4C-4AED-4A07-B1DE-F90E28D38655}"/>
               </a:ext>
             </a:extLst>
           </p:cNvPr>
@@ -898,7 +1438,7 @@
           <p:cNvPr id="6" name="灯片编号占位符 5">
             <a:extLst>
               <a:ext uri="{FF2B5EF4-FFF2-40B4-BE49-F238E27FC236}">
-                <a16:creationId xmlns:a16="http://schemas.microsoft.com/office/drawing/2014/main" id="{38A26FB8-A57E-411B-963D-F82BF64611B8}"/>
+                <a16:creationId xmlns="" xmlns:a16="http://schemas.microsoft.com/office/drawing/2014/main" id="{38A26FB8-A57E-411B-963D-F82BF64611B8}"/>
               </a:ext>
             </a:extLst>
           </p:cNvPr>
@@ -957,7 +1497,7 @@
           <p:cNvPr id="2" name="标题 1">
             <a:extLst>
               <a:ext uri="{FF2B5EF4-FFF2-40B4-BE49-F238E27FC236}">
-                <a16:creationId xmlns:a16="http://schemas.microsoft.com/office/drawing/2014/main" id="{FCA1C2A2-1B68-466F-B6BD-F31C431175D1}"/>
+                <a16:creationId xmlns="" xmlns:a16="http://schemas.microsoft.com/office/drawing/2014/main" id="{FCA1C2A2-1B68-466F-B6BD-F31C431175D1}"/>
               </a:ext>
             </a:extLst>
           </p:cNvPr>
@@ -994,7 +1534,7 @@
           <p:cNvPr id="3" name="文本占位符 2">
             <a:extLst>
               <a:ext uri="{FF2B5EF4-FFF2-40B4-BE49-F238E27FC236}">
-                <a16:creationId xmlns:a16="http://schemas.microsoft.com/office/drawing/2014/main" id="{82888A8F-5FE0-4686-9A3C-5B60926CDFAA}"/>
+                <a16:creationId xmlns="" xmlns:a16="http://schemas.microsoft.com/office/drawing/2014/main" id="{82888A8F-5FE0-4686-9A3C-5B60926CDFAA}"/>
               </a:ext>
             </a:extLst>
           </p:cNvPr>
@@ -1119,7 +1659,7 @@
           <p:cNvPr id="4" name="日期占位符 3">
             <a:extLst>
               <a:ext uri="{FF2B5EF4-FFF2-40B4-BE49-F238E27FC236}">
-                <a16:creationId xmlns:a16="http://schemas.microsoft.com/office/drawing/2014/main" id="{FA3F1393-BF8A-464B-BC3D-D3E48D215DCE}"/>
+                <a16:creationId xmlns="" xmlns:a16="http://schemas.microsoft.com/office/drawing/2014/main" id="{FA3F1393-BF8A-464B-BC3D-D3E48D215DCE}"/>
               </a:ext>
             </a:extLst>
           </p:cNvPr>
@@ -1137,7 +1677,7 @@
           <a:p>
             <a:fld id="{D993279A-1075-4D69-8304-6D9EBC8FBB92}" type="datetimeFigureOut">
               <a:rPr lang="zh-CN" altLang="en-US" smtClean="0"/>
-              <a:t>2026/7/11</a:t>
+              <a:t>2026/7/13</a:t>
             </a:fld>
             <a:endParaRPr lang="zh-CN" altLang="en-US"/>
           </a:p>
@@ -1148,7 +1688,7 @@
           <p:cNvPr id="5" name="页脚占位符 4">
             <a:extLst>
               <a:ext uri="{FF2B5EF4-FFF2-40B4-BE49-F238E27FC236}">
-                <a16:creationId xmlns:a16="http://schemas.microsoft.com/office/drawing/2014/main" id="{0882A640-5224-42C1-8C0B-A910D5A8E9F5}"/>
+                <a16:creationId xmlns="" xmlns:a16="http://schemas.microsoft.com/office/drawing/2014/main" id="{0882A640-5224-42C1-8C0B-A910D5A8E9F5}"/>
               </a:ext>
             </a:extLst>
           </p:cNvPr>
@@ -1173,7 +1713,7 @@
           <p:cNvPr id="6" name="灯片编号占位符 5">
             <a:extLst>
               <a:ext uri="{FF2B5EF4-FFF2-40B4-BE49-F238E27FC236}">
-                <a16:creationId xmlns:a16="http://schemas.microsoft.com/office/drawing/2014/main" id="{FFD84918-1044-4BD8-9CA6-E7568ECCC46A}"/>
+                <a16:creationId xmlns="" xmlns:a16="http://schemas.microsoft.com/office/drawing/2014/main" id="{FFD84918-1044-4BD8-9CA6-E7568ECCC46A}"/>
               </a:ext>
             </a:extLst>
           </p:cNvPr>
@@ -1232,7 +1772,7 @@
           <p:cNvPr id="2" name="标题 1">
             <a:extLst>
               <a:ext uri="{FF2B5EF4-FFF2-40B4-BE49-F238E27FC236}">
-                <a16:creationId xmlns:a16="http://schemas.microsoft.com/office/drawing/2014/main" id="{3A80E2CF-D6DF-4F84-96F7-51710B53A35B}"/>
+                <a16:creationId xmlns="" xmlns:a16="http://schemas.microsoft.com/office/drawing/2014/main" id="{3A80E2CF-D6DF-4F84-96F7-51710B53A35B}"/>
               </a:ext>
             </a:extLst>
           </p:cNvPr>
@@ -1260,7 +1800,7 @@
           <p:cNvPr id="3" name="内容占位符 2">
             <a:extLst>
               <a:ext uri="{FF2B5EF4-FFF2-40B4-BE49-F238E27FC236}">
-                <a16:creationId xmlns:a16="http://schemas.microsoft.com/office/drawing/2014/main" id="{3AFD40B0-9653-4B2B-B98E-58BE5A8836B4}"/>
+                <a16:creationId xmlns="" xmlns:a16="http://schemas.microsoft.com/office/drawing/2014/main" id="{3AFD40B0-9653-4B2B-B98E-58BE5A8836B4}"/>
               </a:ext>
             </a:extLst>
           </p:cNvPr>
@@ -1322,7 +1862,7 @@
           <p:cNvPr id="4" name="内容占位符 3">
             <a:extLst>
               <a:ext uri="{FF2B5EF4-FFF2-40B4-BE49-F238E27FC236}">
-                <a16:creationId xmlns:a16="http://schemas.microsoft.com/office/drawing/2014/main" id="{C1C79EBB-6CC0-4D09-8F09-4FACC597D96A}"/>
+                <a16:creationId xmlns="" xmlns:a16="http://schemas.microsoft.com/office/drawing/2014/main" id="{C1C79EBB-6CC0-4D09-8F09-4FACC597D96A}"/>
               </a:ext>
             </a:extLst>
           </p:cNvPr>
@@ -1384,7 +1924,7 @@
           <p:cNvPr id="5" name="日期占位符 4">
             <a:extLst>
               <a:ext uri="{FF2B5EF4-FFF2-40B4-BE49-F238E27FC236}">
-                <a16:creationId xmlns:a16="http://schemas.microsoft.com/office/drawing/2014/main" id="{BE713B0C-E8B0-46D9-9529-9DD49221F766}"/>
+                <a16:creationId xmlns="" xmlns:a16="http://schemas.microsoft.com/office/drawing/2014/main" id="{BE713B0C-E8B0-46D9-9529-9DD49221F766}"/>
               </a:ext>
             </a:extLst>
           </p:cNvPr>
@@ -1402,7 +1942,7 @@
           <a:p>
             <a:fld id="{D993279A-1075-4D69-8304-6D9EBC8FBB92}" type="datetimeFigureOut">
               <a:rPr lang="zh-CN" altLang="en-US" smtClean="0"/>
-              <a:t>2026/7/11</a:t>
+              <a:t>2026/7/13</a:t>
             </a:fld>
             <a:endParaRPr lang="zh-CN" altLang="en-US"/>
           </a:p>
@@ -1413,7 +1953,7 @@
           <p:cNvPr id="6" name="页脚占位符 5">
             <a:extLst>
               <a:ext uri="{FF2B5EF4-FFF2-40B4-BE49-F238E27FC236}">
-                <a16:creationId xmlns:a16="http://schemas.microsoft.com/office/drawing/2014/main" id="{7469EBD1-A387-46D5-A779-F15B943D86C3}"/>
+                <a16:creationId xmlns="" xmlns:a16="http://schemas.microsoft.com/office/drawing/2014/main" id="{7469EBD1-A387-46D5-A779-F15B943D86C3}"/>
               </a:ext>
             </a:extLst>
           </p:cNvPr>
@@ -1438,7 +1978,7 @@
           <p:cNvPr id="7" name="灯片编号占位符 6">
             <a:extLst>
               <a:ext uri="{FF2B5EF4-FFF2-40B4-BE49-F238E27FC236}">
-                <a16:creationId xmlns:a16="http://schemas.microsoft.com/office/drawing/2014/main" id="{A00D87DF-32E7-4A25-A06F-BD08276A007E}"/>
+                <a16:creationId xmlns="" xmlns:a16="http://schemas.microsoft.com/office/drawing/2014/main" id="{A00D87DF-32E7-4A25-A06F-BD08276A007E}"/>
               </a:ext>
             </a:extLst>
           </p:cNvPr>
@@ -1497,7 +2037,7 @@
           <p:cNvPr id="2" name="标题 1">
             <a:extLst>
               <a:ext uri="{FF2B5EF4-FFF2-40B4-BE49-F238E27FC236}">
-                <a16:creationId xmlns:a16="http://schemas.microsoft.com/office/drawing/2014/main" id="{9A50E6B8-06B1-4775-BF76-451B61B77926}"/>
+                <a16:creationId xmlns="" xmlns:a16="http://schemas.microsoft.com/office/drawing/2014/main" id="{9A50E6B8-06B1-4775-BF76-451B61B77926}"/>
               </a:ext>
             </a:extLst>
           </p:cNvPr>
@@ -1530,7 +2070,7 @@
           <p:cNvPr id="3" name="文本占位符 2">
             <a:extLst>
               <a:ext uri="{FF2B5EF4-FFF2-40B4-BE49-F238E27FC236}">
-                <a16:creationId xmlns:a16="http://schemas.microsoft.com/office/drawing/2014/main" id="{0E4F2227-23B8-487B-B2DD-FAFA62069AEF}"/>
+                <a16:creationId xmlns="" xmlns:a16="http://schemas.microsoft.com/office/drawing/2014/main" id="{0E4F2227-23B8-487B-B2DD-FAFA62069AEF}"/>
               </a:ext>
             </a:extLst>
           </p:cNvPr>
@@ -1601,7 +2141,7 @@
           <p:cNvPr id="4" name="内容占位符 3">
             <a:extLst>
               <a:ext uri="{FF2B5EF4-FFF2-40B4-BE49-F238E27FC236}">
-                <a16:creationId xmlns:a16="http://schemas.microsoft.com/office/drawing/2014/main" id="{5BCA3B2B-FFD4-454D-82B5-F8A4FAD4AFAB}"/>
+                <a16:creationId xmlns="" xmlns:a16="http://schemas.microsoft.com/office/drawing/2014/main" id="{5BCA3B2B-FFD4-454D-82B5-F8A4FAD4AFAB}"/>
               </a:ext>
             </a:extLst>
           </p:cNvPr>
@@ -1663,7 +2203,7 @@
           <p:cNvPr id="5" name="文本占位符 4">
             <a:extLst>
               <a:ext uri="{FF2B5EF4-FFF2-40B4-BE49-F238E27FC236}">
-                <a16:creationId xmlns:a16="http://schemas.microsoft.com/office/drawing/2014/main" id="{6CACA517-FB69-474D-8ED9-F3A024D474D3}"/>
+                <a16:creationId xmlns="" xmlns:a16="http://schemas.microsoft.com/office/drawing/2014/main" id="{6CACA517-FB69-474D-8ED9-F3A024D474D3}"/>
               </a:ext>
             </a:extLst>
           </p:cNvPr>
@@ -1734,7 +2274,7 @@
           <p:cNvPr id="6" name="内容占位符 5">
             <a:extLst>
               <a:ext uri="{FF2B5EF4-FFF2-40B4-BE49-F238E27FC236}">
-                <a16:creationId xmlns:a16="http://schemas.microsoft.com/office/drawing/2014/main" id="{5193FB18-1AB9-4FEE-B4C5-300D5956F8D7}"/>
+                <a16:creationId xmlns="" xmlns:a16="http://schemas.microsoft.com/office/drawing/2014/main" id="{5193FB18-1AB9-4FEE-B4C5-300D5956F8D7}"/>
               </a:ext>
             </a:extLst>
           </p:cNvPr>
@@ -1796,7 +2336,7 @@
           <p:cNvPr id="7" name="日期占位符 6">
             <a:extLst>
               <a:ext uri="{FF2B5EF4-FFF2-40B4-BE49-F238E27FC236}">
-                <a16:creationId xmlns:a16="http://schemas.microsoft.com/office/drawing/2014/main" id="{F15052C3-8663-4375-9822-DF1BCB37581C}"/>
+                <a16:creationId xmlns="" xmlns:a16="http://schemas.microsoft.com/office/drawing/2014/main" id="{F15052C3-8663-4375-9822-DF1BCB37581C}"/>
               </a:ext>
             </a:extLst>
           </p:cNvPr>
@@ -1814,7 +2354,7 @@
           <a:p>
             <a:fld id="{D993279A-1075-4D69-8304-6D9EBC8FBB92}" type="datetimeFigureOut">
               <a:rPr lang="zh-CN" altLang="en-US" smtClean="0"/>
-              <a:t>2026/7/11</a:t>
+              <a:t>2026/7/13</a:t>
             </a:fld>
             <a:endParaRPr lang="zh-CN" altLang="en-US"/>
           </a:p>
@@ -1825,7 +2365,7 @@
           <p:cNvPr id="8" name="页脚占位符 7">
             <a:extLst>
               <a:ext uri="{FF2B5EF4-FFF2-40B4-BE49-F238E27FC236}">
-                <a16:creationId xmlns:a16="http://schemas.microsoft.com/office/drawing/2014/main" id="{A17DFB13-B6E0-4A60-A51B-6B349668BA9C}"/>
+                <a16:creationId xmlns="" xmlns:a16="http://schemas.microsoft.com/office/drawing/2014/main" id="{A17DFB13-B6E0-4A60-A51B-6B349668BA9C}"/>
               </a:ext>
             </a:extLst>
           </p:cNvPr>
@@ -1850,7 +2390,7 @@
           <p:cNvPr id="9" name="灯片编号占位符 8">
             <a:extLst>
               <a:ext uri="{FF2B5EF4-FFF2-40B4-BE49-F238E27FC236}">
-                <a16:creationId xmlns:a16="http://schemas.microsoft.com/office/drawing/2014/main" id="{DBD23DB3-EFFD-4A58-8967-ED07CB65AFEF}"/>
+                <a16:creationId xmlns="" xmlns:a16="http://schemas.microsoft.com/office/drawing/2014/main" id="{DBD23DB3-EFFD-4A58-8967-ED07CB65AFEF}"/>
               </a:ext>
             </a:extLst>
           </p:cNvPr>
@@ -1909,7 +2449,7 @@
           <p:cNvPr id="2" name="标题 1">
             <a:extLst>
               <a:ext uri="{FF2B5EF4-FFF2-40B4-BE49-F238E27FC236}">
-                <a16:creationId xmlns:a16="http://schemas.microsoft.com/office/drawing/2014/main" id="{51C5A552-D46C-441E-ABA9-252F4D870F47}"/>
+                <a16:creationId xmlns="" xmlns:a16="http://schemas.microsoft.com/office/drawing/2014/main" id="{51C5A552-D46C-441E-ABA9-252F4D870F47}"/>
               </a:ext>
             </a:extLst>
           </p:cNvPr>
@@ -1937,7 +2477,7 @@
           <p:cNvPr id="3" name="日期占位符 2">
             <a:extLst>
               <a:ext uri="{FF2B5EF4-FFF2-40B4-BE49-F238E27FC236}">
-                <a16:creationId xmlns:a16="http://schemas.microsoft.com/office/drawing/2014/main" id="{59E27567-6F25-482F-8358-10F3BB7F99FC}"/>
+                <a16:creationId xmlns="" xmlns:a16="http://schemas.microsoft.com/office/drawing/2014/main" id="{59E27567-6F25-482F-8358-10F3BB7F99FC}"/>
               </a:ext>
             </a:extLst>
           </p:cNvPr>
@@ -1955,7 +2495,7 @@
           <a:p>
             <a:fld id="{D993279A-1075-4D69-8304-6D9EBC8FBB92}" type="datetimeFigureOut">
               <a:rPr lang="zh-CN" altLang="en-US" smtClean="0"/>
-              <a:t>2026/7/11</a:t>
+              <a:t>2026/7/13</a:t>
             </a:fld>
             <a:endParaRPr lang="zh-CN" altLang="en-US"/>
           </a:p>
@@ -1966,7 +2506,7 @@
           <p:cNvPr id="4" name="页脚占位符 3">
             <a:extLst>
               <a:ext uri="{FF2B5EF4-FFF2-40B4-BE49-F238E27FC236}">
-                <a16:creationId xmlns:a16="http://schemas.microsoft.com/office/drawing/2014/main" id="{5DF33EB9-0EEE-445F-87E9-B7EE8F23F47B}"/>
+                <a16:creationId xmlns="" xmlns:a16="http://schemas.microsoft.com/office/drawing/2014/main" id="{5DF33EB9-0EEE-445F-87E9-B7EE8F23F47B}"/>
               </a:ext>
             </a:extLst>
           </p:cNvPr>
@@ -1991,7 +2531,7 @@
           <p:cNvPr id="5" name="灯片编号占位符 4">
             <a:extLst>
               <a:ext uri="{FF2B5EF4-FFF2-40B4-BE49-F238E27FC236}">
-                <a16:creationId xmlns:a16="http://schemas.microsoft.com/office/drawing/2014/main" id="{A9FC5A9E-3DEE-4BE2-8776-F102C221BB49}"/>
+                <a16:creationId xmlns="" xmlns:a16="http://schemas.microsoft.com/office/drawing/2014/main" id="{A9FC5A9E-3DEE-4BE2-8776-F102C221BB49}"/>
               </a:ext>
             </a:extLst>
           </p:cNvPr>
@@ -2050,7 +2590,7 @@
           <p:cNvPr id="2" name="日期占位符 1">
             <a:extLst>
               <a:ext uri="{FF2B5EF4-FFF2-40B4-BE49-F238E27FC236}">
-                <a16:creationId xmlns:a16="http://schemas.microsoft.com/office/drawing/2014/main" id="{17F4D103-63DB-4E29-AB60-94510A38CAE3}"/>
+                <a16:creationId xmlns="" xmlns:a16="http://schemas.microsoft.com/office/drawing/2014/main" id="{17F4D103-63DB-4E29-AB60-94510A38CAE3}"/>
               </a:ext>
             </a:extLst>
           </p:cNvPr>
@@ -2068,7 +2608,7 @@
           <a:p>
             <a:fld id="{D993279A-1075-4D69-8304-6D9EBC8FBB92}" type="datetimeFigureOut">
               <a:rPr lang="zh-CN" altLang="en-US" smtClean="0"/>
-              <a:t>2026/7/11</a:t>
+              <a:t>2026/7/13</a:t>
             </a:fld>
             <a:endParaRPr lang="zh-CN" altLang="en-US"/>
           </a:p>
@@ -2079,7 +2619,7 @@
           <p:cNvPr id="3" name="页脚占位符 2">
             <a:extLst>
               <a:ext uri="{FF2B5EF4-FFF2-40B4-BE49-F238E27FC236}">
-                <a16:creationId xmlns:a16="http://schemas.microsoft.com/office/drawing/2014/main" id="{C0C4E14F-8F6F-46FF-87A3-8388C0986D9A}"/>
+                <a16:creationId xmlns="" xmlns:a16="http://schemas.microsoft.com/office/drawing/2014/main" id="{C0C4E14F-8F6F-46FF-87A3-8388C0986D9A}"/>
               </a:ext>
             </a:extLst>
           </p:cNvPr>
@@ -2104,7 +2644,7 @@
           <p:cNvPr id="4" name="灯片编号占位符 3">
             <a:extLst>
               <a:ext uri="{FF2B5EF4-FFF2-40B4-BE49-F238E27FC236}">
-                <a16:creationId xmlns:a16="http://schemas.microsoft.com/office/drawing/2014/main" id="{8DDE86F7-2B44-4B49-83B5-A9D5B972A100}"/>
+                <a16:creationId xmlns="" xmlns:a16="http://schemas.microsoft.com/office/drawing/2014/main" id="{8DDE86F7-2B44-4B49-83B5-A9D5B972A100}"/>
               </a:ext>
             </a:extLst>
           </p:cNvPr>
@@ -2163,7 +2703,7 @@
           <p:cNvPr id="2" name="标题 1">
             <a:extLst>
               <a:ext uri="{FF2B5EF4-FFF2-40B4-BE49-F238E27FC236}">
-                <a16:creationId xmlns:a16="http://schemas.microsoft.com/office/drawing/2014/main" id="{D5568191-0F6C-414C-97F5-0E50B5D3F76E}"/>
+                <a16:creationId xmlns="" xmlns:a16="http://schemas.microsoft.com/office/drawing/2014/main" id="{D5568191-0F6C-414C-97F5-0E50B5D3F76E}"/>
               </a:ext>
             </a:extLst>
           </p:cNvPr>
@@ -2200,7 +2740,7 @@
           <p:cNvPr id="3" name="内容占位符 2">
             <a:extLst>
               <a:ext uri="{FF2B5EF4-FFF2-40B4-BE49-F238E27FC236}">
-                <a16:creationId xmlns:a16="http://schemas.microsoft.com/office/drawing/2014/main" id="{532AC296-366D-4320-93E9-B809BDC94CB2}"/>
+                <a16:creationId xmlns="" xmlns:a16="http://schemas.microsoft.com/office/drawing/2014/main" id="{532AC296-366D-4320-93E9-B809BDC94CB2}"/>
               </a:ext>
             </a:extLst>
           </p:cNvPr>
@@ -2290,7 +2830,7 @@
           <p:cNvPr id="4" name="文本占位符 3">
             <a:extLst>
               <a:ext uri="{FF2B5EF4-FFF2-40B4-BE49-F238E27FC236}">
-                <a16:creationId xmlns:a16="http://schemas.microsoft.com/office/drawing/2014/main" id="{0063932B-C39C-4195-9F36-A8464378D8C4}"/>
+                <a16:creationId xmlns="" xmlns:a16="http://schemas.microsoft.com/office/drawing/2014/main" id="{0063932B-C39C-4195-9F36-A8464378D8C4}"/>
               </a:ext>
             </a:extLst>
           </p:cNvPr>
@@ -2361,7 +2901,7 @@
           <p:cNvPr id="5" name="日期占位符 4">
             <a:extLst>
               <a:ext uri="{FF2B5EF4-FFF2-40B4-BE49-F238E27FC236}">
-                <a16:creationId xmlns:a16="http://schemas.microsoft.com/office/drawing/2014/main" id="{A0B1CCD8-2A36-48D7-B593-AACA0D70EAD7}"/>
+                <a16:creationId xmlns="" xmlns:a16="http://schemas.microsoft.com/office/drawing/2014/main" id="{A0B1CCD8-2A36-48D7-B593-AACA0D70EAD7}"/>
               </a:ext>
             </a:extLst>
           </p:cNvPr>
@@ -2379,7 +2919,7 @@
           <a:p>
             <a:fld id="{D993279A-1075-4D69-8304-6D9EBC8FBB92}" type="datetimeFigureOut">
               <a:rPr lang="zh-CN" altLang="en-US" smtClean="0"/>
-              <a:t>2026/7/11</a:t>
+              <a:t>2026/7/13</a:t>
             </a:fld>
             <a:endParaRPr lang="zh-CN" altLang="en-US"/>
           </a:p>
@@ -2390,7 +2930,7 @@
           <p:cNvPr id="6" name="页脚占位符 5">
             <a:extLst>
               <a:ext uri="{FF2B5EF4-FFF2-40B4-BE49-F238E27FC236}">
-                <a16:creationId xmlns:a16="http://schemas.microsoft.com/office/drawing/2014/main" id="{5C50A4F1-2C73-43CE-A916-C9E07B3ADDC7}"/>
+                <a16:creationId xmlns="" xmlns:a16="http://schemas.microsoft.com/office/drawing/2014/main" id="{5C50A4F1-2C73-43CE-A916-C9E07B3ADDC7}"/>
               </a:ext>
             </a:extLst>
           </p:cNvPr>
@@ -2415,7 +2955,7 @@
           <p:cNvPr id="7" name="灯片编号占位符 6">
             <a:extLst>
               <a:ext uri="{FF2B5EF4-FFF2-40B4-BE49-F238E27FC236}">
-                <a16:creationId xmlns:a16="http://schemas.microsoft.com/office/drawing/2014/main" id="{CBA87266-2570-4E71-BFBC-6AA64821C77B}"/>
+                <a16:creationId xmlns="" xmlns:a16="http://schemas.microsoft.com/office/drawing/2014/main" id="{CBA87266-2570-4E71-BFBC-6AA64821C77B}"/>
               </a:ext>
             </a:extLst>
           </p:cNvPr>
@@ -2474,7 +3014,7 @@
           <p:cNvPr id="2" name="标题 1">
             <a:extLst>
               <a:ext uri="{FF2B5EF4-FFF2-40B4-BE49-F238E27FC236}">
-                <a16:creationId xmlns:a16="http://schemas.microsoft.com/office/drawing/2014/main" id="{EE0599B2-24E7-4391-8F55-0A344B747E4C}"/>
+                <a16:creationId xmlns="" xmlns:a16="http://schemas.microsoft.com/office/drawing/2014/main" id="{EE0599B2-24E7-4391-8F55-0A344B747E4C}"/>
               </a:ext>
             </a:extLst>
           </p:cNvPr>
@@ -2511,7 +3051,7 @@
           <p:cNvPr id="3" name="图片占位符 2">
             <a:extLst>
               <a:ext uri="{FF2B5EF4-FFF2-40B4-BE49-F238E27FC236}">
-                <a16:creationId xmlns:a16="http://schemas.microsoft.com/office/drawing/2014/main" id="{BE374B4F-8A27-4406-AC7D-AB52920B6B86}"/>
+                <a16:creationId xmlns="" xmlns:a16="http://schemas.microsoft.com/office/drawing/2014/main" id="{BE374B4F-8A27-4406-AC7D-AB52920B6B86}"/>
               </a:ext>
             </a:extLst>
           </p:cNvPr>
@@ -2578,7 +3118,7 @@
           <p:cNvPr id="4" name="文本占位符 3">
             <a:extLst>
               <a:ext uri="{FF2B5EF4-FFF2-40B4-BE49-F238E27FC236}">
-                <a16:creationId xmlns:a16="http://schemas.microsoft.com/office/drawing/2014/main" id="{305818E5-25C3-4991-8934-281EA40C8400}"/>
+                <a16:creationId xmlns="" xmlns:a16="http://schemas.microsoft.com/office/drawing/2014/main" id="{305818E5-25C3-4991-8934-281EA40C8400}"/>
               </a:ext>
             </a:extLst>
           </p:cNvPr>
@@ -2649,7 +3189,7 @@
           <p:cNvPr id="5" name="日期占位符 4">
             <a:extLst>
               <a:ext uri="{FF2B5EF4-FFF2-40B4-BE49-F238E27FC236}">
-                <a16:creationId xmlns:a16="http://schemas.microsoft.com/office/drawing/2014/main" id="{941301B6-1149-4DDD-9C1C-BC94F79DF1B1}"/>
+                <a16:creationId xmlns="" xmlns:a16="http://schemas.microsoft.com/office/drawing/2014/main" id="{941301B6-1149-4DDD-9C1C-BC94F79DF1B1}"/>
               </a:ext>
             </a:extLst>
           </p:cNvPr>
@@ -2667,7 +3207,7 @@
           <a:p>
             <a:fld id="{D993279A-1075-4D69-8304-6D9EBC8FBB92}" type="datetimeFigureOut">
               <a:rPr lang="zh-CN" altLang="en-US" smtClean="0"/>
-              <a:t>2026/7/11</a:t>
+              <a:t>2026/7/13</a:t>
             </a:fld>
             <a:endParaRPr lang="zh-CN" altLang="en-US"/>
           </a:p>
@@ -2678,7 +3218,7 @@
           <p:cNvPr id="6" name="页脚占位符 5">
             <a:extLst>
               <a:ext uri="{FF2B5EF4-FFF2-40B4-BE49-F238E27FC236}">
-                <a16:creationId xmlns:a16="http://schemas.microsoft.com/office/drawing/2014/main" id="{A35B3B54-9B23-4A85-A22D-CFC4D62CCF59}"/>
+                <a16:creationId xmlns="" xmlns:a16="http://schemas.microsoft.com/office/drawing/2014/main" id="{A35B3B54-9B23-4A85-A22D-CFC4D62CCF59}"/>
               </a:ext>
             </a:extLst>
           </p:cNvPr>
@@ -2703,7 +3243,7 @@
           <p:cNvPr id="7" name="灯片编号占位符 6">
             <a:extLst>
               <a:ext uri="{FF2B5EF4-FFF2-40B4-BE49-F238E27FC236}">
-                <a16:creationId xmlns:a16="http://schemas.microsoft.com/office/drawing/2014/main" id="{5E3540A1-D2FC-4C4F-8730-45AE7AE81FA7}"/>
+                <a16:creationId xmlns="" xmlns:a16="http://schemas.microsoft.com/office/drawing/2014/main" id="{5E3540A1-D2FC-4C4F-8730-45AE7AE81FA7}"/>
               </a:ext>
             </a:extLst>
           </p:cNvPr>
@@ -2767,7 +3307,7 @@
           <p:cNvPr id="2" name="标题占位符 1">
             <a:extLst>
               <a:ext uri="{FF2B5EF4-FFF2-40B4-BE49-F238E27FC236}">
-                <a16:creationId xmlns:a16="http://schemas.microsoft.com/office/drawing/2014/main" id="{F9A1AFFF-38F9-4CF8-89C5-C23CD407E653}"/>
+                <a16:creationId xmlns="" xmlns:a16="http://schemas.microsoft.com/office/drawing/2014/main" id="{F9A1AFFF-38F9-4CF8-89C5-C23CD407E653}"/>
               </a:ext>
             </a:extLst>
           </p:cNvPr>
@@ -2805,7 +3345,7 @@
           <p:cNvPr id="3" name="文本占位符 2">
             <a:extLst>
               <a:ext uri="{FF2B5EF4-FFF2-40B4-BE49-F238E27FC236}">
-                <a16:creationId xmlns:a16="http://schemas.microsoft.com/office/drawing/2014/main" id="{DD5E842E-D47B-4800-8B91-BF2384D97C93}"/>
+                <a16:creationId xmlns="" xmlns:a16="http://schemas.microsoft.com/office/drawing/2014/main" id="{DD5E842E-D47B-4800-8B91-BF2384D97C93}"/>
               </a:ext>
             </a:extLst>
           </p:cNvPr>
@@ -2872,7 +3412,7 @@
           <p:cNvPr id="4" name="日期占位符 3">
             <a:extLst>
               <a:ext uri="{FF2B5EF4-FFF2-40B4-BE49-F238E27FC236}">
-                <a16:creationId xmlns:a16="http://schemas.microsoft.com/office/drawing/2014/main" id="{6FCA4C76-C2F9-4567-95EC-AD2122AE67EC}"/>
+                <a16:creationId xmlns="" xmlns:a16="http://schemas.microsoft.com/office/drawing/2014/main" id="{6FCA4C76-C2F9-4567-95EC-AD2122AE67EC}"/>
               </a:ext>
             </a:extLst>
           </p:cNvPr>
@@ -2908,7 +3448,7 @@
           <a:p>
             <a:fld id="{D993279A-1075-4D69-8304-6D9EBC8FBB92}" type="datetimeFigureOut">
               <a:rPr lang="zh-CN" altLang="en-US" smtClean="0"/>
-              <a:t>2026/7/11</a:t>
+              <a:t>2026/7/13</a:t>
             </a:fld>
             <a:endParaRPr lang="zh-CN" altLang="en-US"/>
           </a:p>
@@ -2919,7 +3459,7 @@
           <p:cNvPr id="5" name="页脚占位符 4">
             <a:extLst>
               <a:ext uri="{FF2B5EF4-FFF2-40B4-BE49-F238E27FC236}">
-                <a16:creationId xmlns:a16="http://schemas.microsoft.com/office/drawing/2014/main" id="{42914F35-1A1A-4188-8437-3AD2F48F2361}"/>
+                <a16:creationId xmlns="" xmlns:a16="http://schemas.microsoft.com/office/drawing/2014/main" id="{42914F35-1A1A-4188-8437-3AD2F48F2361}"/>
               </a:ext>
             </a:extLst>
           </p:cNvPr>
@@ -2962,7 +3502,7 @@
           <p:cNvPr id="6" name="灯片编号占位符 5">
             <a:extLst>
               <a:ext uri="{FF2B5EF4-FFF2-40B4-BE49-F238E27FC236}">
-                <a16:creationId xmlns:a16="http://schemas.microsoft.com/office/drawing/2014/main" id="{934BC865-325B-47A4-BA1C-86F68BC2983D}"/>
+                <a16:creationId xmlns="" xmlns:a16="http://schemas.microsoft.com/office/drawing/2014/main" id="{934BC865-325B-47A4-BA1C-86F68BC2983D}"/>
               </a:ext>
             </a:extLst>
           </p:cNvPr>
@@ -3330,7 +3870,7 @@
           <p:cNvPr id="3" name="副标题 2">
             <a:extLst>
               <a:ext uri="{FF2B5EF4-FFF2-40B4-BE49-F238E27FC236}">
-                <a16:creationId xmlns:a16="http://schemas.microsoft.com/office/drawing/2014/main" id="{87E166CE-5650-4880-A211-9F72AED653E3}"/>
+                <a16:creationId xmlns="" xmlns:a16="http://schemas.microsoft.com/office/drawing/2014/main" id="{87E166CE-5650-4880-A211-9F72AED653E3}"/>
               </a:ext>
             </a:extLst>
           </p:cNvPr>
@@ -3343,8 +3883,8 @@
         </p:nvSpPr>
         <p:spPr>
           <a:xfrm>
-            <a:off x="1524000" y="3720026"/>
-            <a:ext cx="10127226" cy="1655762"/>
+            <a:off x="1524000" y="3246201"/>
+            <a:ext cx="8991600" cy="1655762"/>
           </a:xfrm>
         </p:spPr>
         <p:txBody>
@@ -3359,6 +3899,9 @@
                     <a:lumOff val="50000"/>
                   </a:schemeClr>
                 </a:solidFill>
+                <a:latin typeface="Calibri Light" panose="020F0302020204030204" pitchFamily="34" charset="0"/>
+                <a:ea typeface="Calibri Light" panose="020F0302020204030204" pitchFamily="34" charset="0"/>
+                <a:cs typeface="Calibri Light" panose="020F0302020204030204" pitchFamily="34" charset="0"/>
               </a:rPr>
               <a:t>An architecture and requirements briefing for supervising autonomous AI agents deployed for network operations</a:t>
             </a:r>
@@ -3380,7 +3923,7 @@
           <p:cNvPr id="4" name="Text 4">
             <a:extLst>
               <a:ext uri="{FF2B5EF4-FFF2-40B4-BE49-F238E27FC236}">
-                <a16:creationId xmlns:a16="http://schemas.microsoft.com/office/drawing/2014/main" id="{41F9B342-E7C0-4E51-8237-C08E56CF21C0}"/>
+                <a16:creationId xmlns="" xmlns:a16="http://schemas.microsoft.com/office/drawing/2014/main" id="{41F9B342-E7C0-4E51-8237-C08E56CF21C0}"/>
               </a:ext>
             </a:extLst>
           </p:cNvPr>
@@ -3389,8 +3932,8 @@
         </p:nvSpPr>
         <p:spPr>
           <a:xfrm>
-            <a:off x="1078597" y="2158682"/>
-            <a:ext cx="10248164" cy="1443356"/>
+            <a:off x="1078597" y="1684857"/>
+            <a:ext cx="10268276" cy="1443356"/>
           </a:xfrm>
           <a:prstGeom prst="rect">
             <a:avLst/>
@@ -3409,15 +3952,12 @@
             </a:pPr>
             <a:r>
               <a:rPr lang="en-US" sz="3600" dirty="0">
-                <a:latin typeface="Cambria" pitchFamily="34" charset="0"/>
-                <a:ea typeface="Cambria" pitchFamily="34" charset="-122"/>
-                <a:cs typeface="Cambria" pitchFamily="34" charset="-120"/>
+                <a:latin typeface="Calibri Light" panose="020F0302020204030204" pitchFamily="34" charset="0"/>
+                <a:ea typeface="Calibri Light" panose="020F0302020204030204" pitchFamily="34" charset="0"/>
+                <a:cs typeface="Calibri Light" panose="020F0302020204030204" pitchFamily="34" charset="0"/>
               </a:rPr>
               <a:t>Architecture and Requirements for Observability, C&amp;I of Network Management Agents</a:t>
             </a:r>
-            <a:endParaRPr lang="en-US" sz="3600" dirty="0">
-              <a:latin typeface="Calibri" panose="020F0502020204030204"/>
-            </a:endParaRPr>
           </a:p>
         </p:txBody>
       </p:sp>
@@ -3426,7 +3966,7 @@
           <p:cNvPr id="6" name="文本框 5">
             <a:extLst>
               <a:ext uri="{FF2B5EF4-FFF2-40B4-BE49-F238E27FC236}">
-                <a16:creationId xmlns:a16="http://schemas.microsoft.com/office/drawing/2014/main" id="{981CF869-3C14-4C68-A6D4-EDCE3E969CFD}"/>
+                <a16:creationId xmlns="" xmlns:a16="http://schemas.microsoft.com/office/drawing/2014/main" id="{981CF869-3C14-4C68-A6D4-EDCE3E969CFD}"/>
               </a:ext>
             </a:extLst>
           </p:cNvPr>
@@ -3450,7 +3990,10 @@
           <a:lstStyle/>
           <a:p>
             <a:r>
-              <a:rPr lang="zh-CN" altLang="en-US" dirty="0"/>
+              <a:rPr lang="zh-CN" altLang="en-US" dirty="0">
+                <a:latin typeface="Calibri Light" panose="020F0302020204030204" pitchFamily="34" charset="0"/>
+                <a:cs typeface="Calibri Light" panose="020F0302020204030204" pitchFamily="34" charset="0"/>
+              </a:rPr>
               <a:t>https://datatracker.ietf.org/doc/draft-mcw-opsawg-icon-requirements/</a:t>
             </a:r>
           </a:p>
@@ -3466,6 +4009,13 @@
   <p:clrMapOvr>
     <a:masterClrMapping/>
   </p:clrMapOvr>
+  <p:timing>
+    <p:tnLst>
+      <p:par>
+        <p:cTn id="1" dur="indefinite" restart="never" nodeType="tmRoot"/>
+      </p:par>
+    </p:tnLst>
+  </p:timing>
 </p:sld>
 </file>
 
@@ -3488,10 +4038,368 @@
       </p:grpSpPr>
       <p:sp>
         <p:nvSpPr>
+          <p:cNvPr id="2" name="标题 1"/>
+          <p:cNvSpPr>
+            <a:spLocks noGrp="1"/>
+          </p:cNvSpPr>
+          <p:nvPr>
+            <p:ph type="title"/>
+          </p:nvPr>
+        </p:nvSpPr>
+        <p:spPr>
+          <a:xfrm>
+            <a:off x="838200" y="165619"/>
+            <a:ext cx="10515600" cy="1325563"/>
+          </a:xfrm>
+        </p:spPr>
+        <p:txBody>
+          <a:bodyPr/>
+          <a:lstStyle/>
+          <a:p>
+            <a:r>
+              <a:rPr lang="en-US" dirty="0" smtClean="0">
+                <a:latin typeface="Calibri Light" panose="020F0302020204030204" pitchFamily="34" charset="0"/>
+                <a:ea typeface="Calibri Light" panose="020F0302020204030204" pitchFamily="34" charset="0"/>
+                <a:cs typeface="Calibri Light" panose="020F0302020204030204" pitchFamily="34" charset="0"/>
+              </a:rPr>
+              <a:t>Scope &amp; Key Terminology</a:t>
+            </a:r>
+            <a:endParaRPr lang="en-US" dirty="0">
+              <a:latin typeface="Calibri Light" panose="020F0302020204030204" pitchFamily="34" charset="0"/>
+              <a:ea typeface="Calibri Light" panose="020F0302020204030204" pitchFamily="34" charset="0"/>
+              <a:cs typeface="Calibri Light" panose="020F0302020204030204" pitchFamily="34" charset="0"/>
+            </a:endParaRPr>
+          </a:p>
+        </p:txBody>
+      </p:sp>
+      <p:sp>
+        <p:nvSpPr>
+          <p:cNvPr id="3" name="内容占位符 2"/>
+          <p:cNvSpPr>
+            <a:spLocks noGrp="1"/>
+          </p:cNvSpPr>
+          <p:nvPr>
+            <p:ph idx="1"/>
+          </p:nvPr>
+        </p:nvSpPr>
+        <p:spPr>
+          <a:xfrm>
+            <a:off x="838200" y="1409989"/>
+            <a:ext cx="11165378" cy="5206942"/>
+          </a:xfrm>
+        </p:spPr>
+        <p:txBody>
+          <a:bodyPr>
+            <a:normAutofit fontScale="92500"/>
+          </a:bodyPr>
+          <a:lstStyle/>
+          <a:p>
+            <a:r>
+              <a:rPr lang="en-US" dirty="0" smtClean="0">
+                <a:latin typeface="Calibri" panose="020F0502020204030204" pitchFamily="34" charset="0"/>
+                <a:ea typeface="Calibri" panose="020F0502020204030204" pitchFamily="34" charset="0"/>
+                <a:cs typeface="Calibri" panose="020F0502020204030204" pitchFamily="34" charset="0"/>
+              </a:rPr>
+              <a:t>Scope</a:t>
+            </a:r>
+          </a:p>
+          <a:p>
+            <a:pPr lvl="1"/>
+            <a:r>
+              <a:rPr lang="en-US" altLang="zh-CN" dirty="0">
+                <a:latin typeface="Calibri" panose="020F0502020204030204" pitchFamily="34" charset="0"/>
+                <a:ea typeface="Calibri" panose="020F0502020204030204" pitchFamily="34" charset="0"/>
+                <a:cs typeface="Calibri" panose="020F0502020204030204" pitchFamily="34" charset="0"/>
+              </a:rPr>
+              <a:t>Defines the architecture and </a:t>
+            </a:r>
+            <a:r>
+              <a:rPr lang="en-US" altLang="zh-CN" dirty="0" smtClean="0">
+                <a:latin typeface="Calibri" panose="020F0502020204030204" pitchFamily="34" charset="0"/>
+                <a:ea typeface="Calibri" panose="020F0502020204030204" pitchFamily="34" charset="0"/>
+                <a:cs typeface="Calibri" panose="020F0502020204030204" pitchFamily="34" charset="0"/>
+              </a:rPr>
+              <a:t>requirements </a:t>
+            </a:r>
+            <a:r>
+              <a:rPr lang="en-US" altLang="zh-CN" dirty="0">
+                <a:latin typeface="Calibri" panose="020F0502020204030204" pitchFamily="34" charset="0"/>
+                <a:ea typeface="Calibri" panose="020F0502020204030204" pitchFamily="34" charset="0"/>
+                <a:cs typeface="Calibri" panose="020F0502020204030204" pitchFamily="34" charset="0"/>
+              </a:rPr>
+              <a:t>between an agent and its supervision system </a:t>
+            </a:r>
+            <a:r>
+              <a:rPr lang="en-US" altLang="zh-CN" dirty="0" smtClean="0">
+                <a:latin typeface="Calibri" panose="020F0502020204030204" pitchFamily="34" charset="0"/>
+                <a:ea typeface="Calibri" panose="020F0502020204030204" pitchFamily="34" charset="0"/>
+                <a:cs typeface="Calibri" panose="020F0502020204030204" pitchFamily="34" charset="0"/>
+              </a:rPr>
+              <a:t>that enables to see </a:t>
+            </a:r>
+            <a:r>
+              <a:rPr lang="en-US" altLang="zh-CN" dirty="0">
+                <a:latin typeface="Calibri" panose="020F0502020204030204" pitchFamily="34" charset="0"/>
+                <a:ea typeface="Calibri" panose="020F0502020204030204" pitchFamily="34" charset="0"/>
+                <a:cs typeface="Calibri" panose="020F0502020204030204" pitchFamily="34" charset="0"/>
+              </a:rPr>
+              <a:t>what an agent is doing, bound what it is allowed to do, and intervene when </a:t>
+            </a:r>
+            <a:r>
+              <a:rPr lang="en-US" altLang="zh-CN" dirty="0" smtClean="0">
+                <a:latin typeface="Calibri" panose="020F0502020204030204" pitchFamily="34" charset="0"/>
+                <a:ea typeface="Calibri" panose="020F0502020204030204" pitchFamily="34" charset="0"/>
+                <a:cs typeface="Calibri" panose="020F0502020204030204" pitchFamily="34" charset="0"/>
+              </a:rPr>
+              <a:t>necessary</a:t>
+            </a:r>
+            <a:endParaRPr lang="en-US" altLang="zh-CN" dirty="0">
+              <a:latin typeface="Calibri" panose="020F0502020204030204" pitchFamily="34" charset="0"/>
+              <a:ea typeface="Calibri" panose="020F0502020204030204" pitchFamily="34" charset="0"/>
+              <a:cs typeface="Calibri" panose="020F0502020204030204" pitchFamily="34" charset="0"/>
+            </a:endParaRPr>
+          </a:p>
+          <a:p>
+            <a:pPr lvl="1"/>
+            <a:r>
+              <a:rPr lang="en-US" dirty="0" smtClean="0">
+                <a:latin typeface="Calibri" panose="020F0502020204030204" pitchFamily="34" charset="0"/>
+                <a:ea typeface="Calibri" panose="020F0502020204030204" pitchFamily="34" charset="0"/>
+                <a:cs typeface="Calibri" panose="020F0502020204030204" pitchFamily="34" charset="0"/>
+              </a:rPr>
+              <a:t>Solution-neutral</a:t>
+            </a:r>
+          </a:p>
+          <a:p>
+            <a:pPr lvl="2"/>
+            <a:r>
+              <a:rPr lang="en-US" dirty="0">
+                <a:latin typeface="Calibri" panose="020F0502020204030204" pitchFamily="34" charset="0"/>
+                <a:ea typeface="Calibri" panose="020F0502020204030204" pitchFamily="34" charset="0"/>
+                <a:cs typeface="Calibri" panose="020F0502020204030204" pitchFamily="34" charset="0"/>
+              </a:rPr>
+              <a:t>Protocols, data model, or API choice is intentionally left for future work</a:t>
+            </a:r>
+            <a:r>
+              <a:rPr lang="en-US" dirty="0" smtClean="0">
+                <a:latin typeface="Calibri" panose="020F0502020204030204" pitchFamily="34" charset="0"/>
+                <a:ea typeface="Calibri" panose="020F0502020204030204" pitchFamily="34" charset="0"/>
+                <a:cs typeface="Calibri" panose="020F0502020204030204" pitchFamily="34" charset="0"/>
+              </a:rPr>
+              <a:t>.</a:t>
+            </a:r>
+          </a:p>
+          <a:p>
+            <a:pPr lvl="1"/>
+            <a:r>
+              <a:rPr lang="en-US" dirty="0">
+                <a:latin typeface="Calibri" panose="020F0502020204030204" pitchFamily="34" charset="0"/>
+                <a:ea typeface="Calibri" panose="020F0502020204030204" pitchFamily="34" charset="0"/>
+                <a:cs typeface="Calibri" panose="020F0502020204030204" pitchFamily="34" charset="0"/>
+              </a:rPr>
+              <a:t>Companion Problem Statement</a:t>
+            </a:r>
+          </a:p>
+          <a:p>
+            <a:pPr lvl="2"/>
+            <a:r>
+              <a:rPr lang="en-US" dirty="0">
+                <a:latin typeface="Calibri" panose="020F0502020204030204" pitchFamily="34" charset="0"/>
+                <a:ea typeface="Calibri" panose="020F0502020204030204" pitchFamily="34" charset="0"/>
+                <a:cs typeface="Calibri" panose="020F0502020204030204" pitchFamily="34" charset="0"/>
+              </a:rPr>
+              <a:t>I-D. </a:t>
+            </a:r>
+            <a:r>
+              <a:rPr lang="en-US" dirty="0" err="1">
+                <a:latin typeface="Calibri" panose="020F0502020204030204" pitchFamily="34" charset="0"/>
+                <a:ea typeface="Calibri" panose="020F0502020204030204" pitchFamily="34" charset="0"/>
+                <a:cs typeface="Calibri" panose="020F0502020204030204" pitchFamily="34" charset="0"/>
+              </a:rPr>
+              <a:t>wnd</a:t>
+            </a:r>
+            <a:r>
+              <a:rPr lang="en-US" dirty="0">
+                <a:latin typeface="Calibri" panose="020F0502020204030204" pitchFamily="34" charset="0"/>
+                <a:ea typeface="Calibri" panose="020F0502020204030204" pitchFamily="34" charset="0"/>
+                <a:cs typeface="Calibri" panose="020F0502020204030204" pitchFamily="34" charset="0"/>
+              </a:rPr>
+              <a:t>-opsawg-icon-</a:t>
+            </a:r>
+            <a:r>
+              <a:rPr lang="en-US" dirty="0" err="1">
+                <a:latin typeface="Calibri" panose="020F0502020204030204" pitchFamily="34" charset="0"/>
+                <a:ea typeface="Calibri" panose="020F0502020204030204" pitchFamily="34" charset="0"/>
+                <a:cs typeface="Calibri" panose="020F0502020204030204" pitchFamily="34" charset="0"/>
+              </a:rPr>
+              <a:t>ps</a:t>
+            </a:r>
+            <a:r>
+              <a:rPr lang="en-US" dirty="0">
+                <a:latin typeface="Calibri" panose="020F0502020204030204" pitchFamily="34" charset="0"/>
+                <a:ea typeface="Calibri" panose="020F0502020204030204" pitchFamily="34" charset="0"/>
+                <a:cs typeface="Calibri" panose="020F0502020204030204" pitchFamily="34" charset="0"/>
+              </a:rPr>
+              <a:t> details the operational gaps motivating these </a:t>
+            </a:r>
+            <a:r>
+              <a:rPr lang="en-US" dirty="0" smtClean="0">
+                <a:latin typeface="Calibri" panose="020F0502020204030204" pitchFamily="34" charset="0"/>
+                <a:ea typeface="Calibri" panose="020F0502020204030204" pitchFamily="34" charset="0"/>
+                <a:cs typeface="Calibri" panose="020F0502020204030204" pitchFamily="34" charset="0"/>
+              </a:rPr>
+              <a:t>requirements</a:t>
+            </a:r>
+            <a:endParaRPr lang="en-US" dirty="0">
+              <a:latin typeface="Calibri" panose="020F0502020204030204" pitchFamily="34" charset="0"/>
+              <a:ea typeface="Calibri" panose="020F0502020204030204" pitchFamily="34" charset="0"/>
+              <a:cs typeface="Calibri" panose="020F0502020204030204" pitchFamily="34" charset="0"/>
+            </a:endParaRPr>
+          </a:p>
+          <a:p>
+            <a:r>
+              <a:rPr lang="en-US" dirty="0" smtClean="0">
+                <a:latin typeface="Calibri" panose="020F0502020204030204" pitchFamily="34" charset="0"/>
+                <a:ea typeface="Calibri" panose="020F0502020204030204" pitchFamily="34" charset="0"/>
+                <a:cs typeface="Calibri" panose="020F0502020204030204" pitchFamily="34" charset="0"/>
+              </a:rPr>
+              <a:t>Key Terms</a:t>
+            </a:r>
+          </a:p>
+          <a:p>
+            <a:pPr lvl="1"/>
+            <a:r>
+              <a:rPr lang="en-US" dirty="0" smtClean="0">
+                <a:latin typeface="Calibri" panose="020F0502020204030204" pitchFamily="34" charset="0"/>
+                <a:ea typeface="Calibri" panose="020F0502020204030204" pitchFamily="34" charset="0"/>
+                <a:cs typeface="Calibri" panose="020F0502020204030204" pitchFamily="34" charset="0"/>
+              </a:rPr>
+              <a:t>Supervisor</a:t>
+            </a:r>
+          </a:p>
+          <a:p>
+            <a:pPr lvl="2"/>
+            <a:r>
+              <a:rPr lang="en-US" dirty="0">
+                <a:latin typeface="Calibri" panose="020F0502020204030204" pitchFamily="34" charset="0"/>
+                <a:ea typeface="Calibri" panose="020F0502020204030204" pitchFamily="34" charset="0"/>
+                <a:cs typeface="Calibri" panose="020F0502020204030204" pitchFamily="34" charset="0"/>
+              </a:rPr>
+              <a:t>The entity responsible for monitoring, controlling, and intervening in the agent's lifecycle </a:t>
+            </a:r>
+            <a:r>
+              <a:rPr lang="en-US" dirty="0" smtClean="0">
+                <a:latin typeface="Calibri" panose="020F0502020204030204" pitchFamily="34" charset="0"/>
+                <a:ea typeface="Calibri" panose="020F0502020204030204" pitchFamily="34" charset="0"/>
+                <a:cs typeface="Calibri" panose="020F0502020204030204" pitchFamily="34" charset="0"/>
+              </a:rPr>
+              <a:t>—it could be </a:t>
+            </a:r>
+            <a:r>
+              <a:rPr lang="en-US" dirty="0">
+                <a:latin typeface="Calibri" panose="020F0502020204030204" pitchFamily="34" charset="0"/>
+                <a:ea typeface="Calibri" panose="020F0502020204030204" pitchFamily="34" charset="0"/>
+                <a:cs typeface="Calibri" panose="020F0502020204030204" pitchFamily="34" charset="0"/>
+              </a:rPr>
+              <a:t>a human operator, an automated high-privilege supervision system, or an orchestrator</a:t>
+            </a:r>
+            <a:r>
+              <a:rPr lang="en-US" dirty="0" smtClean="0">
+                <a:latin typeface="Calibri" panose="020F0502020204030204" pitchFamily="34" charset="0"/>
+                <a:ea typeface="Calibri" panose="020F0502020204030204" pitchFamily="34" charset="0"/>
+                <a:cs typeface="Calibri" panose="020F0502020204030204" pitchFamily="34" charset="0"/>
+              </a:rPr>
+              <a:t>.</a:t>
+            </a:r>
+          </a:p>
+          <a:p>
+            <a:pPr lvl="1"/>
+            <a:r>
+              <a:rPr lang="en-US" dirty="0" smtClean="0">
+                <a:latin typeface="Calibri" panose="020F0502020204030204" pitchFamily="34" charset="0"/>
+                <a:ea typeface="Calibri" panose="020F0502020204030204" pitchFamily="34" charset="0"/>
+                <a:cs typeface="Calibri" panose="020F0502020204030204" pitchFamily="34" charset="0"/>
+              </a:rPr>
+              <a:t>Agent </a:t>
+            </a:r>
+            <a:r>
+              <a:rPr lang="en-US" dirty="0" smtClean="0">
+                <a:latin typeface="Calibri" panose="020F0502020204030204" pitchFamily="34" charset="0"/>
+                <a:ea typeface="Calibri" panose="020F0502020204030204" pitchFamily="34" charset="0"/>
+                <a:cs typeface="Calibri" panose="020F0502020204030204" pitchFamily="34" charset="0"/>
+              </a:rPr>
+              <a:t>Supervision/orchestration</a:t>
+            </a:r>
+            <a:endParaRPr lang="en-US" dirty="0" smtClean="0">
+              <a:latin typeface="Calibri" panose="020F0502020204030204" pitchFamily="34" charset="0"/>
+              <a:ea typeface="Calibri" panose="020F0502020204030204" pitchFamily="34" charset="0"/>
+              <a:cs typeface="Calibri" panose="020F0502020204030204" pitchFamily="34" charset="0"/>
+            </a:endParaRPr>
+          </a:p>
+          <a:p>
+            <a:pPr lvl="2"/>
+            <a:r>
+              <a:rPr lang="en-US" dirty="0">
+                <a:latin typeface="Calibri" panose="020F0502020204030204" pitchFamily="34" charset="0"/>
+                <a:ea typeface="Calibri" panose="020F0502020204030204" pitchFamily="34" charset="0"/>
+                <a:cs typeface="Calibri" panose="020F0502020204030204" pitchFamily="34" charset="0"/>
+              </a:rPr>
+              <a:t>The administrative and operational capabilities that continuously monitor, constrain, and guide agent behavior, retaining ultimate authority to modify, overrule, or terminate operations.</a:t>
+            </a:r>
+          </a:p>
+          <a:p>
+            <a:pPr lvl="2"/>
+            <a:endParaRPr lang="en-US" dirty="0">
+              <a:latin typeface="Calibri" panose="020F0502020204030204" pitchFamily="34" charset="0"/>
+              <a:ea typeface="Calibri" panose="020F0502020204030204" pitchFamily="34" charset="0"/>
+              <a:cs typeface="Calibri" panose="020F0502020204030204" pitchFamily="34" charset="0"/>
+            </a:endParaRPr>
+          </a:p>
+        </p:txBody>
+      </p:sp>
+    </p:spTree>
+    <p:extLst>
+      <p:ext uri="{BB962C8B-B14F-4D97-AF65-F5344CB8AC3E}">
+        <p14:creationId xmlns:p14="http://schemas.microsoft.com/office/powerpoint/2010/main" val="290943986"/>
+      </p:ext>
+    </p:extLst>
+  </p:cSld>
+  <p:clrMapOvr>
+    <a:masterClrMapping/>
+  </p:clrMapOvr>
+  <p:timing>
+    <p:tnLst>
+      <p:par>
+        <p:cTn id="1" dur="indefinite" restart="never" nodeType="tmRoot"/>
+      </p:par>
+    </p:tnLst>
+  </p:timing>
+</p:sld>
+</file>
+
+<file path=ppt/slides/slide3.xml><?xml version="1.0" encoding="utf-8"?>
+<p:sld xmlns:a="http://schemas.openxmlformats.org/drawingml/2006/main" xmlns:r="http://schemas.openxmlformats.org/officeDocument/2006/relationships" xmlns:p="http://schemas.openxmlformats.org/presentationml/2006/main">
+  <p:cSld>
+    <p:spTree>
+      <p:nvGrpSpPr>
+        <p:cNvPr id="1" name=""/>
+        <p:cNvGrpSpPr/>
+        <p:nvPr/>
+      </p:nvGrpSpPr>
+      <p:grpSpPr>
+        <a:xfrm>
+          <a:off x="0" y="0"/>
+          <a:ext cx="0" cy="0"/>
+          <a:chOff x="0" y="0"/>
+          <a:chExt cx="0" cy="0"/>
+        </a:xfrm>
+      </p:grpSpPr>
+      <p:sp>
+        <p:nvSpPr>
           <p:cNvPr id="2" name="标题 1">
             <a:extLst>
               <a:ext uri="{FF2B5EF4-FFF2-40B4-BE49-F238E27FC236}">
-                <a16:creationId xmlns:a16="http://schemas.microsoft.com/office/drawing/2014/main" id="{0102B728-6D0A-4D88-A49E-3AE905DDB017}"/>
+                <a16:creationId xmlns="" xmlns:a16="http://schemas.microsoft.com/office/drawing/2014/main" id="{0102B728-6D0A-4D88-A49E-3AE905DDB017}"/>
               </a:ext>
             </a:extLst>
           </p:cNvPr>
@@ -3513,10 +4421,17 @@
           <a:lstStyle/>
           <a:p>
             <a:r>
-              <a:rPr lang="en-US" altLang="zh-CN" dirty="0"/>
+              <a:rPr lang="en-US" altLang="zh-CN" dirty="0">
+                <a:latin typeface="Calibri Light" panose="020F0302020204030204" pitchFamily="34" charset="0"/>
+                <a:ea typeface="Calibri Light" panose="020F0302020204030204" pitchFamily="34" charset="0"/>
+                <a:cs typeface="Calibri Light" panose="020F0302020204030204" pitchFamily="34" charset="0"/>
+              </a:rPr>
               <a:t>A Reference Architecture</a:t>
             </a:r>
-            <a:endParaRPr lang="zh-CN" altLang="en-US" dirty="0"/>
+            <a:endParaRPr lang="zh-CN" altLang="en-US" dirty="0">
+              <a:latin typeface="Calibri Light" panose="020F0302020204030204" pitchFamily="34" charset="0"/>
+              <a:cs typeface="Calibri Light" panose="020F0302020204030204" pitchFamily="34" charset="0"/>
+            </a:endParaRPr>
           </a:p>
         </p:txBody>
       </p:sp>
@@ -3525,7 +4440,7 @@
           <p:cNvPr id="4" name="Shape 3">
             <a:extLst>
               <a:ext uri="{FF2B5EF4-FFF2-40B4-BE49-F238E27FC236}">
-                <a16:creationId xmlns:a16="http://schemas.microsoft.com/office/drawing/2014/main" id="{084A49AC-22B0-479D-84F4-E5240D126EB4}"/>
+                <a16:creationId xmlns="" xmlns:a16="http://schemas.microsoft.com/office/drawing/2014/main" id="{084A49AC-22B0-479D-84F4-E5240D126EB4}"/>
               </a:ext>
             </a:extLst>
           </p:cNvPr>
@@ -3534,8 +4449,8 @@
         </p:nvSpPr>
         <p:spPr>
           <a:xfrm>
-            <a:off x="548640" y="1394619"/>
-            <a:ext cx="11064240" cy="1691640"/>
+            <a:off x="99753" y="1328117"/>
+            <a:ext cx="7726680" cy="2764654"/>
           </a:xfrm>
           <a:prstGeom prst="roundRect">
             <a:avLst>
@@ -3558,7 +4473,7 @@
           <p:cNvPr id="5" name="Text 4">
             <a:extLst>
               <a:ext uri="{FF2B5EF4-FFF2-40B4-BE49-F238E27FC236}">
-                <a16:creationId xmlns:a16="http://schemas.microsoft.com/office/drawing/2014/main" id="{E14E1904-9F56-42DE-94AC-08636BE459DB}"/>
+                <a16:creationId xmlns="" xmlns:a16="http://schemas.microsoft.com/office/drawing/2014/main" id="{E14E1904-9F56-42DE-94AC-08636BE459DB}"/>
               </a:ext>
             </a:extLst>
           </p:cNvPr>
@@ -3567,7 +4482,7 @@
         </p:nvSpPr>
         <p:spPr>
           <a:xfrm>
-            <a:off x="731520" y="1467771"/>
+            <a:off x="282633" y="1387553"/>
             <a:ext cx="5486400" cy="256032"/>
           </a:xfrm>
           <a:prstGeom prst="rect">
@@ -3588,22 +4503,37 @@
                 <a:solidFill>
                   <a:srgbClr val="065A82"/>
                 </a:solidFill>
-                <a:latin typeface="Calibri" pitchFamily="34" charset="0"/>
-                <a:ea typeface="Calibri" pitchFamily="34" charset="-122"/>
-                <a:cs typeface="Calibri" pitchFamily="34" charset="-120"/>
-              </a:rPr>
-              <a:t>AGENT SUPERVISION PLANE</a:t>
-            </a:r>
-            <a:endParaRPr lang="en-US" sz="1050" dirty="0"/>
-          </a:p>
-        </p:txBody>
-      </p:sp>
-      <p:sp>
-        <p:nvSpPr>
-          <p:cNvPr id="6" name="Shape 5">
-            <a:extLst>
-              <a:ext uri="{FF2B5EF4-FFF2-40B4-BE49-F238E27FC236}">
-                <a16:creationId xmlns:a16="http://schemas.microsoft.com/office/drawing/2014/main" id="{311F6CCC-59F5-4E1D-90B0-63E7606D4AFD}"/>
+                <a:latin typeface="Calibri" panose="020F0502020204030204" pitchFamily="34" charset="0"/>
+                <a:ea typeface="Calibri" panose="020F0502020204030204" pitchFamily="34" charset="0"/>
+                <a:cs typeface="Calibri" panose="020F0502020204030204" pitchFamily="34" charset="0"/>
+              </a:rPr>
+              <a:t>AGENT </a:t>
+            </a:r>
+            <a:r>
+              <a:rPr lang="en-US" sz="1050" b="1" kern="0" spc="150" dirty="0" smtClean="0">
+                <a:solidFill>
+                  <a:srgbClr val="065A82"/>
+                </a:solidFill>
+                <a:latin typeface="Calibri" panose="020F0502020204030204" pitchFamily="34" charset="0"/>
+                <a:ea typeface="Calibri" panose="020F0502020204030204" pitchFamily="34" charset="0"/>
+                <a:cs typeface="Calibri" panose="020F0502020204030204" pitchFamily="34" charset="0"/>
+              </a:rPr>
+              <a:t>MANAGEMENT PLANE</a:t>
+            </a:r>
+            <a:endParaRPr lang="en-US" sz="1050" dirty="0">
+              <a:latin typeface="Calibri" panose="020F0502020204030204" pitchFamily="34" charset="0"/>
+              <a:ea typeface="Calibri" panose="020F0502020204030204" pitchFamily="34" charset="0"/>
+              <a:cs typeface="Calibri" panose="020F0502020204030204" pitchFamily="34" charset="0"/>
+            </a:endParaRPr>
+          </a:p>
+        </p:txBody>
+      </p:sp>
+      <p:sp>
+        <p:nvSpPr>
+          <p:cNvPr id="8" name="Shape 7">
+            <a:extLst>
+              <a:ext uri="{FF2B5EF4-FFF2-40B4-BE49-F238E27FC236}">
+                <a16:creationId xmlns="" xmlns:a16="http://schemas.microsoft.com/office/drawing/2014/main" id="{A1E3834F-61D2-47DF-A6DD-1128B2086890}"/>
               </a:ext>
             </a:extLst>
           </p:cNvPr>
@@ -3612,86 +4542,8 @@
         </p:nvSpPr>
         <p:spPr>
           <a:xfrm>
-            <a:off x="822960" y="1778667"/>
-            <a:ext cx="10515600" cy="402336"/>
-          </a:xfrm>
-          <a:prstGeom prst="roundRect">
-            <a:avLst>
-              <a:gd name="adj" fmla="val 13636"/>
-            </a:avLst>
-          </a:prstGeom>
-          <a:solidFill>
-            <a:srgbClr val="1A2340"/>
-          </a:solidFill>
-          <a:ln w="12700">
-            <a:solidFill>
-              <a:srgbClr val="1A2340"/>
-            </a:solidFill>
-            <a:prstDash val="solid"/>
-          </a:ln>
-        </p:spPr>
-      </p:sp>
-      <p:sp>
-        <p:nvSpPr>
-          <p:cNvPr id="7" name="Text 6">
-            <a:extLst>
-              <a:ext uri="{FF2B5EF4-FFF2-40B4-BE49-F238E27FC236}">
-                <a16:creationId xmlns:a16="http://schemas.microsoft.com/office/drawing/2014/main" id="{3FFC70D4-DBA4-48C3-9A8E-E4EDAE9D7836}"/>
-              </a:ext>
-            </a:extLst>
-          </p:cNvPr>
-          <p:cNvSpPr/>
-          <p:nvPr/>
-        </p:nvSpPr>
-        <p:spPr>
-          <a:xfrm>
-            <a:off x="822960" y="1778667"/>
-            <a:ext cx="10515600" cy="402336"/>
-          </a:xfrm>
-          <a:prstGeom prst="rect">
-            <a:avLst/>
-          </a:prstGeom>
-          <a:noFill/>
-          <a:ln/>
-        </p:spPr>
-        <p:txBody>
-          <a:bodyPr wrap="square" rtlCol="0" anchor="ctr"/>
-          <a:lstStyle/>
-          <a:p>
-            <a:pPr marL="0" indent="0" algn="ctr">
-              <a:buNone/>
-            </a:pPr>
-            <a:r>
-              <a:rPr lang="en-US" sz="1300" b="1" dirty="0">
-                <a:solidFill>
-                  <a:srgbClr val="FFFFFF"/>
-                </a:solidFill>
-                <a:latin typeface="Calibri" pitchFamily="34" charset="0"/>
-                <a:ea typeface="Calibri" pitchFamily="34" charset="-122"/>
-                <a:cs typeface="Calibri" pitchFamily="34" charset="-120"/>
-              </a:rPr>
-              <a:t>Human Oversight</a:t>
-            </a:r>
-            <a:endParaRPr lang="en-US" sz="1300" dirty="0"/>
-          </a:p>
-        </p:txBody>
-      </p:sp>
-      <p:sp>
-        <p:nvSpPr>
-          <p:cNvPr id="8" name="Shape 7">
-            <a:extLst>
-              <a:ext uri="{FF2B5EF4-FFF2-40B4-BE49-F238E27FC236}">
-                <a16:creationId xmlns:a16="http://schemas.microsoft.com/office/drawing/2014/main" id="{A1E3834F-61D2-47DF-A6DD-1128B2086890}"/>
-              </a:ext>
-            </a:extLst>
-          </p:cNvPr>
-          <p:cNvSpPr/>
-          <p:nvPr/>
-        </p:nvSpPr>
-        <p:spPr>
-          <a:xfrm>
-            <a:off x="822960" y="2290731"/>
-            <a:ext cx="10515600" cy="658368"/>
+            <a:off x="374073" y="2247089"/>
+            <a:ext cx="7232073" cy="658368"/>
           </a:xfrm>
           <a:prstGeom prst="roundRect">
             <a:avLst>
@@ -3714,7 +4566,7 @@
           <p:cNvPr id="9" name="Text 8">
             <a:extLst>
               <a:ext uri="{FF2B5EF4-FFF2-40B4-BE49-F238E27FC236}">
-                <a16:creationId xmlns:a16="http://schemas.microsoft.com/office/drawing/2014/main" id="{BD8BDB0D-9DFE-4382-99D3-4D92871BEBB8}"/>
+                <a16:creationId xmlns="" xmlns:a16="http://schemas.microsoft.com/office/drawing/2014/main" id="{BD8BDB0D-9DFE-4382-99D3-4D92871BEBB8}"/>
               </a:ext>
             </a:extLst>
           </p:cNvPr>
@@ -3723,7 +4575,7 @@
         </p:nvSpPr>
         <p:spPr>
           <a:xfrm>
-            <a:off x="960120" y="2318163"/>
+            <a:off x="511233" y="2274521"/>
             <a:ext cx="2194560" cy="219456"/>
           </a:xfrm>
           <a:prstGeom prst="rect">
@@ -3740,17 +4592,21 @@
               <a:buNone/>
             </a:pPr>
             <a:r>
-              <a:rPr lang="en-US" sz="950" b="1" dirty="0">
+              <a:rPr lang="en-US" sz="950" b="1" dirty="0" smtClean="0">
                 <a:solidFill>
                   <a:srgbClr val="1C7293"/>
                 </a:solidFill>
-                <a:latin typeface="Calibri" pitchFamily="34" charset="0"/>
-                <a:ea typeface="Calibri" pitchFamily="34" charset="-122"/>
-                <a:cs typeface="Calibri" pitchFamily="34" charset="-120"/>
-              </a:rPr>
-              <a:t>ICON Client</a:t>
-            </a:r>
-            <a:endParaRPr lang="en-US" sz="950" dirty="0"/>
+                <a:latin typeface="Calibri" panose="020F0502020204030204" pitchFamily="34" charset="0"/>
+                <a:ea typeface="Calibri" panose="020F0502020204030204" pitchFamily="34" charset="0"/>
+                <a:cs typeface="Calibri" panose="020F0502020204030204" pitchFamily="34" charset="0"/>
+              </a:rPr>
+              <a:t>Agent Supervisor/client</a:t>
+            </a:r>
+            <a:endParaRPr lang="en-US" sz="950" dirty="0">
+              <a:latin typeface="Calibri" panose="020F0502020204030204" pitchFamily="34" charset="0"/>
+              <a:ea typeface="Calibri" panose="020F0502020204030204" pitchFamily="34" charset="0"/>
+              <a:cs typeface="Calibri" panose="020F0502020204030204" pitchFamily="34" charset="0"/>
+            </a:endParaRPr>
           </a:p>
         </p:txBody>
       </p:sp>
@@ -3759,7 +4615,7 @@
           <p:cNvPr id="10" name="Shape 9">
             <a:extLst>
               <a:ext uri="{FF2B5EF4-FFF2-40B4-BE49-F238E27FC236}">
-                <a16:creationId xmlns:a16="http://schemas.microsoft.com/office/drawing/2014/main" id="{4C3E7FC3-82A4-44D7-9B20-FF42D54A4D31}"/>
+                <a16:creationId xmlns="" xmlns:a16="http://schemas.microsoft.com/office/drawing/2014/main" id="{4C3E7FC3-82A4-44D7-9B20-FF42D54A4D31}"/>
               </a:ext>
             </a:extLst>
           </p:cNvPr>
@@ -3768,8 +4624,8 @@
         </p:nvSpPr>
         <p:spPr>
           <a:xfrm>
-            <a:off x="960120" y="2565051"/>
-            <a:ext cx="3230880" cy="310896"/>
+            <a:off x="963053" y="2530828"/>
+            <a:ext cx="1874520" cy="310896"/>
           </a:xfrm>
           <a:prstGeom prst="roundRect">
             <a:avLst>
@@ -3792,7 +4648,7 @@
           <p:cNvPr id="11" name="Text 10">
             <a:extLst>
               <a:ext uri="{FF2B5EF4-FFF2-40B4-BE49-F238E27FC236}">
-                <a16:creationId xmlns:a16="http://schemas.microsoft.com/office/drawing/2014/main" id="{DE8F064D-56AD-4F90-AB08-0714FA4E4182}"/>
+                <a16:creationId xmlns="" xmlns:a16="http://schemas.microsoft.com/office/drawing/2014/main" id="{DE8F064D-56AD-4F90-AB08-0714FA4E4182}"/>
               </a:ext>
             </a:extLst>
           </p:cNvPr>
@@ -3801,7 +4657,7 @@
         </p:nvSpPr>
         <p:spPr>
           <a:xfrm>
-            <a:off x="960120" y="2565051"/>
+            <a:off x="282633" y="2521587"/>
             <a:ext cx="3230880" cy="310896"/>
           </a:xfrm>
           <a:prstGeom prst="rect">
@@ -3822,13 +4678,17 @@
                 <a:solidFill>
                   <a:srgbClr val="FFFFFF"/>
                 </a:solidFill>
-                <a:latin typeface="Calibri" pitchFamily="34" charset="0"/>
-                <a:ea typeface="Calibri" pitchFamily="34" charset="-122"/>
-                <a:cs typeface="Calibri" pitchFamily="34" charset="-120"/>
+                <a:latin typeface="Calibri" panose="020F0502020204030204" pitchFamily="34" charset="0"/>
+                <a:ea typeface="Calibri" panose="020F0502020204030204" pitchFamily="34" charset="0"/>
+                <a:cs typeface="Calibri" panose="020F0502020204030204" pitchFamily="34" charset="0"/>
               </a:rPr>
               <a:t>Observability</a:t>
             </a:r>
-            <a:endParaRPr lang="en-US" sz="1100" dirty="0"/>
+            <a:endParaRPr lang="en-US" sz="1100" dirty="0">
+              <a:latin typeface="Calibri" panose="020F0502020204030204" pitchFamily="34" charset="0"/>
+              <a:ea typeface="Calibri" panose="020F0502020204030204" pitchFamily="34" charset="0"/>
+              <a:cs typeface="Calibri" panose="020F0502020204030204" pitchFamily="34" charset="0"/>
+            </a:endParaRPr>
           </a:p>
         </p:txBody>
       </p:sp>
@@ -3837,7 +4697,7 @@
           <p:cNvPr id="12" name="Shape 11">
             <a:extLst>
               <a:ext uri="{FF2B5EF4-FFF2-40B4-BE49-F238E27FC236}">
-                <a16:creationId xmlns:a16="http://schemas.microsoft.com/office/drawing/2014/main" id="{50911C78-4C0C-4660-87F8-D05FE2DEFB5E}"/>
+                <a16:creationId xmlns="" xmlns:a16="http://schemas.microsoft.com/office/drawing/2014/main" id="{50911C78-4C0C-4660-87F8-D05FE2DEFB5E}"/>
               </a:ext>
             </a:extLst>
           </p:cNvPr>
@@ -3846,8 +4706,8 @@
         </p:nvSpPr>
         <p:spPr>
           <a:xfrm>
-            <a:off x="4328160" y="2565051"/>
-            <a:ext cx="3230880" cy="310896"/>
+            <a:off x="2909455" y="2521940"/>
+            <a:ext cx="1964087" cy="310896"/>
           </a:xfrm>
           <a:prstGeom prst="roundRect">
             <a:avLst>
@@ -3870,7 +4730,7 @@
           <p:cNvPr id="13" name="Text 12">
             <a:extLst>
               <a:ext uri="{FF2B5EF4-FFF2-40B4-BE49-F238E27FC236}">
-                <a16:creationId xmlns:a16="http://schemas.microsoft.com/office/drawing/2014/main" id="{C0211E05-C7AE-4C7E-916D-D648E59EAF77}"/>
+                <a16:creationId xmlns="" xmlns:a16="http://schemas.microsoft.com/office/drawing/2014/main" id="{C0211E05-C7AE-4C7E-916D-D648E59EAF77}"/>
               </a:ext>
             </a:extLst>
           </p:cNvPr>
@@ -3879,7 +4739,7 @@
         </p:nvSpPr>
         <p:spPr>
           <a:xfrm>
-            <a:off x="4328160" y="2565051"/>
+            <a:off x="2185922" y="2521587"/>
             <a:ext cx="3230880" cy="310896"/>
           </a:xfrm>
           <a:prstGeom prst="rect">
@@ -3900,13 +4760,17 @@
                 <a:solidFill>
                   <a:srgbClr val="FFFFFF"/>
                 </a:solidFill>
-                <a:latin typeface="Calibri" pitchFamily="34" charset="0"/>
-                <a:ea typeface="Calibri" pitchFamily="34" charset="-122"/>
-                <a:cs typeface="Calibri" pitchFamily="34" charset="-120"/>
+                <a:latin typeface="Calibri" panose="020F0502020204030204" pitchFamily="34" charset="0"/>
+                <a:ea typeface="Calibri" panose="020F0502020204030204" pitchFamily="34" charset="0"/>
+                <a:cs typeface="Calibri" panose="020F0502020204030204" pitchFamily="34" charset="0"/>
               </a:rPr>
               <a:t>Control</a:t>
             </a:r>
-            <a:endParaRPr lang="en-US" sz="1100" dirty="0"/>
+            <a:endParaRPr lang="en-US" sz="1100" dirty="0">
+              <a:latin typeface="Calibri" panose="020F0502020204030204" pitchFamily="34" charset="0"/>
+              <a:ea typeface="Calibri" panose="020F0502020204030204" pitchFamily="34" charset="0"/>
+              <a:cs typeface="Calibri" panose="020F0502020204030204" pitchFamily="34" charset="0"/>
+            </a:endParaRPr>
           </a:p>
         </p:txBody>
       </p:sp>
@@ -3915,7 +4779,7 @@
           <p:cNvPr id="14" name="Shape 13">
             <a:extLst>
               <a:ext uri="{FF2B5EF4-FFF2-40B4-BE49-F238E27FC236}">
-                <a16:creationId xmlns:a16="http://schemas.microsoft.com/office/drawing/2014/main" id="{11A12F61-F2D3-4C92-92F2-93CF044584DF}"/>
+                <a16:creationId xmlns="" xmlns:a16="http://schemas.microsoft.com/office/drawing/2014/main" id="{11A12F61-F2D3-4C92-92F2-93CF044584DF}"/>
               </a:ext>
             </a:extLst>
           </p:cNvPr>
@@ -3924,8 +4788,8 @@
         </p:nvSpPr>
         <p:spPr>
           <a:xfrm>
-            <a:off x="7696200" y="2565051"/>
-            <a:ext cx="3230880" cy="310896"/>
+            <a:off x="4969095" y="2521587"/>
+            <a:ext cx="1925089" cy="310896"/>
           </a:xfrm>
           <a:prstGeom prst="roundRect">
             <a:avLst>
@@ -3948,7 +4812,7 @@
           <p:cNvPr id="15" name="Text 14">
             <a:extLst>
               <a:ext uri="{FF2B5EF4-FFF2-40B4-BE49-F238E27FC236}">
-                <a16:creationId xmlns:a16="http://schemas.microsoft.com/office/drawing/2014/main" id="{99537C58-24EC-4FCF-8EDF-6445F71A6305}"/>
+                <a16:creationId xmlns="" xmlns:a16="http://schemas.microsoft.com/office/drawing/2014/main" id="{99537C58-24EC-4FCF-8EDF-6445F71A6305}"/>
               </a:ext>
             </a:extLst>
           </p:cNvPr>
@@ -3957,7 +4821,7 @@
         </p:nvSpPr>
         <p:spPr>
           <a:xfrm>
-            <a:off x="7696200" y="2565051"/>
+            <a:off x="4237046" y="2506270"/>
             <a:ext cx="3230880" cy="310896"/>
           </a:xfrm>
           <a:prstGeom prst="rect">
@@ -3978,13 +4842,17 @@
                 <a:solidFill>
                   <a:srgbClr val="FFFFFF"/>
                 </a:solidFill>
-                <a:latin typeface="Calibri" pitchFamily="34" charset="0"/>
-                <a:ea typeface="Calibri" pitchFamily="34" charset="-122"/>
-                <a:cs typeface="Calibri" pitchFamily="34" charset="-120"/>
+                <a:latin typeface="Calibri" panose="020F0502020204030204" pitchFamily="34" charset="0"/>
+                <a:ea typeface="Calibri" panose="020F0502020204030204" pitchFamily="34" charset="0"/>
+                <a:cs typeface="Calibri" panose="020F0502020204030204" pitchFamily="34" charset="0"/>
               </a:rPr>
               <a:t>Intervention</a:t>
             </a:r>
-            <a:endParaRPr lang="en-US" sz="1100" dirty="0"/>
+            <a:endParaRPr lang="en-US" sz="1100" dirty="0">
+              <a:latin typeface="Calibri" panose="020F0502020204030204" pitchFamily="34" charset="0"/>
+              <a:ea typeface="Calibri" panose="020F0502020204030204" pitchFamily="34" charset="0"/>
+              <a:cs typeface="Calibri" panose="020F0502020204030204" pitchFamily="34" charset="0"/>
+            </a:endParaRPr>
           </a:p>
         </p:txBody>
       </p:sp>
@@ -3993,7 +4861,7 @@
           <p:cNvPr id="17" name="Text 16">
             <a:extLst>
               <a:ext uri="{FF2B5EF4-FFF2-40B4-BE49-F238E27FC236}">
-                <a16:creationId xmlns:a16="http://schemas.microsoft.com/office/drawing/2014/main" id="{11C60039-1D73-45C5-BCDD-09191E6C51F7}"/>
+                <a16:creationId xmlns="" xmlns:a16="http://schemas.microsoft.com/office/drawing/2014/main" id="{11C60039-1D73-45C5-BCDD-09191E6C51F7}"/>
               </a:ext>
             </a:extLst>
           </p:cNvPr>
@@ -4002,7 +4870,7 @@
         </p:nvSpPr>
         <p:spPr>
           <a:xfrm>
-            <a:off x="6172200" y="3113691"/>
+            <a:off x="4234646" y="3033473"/>
             <a:ext cx="2103120" cy="274320"/>
           </a:xfrm>
           <a:prstGeom prst="rect">
@@ -4019,17 +4887,32 @@
               <a:buNone/>
             </a:pPr>
             <a:r>
-              <a:rPr lang="en-US" sz="1050" i="1" dirty="0">
+              <a:rPr lang="en-US" sz="1050" i="1" dirty="0" smtClean="0">
                 <a:solidFill>
                   <a:srgbClr val="5B6B78"/>
                 </a:solidFill>
-                <a:latin typeface="Calibri" pitchFamily="34" charset="0"/>
-                <a:ea typeface="Calibri" pitchFamily="34" charset="-122"/>
-                <a:cs typeface="Calibri" pitchFamily="34" charset="-120"/>
-              </a:rPr>
-              <a:t>ICON Interface</a:t>
-            </a:r>
-            <a:endParaRPr lang="en-US" sz="1050" dirty="0"/>
+                <a:latin typeface="Calibri" panose="020F0502020204030204" pitchFamily="34" charset="0"/>
+                <a:ea typeface="Calibri" panose="020F0502020204030204" pitchFamily="34" charset="0"/>
+                <a:cs typeface="Calibri" panose="020F0502020204030204" pitchFamily="34" charset="0"/>
+              </a:rPr>
+              <a:t>Management </a:t>
+            </a:r>
+            <a:r>
+              <a:rPr lang="en-US" sz="1050" i="1" dirty="0" smtClean="0">
+                <a:solidFill>
+                  <a:srgbClr val="5B6B78"/>
+                </a:solidFill>
+                <a:latin typeface="Calibri" panose="020F0502020204030204" pitchFamily="34" charset="0"/>
+                <a:ea typeface="Calibri" panose="020F0502020204030204" pitchFamily="34" charset="0"/>
+                <a:cs typeface="Calibri" panose="020F0502020204030204" pitchFamily="34" charset="0"/>
+              </a:rPr>
+              <a:t>Interface</a:t>
+            </a:r>
+            <a:endParaRPr lang="en-US" sz="1050" dirty="0">
+              <a:latin typeface="Calibri" panose="020F0502020204030204" pitchFamily="34" charset="0"/>
+              <a:ea typeface="Calibri" panose="020F0502020204030204" pitchFamily="34" charset="0"/>
+              <a:cs typeface="Calibri" panose="020F0502020204030204" pitchFamily="34" charset="0"/>
+            </a:endParaRPr>
           </a:p>
         </p:txBody>
       </p:sp>
@@ -4038,7 +4921,7 @@
           <p:cNvPr id="18" name="Shape 17">
             <a:extLst>
               <a:ext uri="{FF2B5EF4-FFF2-40B4-BE49-F238E27FC236}">
-                <a16:creationId xmlns:a16="http://schemas.microsoft.com/office/drawing/2014/main" id="{71AD3023-618D-4E2C-BC52-E288B8EEC79D}"/>
+                <a16:creationId xmlns="" xmlns:a16="http://schemas.microsoft.com/office/drawing/2014/main" id="{71AD3023-618D-4E2C-BC52-E288B8EEC79D}"/>
               </a:ext>
             </a:extLst>
           </p:cNvPr>
@@ -4047,8 +4930,8 @@
         </p:nvSpPr>
         <p:spPr>
           <a:xfrm>
-            <a:off x="548640" y="3506883"/>
-            <a:ext cx="11064240" cy="502920"/>
+            <a:off x="229741" y="3369948"/>
+            <a:ext cx="7323513" cy="502920"/>
           </a:xfrm>
           <a:prstGeom prst="roundRect">
             <a:avLst>
@@ -4071,7 +4954,7 @@
           <p:cNvPr id="19" name="Text 18">
             <a:extLst>
               <a:ext uri="{FF2B5EF4-FFF2-40B4-BE49-F238E27FC236}">
-                <a16:creationId xmlns:a16="http://schemas.microsoft.com/office/drawing/2014/main" id="{5D74EED8-82B6-4AA2-A162-53BF5C8F9FA8}"/>
+                <a16:creationId xmlns="" xmlns:a16="http://schemas.microsoft.com/office/drawing/2014/main" id="{5D74EED8-82B6-4AA2-A162-53BF5C8F9FA8}"/>
               </a:ext>
             </a:extLst>
           </p:cNvPr>
@@ -4080,8 +4963,8 @@
         </p:nvSpPr>
         <p:spPr>
           <a:xfrm>
-            <a:off x="548640" y="3506883"/>
-            <a:ext cx="11064240" cy="502920"/>
+            <a:off x="142824" y="3369948"/>
+            <a:ext cx="6940972" cy="502920"/>
           </a:xfrm>
           <a:prstGeom prst="rect">
             <a:avLst/>
@@ -4101,13 +4984,50 @@
                 <a:solidFill>
                   <a:srgbClr val="1A2340"/>
                 </a:solidFill>
-                <a:latin typeface="Calibri" pitchFamily="34" charset="0"/>
-                <a:ea typeface="Calibri" pitchFamily="34" charset="-122"/>
-                <a:cs typeface="Calibri" pitchFamily="34" charset="-120"/>
-              </a:rPr>
-              <a:t>ICON ENFORCEMENT COMPONENT  (ICON Server)</a:t>
-            </a:r>
-            <a:endParaRPr lang="en-US" sz="1300" dirty="0"/>
+                <a:latin typeface="Calibri" panose="020F0502020204030204" pitchFamily="34" charset="0"/>
+                <a:ea typeface="Calibri" panose="020F0502020204030204" pitchFamily="34" charset="0"/>
+                <a:cs typeface="Calibri" panose="020F0502020204030204" pitchFamily="34" charset="0"/>
+              </a:rPr>
+              <a:t>S</a:t>
+            </a:r>
+            <a:r>
+              <a:rPr lang="en-US" sz="1300" b="1" dirty="0" smtClean="0">
+                <a:solidFill>
+                  <a:srgbClr val="1A2340"/>
+                </a:solidFill>
+                <a:latin typeface="Calibri" panose="020F0502020204030204" pitchFamily="34" charset="0"/>
+                <a:ea typeface="Calibri" panose="020F0502020204030204" pitchFamily="34" charset="0"/>
+                <a:cs typeface="Calibri" panose="020F0502020204030204" pitchFamily="34" charset="0"/>
+              </a:rPr>
+              <a:t>upervision</a:t>
+            </a:r>
+            <a:r>
+              <a:rPr lang="en-US" sz="1300" b="1" dirty="0" smtClean="0">
+                <a:solidFill>
+                  <a:srgbClr val="1A2340"/>
+                </a:solidFill>
+                <a:latin typeface="Calibri" panose="020F0502020204030204" pitchFamily="34" charset="0"/>
+                <a:ea typeface="Calibri" panose="020F0502020204030204" pitchFamily="34" charset="0"/>
+                <a:cs typeface="Calibri" panose="020F0502020204030204" pitchFamily="34" charset="0"/>
+              </a:rPr>
+              <a:t> Enforcement </a:t>
+            </a:r>
+            <a:r>
+              <a:rPr lang="en-US" sz="1300" b="1" dirty="0" smtClean="0">
+                <a:solidFill>
+                  <a:srgbClr val="1A2340"/>
+                </a:solidFill>
+                <a:latin typeface="Calibri" panose="020F0502020204030204" pitchFamily="34" charset="0"/>
+                <a:ea typeface="Calibri" panose="020F0502020204030204" pitchFamily="34" charset="0"/>
+                <a:cs typeface="Calibri" panose="020F0502020204030204" pitchFamily="34" charset="0"/>
+              </a:rPr>
+              <a:t>Entity/server</a:t>
+            </a:r>
+            <a:endParaRPr lang="en-US" sz="1300" dirty="0">
+              <a:latin typeface="Calibri" panose="020F0502020204030204" pitchFamily="34" charset="0"/>
+              <a:ea typeface="Calibri" panose="020F0502020204030204" pitchFamily="34" charset="0"/>
+              <a:cs typeface="Calibri" panose="020F0502020204030204" pitchFamily="34" charset="0"/>
+            </a:endParaRPr>
           </a:p>
         </p:txBody>
       </p:sp>
@@ -4116,7 +5036,7 @@
           <p:cNvPr id="21" name="Shape 20">
             <a:extLst>
               <a:ext uri="{FF2B5EF4-FFF2-40B4-BE49-F238E27FC236}">
-                <a16:creationId xmlns:a16="http://schemas.microsoft.com/office/drawing/2014/main" id="{BE393F0A-F3C3-4A84-8146-65A2F5B9C1A0}"/>
+                <a16:creationId xmlns="" xmlns:a16="http://schemas.microsoft.com/office/drawing/2014/main" id="{BE393F0A-F3C3-4A84-8146-65A2F5B9C1A0}"/>
               </a:ext>
             </a:extLst>
           </p:cNvPr>
@@ -4125,8 +5045,8 @@
         </p:nvSpPr>
         <p:spPr>
           <a:xfrm>
-            <a:off x="548640" y="4375563"/>
-            <a:ext cx="11064240" cy="1417320"/>
+            <a:off x="99754" y="4295345"/>
+            <a:ext cx="7726680" cy="1444752"/>
           </a:xfrm>
           <a:prstGeom prst="roundRect">
             <a:avLst>
@@ -4149,7 +5069,7 @@
           <p:cNvPr id="22" name="Text 21">
             <a:extLst>
               <a:ext uri="{FF2B5EF4-FFF2-40B4-BE49-F238E27FC236}">
-                <a16:creationId xmlns:a16="http://schemas.microsoft.com/office/drawing/2014/main" id="{9038E49F-4FAC-49B4-9ADA-A881F74F31DF}"/>
+                <a16:creationId xmlns="" xmlns:a16="http://schemas.microsoft.com/office/drawing/2014/main" id="{9038E49F-4FAC-49B4-9ADA-A881F74F31DF}"/>
               </a:ext>
             </a:extLst>
           </p:cNvPr>
@@ -4158,7 +5078,7 @@
         </p:nvSpPr>
         <p:spPr>
           <a:xfrm>
-            <a:off x="731520" y="4448715"/>
+            <a:off x="282633" y="4368497"/>
             <a:ext cx="5486400" cy="256032"/>
           </a:xfrm>
           <a:prstGeom prst="rect">
@@ -4179,13 +5099,17 @@
                 <a:solidFill>
                   <a:srgbClr val="065A82"/>
                 </a:solidFill>
-                <a:latin typeface="Calibri" pitchFamily="34" charset="0"/>
-                <a:ea typeface="Calibri" pitchFamily="34" charset="-122"/>
-                <a:cs typeface="Calibri" pitchFamily="34" charset="-120"/>
+                <a:latin typeface="Calibri" panose="020F0502020204030204" pitchFamily="34" charset="0"/>
+                <a:ea typeface="Calibri" panose="020F0502020204030204" pitchFamily="34" charset="0"/>
+                <a:cs typeface="Calibri" panose="020F0502020204030204" pitchFamily="34" charset="0"/>
               </a:rPr>
               <a:t>AGENT EXECUTION PLANE</a:t>
             </a:r>
-            <a:endParaRPr lang="en-US" sz="1050" dirty="0"/>
+            <a:endParaRPr lang="en-US" sz="1050" dirty="0">
+              <a:latin typeface="Calibri" panose="020F0502020204030204" pitchFamily="34" charset="0"/>
+              <a:ea typeface="Calibri" panose="020F0502020204030204" pitchFamily="34" charset="0"/>
+              <a:cs typeface="Calibri" panose="020F0502020204030204" pitchFamily="34" charset="0"/>
+            </a:endParaRPr>
           </a:p>
         </p:txBody>
       </p:sp>
@@ -4194,7 +5118,7 @@
           <p:cNvPr id="23" name="Shape 22">
             <a:extLst>
               <a:ext uri="{FF2B5EF4-FFF2-40B4-BE49-F238E27FC236}">
-                <a16:creationId xmlns:a16="http://schemas.microsoft.com/office/drawing/2014/main" id="{09DA8E31-BD8F-4396-9FC4-6CC45869B204}"/>
+                <a16:creationId xmlns="" xmlns:a16="http://schemas.microsoft.com/office/drawing/2014/main" id="{09DA8E31-BD8F-4396-9FC4-6CC45869B204}"/>
               </a:ext>
             </a:extLst>
           </p:cNvPr>
@@ -4203,8 +5127,8 @@
         </p:nvSpPr>
         <p:spPr>
           <a:xfrm>
-            <a:off x="822960" y="4759611"/>
-            <a:ext cx="2526030" cy="438912"/>
+            <a:off x="374073" y="4679393"/>
+            <a:ext cx="7232073" cy="438912"/>
           </a:xfrm>
           <a:prstGeom prst="roundRect">
             <a:avLst>
@@ -4227,7 +5151,7 @@
           <p:cNvPr id="24" name="Text 23">
             <a:extLst>
               <a:ext uri="{FF2B5EF4-FFF2-40B4-BE49-F238E27FC236}">
-                <a16:creationId xmlns:a16="http://schemas.microsoft.com/office/drawing/2014/main" id="{E40C1439-EB9A-43B2-AA3A-8EE1B5652F42}"/>
+                <a16:creationId xmlns="" xmlns:a16="http://schemas.microsoft.com/office/drawing/2014/main" id="{E40C1439-EB9A-43B2-AA3A-8EE1B5652F42}"/>
               </a:ext>
             </a:extLst>
           </p:cNvPr>
@@ -4236,8 +5160,8 @@
         </p:nvSpPr>
         <p:spPr>
           <a:xfrm>
-            <a:off x="822960" y="4759611"/>
-            <a:ext cx="2526030" cy="438912"/>
+            <a:off x="374073" y="4679393"/>
+            <a:ext cx="6350924" cy="438912"/>
           </a:xfrm>
           <a:prstGeom prst="rect">
             <a:avLst/>
@@ -4253,26 +5177,30 @@
               <a:buNone/>
             </a:pPr>
             <a:r>
-              <a:rPr lang="en-US" sz="1250" b="1" dirty="0">
+              <a:rPr lang="en-US" sz="1250" b="1" dirty="0" smtClean="0">
                 <a:solidFill>
                   <a:srgbClr val="FFFFFF"/>
                 </a:solidFill>
-                <a:latin typeface="Calibri" pitchFamily="34" charset="0"/>
-                <a:ea typeface="Calibri" pitchFamily="34" charset="-122"/>
-                <a:cs typeface="Calibri" pitchFamily="34" charset="-120"/>
-              </a:rPr>
-              <a:t>Agent 1</a:t>
-            </a:r>
-            <a:endParaRPr lang="en-US" sz="1250" dirty="0"/>
-          </a:p>
-        </p:txBody>
-      </p:sp>
-      <p:sp>
-        <p:nvSpPr>
-          <p:cNvPr id="25" name="Shape 24">
-            <a:extLst>
-              <a:ext uri="{FF2B5EF4-FFF2-40B4-BE49-F238E27FC236}">
-                <a16:creationId xmlns:a16="http://schemas.microsoft.com/office/drawing/2014/main" id="{D59070DD-5225-491E-8C80-6A3E51E921B4}"/>
+                <a:latin typeface="Calibri" panose="020F0502020204030204" pitchFamily="34" charset="0"/>
+                <a:ea typeface="Calibri" panose="020F0502020204030204" pitchFamily="34" charset="0"/>
+                <a:cs typeface="Calibri" panose="020F0502020204030204" pitchFamily="34" charset="0"/>
+              </a:rPr>
+              <a:t>AI Agent(s)</a:t>
+            </a:r>
+            <a:endParaRPr lang="en-US" sz="1250" dirty="0">
+              <a:latin typeface="Calibri" panose="020F0502020204030204" pitchFamily="34" charset="0"/>
+              <a:ea typeface="Calibri" panose="020F0502020204030204" pitchFamily="34" charset="0"/>
+              <a:cs typeface="Calibri" panose="020F0502020204030204" pitchFamily="34" charset="0"/>
+            </a:endParaRPr>
+          </a:p>
+        </p:txBody>
+      </p:sp>
+      <p:sp>
+        <p:nvSpPr>
+          <p:cNvPr id="30" name="Shape 29">
+            <a:extLst>
+              <a:ext uri="{FF2B5EF4-FFF2-40B4-BE49-F238E27FC236}">
+                <a16:creationId xmlns="" xmlns:a16="http://schemas.microsoft.com/office/drawing/2014/main" id="{A6497F40-84A8-49D8-8AC1-DFA838DF2B8C}"/>
               </a:ext>
             </a:extLst>
           </p:cNvPr>
@@ -4281,209 +5209,8 @@
         </p:nvSpPr>
         <p:spPr>
           <a:xfrm>
-            <a:off x="3486150" y="4759611"/>
-            <a:ext cx="2526030" cy="438912"/>
-          </a:xfrm>
-          <a:prstGeom prst="roundRect">
-            <a:avLst>
-              <a:gd name="adj" fmla="val 10417"/>
-            </a:avLst>
-          </a:prstGeom>
-          <a:solidFill>
-            <a:srgbClr val="065A82"/>
-          </a:solidFill>
-          <a:ln w="12700">
-            <a:solidFill>
-              <a:srgbClr val="065A82"/>
-            </a:solidFill>
-            <a:prstDash val="solid"/>
-          </a:ln>
-        </p:spPr>
-      </p:sp>
-      <p:sp>
-        <p:nvSpPr>
-          <p:cNvPr id="26" name="Text 25">
-            <a:extLst>
-              <a:ext uri="{FF2B5EF4-FFF2-40B4-BE49-F238E27FC236}">
-                <a16:creationId xmlns:a16="http://schemas.microsoft.com/office/drawing/2014/main" id="{9836E200-FC5D-41DE-90E5-7F5B9FC90E7A}"/>
-              </a:ext>
-            </a:extLst>
-          </p:cNvPr>
-          <p:cNvSpPr/>
-          <p:nvPr/>
-        </p:nvSpPr>
-        <p:spPr>
-          <a:xfrm>
-            <a:off x="3486150" y="4759611"/>
-            <a:ext cx="2526030" cy="438912"/>
-          </a:xfrm>
-          <a:prstGeom prst="rect">
-            <a:avLst/>
-          </a:prstGeom>
-          <a:noFill/>
-          <a:ln/>
-        </p:spPr>
-        <p:txBody>
-          <a:bodyPr wrap="square" rtlCol="0" anchor="ctr"/>
-          <a:lstStyle/>
-          <a:p>
-            <a:pPr marL="0" indent="0" algn="ctr">
-              <a:buNone/>
-            </a:pPr>
-            <a:r>
-              <a:rPr lang="en-US" sz="1250" b="1" dirty="0">
-                <a:solidFill>
-                  <a:srgbClr val="FFFFFF"/>
-                </a:solidFill>
-                <a:latin typeface="Calibri" pitchFamily="34" charset="0"/>
-                <a:ea typeface="Calibri" pitchFamily="34" charset="-122"/>
-                <a:cs typeface="Calibri" pitchFamily="34" charset="-120"/>
-              </a:rPr>
-              <a:t>Agent 2</a:t>
-            </a:r>
-            <a:endParaRPr lang="en-US" sz="1250" dirty="0"/>
-          </a:p>
-        </p:txBody>
-      </p:sp>
-      <p:sp>
-        <p:nvSpPr>
-          <p:cNvPr id="27" name="Text 26">
-            <a:extLst>
-              <a:ext uri="{FF2B5EF4-FFF2-40B4-BE49-F238E27FC236}">
-                <a16:creationId xmlns:a16="http://schemas.microsoft.com/office/drawing/2014/main" id="{CF120B50-4F4A-4494-9B6C-9D08C33419A1}"/>
-              </a:ext>
-            </a:extLst>
-          </p:cNvPr>
-          <p:cNvSpPr/>
-          <p:nvPr/>
-        </p:nvSpPr>
-        <p:spPr>
-          <a:xfrm>
-            <a:off x="6149340" y="4759611"/>
-            <a:ext cx="2526030" cy="438912"/>
-          </a:xfrm>
-          <a:prstGeom prst="rect">
-            <a:avLst/>
-          </a:prstGeom>
-          <a:noFill/>
-          <a:ln/>
-        </p:spPr>
-        <p:txBody>
-          <a:bodyPr wrap="square" rtlCol="0" anchor="ctr"/>
-          <a:lstStyle/>
-          <a:p>
-            <a:pPr marL="0" indent="0" algn="ctr">
-              <a:buNone/>
-            </a:pPr>
-            <a:r>
-              <a:rPr lang="en-US" sz="2000" b="1" dirty="0">
-                <a:solidFill>
-                  <a:srgbClr val="5B6B78"/>
-                </a:solidFill>
-                <a:latin typeface="Calibri" pitchFamily="34" charset="0"/>
-                <a:ea typeface="Calibri" pitchFamily="34" charset="-122"/>
-                <a:cs typeface="Calibri" pitchFamily="34" charset="-120"/>
-              </a:rPr>
-              <a:t>⋯</a:t>
-            </a:r>
-            <a:endParaRPr lang="en-US" sz="2000" dirty="0"/>
-          </a:p>
-        </p:txBody>
-      </p:sp>
-      <p:sp>
-        <p:nvSpPr>
-          <p:cNvPr id="28" name="Shape 27">
-            <a:extLst>
-              <a:ext uri="{FF2B5EF4-FFF2-40B4-BE49-F238E27FC236}">
-                <a16:creationId xmlns:a16="http://schemas.microsoft.com/office/drawing/2014/main" id="{C28DDFF7-C3FB-49CE-B089-21321C0413AB}"/>
-              </a:ext>
-            </a:extLst>
-          </p:cNvPr>
-          <p:cNvSpPr/>
-          <p:nvPr/>
-        </p:nvSpPr>
-        <p:spPr>
-          <a:xfrm>
-            <a:off x="8812530" y="4759611"/>
-            <a:ext cx="2526030" cy="438912"/>
-          </a:xfrm>
-          <a:prstGeom prst="roundRect">
-            <a:avLst>
-              <a:gd name="adj" fmla="val 10417"/>
-            </a:avLst>
-          </a:prstGeom>
-          <a:solidFill>
-            <a:srgbClr val="065A82"/>
-          </a:solidFill>
-          <a:ln w="12700">
-            <a:solidFill>
-              <a:srgbClr val="065A82"/>
-            </a:solidFill>
-            <a:prstDash val="solid"/>
-          </a:ln>
-        </p:spPr>
-      </p:sp>
-      <p:sp>
-        <p:nvSpPr>
-          <p:cNvPr id="29" name="Text 28">
-            <a:extLst>
-              <a:ext uri="{FF2B5EF4-FFF2-40B4-BE49-F238E27FC236}">
-                <a16:creationId xmlns:a16="http://schemas.microsoft.com/office/drawing/2014/main" id="{A88621C6-F808-4821-A0D9-BD72E86D0491}"/>
-              </a:ext>
-            </a:extLst>
-          </p:cNvPr>
-          <p:cNvSpPr/>
-          <p:nvPr/>
-        </p:nvSpPr>
-        <p:spPr>
-          <a:xfrm>
-            <a:off x="8812530" y="4759611"/>
-            <a:ext cx="2526030" cy="438912"/>
-          </a:xfrm>
-          <a:prstGeom prst="rect">
-            <a:avLst/>
-          </a:prstGeom>
-          <a:noFill/>
-          <a:ln/>
-        </p:spPr>
-        <p:txBody>
-          <a:bodyPr wrap="square" rtlCol="0" anchor="ctr"/>
-          <a:lstStyle/>
-          <a:p>
-            <a:pPr marL="0" indent="0" algn="ctr">
-              <a:buNone/>
-            </a:pPr>
-            <a:r>
-              <a:rPr lang="en-US" sz="1250" b="1" dirty="0">
-                <a:solidFill>
-                  <a:srgbClr val="FFFFFF"/>
-                </a:solidFill>
-                <a:latin typeface="Calibri" pitchFamily="34" charset="0"/>
-                <a:ea typeface="Calibri" pitchFamily="34" charset="-122"/>
-                <a:cs typeface="Calibri" pitchFamily="34" charset="-120"/>
-              </a:rPr>
-              <a:t>Agent n</a:t>
-            </a:r>
-            <a:endParaRPr lang="en-US" sz="1250" dirty="0"/>
-          </a:p>
-        </p:txBody>
-      </p:sp>
-      <p:sp>
-        <p:nvSpPr>
-          <p:cNvPr id="30" name="Shape 29">
-            <a:extLst>
-              <a:ext uri="{FF2B5EF4-FFF2-40B4-BE49-F238E27FC236}">
-                <a16:creationId xmlns:a16="http://schemas.microsoft.com/office/drawing/2014/main" id="{A6497F40-84A8-49D8-8AC1-DFA838DF2B8C}"/>
-              </a:ext>
-            </a:extLst>
-          </p:cNvPr>
-          <p:cNvSpPr/>
-          <p:nvPr/>
-        </p:nvSpPr>
-        <p:spPr>
-          <a:xfrm>
-            <a:off x="822960" y="5326539"/>
-            <a:ext cx="10515600" cy="384048"/>
+            <a:off x="374073" y="5246321"/>
+            <a:ext cx="7232073" cy="384048"/>
           </a:xfrm>
           <a:prstGeom prst="roundRect">
             <a:avLst>
@@ -4506,7 +5233,7 @@
           <p:cNvPr id="31" name="Text 30">
             <a:extLst>
               <a:ext uri="{FF2B5EF4-FFF2-40B4-BE49-F238E27FC236}">
-                <a16:creationId xmlns:a16="http://schemas.microsoft.com/office/drawing/2014/main" id="{D8FA34BD-9341-44A4-A89C-C93F37755A15}"/>
+                <a16:creationId xmlns="" xmlns:a16="http://schemas.microsoft.com/office/drawing/2014/main" id="{D8FA34BD-9341-44A4-A89C-C93F37755A15}"/>
               </a:ext>
             </a:extLst>
           </p:cNvPr>
@@ -4515,8 +5242,8 @@
         </p:nvSpPr>
         <p:spPr>
           <a:xfrm>
-            <a:off x="822960" y="5326539"/>
-            <a:ext cx="10515600" cy="384048"/>
+            <a:off x="374073" y="5246321"/>
+            <a:ext cx="6458989" cy="384048"/>
           </a:xfrm>
           <a:prstGeom prst="rect">
             <a:avLst/>
@@ -4536,13 +5263,17 @@
                 <a:solidFill>
                   <a:srgbClr val="065A82"/>
                 </a:solidFill>
-                <a:latin typeface="Calibri" pitchFamily="34" charset="0"/>
-                <a:ea typeface="Calibri" pitchFamily="34" charset="-122"/>
-                <a:cs typeface="Calibri" pitchFamily="34" charset="-120"/>
+                <a:latin typeface="Calibri" panose="020F0502020204030204" pitchFamily="34" charset="0"/>
+                <a:ea typeface="Calibri" panose="020F0502020204030204" pitchFamily="34" charset="0"/>
+                <a:cs typeface="Calibri" panose="020F0502020204030204" pitchFamily="34" charset="0"/>
               </a:rPr>
               <a:t>Function Modules &amp; Tools</a:t>
             </a:r>
-            <a:endParaRPr lang="en-US" sz="1150" dirty="0"/>
+            <a:endParaRPr lang="en-US" sz="1150" dirty="0">
+              <a:latin typeface="Calibri" panose="020F0502020204030204" pitchFamily="34" charset="0"/>
+              <a:ea typeface="Calibri" panose="020F0502020204030204" pitchFamily="34" charset="0"/>
+              <a:cs typeface="Calibri" panose="020F0502020204030204" pitchFamily="34" charset="0"/>
+            </a:endParaRPr>
           </a:p>
         </p:txBody>
       </p:sp>
@@ -4551,7 +5282,7 @@
           <p:cNvPr id="33" name="Text 32">
             <a:extLst>
               <a:ext uri="{FF2B5EF4-FFF2-40B4-BE49-F238E27FC236}">
-                <a16:creationId xmlns:a16="http://schemas.microsoft.com/office/drawing/2014/main" id="{DB643E20-E179-4E84-B69F-68EC3ED12F7C}"/>
+                <a16:creationId xmlns="" xmlns:a16="http://schemas.microsoft.com/office/drawing/2014/main" id="{DB643E20-E179-4E84-B69F-68EC3ED12F7C}"/>
               </a:ext>
             </a:extLst>
           </p:cNvPr>
@@ -4560,7 +5291,7 @@
         </p:nvSpPr>
         <p:spPr>
           <a:xfrm>
-            <a:off x="6172200" y="5820315"/>
+            <a:off x="4234646" y="5758162"/>
             <a:ext cx="2103120" cy="274320"/>
           </a:xfrm>
           <a:prstGeom prst="rect">
@@ -4581,13 +5312,17 @@
                 <a:solidFill>
                   <a:srgbClr val="5B6B78"/>
                 </a:solidFill>
-                <a:latin typeface="Calibri" pitchFamily="34" charset="0"/>
-                <a:ea typeface="Calibri" pitchFamily="34" charset="-122"/>
-                <a:cs typeface="Calibri" pitchFamily="34" charset="-120"/>
+                <a:latin typeface="Calibri" panose="020F0502020204030204" pitchFamily="34" charset="0"/>
+                <a:ea typeface="Calibri" panose="020F0502020204030204" pitchFamily="34" charset="0"/>
+                <a:cs typeface="Calibri" panose="020F0502020204030204" pitchFamily="34" charset="0"/>
               </a:rPr>
               <a:t>Interaction</a:t>
             </a:r>
-            <a:endParaRPr lang="en-US" sz="1050" dirty="0"/>
+            <a:endParaRPr lang="en-US" sz="1050" dirty="0">
+              <a:latin typeface="Calibri" panose="020F0502020204030204" pitchFamily="34" charset="0"/>
+              <a:ea typeface="Calibri" panose="020F0502020204030204" pitchFamily="34" charset="0"/>
+              <a:cs typeface="Calibri" panose="020F0502020204030204" pitchFamily="34" charset="0"/>
+            </a:endParaRPr>
           </a:p>
         </p:txBody>
       </p:sp>
@@ -4596,7 +5331,7 @@
           <p:cNvPr id="34" name="Shape 33">
             <a:extLst>
               <a:ext uri="{FF2B5EF4-FFF2-40B4-BE49-F238E27FC236}">
-                <a16:creationId xmlns:a16="http://schemas.microsoft.com/office/drawing/2014/main" id="{1CE22825-30C6-4FD9-8CAC-D03ECB628822}"/>
+                <a16:creationId xmlns="" xmlns:a16="http://schemas.microsoft.com/office/drawing/2014/main" id="{1CE22825-30C6-4FD9-8CAC-D03ECB628822}"/>
               </a:ext>
             </a:extLst>
           </p:cNvPr>
@@ -4605,8 +5340,8 @@
         </p:nvSpPr>
         <p:spPr>
           <a:xfrm>
-            <a:off x="548640" y="6122067"/>
-            <a:ext cx="11064240" cy="411480"/>
+            <a:off x="99754" y="6041849"/>
+            <a:ext cx="7726680" cy="411480"/>
           </a:xfrm>
           <a:prstGeom prst="roundRect">
             <a:avLst>
@@ -4629,7 +5364,7 @@
           <p:cNvPr id="35" name="Text 34">
             <a:extLst>
               <a:ext uri="{FF2B5EF4-FFF2-40B4-BE49-F238E27FC236}">
-                <a16:creationId xmlns:a16="http://schemas.microsoft.com/office/drawing/2014/main" id="{70C80CF3-6AC4-488C-A61D-DB993BF51A3F}"/>
+                <a16:creationId xmlns="" xmlns:a16="http://schemas.microsoft.com/office/drawing/2014/main" id="{70C80CF3-6AC4-488C-A61D-DB993BF51A3F}"/>
               </a:ext>
             </a:extLst>
           </p:cNvPr>
@@ -4638,8 +5373,8 @@
         </p:nvSpPr>
         <p:spPr>
           <a:xfrm>
-            <a:off x="548640" y="6122067"/>
-            <a:ext cx="11064240" cy="411480"/>
+            <a:off x="-238115" y="6050546"/>
+            <a:ext cx="8387542" cy="411480"/>
           </a:xfrm>
           <a:prstGeom prst="rect">
             <a:avLst/>
@@ -4659,58 +5394,17 @@
                 <a:solidFill>
                   <a:srgbClr val="FFFFFF"/>
                 </a:solidFill>
-                <a:latin typeface="Calibri" pitchFamily="34" charset="0"/>
-                <a:ea typeface="Calibri" pitchFamily="34" charset="-122"/>
-                <a:cs typeface="Calibri" pitchFamily="34" charset="-120"/>
+                <a:latin typeface="Calibri" panose="020F0502020204030204" pitchFamily="34" charset="0"/>
+                <a:ea typeface="Calibri" panose="020F0502020204030204" pitchFamily="34" charset="0"/>
+                <a:cs typeface="Calibri" panose="020F0502020204030204" pitchFamily="34" charset="0"/>
               </a:rPr>
               <a:t>NETWORK INFRASTRUCTURE</a:t>
             </a:r>
-            <a:endParaRPr lang="en-US" sz="1200" dirty="0"/>
-          </a:p>
-        </p:txBody>
-      </p:sp>
-      <p:sp>
-        <p:nvSpPr>
-          <p:cNvPr id="36" name="Text 35">
-            <a:extLst>
-              <a:ext uri="{FF2B5EF4-FFF2-40B4-BE49-F238E27FC236}">
-                <a16:creationId xmlns:a16="http://schemas.microsoft.com/office/drawing/2014/main" id="{B671720F-120F-45D2-9857-9277C20BA6D3}"/>
-              </a:ext>
-            </a:extLst>
-          </p:cNvPr>
-          <p:cNvSpPr/>
-          <p:nvPr/>
-        </p:nvSpPr>
-        <p:spPr>
-          <a:xfrm>
-            <a:off x="457200" y="6176931"/>
-            <a:ext cx="6400800" cy="274320"/>
-          </a:xfrm>
-          <a:prstGeom prst="rect">
-            <a:avLst/>
-          </a:prstGeom>
-          <a:noFill/>
-          <a:ln/>
-        </p:spPr>
-        <p:txBody>
-          <a:bodyPr wrap="square" rtlCol="0" anchor="ctr"/>
-          <a:lstStyle/>
-          <a:p>
-            <a:pPr marL="0" indent="0">
-              <a:buNone/>
-            </a:pPr>
-            <a:r>
-              <a:rPr lang="en-US" sz="1000" dirty="0">
-                <a:solidFill>
-                  <a:srgbClr val="5B6B78"/>
-                </a:solidFill>
-                <a:latin typeface="Calibri" pitchFamily="34" charset="0"/>
-                <a:ea typeface="Calibri" pitchFamily="34" charset="-122"/>
-                <a:cs typeface="Calibri" pitchFamily="34" charset="-120"/>
-              </a:rPr>
-              <a:t>Architecture Overview</a:t>
-            </a:r>
-            <a:endParaRPr lang="en-US" sz="1000" dirty="0"/>
+            <a:endParaRPr lang="en-US" sz="1200" dirty="0">
+              <a:latin typeface="Calibri" panose="020F0502020204030204" pitchFamily="34" charset="0"/>
+              <a:ea typeface="Calibri" panose="020F0502020204030204" pitchFamily="34" charset="0"/>
+              <a:cs typeface="Calibri" panose="020F0502020204030204" pitchFamily="34" charset="0"/>
+            </a:endParaRPr>
           </a:p>
         </p:txBody>
       </p:sp>
@@ -4719,7 +5413,7 @@
           <p:cNvPr id="39" name="直接箭头连接符 38">
             <a:extLst>
               <a:ext uri="{FF2B5EF4-FFF2-40B4-BE49-F238E27FC236}">
-                <a16:creationId xmlns:a16="http://schemas.microsoft.com/office/drawing/2014/main" id="{EBD885E5-79FC-4839-855C-3F187FD4B3EB}"/>
+                <a16:creationId xmlns="" xmlns:a16="http://schemas.microsoft.com/office/drawing/2014/main" id="{EBD885E5-79FC-4839-855C-3F187FD4B3EB}"/>
               </a:ext>
             </a:extLst>
           </p:cNvPr>
@@ -4727,49 +5421,9 @@
           <p:nvPr/>
         </p:nvCxnSpPr>
         <p:spPr>
-          <a:xfrm>
-            <a:off x="5937040" y="3071549"/>
-            <a:ext cx="0" cy="435334"/>
-          </a:xfrm>
-          <a:prstGeom prst="straightConnector1">
-            <a:avLst/>
-          </a:prstGeom>
-          <a:ln w="38100">
-            <a:headEnd type="triangle"/>
-            <a:tailEnd type="triangle"/>
-          </a:ln>
-        </p:spPr>
-        <p:style>
-          <a:lnRef idx="1">
-            <a:schemeClr val="accent1"/>
-          </a:lnRef>
-          <a:fillRef idx="0">
-            <a:schemeClr val="accent1"/>
-          </a:fillRef>
-          <a:effectRef idx="0">
-            <a:schemeClr val="accent1"/>
-          </a:effectRef>
-          <a:fontRef idx="minor">
-            <a:schemeClr val="tx1"/>
-          </a:fontRef>
-        </p:style>
-      </p:cxnSp>
-      <p:cxnSp>
-        <p:nvCxnSpPr>
-          <p:cNvPr id="40" name="直接箭头连接符 39">
-            <a:extLst>
-              <a:ext uri="{FF2B5EF4-FFF2-40B4-BE49-F238E27FC236}">
-                <a16:creationId xmlns:a16="http://schemas.microsoft.com/office/drawing/2014/main" id="{8941FB49-34A1-410E-802B-B9979F3A27BB}"/>
-              </a:ext>
-            </a:extLst>
-          </p:cNvPr>
-          <p:cNvCxnSpPr/>
-          <p:nvPr/>
-        </p:nvCxnSpPr>
-        <p:spPr>
-          <a:xfrm>
-            <a:off x="5943600" y="3940229"/>
-            <a:ext cx="0" cy="435334"/>
+          <a:xfrm flipH="1">
+            <a:off x="3952376" y="2900972"/>
+            <a:ext cx="6560" cy="521927"/>
           </a:xfrm>
           <a:prstGeom prst="straightConnector1">
             <a:avLst/>
@@ -4799,7 +5453,7 @@
           <p:cNvPr id="41" name="直接箭头连接符 40">
             <a:extLst>
               <a:ext uri="{FF2B5EF4-FFF2-40B4-BE49-F238E27FC236}">
-                <a16:creationId xmlns:a16="http://schemas.microsoft.com/office/drawing/2014/main" id="{C32315DC-1FC1-4A2E-AF69-4F5D5251C572}"/>
+                <a16:creationId xmlns="" xmlns:a16="http://schemas.microsoft.com/office/drawing/2014/main" id="{C32315DC-1FC1-4A2E-AF69-4F5D5251C572}"/>
               </a:ext>
             </a:extLst>
           </p:cNvPr>
@@ -4810,7 +5464,7 @@
         </p:nvCxnSpPr>
         <p:spPr>
           <a:xfrm>
-            <a:off x="5986338" y="5792883"/>
+            <a:off x="4048784" y="5730730"/>
             <a:ext cx="0" cy="329184"/>
           </a:xfrm>
           <a:prstGeom prst="straightConnector1">
@@ -4836,6 +5490,281 @@
           </a:fontRef>
         </p:style>
       </p:cxnSp>
+      <p:sp>
+        <p:nvSpPr>
+          <p:cNvPr id="32" name="Shape 5">
+            <a:extLst>
+              <a:ext uri="{FF2B5EF4-FFF2-40B4-BE49-F238E27FC236}">
+                <a16:creationId xmlns:a16="http://schemas.microsoft.com/office/drawing/2014/main" xmlns="" id="{311F6CCC-59F5-4E1D-90B0-63E7606D4AFD}"/>
+              </a:ext>
+            </a:extLst>
+          </p:cNvPr>
+          <p:cNvSpPr/>
+          <p:nvPr/>
+        </p:nvSpPr>
+        <p:spPr>
+          <a:xfrm>
+            <a:off x="374073" y="1698449"/>
+            <a:ext cx="7232073" cy="402336"/>
+          </a:xfrm>
+          <a:prstGeom prst="roundRect">
+            <a:avLst>
+              <a:gd name="adj" fmla="val 13636"/>
+            </a:avLst>
+          </a:prstGeom>
+          <a:solidFill>
+            <a:srgbClr val="1A2340"/>
+          </a:solidFill>
+          <a:ln w="12700">
+            <a:solidFill>
+              <a:srgbClr val="1A2340"/>
+            </a:solidFill>
+            <a:prstDash val="solid"/>
+          </a:ln>
+        </p:spPr>
+      </p:sp>
+      <p:sp>
+        <p:nvSpPr>
+          <p:cNvPr id="37" name="Text 6">
+            <a:extLst>
+              <a:ext uri="{FF2B5EF4-FFF2-40B4-BE49-F238E27FC236}">
+                <a16:creationId xmlns:a16="http://schemas.microsoft.com/office/drawing/2014/main" xmlns="" id="{3FFC70D4-DBA4-48C3-9A8E-E4EDAE9D7836}"/>
+              </a:ext>
+            </a:extLst>
+          </p:cNvPr>
+          <p:cNvSpPr/>
+          <p:nvPr/>
+        </p:nvSpPr>
+        <p:spPr>
+          <a:xfrm>
+            <a:off x="374073" y="1698449"/>
+            <a:ext cx="7232073" cy="402336"/>
+          </a:xfrm>
+          <a:prstGeom prst="rect">
+            <a:avLst/>
+          </a:prstGeom>
+          <a:noFill/>
+          <a:ln/>
+        </p:spPr>
+        <p:txBody>
+          <a:bodyPr wrap="square" rtlCol="0" anchor="ctr"/>
+          <a:lstStyle/>
+          <a:p>
+            <a:pPr marL="0" indent="0" algn="ctr">
+              <a:buNone/>
+            </a:pPr>
+            <a:r>
+              <a:rPr lang="en-US" sz="1300" b="1" dirty="0">
+                <a:solidFill>
+                  <a:srgbClr val="FFFFFF"/>
+                </a:solidFill>
+                <a:latin typeface="Calibri" pitchFamily="34" charset="0"/>
+                <a:ea typeface="Calibri" pitchFamily="34" charset="-122"/>
+                <a:cs typeface="Calibri" pitchFamily="34" charset="-120"/>
+              </a:rPr>
+              <a:t>Human Oversight</a:t>
+            </a:r>
+            <a:endParaRPr lang="en-US" sz="1300" dirty="0"/>
+          </a:p>
+        </p:txBody>
+      </p:sp>
+      <p:sp>
+        <p:nvSpPr>
+          <p:cNvPr id="7" name="文本框 6"/>
+          <p:cNvSpPr txBox="1"/>
+          <p:nvPr/>
+        </p:nvSpPr>
+        <p:spPr>
+          <a:xfrm>
+            <a:off x="7879263" y="1585113"/>
+            <a:ext cx="4271832" cy="4708981"/>
+          </a:xfrm>
+          <a:prstGeom prst="rect">
+            <a:avLst/>
+          </a:prstGeom>
+          <a:noFill/>
+        </p:spPr>
+        <p:txBody>
+          <a:bodyPr wrap="square" rtlCol="0">
+            <a:spAutoFit/>
+          </a:bodyPr>
+          <a:lstStyle/>
+          <a:p>
+            <a:r>
+              <a:rPr lang="en-US" sz="2000" dirty="0" smtClean="0">
+                <a:latin typeface="Calibri" panose="020F0502020204030204" pitchFamily="34" charset="0"/>
+                <a:ea typeface="Calibri" panose="020F0502020204030204" pitchFamily="34" charset="0"/>
+                <a:cs typeface="Calibri" panose="020F0502020204030204" pitchFamily="34" charset="0"/>
+              </a:rPr>
+              <a:t>Human Oversight</a:t>
+            </a:r>
+          </a:p>
+          <a:p>
+            <a:pPr marL="342900" indent="-342900">
+              <a:buFont typeface="Arial" panose="020B0604020202020204" pitchFamily="34" charset="0"/>
+              <a:buChar char="•"/>
+            </a:pPr>
+            <a:r>
+              <a:rPr lang="en-US" dirty="0">
+                <a:latin typeface="Calibri" panose="020F0502020204030204" pitchFamily="34" charset="0"/>
+                <a:ea typeface="Calibri" panose="020F0502020204030204" pitchFamily="34" charset="0"/>
+                <a:cs typeface="Calibri" panose="020F0502020204030204" pitchFamily="34" charset="0"/>
+              </a:rPr>
+              <a:t>The top-level authority in the Agent Supervision Plane</a:t>
+            </a:r>
+            <a:r>
+              <a:rPr lang="en-US" dirty="0" smtClean="0">
+                <a:latin typeface="Calibri" panose="020F0502020204030204" pitchFamily="34" charset="0"/>
+                <a:ea typeface="Calibri" panose="020F0502020204030204" pitchFamily="34" charset="0"/>
+                <a:cs typeface="Calibri" panose="020F0502020204030204" pitchFamily="34" charset="0"/>
+              </a:rPr>
+              <a:t>.</a:t>
+            </a:r>
+          </a:p>
+          <a:p>
+            <a:pPr marL="800100" lvl="1" indent="-342900">
+              <a:buFont typeface="Arial" panose="020B0604020202020204" pitchFamily="34" charset="0"/>
+              <a:buChar char="•"/>
+            </a:pPr>
+            <a:r>
+              <a:rPr lang="en-US" dirty="0" smtClean="0">
+                <a:latin typeface="Calibri" panose="020F0502020204030204" pitchFamily="34" charset="0"/>
+                <a:ea typeface="Calibri" panose="020F0502020204030204" pitchFamily="34" charset="0"/>
+                <a:cs typeface="Calibri" panose="020F0502020204030204" pitchFamily="34" charset="0"/>
+              </a:rPr>
+              <a:t>Policy &amp; constraint injection</a:t>
+            </a:r>
+          </a:p>
+          <a:p>
+            <a:pPr marL="800100" lvl="1" indent="-342900">
+              <a:buFont typeface="Arial" panose="020B0604020202020204" pitchFamily="34" charset="0"/>
+              <a:buChar char="•"/>
+            </a:pPr>
+            <a:r>
+              <a:rPr lang="en-US" dirty="0" smtClean="0">
+                <a:latin typeface="Calibri" panose="020F0502020204030204" pitchFamily="34" charset="0"/>
+                <a:ea typeface="Calibri" panose="020F0502020204030204" pitchFamily="34" charset="0"/>
+                <a:cs typeface="Calibri" panose="020F0502020204030204" pitchFamily="34" charset="0"/>
+              </a:rPr>
+              <a:t>Escalation Handling</a:t>
+            </a:r>
+          </a:p>
+          <a:p>
+            <a:pPr marL="800100" lvl="1" indent="-342900">
+              <a:buFont typeface="Arial" panose="020B0604020202020204" pitchFamily="34" charset="0"/>
+              <a:buChar char="•"/>
+            </a:pPr>
+            <a:r>
+              <a:rPr lang="en-US" dirty="0" smtClean="0">
+                <a:latin typeface="Calibri" panose="020F0502020204030204" pitchFamily="34" charset="0"/>
+                <a:ea typeface="Calibri" panose="020F0502020204030204" pitchFamily="34" charset="0"/>
+                <a:cs typeface="Calibri" panose="020F0502020204030204" pitchFamily="34" charset="0"/>
+              </a:rPr>
+              <a:t>Emergency intervention trigger</a:t>
+            </a:r>
+          </a:p>
+          <a:p>
+            <a:pPr marL="800100" lvl="1" indent="-342900">
+              <a:buFont typeface="Arial" panose="020B0604020202020204" pitchFamily="34" charset="0"/>
+              <a:buChar char="•"/>
+            </a:pPr>
+            <a:r>
+              <a:rPr lang="en-US" altLang="zh-CN" dirty="0" smtClean="0">
+                <a:latin typeface="Calibri" panose="020F0502020204030204" pitchFamily="34" charset="0"/>
+                <a:ea typeface="Calibri" panose="020F0502020204030204" pitchFamily="34" charset="0"/>
+                <a:cs typeface="Calibri" panose="020F0502020204030204" pitchFamily="34" charset="0"/>
+              </a:rPr>
+              <a:t>Post-execution feedback</a:t>
+            </a:r>
+            <a:endParaRPr lang="en-US" sz="2000" dirty="0" smtClean="0">
+              <a:latin typeface="Calibri" panose="020F0502020204030204" pitchFamily="34" charset="0"/>
+              <a:ea typeface="Calibri" panose="020F0502020204030204" pitchFamily="34" charset="0"/>
+              <a:cs typeface="Calibri" panose="020F0502020204030204" pitchFamily="34" charset="0"/>
+            </a:endParaRPr>
+          </a:p>
+          <a:p>
+            <a:endParaRPr lang="en-US" sz="2000" dirty="0" smtClean="0">
+              <a:latin typeface="Calibri" panose="020F0502020204030204" pitchFamily="34" charset="0"/>
+              <a:ea typeface="Calibri" panose="020F0502020204030204" pitchFamily="34" charset="0"/>
+              <a:cs typeface="Calibri" panose="020F0502020204030204" pitchFamily="34" charset="0"/>
+            </a:endParaRPr>
+          </a:p>
+          <a:p>
+            <a:r>
+              <a:rPr lang="en-US" sz="2000" dirty="0" smtClean="0">
+                <a:latin typeface="Calibri" panose="020F0502020204030204" pitchFamily="34" charset="0"/>
+                <a:ea typeface="Calibri" panose="020F0502020204030204" pitchFamily="34" charset="0"/>
+                <a:cs typeface="Calibri" panose="020F0502020204030204" pitchFamily="34" charset="0"/>
+              </a:rPr>
+              <a:t>Agent Supervisor/client</a:t>
+            </a:r>
+          </a:p>
+          <a:p>
+            <a:pPr marL="342900" indent="-342900">
+              <a:buFont typeface="Arial" panose="020B0604020202020204" pitchFamily="34" charset="0"/>
+              <a:buChar char="•"/>
+            </a:pPr>
+            <a:r>
+              <a:rPr lang="en-US" dirty="0">
+                <a:latin typeface="Calibri" panose="020F0502020204030204" pitchFamily="34" charset="0"/>
+                <a:ea typeface="Calibri" panose="020F0502020204030204" pitchFamily="34" charset="0"/>
+                <a:cs typeface="Calibri" panose="020F0502020204030204" pitchFamily="34" charset="0"/>
+              </a:rPr>
+              <a:t>Acts on behalf of operators to monitor, control, and </a:t>
+            </a:r>
+            <a:r>
+              <a:rPr lang="en-US" dirty="0" smtClean="0">
+                <a:latin typeface="Calibri" panose="020F0502020204030204" pitchFamily="34" charset="0"/>
+                <a:ea typeface="Calibri" panose="020F0502020204030204" pitchFamily="34" charset="0"/>
+                <a:cs typeface="Calibri" panose="020F0502020204030204" pitchFamily="34" charset="0"/>
+              </a:rPr>
+              <a:t>intervene across agents</a:t>
+            </a:r>
+          </a:p>
+          <a:p>
+            <a:endParaRPr lang="en-US" sz="2000" dirty="0" smtClean="0">
+              <a:latin typeface="Calibri" panose="020F0502020204030204" pitchFamily="34" charset="0"/>
+              <a:ea typeface="Calibri" panose="020F0502020204030204" pitchFamily="34" charset="0"/>
+              <a:cs typeface="Calibri" panose="020F0502020204030204" pitchFamily="34" charset="0"/>
+            </a:endParaRPr>
+          </a:p>
+          <a:p>
+            <a:r>
+              <a:rPr lang="en-US" sz="2000" dirty="0" smtClean="0">
+                <a:latin typeface="Calibri" panose="020F0502020204030204" pitchFamily="34" charset="0"/>
+                <a:ea typeface="Calibri" panose="020F0502020204030204" pitchFamily="34" charset="0"/>
+                <a:cs typeface="Calibri" panose="020F0502020204030204" pitchFamily="34" charset="0"/>
+              </a:rPr>
+              <a:t>Supervision Enforcement Entity</a:t>
+            </a:r>
+          </a:p>
+          <a:p>
+            <a:pPr marL="342900" indent="-342900">
+              <a:buFont typeface="Arial" panose="020B0604020202020204" pitchFamily="34" charset="0"/>
+              <a:buChar char="•"/>
+            </a:pPr>
+            <a:r>
+              <a:rPr lang="en-US" dirty="0">
+                <a:latin typeface="Calibri" panose="020F0502020204030204" pitchFamily="34" charset="0"/>
+                <a:ea typeface="Calibri" panose="020F0502020204030204" pitchFamily="34" charset="0"/>
+                <a:cs typeface="Calibri" panose="020F0502020204030204" pitchFamily="34" charset="0"/>
+              </a:rPr>
+              <a:t>The unified bridge between supervision signals and native agent execution.</a:t>
+            </a:r>
+          </a:p>
+          <a:p>
+            <a:pPr marL="342900" indent="-342900">
+              <a:buFont typeface="Arial" panose="020B0604020202020204" pitchFamily="34" charset="0"/>
+              <a:buChar char="•"/>
+            </a:pPr>
+            <a:endParaRPr lang="en-US" sz="2000" dirty="0">
+              <a:latin typeface="Calibri" panose="020F0502020204030204" pitchFamily="34" charset="0"/>
+              <a:ea typeface="Calibri" panose="020F0502020204030204" pitchFamily="34" charset="0"/>
+              <a:cs typeface="Calibri" panose="020F0502020204030204" pitchFamily="34" charset="0"/>
+            </a:endParaRPr>
+          </a:p>
+        </p:txBody>
+      </p:sp>
     </p:spTree>
     <p:extLst>
       <p:ext uri="{BB962C8B-B14F-4D97-AF65-F5344CB8AC3E}">
@@ -4846,134 +5775,13 @@
   <p:clrMapOvr>
     <a:masterClrMapping/>
   </p:clrMapOvr>
-</p:sld>
-</file>
-
-<file path=ppt/slides/slide3.xml><?xml version="1.0" encoding="utf-8"?>
-<p:sld xmlns:a="http://schemas.openxmlformats.org/drawingml/2006/main" xmlns:r="http://schemas.openxmlformats.org/officeDocument/2006/relationships" xmlns:p="http://schemas.openxmlformats.org/presentationml/2006/main">
-  <p:cSld>
-    <p:spTree>
-      <p:nvGrpSpPr>
-        <p:cNvPr id="1" name=""/>
-        <p:cNvGrpSpPr/>
-        <p:nvPr/>
-      </p:nvGrpSpPr>
-      <p:grpSpPr>
-        <a:xfrm>
-          <a:off x="0" y="0"/>
-          <a:ext cx="0" cy="0"/>
-          <a:chOff x="0" y="0"/>
-          <a:chExt cx="0" cy="0"/>
-        </a:xfrm>
-      </p:grpSpPr>
-      <p:sp>
-        <p:nvSpPr>
-          <p:cNvPr id="2" name="标题 1">
-            <a:extLst>
-              <a:ext uri="{FF2B5EF4-FFF2-40B4-BE49-F238E27FC236}">
-                <a16:creationId xmlns:a16="http://schemas.microsoft.com/office/drawing/2014/main" id="{1E9543EA-3131-444F-84A4-D17330176CA2}"/>
-              </a:ext>
-            </a:extLst>
-          </p:cNvPr>
-          <p:cNvSpPr>
-            <a:spLocks noGrp="1"/>
-          </p:cNvSpPr>
-          <p:nvPr>
-            <p:ph type="title"/>
-          </p:nvPr>
-        </p:nvSpPr>
-        <p:spPr/>
-        <p:txBody>
-          <a:bodyPr>
-            <a:normAutofit/>
-          </a:bodyPr>
-          <a:lstStyle/>
-          <a:p>
-            <a:r>
-              <a:rPr lang="en-US" altLang="zh-CN" dirty="0"/>
-              <a:t>Agent Observability Requirements</a:t>
-            </a:r>
-            <a:endParaRPr lang="zh-CN" altLang="en-US" dirty="0"/>
-          </a:p>
-        </p:txBody>
-      </p:sp>
-      <p:sp>
-        <p:nvSpPr>
-          <p:cNvPr id="3" name="内容占位符 2">
-            <a:extLst>
-              <a:ext uri="{FF2B5EF4-FFF2-40B4-BE49-F238E27FC236}">
-                <a16:creationId xmlns:a16="http://schemas.microsoft.com/office/drawing/2014/main" id="{CA5A97EF-FE90-45DB-B31F-611000FFB070}"/>
-              </a:ext>
-            </a:extLst>
-          </p:cNvPr>
-          <p:cNvSpPr>
-            <a:spLocks noGrp="1"/>
-          </p:cNvSpPr>
-          <p:nvPr>
-            <p:ph idx="1"/>
-          </p:nvPr>
-        </p:nvSpPr>
-        <p:spPr/>
-        <p:txBody>
-          <a:bodyPr/>
-          <a:lstStyle/>
-          <a:p>
-            <a:r>
-              <a:rPr lang="en-US" altLang="zh-CN" dirty="0"/>
-              <a:t>See what agents did, why they did it, and how they're performing.</a:t>
-            </a:r>
-          </a:p>
-          <a:p>
-            <a:r>
-              <a:rPr lang="en-US" altLang="zh-CN" dirty="0"/>
-              <a:t>OBS-1: Execution Trajectory Capture</a:t>
-            </a:r>
-          </a:p>
-          <a:p>
-            <a:endParaRPr lang="en-US" altLang="zh-CN" dirty="0"/>
-          </a:p>
-          <a:p>
-            <a:r>
-              <a:rPr lang="en-US" altLang="zh-CN" dirty="0"/>
-              <a:t>OBS-2: Reasoning Provenance Capture</a:t>
-            </a:r>
-          </a:p>
-          <a:p>
-            <a:endParaRPr lang="en-US" altLang="zh-CN" dirty="0"/>
-          </a:p>
-          <a:p>
-            <a:r>
-              <a:rPr lang="en-US" altLang="zh-CN" dirty="0"/>
-              <a:t>OBS-3: Operational Metrics Collection</a:t>
-            </a:r>
-          </a:p>
-          <a:p>
-            <a:endParaRPr lang="en-US" altLang="zh-CN" dirty="0"/>
-          </a:p>
-          <a:p>
-            <a:r>
-              <a:rPr lang="en-US" altLang="zh-CN" dirty="0"/>
-              <a:t>OBS-4: Multi-Agent Correlation</a:t>
-            </a:r>
-          </a:p>
-          <a:p>
-            <a:endParaRPr lang="en-US" altLang="zh-CN" dirty="0"/>
-          </a:p>
-          <a:p>
-            <a:endParaRPr lang="zh-CN" altLang="en-US" dirty="0"/>
-          </a:p>
-        </p:txBody>
-      </p:sp>
-    </p:spTree>
-    <p:extLst>
-      <p:ext uri="{BB962C8B-B14F-4D97-AF65-F5344CB8AC3E}">
-        <p14:creationId xmlns:p14="http://schemas.microsoft.com/office/powerpoint/2010/main" val="4147912469"/>
-      </p:ext>
-    </p:extLst>
-  </p:cSld>
-  <p:clrMapOvr>
-    <a:masterClrMapping/>
-  </p:clrMapOvr>
+  <p:timing>
+    <p:tnLst>
+      <p:par>
+        <p:cTn id="1" dur="indefinite" restart="never" nodeType="tmRoot"/>
+      </p:par>
+    </p:tnLst>
+  </p:timing>
 </p:sld>
 </file>
 
@@ -4999,7 +5807,7 @@
           <p:cNvPr id="2" name="标题 1">
             <a:extLst>
               <a:ext uri="{FF2B5EF4-FFF2-40B4-BE49-F238E27FC236}">
-                <a16:creationId xmlns:a16="http://schemas.microsoft.com/office/drawing/2014/main" id="{824FAEC5-7814-4802-BDD4-BD5389F73389}"/>
+                <a16:creationId xmlns="" xmlns:a16="http://schemas.microsoft.com/office/drawing/2014/main" id="{1E9543EA-3131-444F-84A4-D17330176CA2}"/>
               </a:ext>
             </a:extLst>
           </p:cNvPr>
@@ -5012,8 +5820,8 @@
         </p:nvSpPr>
         <p:spPr>
           <a:xfrm>
-            <a:off x="488011" y="229952"/>
-            <a:ext cx="11215977" cy="1325563"/>
+            <a:off x="838200" y="107430"/>
+            <a:ext cx="10515600" cy="1325563"/>
           </a:xfrm>
         </p:spPr>
         <p:txBody>
@@ -5023,10 +5831,17 @@
           <a:lstStyle/>
           <a:p>
             <a:r>
-              <a:rPr lang="en-US" altLang="zh-CN" dirty="0"/>
-              <a:t>Agent Control Requirements </a:t>
-            </a:r>
-            <a:endParaRPr lang="zh-CN" altLang="en-US" dirty="0"/>
+              <a:rPr lang="en-US" altLang="zh-CN" dirty="0">
+                <a:latin typeface="Calibri Light" panose="020F0302020204030204" pitchFamily="34" charset="0"/>
+                <a:ea typeface="Calibri Light" panose="020F0302020204030204" pitchFamily="34" charset="0"/>
+                <a:cs typeface="Calibri Light" panose="020F0302020204030204" pitchFamily="34" charset="0"/>
+              </a:rPr>
+              <a:t>Agent Observability Requirements</a:t>
+            </a:r>
+            <a:endParaRPr lang="zh-CN" altLang="en-US" dirty="0">
+              <a:latin typeface="Calibri Light" panose="020F0302020204030204" pitchFamily="34" charset="0"/>
+              <a:cs typeface="Calibri Light" panose="020F0302020204030204" pitchFamily="34" charset="0"/>
+            </a:endParaRPr>
           </a:p>
         </p:txBody>
       </p:sp>
@@ -5035,7 +5850,7 @@
           <p:cNvPr id="3" name="内容占位符 2">
             <a:extLst>
               <a:ext uri="{FF2B5EF4-FFF2-40B4-BE49-F238E27FC236}">
-                <a16:creationId xmlns:a16="http://schemas.microsoft.com/office/drawing/2014/main" id="{88448AB7-F29E-43C6-8C89-947BD405CDCF}"/>
+                <a16:creationId xmlns="" xmlns:a16="http://schemas.microsoft.com/office/drawing/2014/main" id="{CA5A97EF-FE90-45DB-B31F-611000FFB070}"/>
               </a:ext>
             </a:extLst>
           </p:cNvPr>
@@ -5046,87 +5861,324 @@
             <p:ph idx="1"/>
           </p:nvPr>
         </p:nvSpPr>
-        <p:spPr/>
+        <p:spPr>
+          <a:xfrm>
+            <a:off x="838200" y="1605491"/>
+            <a:ext cx="10575175" cy="5044691"/>
+          </a:xfrm>
+        </p:spPr>
         <p:txBody>
           <a:bodyPr>
-            <a:normAutofit fontScale="77500" lnSpcReduction="20000"/>
+            <a:normAutofit fontScale="92500" lnSpcReduction="10000"/>
           </a:bodyPr>
           <a:lstStyle/>
           <a:p>
             <a:r>
-              <a:rPr lang="en-US" altLang="zh-CN" dirty="0"/>
-              <a:t>Set a boundary for agent behaviors.</a:t>
-            </a:r>
-          </a:p>
-          <a:p>
-            <a:r>
-              <a:rPr lang="en-US" altLang="zh-CN" dirty="0"/>
-              <a:t>CTL-1: Access &amp; Permission</a:t>
-            </a:r>
-          </a:p>
-          <a:p>
-            <a:endParaRPr lang="en-US" altLang="zh-CN" dirty="0"/>
-          </a:p>
-          <a:p>
-            <a:r>
-              <a:rPr lang="en-US" altLang="zh-CN" dirty="0"/>
-              <a:t>CTL-2: Intent Validation &amp; Alignment</a:t>
-            </a:r>
-          </a:p>
-          <a:p>
-            <a:endParaRPr lang="en-US" altLang="zh-CN" dirty="0"/>
-          </a:p>
-          <a:p>
-            <a:r>
-              <a:rPr lang="en-US" altLang="zh-CN" dirty="0"/>
-              <a:t>CTL-3: Temporal &amp; Data/Context Validity</a:t>
-            </a:r>
-          </a:p>
-          <a:p>
-            <a:endParaRPr lang="en-US" altLang="zh-CN" dirty="0"/>
-          </a:p>
-          <a:p>
-            <a:r>
-              <a:rPr lang="en-US" altLang="zh-CN" dirty="0"/>
-              <a:t>CTL-4: Authorization &amp; Approval</a:t>
-            </a:r>
-          </a:p>
-          <a:p>
-            <a:endParaRPr lang="en-US" altLang="zh-CN" dirty="0"/>
-          </a:p>
-          <a:p>
-            <a:r>
-              <a:rPr lang="en-US" altLang="zh-CN" dirty="0"/>
-              <a:t>CTL-5: Failure &amp; Liveness</a:t>
-            </a:r>
-          </a:p>
-          <a:p>
-            <a:endParaRPr lang="en-US" altLang="zh-CN" dirty="0"/>
-          </a:p>
-          <a:p>
-            <a:r>
-              <a:rPr lang="en-US" altLang="zh-CN" dirty="0"/>
-              <a:t>CTL-6: Global &amp; Dynamic Boundary Adaptation</a:t>
-            </a:r>
-          </a:p>
-          <a:p>
-            <a:endParaRPr lang="en-US" altLang="zh-CN" dirty="0"/>
-          </a:p>
-          <a:p>
-            <a:endParaRPr lang="zh-CN" altLang="en-US" dirty="0"/>
+              <a:rPr lang="en-US" altLang="zh-CN" dirty="0">
+                <a:latin typeface="Calibri" panose="020F0502020204030204" pitchFamily="34" charset="0"/>
+                <a:ea typeface="Calibri" panose="020F0502020204030204" pitchFamily="34" charset="0"/>
+                <a:cs typeface="Calibri" panose="020F0502020204030204" pitchFamily="34" charset="0"/>
+              </a:rPr>
+              <a:t>See what agents did, why they did it, and how they're performing.</a:t>
+            </a:r>
+          </a:p>
+          <a:p>
+            <a:r>
+              <a:rPr lang="en-US" altLang="zh-CN" dirty="0">
+                <a:latin typeface="Calibri" panose="020F0502020204030204" pitchFamily="34" charset="0"/>
+                <a:ea typeface="Calibri" panose="020F0502020204030204" pitchFamily="34" charset="0"/>
+                <a:cs typeface="Calibri" panose="020F0502020204030204" pitchFamily="34" charset="0"/>
+              </a:rPr>
+              <a:t>OBS-1: Execution Trajectory Capture</a:t>
+            </a:r>
+          </a:p>
+          <a:p>
+            <a:pPr lvl="1"/>
+            <a:r>
+              <a:rPr lang="en-US" altLang="zh-CN" dirty="0">
+                <a:latin typeface="Calibri" panose="020F0502020204030204" pitchFamily="34" charset="0"/>
+                <a:ea typeface="Calibri" panose="020F0502020204030204" pitchFamily="34" charset="0"/>
+                <a:cs typeface="Calibri" panose="020F0502020204030204" pitchFamily="34" charset="0"/>
+              </a:rPr>
+              <a:t>Makes the full path from </a:t>
+            </a:r>
+            <a:r>
+              <a:rPr lang="en-US" altLang="zh-CN" dirty="0" smtClean="0">
+                <a:latin typeface="Calibri" panose="020F0502020204030204" pitchFamily="34" charset="0"/>
+                <a:ea typeface="Calibri" panose="020F0502020204030204" pitchFamily="34" charset="0"/>
+                <a:cs typeface="Calibri" panose="020F0502020204030204" pitchFamily="34" charset="0"/>
+              </a:rPr>
+              <a:t>reasoning </a:t>
+            </a:r>
+            <a:r>
+              <a:rPr lang="en-US" altLang="zh-CN" dirty="0">
+                <a:latin typeface="Calibri" panose="020F0502020204030204" pitchFamily="34" charset="0"/>
+                <a:ea typeface="Calibri" panose="020F0502020204030204" pitchFamily="34" charset="0"/>
+                <a:cs typeface="Calibri" panose="020F0502020204030204" pitchFamily="34" charset="0"/>
+              </a:rPr>
+              <a:t>to network </a:t>
+            </a:r>
+            <a:r>
+              <a:rPr lang="en-US" altLang="zh-CN" dirty="0" smtClean="0">
+                <a:latin typeface="Calibri" panose="020F0502020204030204" pitchFamily="34" charset="0"/>
+                <a:ea typeface="Calibri" panose="020F0502020204030204" pitchFamily="34" charset="0"/>
+                <a:cs typeface="Calibri" panose="020F0502020204030204" pitchFamily="34" charset="0"/>
+              </a:rPr>
+              <a:t>observations</a:t>
+            </a:r>
+            <a:r>
+              <a:rPr lang="en-US" altLang="zh-CN" dirty="0" smtClean="0">
+                <a:latin typeface="Calibri" panose="020F0502020204030204" pitchFamily="34" charset="0"/>
+                <a:ea typeface="Calibri" panose="020F0502020204030204" pitchFamily="34" charset="0"/>
+                <a:cs typeface="Calibri" panose="020F0502020204030204" pitchFamily="34" charset="0"/>
+              </a:rPr>
+              <a:t> visible, including the </a:t>
+            </a:r>
+            <a:r>
+              <a:rPr lang="en-US" altLang="zh-CN" dirty="0">
+                <a:latin typeface="Calibri" panose="020F0502020204030204" pitchFamily="34" charset="0"/>
+                <a:ea typeface="Calibri" panose="020F0502020204030204" pitchFamily="34" charset="0"/>
+                <a:cs typeface="Calibri" panose="020F0502020204030204" pitchFamily="34" charset="0"/>
+              </a:rPr>
+              <a:t>plan, </a:t>
+            </a:r>
+            <a:r>
+              <a:rPr lang="en-US" altLang="zh-CN" dirty="0" smtClean="0">
+                <a:latin typeface="Calibri" panose="020F0502020204030204" pitchFamily="34" charset="0"/>
+                <a:ea typeface="Calibri" panose="020F0502020204030204" pitchFamily="34" charset="0"/>
+                <a:cs typeface="Calibri" panose="020F0502020204030204" pitchFamily="34" charset="0"/>
+              </a:rPr>
+              <a:t>the invoked tools/skills, generated </a:t>
+            </a:r>
+            <a:r>
+              <a:rPr lang="en-US" altLang="zh-CN" dirty="0">
+                <a:latin typeface="Calibri" panose="020F0502020204030204" pitchFamily="34" charset="0"/>
+                <a:ea typeface="Calibri" panose="020F0502020204030204" pitchFamily="34" charset="0"/>
+                <a:cs typeface="Calibri" panose="020F0502020204030204" pitchFamily="34" charset="0"/>
+              </a:rPr>
+              <a:t>configuration </a:t>
+            </a:r>
+            <a:r>
+              <a:rPr lang="en-US" altLang="zh-CN" dirty="0" smtClean="0">
+                <a:latin typeface="Calibri" panose="020F0502020204030204" pitchFamily="34" charset="0"/>
+                <a:ea typeface="Calibri" panose="020F0502020204030204" pitchFamily="34" charset="0"/>
+                <a:cs typeface="Calibri" panose="020F0502020204030204" pitchFamily="34" charset="0"/>
+              </a:rPr>
+              <a:t>change, </a:t>
+            </a:r>
+            <a:r>
+              <a:rPr lang="en-US" altLang="zh-CN" dirty="0">
+                <a:latin typeface="Calibri" panose="020F0502020204030204" pitchFamily="34" charset="0"/>
+                <a:ea typeface="Calibri" panose="020F0502020204030204" pitchFamily="34" charset="0"/>
+                <a:cs typeface="Calibri" panose="020F0502020204030204" pitchFamily="34" charset="0"/>
+              </a:rPr>
+              <a:t>and the resulting state</a:t>
+            </a:r>
+            <a:r>
+              <a:rPr lang="en-US" altLang="zh-CN" dirty="0" smtClean="0">
+                <a:latin typeface="Calibri" panose="020F0502020204030204" pitchFamily="34" charset="0"/>
+                <a:ea typeface="Calibri" panose="020F0502020204030204" pitchFamily="34" charset="0"/>
+                <a:cs typeface="Calibri" panose="020F0502020204030204" pitchFamily="34" charset="0"/>
+              </a:rPr>
+              <a:t>.</a:t>
+            </a:r>
+            <a:endParaRPr lang="en-US" altLang="zh-CN" dirty="0">
+              <a:latin typeface="Calibri" panose="020F0502020204030204" pitchFamily="34" charset="0"/>
+              <a:ea typeface="Calibri" panose="020F0502020204030204" pitchFamily="34" charset="0"/>
+              <a:cs typeface="Calibri" panose="020F0502020204030204" pitchFamily="34" charset="0"/>
+            </a:endParaRPr>
+          </a:p>
+          <a:p>
+            <a:r>
+              <a:rPr lang="en-US" altLang="zh-CN" dirty="0">
+                <a:latin typeface="Calibri" panose="020F0502020204030204" pitchFamily="34" charset="0"/>
+                <a:ea typeface="Calibri" panose="020F0502020204030204" pitchFamily="34" charset="0"/>
+                <a:cs typeface="Calibri" panose="020F0502020204030204" pitchFamily="34" charset="0"/>
+              </a:rPr>
+              <a:t>OBS-2: Reasoning Provenance Capture</a:t>
+            </a:r>
+          </a:p>
+          <a:p>
+            <a:pPr lvl="1"/>
+            <a:r>
+              <a:rPr lang="en-US" altLang="zh-CN" dirty="0">
+                <a:latin typeface="Calibri" panose="020F0502020204030204" pitchFamily="34" charset="0"/>
+                <a:ea typeface="Calibri" panose="020F0502020204030204" pitchFamily="34" charset="0"/>
+                <a:cs typeface="Calibri" panose="020F0502020204030204" pitchFamily="34" charset="0"/>
+              </a:rPr>
+              <a:t>Exposes why a decision was </a:t>
+            </a:r>
+            <a:r>
+              <a:rPr lang="en-US" altLang="zh-CN" dirty="0" smtClean="0">
+                <a:latin typeface="Calibri" panose="020F0502020204030204" pitchFamily="34" charset="0"/>
+                <a:ea typeface="Calibri" panose="020F0502020204030204" pitchFamily="34" charset="0"/>
+                <a:cs typeface="Calibri" panose="020F0502020204030204" pitchFamily="34" charset="0"/>
+              </a:rPr>
+              <a:t>made </a:t>
+            </a:r>
+            <a:r>
+              <a:rPr lang="en-US" altLang="zh-CN" dirty="0">
+                <a:latin typeface="Calibri" panose="020F0502020204030204" pitchFamily="34" charset="0"/>
+                <a:ea typeface="Calibri" panose="020F0502020204030204" pitchFamily="34" charset="0"/>
+                <a:cs typeface="Calibri" panose="020F0502020204030204" pitchFamily="34" charset="0"/>
+              </a:rPr>
+              <a:t>— the operational </a:t>
+            </a:r>
+            <a:r>
+              <a:rPr lang="en-US" altLang="zh-CN" dirty="0" smtClean="0">
+                <a:latin typeface="Calibri" panose="020F0502020204030204" pitchFamily="34" charset="0"/>
+                <a:ea typeface="Calibri" panose="020F0502020204030204" pitchFamily="34" charset="0"/>
+                <a:cs typeface="Calibri" panose="020F0502020204030204" pitchFamily="34" charset="0"/>
+              </a:rPr>
+              <a:t>signals (e.g., alarms, incidents, telemetry streams) </a:t>
+            </a:r>
+            <a:r>
+              <a:rPr lang="en-US" altLang="zh-CN" dirty="0">
+                <a:latin typeface="Calibri" panose="020F0502020204030204" pitchFamily="34" charset="0"/>
+                <a:ea typeface="Calibri" panose="020F0502020204030204" pitchFamily="34" charset="0"/>
+                <a:cs typeface="Calibri" panose="020F0502020204030204" pitchFamily="34" charset="0"/>
+              </a:rPr>
+              <a:t>and confidence level behind a specific network action</a:t>
+            </a:r>
+            <a:r>
+              <a:rPr lang="en-US" altLang="zh-CN" dirty="0" smtClean="0">
+                <a:latin typeface="Calibri" panose="020F0502020204030204" pitchFamily="34" charset="0"/>
+                <a:ea typeface="Calibri" panose="020F0502020204030204" pitchFamily="34" charset="0"/>
+                <a:cs typeface="Calibri" panose="020F0502020204030204" pitchFamily="34" charset="0"/>
+              </a:rPr>
+              <a:t>.</a:t>
+            </a:r>
+            <a:endParaRPr lang="en-US" altLang="zh-CN" dirty="0">
+              <a:latin typeface="Calibri" panose="020F0502020204030204" pitchFamily="34" charset="0"/>
+              <a:ea typeface="Calibri" panose="020F0502020204030204" pitchFamily="34" charset="0"/>
+              <a:cs typeface="Calibri" panose="020F0502020204030204" pitchFamily="34" charset="0"/>
+            </a:endParaRPr>
+          </a:p>
+          <a:p>
+            <a:r>
+              <a:rPr lang="en-US" altLang="zh-CN" dirty="0">
+                <a:latin typeface="Calibri" panose="020F0502020204030204" pitchFamily="34" charset="0"/>
+                <a:ea typeface="Calibri" panose="020F0502020204030204" pitchFamily="34" charset="0"/>
+                <a:cs typeface="Calibri" panose="020F0502020204030204" pitchFamily="34" charset="0"/>
+              </a:rPr>
+              <a:t>OBS-3: Operational Metrics Collection</a:t>
+            </a:r>
+          </a:p>
+          <a:p>
+            <a:pPr lvl="1"/>
+            <a:r>
+              <a:rPr lang="en-US" altLang="zh-CN" dirty="0">
+                <a:latin typeface="Calibri" panose="020F0502020204030204" pitchFamily="34" charset="0"/>
+                <a:ea typeface="Calibri" panose="020F0502020204030204" pitchFamily="34" charset="0"/>
+                <a:cs typeface="Calibri" panose="020F0502020204030204" pitchFamily="34" charset="0"/>
+              </a:rPr>
+              <a:t>Tracks an agent's own operational health </a:t>
+            </a:r>
+            <a:r>
+              <a:rPr lang="en-US" altLang="zh-CN" dirty="0" smtClean="0">
+                <a:latin typeface="Calibri" panose="020F0502020204030204" pitchFamily="34" charset="0"/>
+                <a:ea typeface="Calibri" panose="020F0502020204030204" pitchFamily="34" charset="0"/>
+                <a:cs typeface="Calibri" panose="020F0502020204030204" pitchFamily="34" charset="0"/>
+              </a:rPr>
+              <a:t>and performance, e.g., </a:t>
+            </a:r>
+            <a:r>
+              <a:rPr lang="en-US" altLang="zh-CN" dirty="0" smtClean="0">
+                <a:latin typeface="Calibri" panose="020F0502020204030204" pitchFamily="34" charset="0"/>
+                <a:ea typeface="Calibri" panose="020F0502020204030204" pitchFamily="34" charset="0"/>
+                <a:cs typeface="Calibri" panose="020F0502020204030204" pitchFamily="34" charset="0"/>
+              </a:rPr>
+              <a:t>error </a:t>
+            </a:r>
+            <a:r>
+              <a:rPr lang="en-US" altLang="zh-CN" dirty="0">
+                <a:latin typeface="Calibri" panose="020F0502020204030204" pitchFamily="34" charset="0"/>
+                <a:ea typeface="Calibri" panose="020F0502020204030204" pitchFamily="34" charset="0"/>
+                <a:cs typeface="Calibri" panose="020F0502020204030204" pitchFamily="34" charset="0"/>
+              </a:rPr>
+              <a:t>rates, rollback frequency, completion </a:t>
+            </a:r>
+            <a:r>
+              <a:rPr lang="en-US" altLang="zh-CN" dirty="0" smtClean="0">
+                <a:latin typeface="Calibri" panose="020F0502020204030204" pitchFamily="34" charset="0"/>
+                <a:ea typeface="Calibri" panose="020F0502020204030204" pitchFamily="34" charset="0"/>
+                <a:cs typeface="Calibri" panose="020F0502020204030204" pitchFamily="34" charset="0"/>
+              </a:rPr>
+              <a:t>performance, token consumption.</a:t>
+            </a:r>
+            <a:endParaRPr lang="en-US" altLang="zh-CN" dirty="0">
+              <a:latin typeface="Calibri" panose="020F0502020204030204" pitchFamily="34" charset="0"/>
+              <a:ea typeface="Calibri" panose="020F0502020204030204" pitchFamily="34" charset="0"/>
+              <a:cs typeface="Calibri" panose="020F0502020204030204" pitchFamily="34" charset="0"/>
+            </a:endParaRPr>
+          </a:p>
+          <a:p>
+            <a:r>
+              <a:rPr lang="en-US" altLang="zh-CN" dirty="0">
+                <a:latin typeface="Calibri" panose="020F0502020204030204" pitchFamily="34" charset="0"/>
+                <a:ea typeface="Calibri" panose="020F0502020204030204" pitchFamily="34" charset="0"/>
+                <a:cs typeface="Calibri" panose="020F0502020204030204" pitchFamily="34" charset="0"/>
+              </a:rPr>
+              <a:t>OBS-4: Multi-Agent Correlation</a:t>
+            </a:r>
+          </a:p>
+          <a:p>
+            <a:pPr lvl="1"/>
+            <a:r>
+              <a:rPr lang="en-US" altLang="zh-CN" dirty="0">
+                <a:latin typeface="Calibri" panose="020F0502020204030204" pitchFamily="34" charset="0"/>
+                <a:ea typeface="Calibri" panose="020F0502020204030204" pitchFamily="34" charset="0"/>
+                <a:cs typeface="Calibri" panose="020F0502020204030204" pitchFamily="34" charset="0"/>
+              </a:rPr>
+              <a:t>Cross-agent execution tracing, decision-making path, </a:t>
+            </a:r>
+            <a:r>
+              <a:rPr lang="en-US" altLang="zh-CN" dirty="0" smtClean="0">
+                <a:latin typeface="Calibri" panose="020F0502020204030204" pitchFamily="34" charset="0"/>
+                <a:ea typeface="Calibri" panose="020F0502020204030204" pitchFamily="34" charset="0"/>
+                <a:cs typeface="Calibri" panose="020F0502020204030204" pitchFamily="34" charset="0"/>
+              </a:rPr>
+              <a:t>metric </a:t>
+            </a:r>
+            <a:r>
+              <a:rPr lang="en-US" altLang="zh-CN" dirty="0">
+                <a:latin typeface="Calibri" panose="020F0502020204030204" pitchFamily="34" charset="0"/>
+                <a:ea typeface="Calibri" panose="020F0502020204030204" pitchFamily="34" charset="0"/>
+                <a:cs typeface="Calibri" panose="020F0502020204030204" pitchFamily="34" charset="0"/>
+              </a:rPr>
+              <a:t>collection and measurement.</a:t>
+            </a:r>
+            <a:endParaRPr lang="en-US" altLang="zh-CN" dirty="0">
+              <a:latin typeface="Calibri" panose="020F0502020204030204" pitchFamily="34" charset="0"/>
+              <a:ea typeface="Calibri" panose="020F0502020204030204" pitchFamily="34" charset="0"/>
+              <a:cs typeface="Calibri" panose="020F0502020204030204" pitchFamily="34" charset="0"/>
+            </a:endParaRPr>
+          </a:p>
+          <a:p>
+            <a:endParaRPr lang="zh-CN" altLang="en-US" dirty="0">
+              <a:latin typeface="Calibri" panose="020F0502020204030204" pitchFamily="34" charset="0"/>
+              <a:cs typeface="Calibri" panose="020F0502020204030204" pitchFamily="34" charset="0"/>
+            </a:endParaRPr>
           </a:p>
         </p:txBody>
       </p:sp>
     </p:spTree>
     <p:extLst>
       <p:ext uri="{BB962C8B-B14F-4D97-AF65-F5344CB8AC3E}">
-        <p14:creationId xmlns:p14="http://schemas.microsoft.com/office/powerpoint/2010/main" val="3505180484"/>
+        <p14:creationId xmlns:p14="http://schemas.microsoft.com/office/powerpoint/2010/main" val="4147912469"/>
       </p:ext>
     </p:extLst>
   </p:cSld>
   <p:clrMapOvr>
     <a:masterClrMapping/>
   </p:clrMapOvr>
+  <p:timing>
+    <p:tnLst>
+      <p:par>
+        <p:cTn id="1" dur="indefinite" restart="never" nodeType="tmRoot"/>
+      </p:par>
+    </p:tnLst>
+  </p:timing>
 </p:sld>
 </file>
 
@@ -5152,7 +6204,7 @@
           <p:cNvPr id="2" name="标题 1">
             <a:extLst>
               <a:ext uri="{FF2B5EF4-FFF2-40B4-BE49-F238E27FC236}">
-                <a16:creationId xmlns:a16="http://schemas.microsoft.com/office/drawing/2014/main" id="{5DA4F520-B074-4471-B42B-B29DFB85A1DD}"/>
+                <a16:creationId xmlns="" xmlns:a16="http://schemas.microsoft.com/office/drawing/2014/main" id="{824FAEC5-7814-4802-BDD4-BD5389F73389}"/>
               </a:ext>
             </a:extLst>
           </p:cNvPr>
@@ -5163,7 +6215,12 @@
             <p:ph type="title"/>
           </p:nvPr>
         </p:nvSpPr>
-        <p:spPr/>
+        <p:spPr>
+          <a:xfrm>
+            <a:off x="488011" y="84425"/>
+            <a:ext cx="11215977" cy="1325563"/>
+          </a:xfrm>
+        </p:spPr>
         <p:txBody>
           <a:bodyPr>
             <a:normAutofit/>
@@ -5171,10 +6228,414 @@
           <a:lstStyle/>
           <a:p>
             <a:r>
-              <a:rPr lang="en-US" altLang="zh-CN" dirty="0"/>
+              <a:rPr lang="en-US" altLang="zh-CN" dirty="0">
+                <a:latin typeface="Calibri Light" panose="020F0302020204030204" pitchFamily="34" charset="0"/>
+                <a:ea typeface="Calibri Light" panose="020F0302020204030204" pitchFamily="34" charset="0"/>
+                <a:cs typeface="Calibri Light" panose="020F0302020204030204" pitchFamily="34" charset="0"/>
+              </a:rPr>
+              <a:t>Agent Control Requirements </a:t>
+            </a:r>
+            <a:endParaRPr lang="zh-CN" altLang="en-US" dirty="0">
+              <a:latin typeface="Calibri Light" panose="020F0302020204030204" pitchFamily="34" charset="0"/>
+              <a:cs typeface="Calibri Light" panose="020F0302020204030204" pitchFamily="34" charset="0"/>
+            </a:endParaRPr>
+          </a:p>
+        </p:txBody>
+      </p:sp>
+      <p:sp>
+        <p:nvSpPr>
+          <p:cNvPr id="3" name="内容占位符 2">
+            <a:extLst>
+              <a:ext uri="{FF2B5EF4-FFF2-40B4-BE49-F238E27FC236}">
+                <a16:creationId xmlns="" xmlns:a16="http://schemas.microsoft.com/office/drawing/2014/main" id="{88448AB7-F29E-43C6-8C89-947BD405CDCF}"/>
+              </a:ext>
+            </a:extLst>
+          </p:cNvPr>
+          <p:cNvSpPr>
+            <a:spLocks noGrp="1"/>
+          </p:cNvSpPr>
+          <p:nvPr>
+            <p:ph idx="1"/>
+          </p:nvPr>
+        </p:nvSpPr>
+        <p:spPr>
+          <a:xfrm>
+            <a:off x="838198" y="1409988"/>
+            <a:ext cx="10957562" cy="5215256"/>
+          </a:xfrm>
+        </p:spPr>
+        <p:txBody>
+          <a:bodyPr>
+            <a:normAutofit fontScale="92500" lnSpcReduction="20000"/>
+          </a:bodyPr>
+          <a:lstStyle/>
+          <a:p>
+            <a:r>
+              <a:rPr lang="en-US" altLang="zh-CN" dirty="0">
+                <a:latin typeface="Calibri" panose="020F0502020204030204" pitchFamily="34" charset="0"/>
+                <a:ea typeface="Calibri" panose="020F0502020204030204" pitchFamily="34" charset="0"/>
+                <a:cs typeface="Calibri" panose="020F0502020204030204" pitchFamily="34" charset="0"/>
+              </a:rPr>
+              <a:t>Set a boundary for agent behaviors.</a:t>
+            </a:r>
+          </a:p>
+          <a:p>
+            <a:r>
+              <a:rPr lang="en-US" altLang="zh-CN" dirty="0">
+                <a:latin typeface="Calibri" panose="020F0502020204030204" pitchFamily="34" charset="0"/>
+                <a:ea typeface="Calibri" panose="020F0502020204030204" pitchFamily="34" charset="0"/>
+                <a:cs typeface="Calibri" panose="020F0502020204030204" pitchFamily="34" charset="0"/>
+              </a:rPr>
+              <a:t>CTL-1: Access &amp; Permission</a:t>
+            </a:r>
+          </a:p>
+          <a:p>
+            <a:pPr lvl="1"/>
+            <a:r>
+              <a:rPr lang="en-US" altLang="zh-CN" dirty="0" smtClean="0">
+                <a:latin typeface="Calibri" panose="020F0502020204030204" pitchFamily="34" charset="0"/>
+                <a:ea typeface="Calibri" panose="020F0502020204030204" pitchFamily="34" charset="0"/>
+                <a:cs typeface="Calibri" panose="020F0502020204030204" pitchFamily="34" charset="0"/>
+              </a:rPr>
+              <a:t>Limits </a:t>
+            </a:r>
+            <a:r>
+              <a:rPr lang="en-US" altLang="zh-CN" dirty="0">
+                <a:latin typeface="Calibri" panose="020F0502020204030204" pitchFamily="34" charset="0"/>
+                <a:ea typeface="Calibri" panose="020F0502020204030204" pitchFamily="34" charset="0"/>
+                <a:cs typeface="Calibri" panose="020F0502020204030204" pitchFamily="34" charset="0"/>
+              </a:rPr>
+              <a:t>each agent's </a:t>
+            </a:r>
+            <a:r>
+              <a:rPr lang="en-US" altLang="zh-CN" dirty="0" smtClean="0">
+                <a:latin typeface="Calibri" panose="020F0502020204030204" pitchFamily="34" charset="0"/>
+                <a:ea typeface="Calibri" panose="020F0502020204030204" pitchFamily="34" charset="0"/>
+                <a:cs typeface="Calibri" panose="020F0502020204030204" pitchFamily="34" charset="0"/>
+              </a:rPr>
+              <a:t>operational scope to specific network domains/areas, devices, protocols and tools as well as </a:t>
+            </a:r>
+            <a:r>
+              <a:rPr lang="en-US" altLang="zh-CN" dirty="0" smtClean="0">
+                <a:latin typeface="Calibri" panose="020F0502020204030204" pitchFamily="34" charset="0"/>
+                <a:ea typeface="Calibri" panose="020F0502020204030204" pitchFamily="34" charset="0"/>
+                <a:cs typeface="Calibri" panose="020F0502020204030204" pitchFamily="34" charset="0"/>
+              </a:rPr>
+              <a:t>network configuration </a:t>
+            </a:r>
+            <a:r>
+              <a:rPr lang="en-US" altLang="zh-CN" dirty="0" smtClean="0">
+                <a:latin typeface="Calibri" panose="020F0502020204030204" pitchFamily="34" charset="0"/>
+                <a:ea typeface="Calibri" panose="020F0502020204030204" pitchFamily="34" charset="0"/>
+                <a:cs typeface="Calibri" panose="020F0502020204030204" pitchFamily="34" charset="0"/>
+              </a:rPr>
+              <a:t>access control (e.g., datastores, modules, nodes, RPCs, etc.)</a:t>
+            </a:r>
+          </a:p>
+          <a:p>
+            <a:r>
+              <a:rPr lang="en-US" altLang="zh-CN" dirty="0" smtClean="0">
+                <a:latin typeface="Calibri" panose="020F0502020204030204" pitchFamily="34" charset="0"/>
+                <a:ea typeface="Calibri" panose="020F0502020204030204" pitchFamily="34" charset="0"/>
+                <a:cs typeface="Calibri" panose="020F0502020204030204" pitchFamily="34" charset="0"/>
+              </a:rPr>
+              <a:t>CTL-2</a:t>
+            </a:r>
+            <a:r>
+              <a:rPr lang="en-US" altLang="zh-CN" dirty="0">
+                <a:latin typeface="Calibri" panose="020F0502020204030204" pitchFamily="34" charset="0"/>
+                <a:ea typeface="Calibri" panose="020F0502020204030204" pitchFamily="34" charset="0"/>
+                <a:cs typeface="Calibri" panose="020F0502020204030204" pitchFamily="34" charset="0"/>
+              </a:rPr>
+              <a:t>: Intent Validation &amp; Alignment</a:t>
+            </a:r>
+          </a:p>
+          <a:p>
+            <a:pPr lvl="1"/>
+            <a:r>
+              <a:rPr lang="en-US" altLang="zh-CN" dirty="0">
+                <a:latin typeface="Calibri" panose="020F0502020204030204" pitchFamily="34" charset="0"/>
+                <a:ea typeface="Calibri" panose="020F0502020204030204" pitchFamily="34" charset="0"/>
+                <a:cs typeface="Calibri" panose="020F0502020204030204" pitchFamily="34" charset="0"/>
+              </a:rPr>
+              <a:t>Requires the agent to check that what it is about to configure actually matches the operational intent it was given, before committing</a:t>
+            </a:r>
+            <a:r>
+              <a:rPr lang="en-US" altLang="zh-CN" dirty="0" smtClean="0">
+                <a:latin typeface="Calibri" panose="020F0502020204030204" pitchFamily="34" charset="0"/>
+                <a:ea typeface="Calibri" panose="020F0502020204030204" pitchFamily="34" charset="0"/>
+                <a:cs typeface="Calibri" panose="020F0502020204030204" pitchFamily="34" charset="0"/>
+              </a:rPr>
+              <a:t>.</a:t>
+            </a:r>
+            <a:endParaRPr lang="en-US" altLang="zh-CN" dirty="0">
+              <a:latin typeface="Calibri" panose="020F0502020204030204" pitchFamily="34" charset="0"/>
+              <a:ea typeface="Calibri" panose="020F0502020204030204" pitchFamily="34" charset="0"/>
+              <a:cs typeface="Calibri" panose="020F0502020204030204" pitchFamily="34" charset="0"/>
+            </a:endParaRPr>
+          </a:p>
+          <a:p>
+            <a:r>
+              <a:rPr lang="en-US" altLang="zh-CN" dirty="0">
+                <a:latin typeface="Calibri" panose="020F0502020204030204" pitchFamily="34" charset="0"/>
+                <a:ea typeface="Calibri" panose="020F0502020204030204" pitchFamily="34" charset="0"/>
+                <a:cs typeface="Calibri" panose="020F0502020204030204" pitchFamily="34" charset="0"/>
+              </a:rPr>
+              <a:t>CTL-3: Temporal &amp; Data/Context Validity</a:t>
+            </a:r>
+          </a:p>
+          <a:p>
+            <a:pPr lvl="1"/>
+            <a:r>
+              <a:rPr lang="en-US" altLang="zh-CN" dirty="0">
+                <a:latin typeface="Calibri" panose="020F0502020204030204" pitchFamily="34" charset="0"/>
+                <a:ea typeface="Calibri" panose="020F0502020204030204" pitchFamily="34" charset="0"/>
+                <a:cs typeface="Calibri" panose="020F0502020204030204" pitchFamily="34" charset="0"/>
+              </a:rPr>
+              <a:t>Ties an agent's actions to a valid operating window and to network state that is still </a:t>
+            </a:r>
+            <a:r>
+              <a:rPr lang="en-US" altLang="zh-CN" dirty="0" smtClean="0">
+                <a:latin typeface="Calibri" panose="020F0502020204030204" pitchFamily="34" charset="0"/>
+                <a:ea typeface="Calibri" panose="020F0502020204030204" pitchFamily="34" charset="0"/>
+                <a:cs typeface="Calibri" panose="020F0502020204030204" pitchFamily="34" charset="0"/>
+              </a:rPr>
+              <a:t>current.</a:t>
+            </a:r>
+            <a:endParaRPr lang="en-US" altLang="zh-CN" dirty="0">
+              <a:latin typeface="Calibri" panose="020F0502020204030204" pitchFamily="34" charset="0"/>
+              <a:ea typeface="Calibri" panose="020F0502020204030204" pitchFamily="34" charset="0"/>
+              <a:cs typeface="Calibri" panose="020F0502020204030204" pitchFamily="34" charset="0"/>
+            </a:endParaRPr>
+          </a:p>
+          <a:p>
+            <a:r>
+              <a:rPr lang="en-US" altLang="zh-CN" dirty="0">
+                <a:latin typeface="Calibri" panose="020F0502020204030204" pitchFamily="34" charset="0"/>
+                <a:ea typeface="Calibri" panose="020F0502020204030204" pitchFamily="34" charset="0"/>
+                <a:cs typeface="Calibri" panose="020F0502020204030204" pitchFamily="34" charset="0"/>
+              </a:rPr>
+              <a:t>CTL-4: Authorization &amp; Approval</a:t>
+            </a:r>
+          </a:p>
+          <a:p>
+            <a:pPr lvl="1"/>
+            <a:r>
+              <a:rPr lang="en-US" altLang="zh-CN" dirty="0" smtClean="0">
+                <a:latin typeface="Calibri" panose="020F0502020204030204" pitchFamily="34" charset="0"/>
+                <a:ea typeface="Calibri" panose="020F0502020204030204" pitchFamily="34" charset="0"/>
+                <a:cs typeface="Calibri" panose="020F0502020204030204" pitchFamily="34" charset="0"/>
+              </a:rPr>
+              <a:t>Specifies of some</a:t>
+            </a:r>
+            <a:r>
+              <a:rPr lang="en-US" altLang="zh-CN" dirty="0" smtClean="0">
+                <a:latin typeface="Calibri" panose="020F0502020204030204" pitchFamily="34" charset="0"/>
+                <a:ea typeface="Calibri" panose="020F0502020204030204" pitchFamily="34" charset="0"/>
+                <a:cs typeface="Calibri" panose="020F0502020204030204" pitchFamily="34" charset="0"/>
+              </a:rPr>
+              <a:t> </a:t>
+            </a:r>
+            <a:r>
+              <a:rPr lang="en-US" altLang="zh-CN" dirty="0">
+                <a:latin typeface="Calibri" panose="020F0502020204030204" pitchFamily="34" charset="0"/>
+                <a:ea typeface="Calibri" panose="020F0502020204030204" pitchFamily="34" charset="0"/>
+                <a:cs typeface="Calibri" panose="020F0502020204030204" pitchFamily="34" charset="0"/>
+              </a:rPr>
+              <a:t>network </a:t>
+            </a:r>
+            <a:r>
+              <a:rPr lang="en-US" altLang="zh-CN" dirty="0" smtClean="0">
+                <a:latin typeface="Calibri" panose="020F0502020204030204" pitchFamily="34" charset="0"/>
+                <a:ea typeface="Calibri" panose="020F0502020204030204" pitchFamily="34" charset="0"/>
+                <a:cs typeface="Calibri" panose="020F0502020204030204" pitchFamily="34" charset="0"/>
+              </a:rPr>
+              <a:t>operations </a:t>
+            </a:r>
+            <a:r>
+              <a:rPr lang="en-US" altLang="zh-CN" dirty="0" smtClean="0">
+                <a:latin typeface="Calibri" panose="020F0502020204030204" pitchFamily="34" charset="0"/>
+                <a:ea typeface="Calibri" panose="020F0502020204030204" pitchFamily="34" charset="0"/>
+                <a:cs typeface="Calibri" panose="020F0502020204030204" pitchFamily="34" charset="0"/>
+              </a:rPr>
+              <a:t>as </a:t>
+            </a:r>
+            <a:r>
+              <a:rPr lang="en-US" altLang="zh-CN" dirty="0">
+                <a:latin typeface="Calibri" panose="020F0502020204030204" pitchFamily="34" charset="0"/>
+                <a:ea typeface="Calibri" panose="020F0502020204030204" pitchFamily="34" charset="0"/>
+                <a:cs typeface="Calibri" panose="020F0502020204030204" pitchFamily="34" charset="0"/>
+              </a:rPr>
+              <a:t>requiring a human decision before </a:t>
+            </a:r>
+            <a:r>
+              <a:rPr lang="en-US" altLang="zh-CN" dirty="0" smtClean="0">
+                <a:latin typeface="Calibri" panose="020F0502020204030204" pitchFamily="34" charset="0"/>
+                <a:ea typeface="Calibri" panose="020F0502020204030204" pitchFamily="34" charset="0"/>
+                <a:cs typeface="Calibri" panose="020F0502020204030204" pitchFamily="34" charset="0"/>
+              </a:rPr>
+              <a:t>execution.</a:t>
+            </a:r>
+            <a:endParaRPr lang="en-US" altLang="zh-CN" dirty="0">
+              <a:latin typeface="Calibri" panose="020F0502020204030204" pitchFamily="34" charset="0"/>
+              <a:ea typeface="Calibri" panose="020F0502020204030204" pitchFamily="34" charset="0"/>
+              <a:cs typeface="Calibri" panose="020F0502020204030204" pitchFamily="34" charset="0"/>
+            </a:endParaRPr>
+          </a:p>
+          <a:p>
+            <a:r>
+              <a:rPr lang="en-US" altLang="zh-CN" dirty="0">
+                <a:latin typeface="Calibri" panose="020F0502020204030204" pitchFamily="34" charset="0"/>
+                <a:ea typeface="Calibri" panose="020F0502020204030204" pitchFamily="34" charset="0"/>
+                <a:cs typeface="Calibri" panose="020F0502020204030204" pitchFamily="34" charset="0"/>
+              </a:rPr>
+              <a:t>CTL-5: Failure &amp; Liveness</a:t>
+            </a:r>
+          </a:p>
+          <a:p>
+            <a:pPr lvl="1"/>
+            <a:r>
+              <a:rPr lang="en-US" altLang="zh-CN" dirty="0">
+                <a:latin typeface="Calibri" panose="020F0502020204030204" pitchFamily="34" charset="0"/>
+                <a:ea typeface="Calibri" panose="020F0502020204030204" pitchFamily="34" charset="0"/>
+                <a:cs typeface="Calibri" panose="020F0502020204030204" pitchFamily="34" charset="0"/>
+              </a:rPr>
+              <a:t>Defines what an agent does when </a:t>
+            </a:r>
+            <a:r>
+              <a:rPr lang="en-US" altLang="zh-CN" dirty="0" smtClean="0">
+                <a:latin typeface="Calibri" panose="020F0502020204030204" pitchFamily="34" charset="0"/>
+                <a:ea typeface="Calibri" panose="020F0502020204030204" pitchFamily="34" charset="0"/>
+                <a:cs typeface="Calibri" panose="020F0502020204030204" pitchFamily="34" charset="0"/>
+              </a:rPr>
+              <a:t>it encounters predefined failure</a:t>
+            </a:r>
+            <a:r>
+              <a:rPr lang="en-US" altLang="zh-CN" dirty="0" smtClean="0">
+                <a:latin typeface="Calibri" panose="020F0502020204030204" pitchFamily="34" charset="0"/>
+                <a:ea typeface="Calibri" panose="020F0502020204030204" pitchFamily="34" charset="0"/>
+                <a:cs typeface="Calibri" panose="020F0502020204030204" pitchFamily="34" charset="0"/>
+              </a:rPr>
+              <a:t>, </a:t>
+            </a:r>
+            <a:r>
+              <a:rPr lang="en-US" altLang="zh-CN" dirty="0">
+                <a:latin typeface="Calibri" panose="020F0502020204030204" pitchFamily="34" charset="0"/>
+                <a:ea typeface="Calibri" panose="020F0502020204030204" pitchFamily="34" charset="0"/>
+                <a:cs typeface="Calibri" panose="020F0502020204030204" pitchFamily="34" charset="0"/>
+              </a:rPr>
+              <a:t>and requires it to continuously </a:t>
+            </a:r>
+            <a:r>
+              <a:rPr lang="en-US" altLang="zh-CN" dirty="0" smtClean="0">
+                <a:latin typeface="Calibri" panose="020F0502020204030204" pitchFamily="34" charset="0"/>
+                <a:ea typeface="Calibri" panose="020F0502020204030204" pitchFamily="34" charset="0"/>
+                <a:cs typeface="Calibri" panose="020F0502020204030204" pitchFamily="34" charset="0"/>
+              </a:rPr>
+              <a:t>report its liveness</a:t>
+            </a:r>
+            <a:r>
+              <a:rPr lang="en-US" altLang="zh-CN" dirty="0" smtClean="0">
+                <a:latin typeface="Calibri" panose="020F0502020204030204" pitchFamily="34" charset="0"/>
+                <a:ea typeface="Calibri" panose="020F0502020204030204" pitchFamily="34" charset="0"/>
+                <a:cs typeface="Calibri" panose="020F0502020204030204" pitchFamily="34" charset="0"/>
+              </a:rPr>
+              <a:t>.</a:t>
+            </a:r>
+            <a:endParaRPr lang="en-US" altLang="zh-CN" dirty="0">
+              <a:latin typeface="Calibri" panose="020F0502020204030204" pitchFamily="34" charset="0"/>
+              <a:ea typeface="Calibri" panose="020F0502020204030204" pitchFamily="34" charset="0"/>
+              <a:cs typeface="Calibri" panose="020F0502020204030204" pitchFamily="34" charset="0"/>
+            </a:endParaRPr>
+          </a:p>
+          <a:p>
+            <a:pPr lvl="1"/>
+            <a:endParaRPr lang="en-US" altLang="zh-CN" dirty="0">
+              <a:latin typeface="Calibri" panose="020F0502020204030204" pitchFamily="34" charset="0"/>
+              <a:ea typeface="Calibri" panose="020F0502020204030204" pitchFamily="34" charset="0"/>
+              <a:cs typeface="Calibri" panose="020F0502020204030204" pitchFamily="34" charset="0"/>
+            </a:endParaRPr>
+          </a:p>
+          <a:p>
+            <a:endParaRPr lang="zh-CN" altLang="en-US" dirty="0">
+              <a:latin typeface="Calibri" panose="020F0502020204030204" pitchFamily="34" charset="0"/>
+              <a:cs typeface="Calibri" panose="020F0502020204030204" pitchFamily="34" charset="0"/>
+            </a:endParaRPr>
+          </a:p>
+        </p:txBody>
+      </p:sp>
+    </p:spTree>
+    <p:extLst>
+      <p:ext uri="{BB962C8B-B14F-4D97-AF65-F5344CB8AC3E}">
+        <p14:creationId xmlns:p14="http://schemas.microsoft.com/office/powerpoint/2010/main" val="3505180484"/>
+      </p:ext>
+    </p:extLst>
+  </p:cSld>
+  <p:clrMapOvr>
+    <a:masterClrMapping/>
+  </p:clrMapOvr>
+  <p:timing>
+    <p:tnLst>
+      <p:par>
+        <p:cTn id="1" dur="indefinite" restart="never" nodeType="tmRoot"/>
+      </p:par>
+    </p:tnLst>
+  </p:timing>
+</p:sld>
+</file>
+
+<file path=ppt/slides/slide6.xml><?xml version="1.0" encoding="utf-8"?>
+<p:sld xmlns:a="http://schemas.openxmlformats.org/drawingml/2006/main" xmlns:r="http://schemas.openxmlformats.org/officeDocument/2006/relationships" xmlns:p="http://schemas.openxmlformats.org/presentationml/2006/main">
+  <p:cSld>
+    <p:spTree>
+      <p:nvGrpSpPr>
+        <p:cNvPr id="1" name=""/>
+        <p:cNvGrpSpPr/>
+        <p:nvPr/>
+      </p:nvGrpSpPr>
+      <p:grpSpPr>
+        <a:xfrm>
+          <a:off x="0" y="0"/>
+          <a:ext cx="0" cy="0"/>
+          <a:chOff x="0" y="0"/>
+          <a:chExt cx="0" cy="0"/>
+        </a:xfrm>
+      </p:grpSpPr>
+      <p:sp>
+        <p:nvSpPr>
+          <p:cNvPr id="2" name="标题 1">
+            <a:extLst>
+              <a:ext uri="{FF2B5EF4-FFF2-40B4-BE49-F238E27FC236}">
+                <a16:creationId xmlns="" xmlns:a16="http://schemas.microsoft.com/office/drawing/2014/main" id="{5DA4F520-B074-4471-B42B-B29DFB85A1DD}"/>
+              </a:ext>
+            </a:extLst>
+          </p:cNvPr>
+          <p:cNvSpPr>
+            <a:spLocks noGrp="1"/>
+          </p:cNvSpPr>
+          <p:nvPr>
+            <p:ph type="title"/>
+          </p:nvPr>
+        </p:nvSpPr>
+        <p:spPr/>
+        <p:txBody>
+          <a:bodyPr>
+            <a:normAutofit/>
+          </a:bodyPr>
+          <a:lstStyle/>
+          <a:p>
+            <a:r>
+              <a:rPr lang="en-US" altLang="zh-CN" dirty="0">
+                <a:latin typeface="Calibri Light" panose="020F0302020204030204" pitchFamily="34" charset="0"/>
+                <a:ea typeface="Calibri Light" panose="020F0302020204030204" pitchFamily="34" charset="0"/>
+                <a:cs typeface="Calibri Light" panose="020F0302020204030204" pitchFamily="34" charset="0"/>
+              </a:rPr>
               <a:t>Agent Intervention Requirements</a:t>
             </a:r>
-            <a:endParaRPr lang="zh-CN" altLang="en-US" dirty="0"/>
+            <a:endParaRPr lang="zh-CN" altLang="en-US" dirty="0">
+              <a:latin typeface="Calibri Light" panose="020F0302020204030204" pitchFamily="34" charset="0"/>
+              <a:cs typeface="Calibri Light" panose="020F0302020204030204" pitchFamily="34" charset="0"/>
+            </a:endParaRPr>
           </a:p>
         </p:txBody>
       </p:sp>
@@ -5183,7 +6644,7 @@
           <p:cNvPr id="3" name="内容占位符 2">
             <a:extLst>
               <a:ext uri="{FF2B5EF4-FFF2-40B4-BE49-F238E27FC236}">
-                <a16:creationId xmlns:a16="http://schemas.microsoft.com/office/drawing/2014/main" id="{0656D31C-579C-4A31-81EF-445957A060BA}"/>
+                <a16:creationId xmlns="" xmlns:a16="http://schemas.microsoft.com/office/drawing/2014/main" id="{0656D31C-579C-4A31-81EF-445957A060BA}"/>
               </a:ext>
             </a:extLst>
           </p:cNvPr>
@@ -5194,56 +6655,370 @@
             <p:ph idx="1"/>
           </p:nvPr>
         </p:nvSpPr>
-        <p:spPr/>
+        <p:spPr>
+          <a:xfrm>
+            <a:off x="838200" y="1541059"/>
+            <a:ext cx="10515600" cy="4984432"/>
+          </a:xfrm>
+        </p:spPr>
         <p:txBody>
           <a:bodyPr>
-            <a:normAutofit lnSpcReduction="10000"/>
+            <a:normAutofit fontScale="92500" lnSpcReduction="10000"/>
           </a:bodyPr>
           <a:lstStyle/>
           <a:p>
             <a:r>
-              <a:rPr lang="en-US" altLang="zh-CN" dirty="0"/>
-              <a:t>Emergency interruption when the agent deviates from expected behaviors.</a:t>
-            </a:r>
-          </a:p>
-          <a:p>
-            <a:r>
-              <a:rPr lang="en-US" altLang="zh-CN" dirty="0"/>
+              <a:rPr lang="en-US" altLang="zh-CN" dirty="0" smtClean="0">
+                <a:latin typeface="Calibri" panose="020F0502020204030204" pitchFamily="34" charset="0"/>
+                <a:ea typeface="Calibri" panose="020F0502020204030204" pitchFamily="34" charset="0"/>
+                <a:cs typeface="Calibri" panose="020F0502020204030204" pitchFamily="34" charset="0"/>
+              </a:rPr>
+              <a:t>Emergency runtime </a:t>
+            </a:r>
+            <a:r>
+              <a:rPr lang="en-US" altLang="zh-CN" dirty="0">
+                <a:latin typeface="Calibri" panose="020F0502020204030204" pitchFamily="34" charset="0"/>
+                <a:ea typeface="Calibri" panose="020F0502020204030204" pitchFamily="34" charset="0"/>
+                <a:cs typeface="Calibri" panose="020F0502020204030204" pitchFamily="34" charset="0"/>
+              </a:rPr>
+              <a:t>interruption when the agent deviates from expected behaviors.</a:t>
+            </a:r>
+          </a:p>
+          <a:p>
+            <a:r>
+              <a:rPr lang="en-US" altLang="zh-CN" dirty="0">
+                <a:latin typeface="Calibri" panose="020F0502020204030204" pitchFamily="34" charset="0"/>
+                <a:ea typeface="Calibri" panose="020F0502020204030204" pitchFamily="34" charset="0"/>
+                <a:cs typeface="Calibri" panose="020F0502020204030204" pitchFamily="34" charset="0"/>
+              </a:rPr>
               <a:t>INT-1: Execution Interruption</a:t>
             </a:r>
           </a:p>
           <a:p>
-            <a:endParaRPr lang="en-US" altLang="zh-CN" dirty="0"/>
-          </a:p>
-          <a:p>
-            <a:r>
-              <a:rPr lang="en-US" altLang="zh-CN" dirty="0"/>
+            <a:pPr lvl="1"/>
+            <a:r>
+              <a:rPr lang="en-US" altLang="zh-CN" dirty="0">
+                <a:latin typeface="Calibri" panose="020F0502020204030204" pitchFamily="34" charset="0"/>
+                <a:ea typeface="Calibri" panose="020F0502020204030204" pitchFamily="34" charset="0"/>
+                <a:cs typeface="Calibri" panose="020F0502020204030204" pitchFamily="34" charset="0"/>
+              </a:rPr>
+              <a:t>Guarantees an agent can be </a:t>
+            </a:r>
+            <a:r>
+              <a:rPr lang="en-US" altLang="zh-CN" dirty="0" smtClean="0">
+                <a:latin typeface="Calibri" panose="020F0502020204030204" pitchFamily="34" charset="0"/>
+                <a:ea typeface="Calibri" panose="020F0502020204030204" pitchFamily="34" charset="0"/>
+                <a:cs typeface="Calibri" panose="020F0502020204030204" pitchFamily="34" charset="0"/>
+              </a:rPr>
+              <a:t>paused/stopped </a:t>
+            </a:r>
+            <a:r>
+              <a:rPr lang="en-US" altLang="zh-CN" dirty="0">
+                <a:latin typeface="Calibri" panose="020F0502020204030204" pitchFamily="34" charset="0"/>
+                <a:ea typeface="Calibri" panose="020F0502020204030204" pitchFamily="34" charset="0"/>
+                <a:cs typeface="Calibri" panose="020F0502020204030204" pitchFamily="34" charset="0"/>
+              </a:rPr>
+              <a:t>from outside its own decision loop, even if the agent itself is unresponsive or stuck</a:t>
+            </a:r>
+            <a:r>
+              <a:rPr lang="en-US" altLang="zh-CN" dirty="0" smtClean="0">
+                <a:latin typeface="Calibri" panose="020F0502020204030204" pitchFamily="34" charset="0"/>
+                <a:ea typeface="Calibri" panose="020F0502020204030204" pitchFamily="34" charset="0"/>
+                <a:cs typeface="Calibri" panose="020F0502020204030204" pitchFamily="34" charset="0"/>
+              </a:rPr>
+              <a:t>.</a:t>
+            </a:r>
+            <a:endParaRPr lang="en-US" altLang="zh-CN" dirty="0">
+              <a:latin typeface="Calibri" panose="020F0502020204030204" pitchFamily="34" charset="0"/>
+              <a:ea typeface="Calibri" panose="020F0502020204030204" pitchFamily="34" charset="0"/>
+              <a:cs typeface="Calibri" panose="020F0502020204030204" pitchFamily="34" charset="0"/>
+            </a:endParaRPr>
+          </a:p>
+          <a:p>
+            <a:r>
+              <a:rPr lang="en-US" altLang="zh-CN" dirty="0">
+                <a:latin typeface="Calibri" panose="020F0502020204030204" pitchFamily="34" charset="0"/>
+                <a:ea typeface="Calibri" panose="020F0502020204030204" pitchFamily="34" charset="0"/>
+                <a:cs typeface="Calibri" panose="020F0502020204030204" pitchFamily="34" charset="0"/>
+              </a:rPr>
               <a:t>INT-2: Rollback and Recovery</a:t>
             </a:r>
           </a:p>
           <a:p>
-            <a:endParaRPr lang="en-US" altLang="zh-CN" dirty="0"/>
-          </a:p>
-          <a:p>
-            <a:r>
-              <a:rPr lang="en-US" altLang="zh-CN" dirty="0"/>
+            <a:pPr lvl="1"/>
+            <a:r>
+              <a:rPr lang="en-US" altLang="zh-CN" dirty="0" smtClean="0">
+                <a:latin typeface="Calibri" panose="020F0502020204030204" pitchFamily="34" charset="0"/>
+                <a:ea typeface="Calibri" panose="020F0502020204030204" pitchFamily="34" charset="0"/>
+                <a:cs typeface="Calibri" panose="020F0502020204030204" pitchFamily="34" charset="0"/>
+              </a:rPr>
+              <a:t>Able </a:t>
+            </a:r>
+            <a:r>
+              <a:rPr lang="en-US" altLang="zh-CN" dirty="0" smtClean="0">
+                <a:latin typeface="Calibri" panose="020F0502020204030204" pitchFamily="34" charset="0"/>
+                <a:ea typeface="Calibri" panose="020F0502020204030204" pitchFamily="34" charset="0"/>
+                <a:cs typeface="Calibri" panose="020F0502020204030204" pitchFamily="34" charset="0"/>
+              </a:rPr>
+              <a:t>to </a:t>
+            </a:r>
+            <a:r>
+              <a:rPr lang="en-US" altLang="zh-CN" dirty="0">
+                <a:latin typeface="Calibri" panose="020F0502020204030204" pitchFamily="34" charset="0"/>
+                <a:ea typeface="Calibri" panose="020F0502020204030204" pitchFamily="34" charset="0"/>
+                <a:cs typeface="Calibri" panose="020F0502020204030204" pitchFamily="34" charset="0"/>
+              </a:rPr>
+              <a:t>reverse </a:t>
+            </a:r>
+            <a:r>
+              <a:rPr lang="en-US" altLang="zh-CN" dirty="0" smtClean="0">
+                <a:latin typeface="Calibri" panose="020F0502020204030204" pitchFamily="34" charset="0"/>
+                <a:ea typeface="Calibri" panose="020F0502020204030204" pitchFamily="34" charset="0"/>
+                <a:cs typeface="Calibri" panose="020F0502020204030204" pitchFamily="34" charset="0"/>
+              </a:rPr>
+              <a:t>the operations performed by the agent on the network</a:t>
+            </a:r>
+            <a:r>
+              <a:rPr lang="en-US" altLang="zh-CN" dirty="0">
+                <a:latin typeface="Calibri" panose="020F0502020204030204" pitchFamily="34" charset="0"/>
+                <a:ea typeface="Calibri" panose="020F0502020204030204" pitchFamily="34" charset="0"/>
+                <a:cs typeface="Calibri" panose="020F0502020204030204" pitchFamily="34" charset="0"/>
+              </a:rPr>
+              <a:t> </a:t>
+            </a:r>
+            <a:r>
+              <a:rPr lang="en-US" altLang="zh-CN" dirty="0" smtClean="0">
+                <a:latin typeface="Calibri" panose="020F0502020204030204" pitchFamily="34" charset="0"/>
+                <a:ea typeface="Calibri" panose="020F0502020204030204" pitchFamily="34" charset="0"/>
+                <a:cs typeface="Calibri" panose="020F0502020204030204" pitchFamily="34" charset="0"/>
+              </a:rPr>
+              <a:t>based on d</a:t>
+            </a:r>
+            <a:r>
+              <a:rPr lang="en-US" altLang="zh-CN" dirty="0" smtClean="0">
+                <a:latin typeface="Calibri" panose="020F0502020204030204" pitchFamily="34" charset="0"/>
+                <a:ea typeface="Calibri" panose="020F0502020204030204" pitchFamily="34" charset="0"/>
+                <a:cs typeface="Calibri" panose="020F0502020204030204" pitchFamily="34" charset="0"/>
+              </a:rPr>
+              <a:t>ifferent rollback granularity: workflow </a:t>
+            </a:r>
+            <a:r>
+              <a:rPr lang="en-US" altLang="zh-CN" dirty="0" smtClean="0">
+                <a:latin typeface="Calibri" panose="020F0502020204030204" pitchFamily="34" charset="0"/>
+                <a:ea typeface="Calibri" panose="020F0502020204030204" pitchFamily="34" charset="0"/>
+                <a:cs typeface="Calibri" panose="020F0502020204030204" pitchFamily="34" charset="0"/>
+              </a:rPr>
+              <a:t>level, </a:t>
+            </a:r>
+            <a:r>
+              <a:rPr lang="en-US" altLang="zh-CN" dirty="0" smtClean="0">
+                <a:latin typeface="Calibri" panose="020F0502020204030204" pitchFamily="34" charset="0"/>
+                <a:ea typeface="Calibri" panose="020F0502020204030204" pitchFamily="34" charset="0"/>
+                <a:cs typeface="Calibri" panose="020F0502020204030204" pitchFamily="34" charset="0"/>
+              </a:rPr>
+              <a:t>task </a:t>
+            </a:r>
+            <a:r>
+              <a:rPr lang="en-US" altLang="zh-CN" dirty="0" smtClean="0">
+                <a:latin typeface="Calibri" panose="020F0502020204030204" pitchFamily="34" charset="0"/>
+                <a:ea typeface="Calibri" panose="020F0502020204030204" pitchFamily="34" charset="0"/>
+                <a:cs typeface="Calibri" panose="020F0502020204030204" pitchFamily="34" charset="0"/>
+              </a:rPr>
+              <a:t>level, </a:t>
+            </a:r>
+            <a:r>
+              <a:rPr lang="en-US" altLang="zh-CN" dirty="0" smtClean="0">
+                <a:latin typeface="Calibri" panose="020F0502020204030204" pitchFamily="34" charset="0"/>
+                <a:ea typeface="Calibri" panose="020F0502020204030204" pitchFamily="34" charset="0"/>
+                <a:cs typeface="Calibri" panose="020F0502020204030204" pitchFamily="34" charset="0"/>
+              </a:rPr>
+              <a:t>and </a:t>
+            </a:r>
+            <a:r>
+              <a:rPr lang="en-US" altLang="zh-CN" dirty="0" smtClean="0">
+                <a:latin typeface="Calibri" panose="020F0502020204030204" pitchFamily="34" charset="0"/>
+                <a:ea typeface="Calibri" panose="020F0502020204030204" pitchFamily="34" charset="0"/>
+                <a:cs typeface="Calibri" panose="020F0502020204030204" pitchFamily="34" charset="0"/>
+              </a:rPr>
+              <a:t>context </a:t>
+            </a:r>
+            <a:r>
+              <a:rPr lang="en-US" altLang="zh-CN" dirty="0" smtClean="0">
+                <a:latin typeface="Calibri" panose="020F0502020204030204" pitchFamily="34" charset="0"/>
+                <a:ea typeface="Calibri" panose="020F0502020204030204" pitchFamily="34" charset="0"/>
+                <a:cs typeface="Calibri" panose="020F0502020204030204" pitchFamily="34" charset="0"/>
+              </a:rPr>
+              <a:t>level.</a:t>
+            </a:r>
+            <a:endParaRPr lang="en-US" altLang="zh-CN" dirty="0">
+              <a:latin typeface="Calibri" panose="020F0502020204030204" pitchFamily="34" charset="0"/>
+              <a:ea typeface="Calibri" panose="020F0502020204030204" pitchFamily="34" charset="0"/>
+              <a:cs typeface="Calibri" panose="020F0502020204030204" pitchFamily="34" charset="0"/>
+            </a:endParaRPr>
+          </a:p>
+          <a:p>
+            <a:r>
+              <a:rPr lang="en-US" altLang="zh-CN" dirty="0">
+                <a:latin typeface="Calibri" panose="020F0502020204030204" pitchFamily="34" charset="0"/>
+                <a:ea typeface="Calibri" panose="020F0502020204030204" pitchFamily="34" charset="0"/>
+                <a:cs typeface="Calibri" panose="020F0502020204030204" pitchFamily="34" charset="0"/>
+              </a:rPr>
               <a:t>INT-3: Escalation</a:t>
             </a:r>
           </a:p>
           <a:p>
-            <a:endParaRPr lang="en-US" altLang="zh-CN" dirty="0"/>
-          </a:p>
-          <a:p>
-            <a:r>
-              <a:rPr lang="en-US" altLang="zh-CN" dirty="0"/>
-              <a:t>INT-4: Correction</a:t>
-            </a:r>
-          </a:p>
-          <a:p>
-            <a:endParaRPr lang="en-US" altLang="zh-CN" dirty="0"/>
-          </a:p>
-          <a:p>
-            <a:endParaRPr lang="zh-CN" altLang="en-US" dirty="0"/>
+            <a:pPr lvl="1"/>
+            <a:r>
+              <a:rPr lang="en-US" altLang="zh-CN" dirty="0">
+                <a:latin typeface="Calibri" panose="020F0502020204030204" pitchFamily="34" charset="0"/>
+                <a:ea typeface="Calibri" panose="020F0502020204030204" pitchFamily="34" charset="0"/>
+                <a:cs typeface="Calibri" panose="020F0502020204030204" pitchFamily="34" charset="0"/>
+              </a:rPr>
+              <a:t>Moves a decision the current agent </a:t>
+            </a:r>
+            <a:r>
+              <a:rPr lang="en-US" altLang="zh-CN" dirty="0" smtClean="0">
+                <a:latin typeface="Calibri" panose="020F0502020204030204" pitchFamily="34" charset="0"/>
+                <a:ea typeface="Calibri" panose="020F0502020204030204" pitchFamily="34" charset="0"/>
+                <a:cs typeface="Calibri" panose="020F0502020204030204" pitchFamily="34" charset="0"/>
+              </a:rPr>
+              <a:t>can't </a:t>
+            </a:r>
+            <a:r>
+              <a:rPr lang="en-US" altLang="zh-CN" dirty="0">
+                <a:latin typeface="Calibri" panose="020F0502020204030204" pitchFamily="34" charset="0"/>
+                <a:ea typeface="Calibri" panose="020F0502020204030204" pitchFamily="34" charset="0"/>
+                <a:cs typeface="Calibri" panose="020F0502020204030204" pitchFamily="34" charset="0"/>
+              </a:rPr>
+              <a:t>or shouldn't make alone up to someone with broader authority, without losing context</a:t>
+            </a:r>
+            <a:r>
+              <a:rPr lang="en-US" altLang="zh-CN" dirty="0" smtClean="0">
+                <a:latin typeface="Calibri" panose="020F0502020204030204" pitchFamily="34" charset="0"/>
+                <a:ea typeface="Calibri" panose="020F0502020204030204" pitchFamily="34" charset="0"/>
+                <a:cs typeface="Calibri" panose="020F0502020204030204" pitchFamily="34" charset="0"/>
+              </a:rPr>
+              <a:t>.</a:t>
+            </a:r>
+            <a:endParaRPr lang="en-US" altLang="zh-CN" dirty="0">
+              <a:latin typeface="Calibri" panose="020F0502020204030204" pitchFamily="34" charset="0"/>
+              <a:ea typeface="Calibri" panose="020F0502020204030204" pitchFamily="34" charset="0"/>
+              <a:cs typeface="Calibri" panose="020F0502020204030204" pitchFamily="34" charset="0"/>
+            </a:endParaRPr>
+          </a:p>
+          <a:p>
+            <a:r>
+              <a:rPr lang="en-US" altLang="zh-CN" dirty="0">
+                <a:latin typeface="Calibri" panose="020F0502020204030204" pitchFamily="34" charset="0"/>
+                <a:ea typeface="Calibri" panose="020F0502020204030204" pitchFamily="34" charset="0"/>
+                <a:cs typeface="Calibri" panose="020F0502020204030204" pitchFamily="34" charset="0"/>
+              </a:rPr>
+              <a:t>INT-4: </a:t>
+            </a:r>
+            <a:r>
+              <a:rPr lang="en-US" altLang="zh-CN" dirty="0" smtClean="0">
+                <a:latin typeface="Calibri" panose="020F0502020204030204" pitchFamily="34" charset="0"/>
+                <a:ea typeface="Calibri" panose="020F0502020204030204" pitchFamily="34" charset="0"/>
+                <a:cs typeface="Calibri" panose="020F0502020204030204" pitchFamily="34" charset="0"/>
+              </a:rPr>
+              <a:t>Correction</a:t>
+            </a:r>
+          </a:p>
+          <a:p>
+            <a:pPr lvl="1"/>
+            <a:r>
+              <a:rPr lang="en-US" altLang="zh-CN" dirty="0" smtClean="0">
+                <a:latin typeface="Calibri" panose="020F0502020204030204" pitchFamily="34" charset="0"/>
+                <a:ea typeface="Calibri" panose="020F0502020204030204" pitchFamily="34" charset="0"/>
+                <a:cs typeface="Calibri" panose="020F0502020204030204" pitchFamily="34" charset="0"/>
+              </a:rPr>
+              <a:t>Allows</a:t>
+            </a:r>
+            <a:r>
+              <a:rPr lang="en-US" altLang="zh-CN" dirty="0" smtClean="0">
+                <a:latin typeface="Calibri" panose="020F0502020204030204" pitchFamily="34" charset="0"/>
+                <a:ea typeface="Calibri" panose="020F0502020204030204" pitchFamily="34" charset="0"/>
+                <a:cs typeface="Calibri" panose="020F0502020204030204" pitchFamily="34" charset="0"/>
+              </a:rPr>
+              <a:t> </a:t>
+            </a:r>
+            <a:r>
+              <a:rPr lang="en-US" altLang="zh-CN" dirty="0">
+                <a:latin typeface="Calibri" panose="020F0502020204030204" pitchFamily="34" charset="0"/>
+                <a:ea typeface="Calibri" panose="020F0502020204030204" pitchFamily="34" charset="0"/>
+                <a:cs typeface="Calibri" panose="020F0502020204030204" pitchFamily="34" charset="0"/>
+              </a:rPr>
+              <a:t>a supervisor </a:t>
+            </a:r>
+            <a:r>
+              <a:rPr lang="en-US" altLang="zh-CN" dirty="0" smtClean="0">
+                <a:latin typeface="Calibri" panose="020F0502020204030204" pitchFamily="34" charset="0"/>
+                <a:ea typeface="Calibri" panose="020F0502020204030204" pitchFamily="34" charset="0"/>
+                <a:cs typeface="Calibri" panose="020F0502020204030204" pitchFamily="34" charset="0"/>
+              </a:rPr>
+              <a:t>to fix </a:t>
+            </a:r>
+            <a:r>
+              <a:rPr lang="en-US" altLang="zh-CN" dirty="0">
+                <a:latin typeface="Calibri" panose="020F0502020204030204" pitchFamily="34" charset="0"/>
+                <a:ea typeface="Calibri" panose="020F0502020204030204" pitchFamily="34" charset="0"/>
+                <a:cs typeface="Calibri" panose="020F0502020204030204" pitchFamily="34" charset="0"/>
+              </a:rPr>
+              <a:t>what went </a:t>
+            </a:r>
+            <a:r>
+              <a:rPr lang="en-US" altLang="zh-CN" dirty="0" smtClean="0">
+                <a:latin typeface="Calibri" panose="020F0502020204030204" pitchFamily="34" charset="0"/>
+                <a:ea typeface="Calibri" panose="020F0502020204030204" pitchFamily="34" charset="0"/>
+                <a:cs typeface="Calibri" panose="020F0502020204030204" pitchFamily="34" charset="0"/>
+              </a:rPr>
+              <a:t>wrong, e.g., the </a:t>
+            </a:r>
+            <a:r>
+              <a:rPr lang="en-US" altLang="zh-CN" dirty="0">
+                <a:latin typeface="Calibri" panose="020F0502020204030204" pitchFamily="34" charset="0"/>
+                <a:ea typeface="Calibri" panose="020F0502020204030204" pitchFamily="34" charset="0"/>
+                <a:cs typeface="Calibri" panose="020F0502020204030204" pitchFamily="34" charset="0"/>
+              </a:rPr>
+              <a:t>intent, the data, or the </a:t>
+            </a:r>
+            <a:r>
+              <a:rPr lang="en-US" altLang="zh-CN" dirty="0" smtClean="0">
+                <a:latin typeface="Calibri" panose="020F0502020204030204" pitchFamily="34" charset="0"/>
+                <a:ea typeface="Calibri" panose="020F0502020204030204" pitchFamily="34" charset="0"/>
+                <a:cs typeface="Calibri" panose="020F0502020204030204" pitchFamily="34" charset="0"/>
+              </a:rPr>
+              <a:t>plan </a:t>
+            </a:r>
+            <a:r>
+              <a:rPr lang="en-US" altLang="zh-CN" dirty="0">
+                <a:latin typeface="Calibri" panose="020F0502020204030204" pitchFamily="34" charset="0"/>
+                <a:ea typeface="Calibri" panose="020F0502020204030204" pitchFamily="34" charset="0"/>
+                <a:cs typeface="Calibri" panose="020F0502020204030204" pitchFamily="34" charset="0"/>
+              </a:rPr>
+              <a:t>instead of only being able to accept or reject the agent's output.</a:t>
+            </a:r>
+          </a:p>
+          <a:p>
+            <a:pPr lvl="1"/>
+            <a:endParaRPr lang="en-US" altLang="zh-CN" dirty="0">
+              <a:latin typeface="Calibri" panose="020F0502020204030204" pitchFamily="34" charset="0"/>
+              <a:ea typeface="Calibri" panose="020F0502020204030204" pitchFamily="34" charset="0"/>
+              <a:cs typeface="Calibri" panose="020F0502020204030204" pitchFamily="34" charset="0"/>
+            </a:endParaRPr>
+          </a:p>
+          <a:p>
+            <a:endParaRPr lang="en-US" altLang="zh-CN" dirty="0">
+              <a:latin typeface="Calibri" panose="020F0502020204030204" pitchFamily="34" charset="0"/>
+              <a:ea typeface="Calibri" panose="020F0502020204030204" pitchFamily="34" charset="0"/>
+              <a:cs typeface="Calibri" panose="020F0502020204030204" pitchFamily="34" charset="0"/>
+            </a:endParaRPr>
+          </a:p>
+          <a:p>
+            <a:endParaRPr lang="zh-CN" altLang="en-US" dirty="0">
+              <a:latin typeface="Calibri" panose="020F0502020204030204" pitchFamily="34" charset="0"/>
+              <a:cs typeface="Calibri" panose="020F0502020204030204" pitchFamily="34" charset="0"/>
+            </a:endParaRPr>
           </a:p>
         </p:txBody>
       </p:sp>
@@ -5257,6 +7032,107 @@
   <p:clrMapOvr>
     <a:masterClrMapping/>
   </p:clrMapOvr>
+  <p:timing>
+    <p:tnLst>
+      <p:par>
+        <p:cTn id="1" dur="indefinite" restart="never" nodeType="tmRoot"/>
+      </p:par>
+    </p:tnLst>
+  </p:timing>
+</p:sld>
+</file>
+
+<file path=ppt/slides/slide7.xml><?xml version="1.0" encoding="utf-8"?>
+<p:sld xmlns:a="http://schemas.openxmlformats.org/drawingml/2006/main" xmlns:r="http://schemas.openxmlformats.org/officeDocument/2006/relationships" xmlns:p="http://schemas.openxmlformats.org/presentationml/2006/main">
+  <p:cSld>
+    <p:spTree>
+      <p:nvGrpSpPr>
+        <p:cNvPr id="1" name=""/>
+        <p:cNvGrpSpPr/>
+        <p:nvPr/>
+      </p:nvGrpSpPr>
+      <p:grpSpPr>
+        <a:xfrm>
+          <a:off x="0" y="0"/>
+          <a:ext cx="0" cy="0"/>
+          <a:chOff x="0" y="0"/>
+          <a:chExt cx="0" cy="0"/>
+        </a:xfrm>
+      </p:grpSpPr>
+      <p:sp>
+        <p:nvSpPr>
+          <p:cNvPr id="5" name="标题 1"/>
+          <p:cNvSpPr txBox="1">
+            <a:spLocks/>
+          </p:cNvSpPr>
+          <p:nvPr/>
+        </p:nvSpPr>
+        <p:spPr>
+          <a:xfrm>
+            <a:off x="698240" y="2219514"/>
+            <a:ext cx="10515600" cy="1325563"/>
+          </a:xfrm>
+          <a:prstGeom prst="rect">
+            <a:avLst/>
+          </a:prstGeom>
+        </p:spPr>
+        <p:txBody>
+          <a:bodyPr vert="horz" lIns="91440" tIns="45720" rIns="91440" bIns="45720" rtlCol="0" anchor="b">
+            <a:normAutofit/>
+          </a:bodyPr>
+          <a:lstStyle>
+            <a:lvl1pPr algn="ctr" defTabSz="914400" rtl="0" eaLnBrk="1" latinLnBrk="0" hangingPunct="1">
+              <a:lnSpc>
+                <a:spcPct val="90000"/>
+              </a:lnSpc>
+              <a:spcBef>
+                <a:spcPct val="0"/>
+              </a:spcBef>
+              <a:buNone/>
+              <a:defRPr sz="6000" kern="1200">
+                <a:solidFill>
+                  <a:schemeClr val="tx1"/>
+                </a:solidFill>
+                <a:latin typeface="+mj-lt"/>
+                <a:ea typeface="+mj-ea"/>
+                <a:cs typeface="+mj-cs"/>
+              </a:defRPr>
+            </a:lvl1pPr>
+          </a:lstStyle>
+          <a:p>
+            <a:r>
+              <a:rPr lang="en-US" sz="4400" dirty="0" smtClean="0">
+                <a:latin typeface="Calibri" panose="020F0502020204030204" pitchFamily="34" charset="0"/>
+                <a:ea typeface="Calibri" panose="020F0502020204030204" pitchFamily="34" charset="0"/>
+                <a:cs typeface="Calibri" panose="020F0502020204030204" pitchFamily="34" charset="0"/>
+              </a:rPr>
+              <a:t>Comments, Questions, Concerns?</a:t>
+            </a:r>
+            <a:endParaRPr lang="en-US" sz="4400" dirty="0">
+              <a:latin typeface="Calibri" panose="020F0502020204030204" pitchFamily="34" charset="0"/>
+              <a:ea typeface="Calibri" panose="020F0502020204030204" pitchFamily="34" charset="0"/>
+              <a:cs typeface="Calibri" panose="020F0502020204030204" pitchFamily="34" charset="0"/>
+            </a:endParaRPr>
+          </a:p>
+        </p:txBody>
+      </p:sp>
+    </p:spTree>
+    <p:extLst>
+      <p:ext uri="{BB962C8B-B14F-4D97-AF65-F5344CB8AC3E}">
+        <p14:creationId xmlns:p14="http://schemas.microsoft.com/office/powerpoint/2010/main" val="2675414334"/>
+      </p:ext>
+    </p:extLst>
+  </p:cSld>
+  <p:clrMapOvr>
+    <a:masterClrMapping/>
+  </p:clrMapOvr>
+  <p:timing>
+    <p:tnLst>
+      <p:par>
+        <p:cTn id="1" dur="indefinite" restart="never" nodeType="tmRoot"/>
+      </p:par>
+    </p:tnLst>
+  </p:timing>
 </p:sld>
 </file>
 
@@ -5553,4 +7429,265 @@
     </a:ext>
   </a:extLst>
 </a:theme>
+</file>
+
+<file path=ppt/theme/theme2.xml><?xml version="1.0" encoding="utf-8"?>
+<a:theme xmlns:a="http://schemas.openxmlformats.org/drawingml/2006/main" name="Office 主题">
+  <a:themeElements>
+    <a:clrScheme name="Office">
+      <a:dk1>
+        <a:sysClr val="windowText" lastClr="000000"/>
+      </a:dk1>
+      <a:lt1>
+        <a:sysClr val="window" lastClr="FFFFFF"/>
+      </a:lt1>
+      <a:dk2>
+        <a:srgbClr val="44546A"/>
+      </a:dk2>
+      <a:lt2>
+        <a:srgbClr val="E7E6E6"/>
+      </a:lt2>
+      <a:accent1>
+        <a:srgbClr val="5B9BD5"/>
+      </a:accent1>
+      <a:accent2>
+        <a:srgbClr val="ED7D31"/>
+      </a:accent2>
+      <a:accent3>
+        <a:srgbClr val="A5A5A5"/>
+      </a:accent3>
+      <a:accent4>
+        <a:srgbClr val="FFC000"/>
+      </a:accent4>
+      <a:accent5>
+        <a:srgbClr val="4472C4"/>
+      </a:accent5>
+      <a:accent6>
+        <a:srgbClr val="70AD47"/>
+      </a:accent6>
+      <a:hlink>
+        <a:srgbClr val="0563C1"/>
+      </a:hlink>
+      <a:folHlink>
+        <a:srgbClr val="954F72"/>
+      </a:folHlink>
+    </a:clrScheme>
+    <a:fontScheme name="Office">
+      <a:majorFont>
+        <a:latin typeface="Calibri Light" panose="020F0302020204030204"/>
+        <a:ea typeface=""/>
+        <a:cs typeface=""/>
+        <a:font script="Jpan" typeface="ＭＳ Ｐゴシック"/>
+        <a:font script="Hang" typeface="맑은 고딕"/>
+        <a:font script="Hans" typeface="宋体"/>
+        <a:font script="Hant" typeface="新細明體"/>
+        <a:font script="Arab" typeface="Times New Roman"/>
+        <a:font script="Hebr" typeface="Times New Roman"/>
+        <a:font script="Thai" typeface="Angsana New"/>
+        <a:font script="Ethi" typeface="Nyala"/>
+        <a:font script="Beng" typeface="Vrinda"/>
+        <a:font script="Gujr" typeface="Shruti"/>
+        <a:font script="Khmr" typeface="MoolBoran"/>
+        <a:font script="Knda" typeface="Tunga"/>
+        <a:font script="Guru" typeface="Raavi"/>
+        <a:font script="Cans" typeface="Euphemia"/>
+        <a:font script="Cher" typeface="Plantagenet Cherokee"/>
+        <a:font script="Yiii" typeface="Microsoft Yi Baiti"/>
+        <a:font script="Tibt" typeface="Microsoft Himalaya"/>
+        <a:font script="Thaa" typeface="MV Boli"/>
+        <a:font script="Deva" typeface="Mangal"/>
+        <a:font script="Telu" typeface="Gautami"/>
+        <a:font script="Taml" typeface="Latha"/>
+        <a:font script="Syrc" typeface="Estrangelo Edessa"/>
+        <a:font script="Orya" typeface="Kalinga"/>
+        <a:font script="Mlym" typeface="Kartika"/>
+        <a:font script="Laoo" typeface="DokChampa"/>
+        <a:font script="Sinh" typeface="Iskoola Pota"/>
+        <a:font script="Mong" typeface="Mongolian Baiti"/>
+        <a:font script="Viet" typeface="Times New Roman"/>
+        <a:font script="Uigh" typeface="Microsoft Uighur"/>
+        <a:font script="Geor" typeface="Sylfaen"/>
+      </a:majorFont>
+      <a:minorFont>
+        <a:latin typeface="Calibri" panose="020F0502020204030204"/>
+        <a:ea typeface=""/>
+        <a:cs typeface=""/>
+        <a:font script="Jpan" typeface="ＭＳ Ｐゴシック"/>
+        <a:font script="Hang" typeface="맑은 고딕"/>
+        <a:font script="Hans" typeface="宋体"/>
+        <a:font script="Hant" typeface="新細明體"/>
+        <a:font script="Arab" typeface="Arial"/>
+        <a:font script="Hebr" typeface="Arial"/>
+        <a:font script="Thai" typeface="Cordia New"/>
+        <a:font script="Ethi" typeface="Nyala"/>
+        <a:font script="Beng" typeface="Vrinda"/>
+        <a:font script="Gujr" typeface="Shruti"/>
+        <a:font script="Khmr" typeface="DaunPenh"/>
+        <a:font script="Knda" typeface="Tunga"/>
+        <a:font script="Guru" typeface="Raavi"/>
+        <a:font script="Cans" typeface="Euphemia"/>
+        <a:font script="Cher" typeface="Plantagenet Cherokee"/>
+        <a:font script="Yiii" typeface="Microsoft Yi Baiti"/>
+        <a:font script="Tibt" typeface="Microsoft Himalaya"/>
+        <a:font script="Thaa" typeface="MV Boli"/>
+        <a:font script="Deva" typeface="Mangal"/>
+        <a:font script="Telu" typeface="Gautami"/>
+        <a:font script="Taml" typeface="Latha"/>
+        <a:font script="Syrc" typeface="Estrangelo Edessa"/>
+        <a:font script="Orya" typeface="Kalinga"/>
+        <a:font script="Mlym" typeface="Kartika"/>
+        <a:font script="Laoo" typeface="DokChampa"/>
+        <a:font script="Sinh" typeface="Iskoola Pota"/>
+        <a:font script="Mong" typeface="Mongolian Baiti"/>
+        <a:font script="Viet" typeface="Arial"/>
+        <a:font script="Uigh" typeface="Microsoft Uighur"/>
+        <a:font script="Geor" typeface="Sylfaen"/>
+      </a:minorFont>
+    </a:fontScheme>
+    <a:fmtScheme name="Office">
+      <a:fillStyleLst>
+        <a:solidFill>
+          <a:schemeClr val="phClr"/>
+        </a:solidFill>
+        <a:gradFill rotWithShape="1">
+          <a:gsLst>
+            <a:gs pos="0">
+              <a:schemeClr val="phClr">
+                <a:lumMod val="110000"/>
+                <a:satMod val="105000"/>
+                <a:tint val="67000"/>
+              </a:schemeClr>
+            </a:gs>
+            <a:gs pos="50000">
+              <a:schemeClr val="phClr">
+                <a:lumMod val="105000"/>
+                <a:satMod val="103000"/>
+                <a:tint val="73000"/>
+              </a:schemeClr>
+            </a:gs>
+            <a:gs pos="100000">
+              <a:schemeClr val="phClr">
+                <a:lumMod val="105000"/>
+                <a:satMod val="109000"/>
+                <a:tint val="81000"/>
+              </a:schemeClr>
+            </a:gs>
+          </a:gsLst>
+          <a:lin ang="5400000" scaled="0"/>
+        </a:gradFill>
+        <a:gradFill rotWithShape="1">
+          <a:gsLst>
+            <a:gs pos="0">
+              <a:schemeClr val="phClr">
+                <a:satMod val="103000"/>
+                <a:lumMod val="102000"/>
+                <a:tint val="94000"/>
+              </a:schemeClr>
+            </a:gs>
+            <a:gs pos="50000">
+              <a:schemeClr val="phClr">
+                <a:satMod val="110000"/>
+                <a:lumMod val="100000"/>
+                <a:shade val="100000"/>
+              </a:schemeClr>
+            </a:gs>
+            <a:gs pos="100000">
+              <a:schemeClr val="phClr">
+                <a:lumMod val="99000"/>
+                <a:satMod val="120000"/>
+                <a:shade val="78000"/>
+              </a:schemeClr>
+            </a:gs>
+          </a:gsLst>
+          <a:lin ang="5400000" scaled="0"/>
+        </a:gradFill>
+      </a:fillStyleLst>
+      <a:lnStyleLst>
+        <a:ln w="6350" cap="flat" cmpd="sng" algn="ctr">
+          <a:solidFill>
+            <a:schemeClr val="phClr"/>
+          </a:solidFill>
+          <a:prstDash val="solid"/>
+          <a:miter lim="800000"/>
+        </a:ln>
+        <a:ln w="12700" cap="flat" cmpd="sng" algn="ctr">
+          <a:solidFill>
+            <a:schemeClr val="phClr"/>
+          </a:solidFill>
+          <a:prstDash val="solid"/>
+          <a:miter lim="800000"/>
+        </a:ln>
+        <a:ln w="19050" cap="flat" cmpd="sng" algn="ctr">
+          <a:solidFill>
+            <a:schemeClr val="phClr"/>
+          </a:solidFill>
+          <a:prstDash val="solid"/>
+          <a:miter lim="800000"/>
+        </a:ln>
+      </a:lnStyleLst>
+      <a:effectStyleLst>
+        <a:effectStyle>
+          <a:effectLst/>
+        </a:effectStyle>
+        <a:effectStyle>
+          <a:effectLst/>
+        </a:effectStyle>
+        <a:effectStyle>
+          <a:effectLst>
+            <a:outerShdw blurRad="57150" dist="19050" dir="5400000" algn="ctr" rotWithShape="0">
+              <a:srgbClr val="000000">
+                <a:alpha val="63000"/>
+              </a:srgbClr>
+            </a:outerShdw>
+          </a:effectLst>
+        </a:effectStyle>
+      </a:effectStyleLst>
+      <a:bgFillStyleLst>
+        <a:solidFill>
+          <a:schemeClr val="phClr"/>
+        </a:solidFill>
+        <a:solidFill>
+          <a:schemeClr val="phClr">
+            <a:tint val="95000"/>
+            <a:satMod val="170000"/>
+          </a:schemeClr>
+        </a:solidFill>
+        <a:gradFill rotWithShape="1">
+          <a:gsLst>
+            <a:gs pos="0">
+              <a:schemeClr val="phClr">
+                <a:tint val="93000"/>
+                <a:satMod val="150000"/>
+                <a:shade val="98000"/>
+                <a:lumMod val="102000"/>
+              </a:schemeClr>
+            </a:gs>
+            <a:gs pos="50000">
+              <a:schemeClr val="phClr">
+                <a:tint val="98000"/>
+                <a:satMod val="130000"/>
+                <a:shade val="90000"/>
+                <a:lumMod val="103000"/>
+              </a:schemeClr>
+            </a:gs>
+            <a:gs pos="100000">
+              <a:schemeClr val="phClr">
+                <a:shade val="63000"/>
+                <a:satMod val="120000"/>
+              </a:schemeClr>
+            </a:gs>
+          </a:gsLst>
+          <a:lin ang="5400000" scaled="0"/>
+        </a:gradFill>
+      </a:bgFillStyleLst>
+    </a:fmtScheme>
+  </a:themeElements>
+  <a:objectDefaults/>
+  <a:extraClrSchemeLst/>
+  <a:extLst>
+    <a:ext uri="{05A4C25C-085E-4340-85A3-A5531E510DB2}">
+      <thm15:themeFamily xmlns:thm15="http://schemas.microsoft.com/office/thememl/2012/main" name="Office Theme" id="{62F939B6-93AF-4DB8-9C6B-D6C7DFDC589F}" vid="{4A3C46E8-61CC-4603-A589-7422A47A8E4A}"/>
+    </a:ext>
+  </a:extLst>
+</a:theme>
 </file>
--- a/Side Meetings/ICON-requirements.pptx
+++ b/Side Meetings/ICON-requirements.pptx
@@ -10,10 +10,10 @@
   <p:sldIdLst>
     <p:sldId id="256" r:id="rId2"/>
     <p:sldId id="262" r:id="rId3"/>
-    <p:sldId id="260" r:id="rId4"/>
-    <p:sldId id="257" r:id="rId5"/>
-    <p:sldId id="258" r:id="rId6"/>
-    <p:sldId id="259" r:id="rId7"/>
+    <p:sldId id="267" r:id="rId4"/>
+    <p:sldId id="264" r:id="rId5"/>
+    <p:sldId id="265" r:id="rId6"/>
+    <p:sldId id="266" r:id="rId7"/>
     <p:sldId id="263" r:id="rId8"/>
   </p:sldIdLst>
   <p:sldSz cx="12192000" cy="6858000"/>
@@ -203,7 +203,7 @@
           <a:p>
             <a:fld id="{26FD6D93-B7C5-4886-96FE-E919881FC183}" type="datetimeFigureOut">
               <a:rPr lang="en-US" smtClean="0"/>
-              <a:t>7/13/2026</a:t>
+              <a:t>7/14/2026</a:t>
             </a:fld>
             <a:endParaRPr lang="en-US"/>
           </a:p>
@@ -559,98 +559,6 @@
 </p:notes>
 </file>
 
-<file path=ppt/notesSlides/notesSlide2.xml><?xml version="1.0" encoding="utf-8"?>
-<p:notes xmlns:a="http://schemas.openxmlformats.org/drawingml/2006/main" xmlns:r="http://schemas.openxmlformats.org/officeDocument/2006/relationships" xmlns:p="http://schemas.openxmlformats.org/presentationml/2006/main">
-  <p:cSld>
-    <p:spTree>
-      <p:nvGrpSpPr>
-        <p:cNvPr id="1" name=""/>
-        <p:cNvGrpSpPr/>
-        <p:nvPr/>
-      </p:nvGrpSpPr>
-      <p:grpSpPr>
-        <a:xfrm>
-          <a:off x="0" y="0"/>
-          <a:ext cx="0" cy="0"/>
-          <a:chOff x="0" y="0"/>
-          <a:chExt cx="0" cy="0"/>
-        </a:xfrm>
-      </p:grpSpPr>
-      <p:sp>
-        <p:nvSpPr>
-          <p:cNvPr id="2" name="幻灯片图像占位符 1"/>
-          <p:cNvSpPr>
-            <a:spLocks noGrp="1" noRot="1" noChangeAspect="1"/>
-          </p:cNvSpPr>
-          <p:nvPr>
-            <p:ph type="sldImg"/>
-          </p:nvPr>
-        </p:nvSpPr>
-        <p:spPr/>
-      </p:sp>
-      <p:sp>
-        <p:nvSpPr>
-          <p:cNvPr id="3" name="备注占位符 2"/>
-          <p:cNvSpPr>
-            <a:spLocks noGrp="1"/>
-          </p:cNvSpPr>
-          <p:nvPr>
-            <p:ph type="body" idx="1"/>
-          </p:nvPr>
-        </p:nvSpPr>
-        <p:spPr/>
-        <p:txBody>
-          <a:bodyPr/>
-          <a:lstStyle/>
-          <a:p>
-            <a:r>
-              <a:rPr lang="en-US" dirty="0" smtClean="0"/>
-              <a:t>Examples to How to</a:t>
-            </a:r>
-            <a:r>
-              <a:rPr lang="en-US" baseline="0" dirty="0" smtClean="0"/>
-              <a:t> derive the requirements</a:t>
-            </a:r>
-            <a:endParaRPr lang="en-US" dirty="0"/>
-          </a:p>
-        </p:txBody>
-      </p:sp>
-      <p:sp>
-        <p:nvSpPr>
-          <p:cNvPr id="4" name="灯片编号占位符 3"/>
-          <p:cNvSpPr>
-            <a:spLocks noGrp="1"/>
-          </p:cNvSpPr>
-          <p:nvPr>
-            <p:ph type="sldNum" sz="quarter" idx="10"/>
-          </p:nvPr>
-        </p:nvSpPr>
-        <p:spPr/>
-        <p:txBody>
-          <a:bodyPr/>
-          <a:lstStyle/>
-          <a:p>
-            <a:fld id="{D18227E5-88AC-47A5-A984-521F15CE18F0}" type="slidenum">
-              <a:rPr lang="en-US" smtClean="0"/>
-              <a:t>4</a:t>
-            </a:fld>
-            <a:endParaRPr lang="en-US"/>
-          </a:p>
-        </p:txBody>
-      </p:sp>
-    </p:spTree>
-    <p:extLst>
-      <p:ext uri="{BB962C8B-B14F-4D97-AF65-F5344CB8AC3E}">
-        <p14:creationId xmlns:p14="http://schemas.microsoft.com/office/powerpoint/2010/main" val="3847713879"/>
-      </p:ext>
-    </p:extLst>
-  </p:cSld>
-  <p:clrMapOvr>
-    <a:masterClrMapping/>
-  </p:clrMapOvr>
-</p:notes>
-</file>
-
 <file path=ppt/slideLayouts/slideLayout1.xml><?xml version="1.0" encoding="utf-8"?>
 <p:sldLayout xmlns:a="http://schemas.openxmlformats.org/drawingml/2006/main" xmlns:r="http://schemas.openxmlformats.org/officeDocument/2006/relationships" xmlns:p="http://schemas.openxmlformats.org/presentationml/2006/main" type="title" preserve="1">
   <p:cSld name="标题幻灯片">
@@ -798,7 +706,7 @@
           <a:p>
             <a:fld id="{D993279A-1075-4D69-8304-6D9EBC8FBB92}" type="datetimeFigureOut">
               <a:rPr lang="zh-CN" altLang="en-US" smtClean="0"/>
-              <a:t>2026/7/13</a:t>
+              <a:t>2026/7/14</a:t>
             </a:fld>
             <a:endParaRPr lang="zh-CN" altLang="en-US"/>
           </a:p>
@@ -996,7 +904,7 @@
           <a:p>
             <a:fld id="{D993279A-1075-4D69-8304-6D9EBC8FBB92}" type="datetimeFigureOut">
               <a:rPr lang="zh-CN" altLang="en-US" smtClean="0"/>
-              <a:t>2026/7/13</a:t>
+              <a:t>2026/7/14</a:t>
             </a:fld>
             <a:endParaRPr lang="zh-CN" altLang="en-US"/>
           </a:p>
@@ -1204,7 +1112,7 @@
           <a:p>
             <a:fld id="{D993279A-1075-4D69-8304-6D9EBC8FBB92}" type="datetimeFigureOut">
               <a:rPr lang="zh-CN" altLang="en-US" smtClean="0"/>
-              <a:t>2026/7/13</a:t>
+              <a:t>2026/7/14</a:t>
             </a:fld>
             <a:endParaRPr lang="zh-CN" altLang="en-US"/>
           </a:p>
@@ -1402,7 +1310,7 @@
           <a:p>
             <a:fld id="{D993279A-1075-4D69-8304-6D9EBC8FBB92}" type="datetimeFigureOut">
               <a:rPr lang="zh-CN" altLang="en-US" smtClean="0"/>
-              <a:t>2026/7/13</a:t>
+              <a:t>2026/7/14</a:t>
             </a:fld>
             <a:endParaRPr lang="zh-CN" altLang="en-US"/>
           </a:p>
@@ -1677,7 +1585,7 @@
           <a:p>
             <a:fld id="{D993279A-1075-4D69-8304-6D9EBC8FBB92}" type="datetimeFigureOut">
               <a:rPr lang="zh-CN" altLang="en-US" smtClean="0"/>
-              <a:t>2026/7/13</a:t>
+              <a:t>2026/7/14</a:t>
             </a:fld>
             <a:endParaRPr lang="zh-CN" altLang="en-US"/>
           </a:p>
@@ -1942,7 +1850,7 @@
           <a:p>
             <a:fld id="{D993279A-1075-4D69-8304-6D9EBC8FBB92}" type="datetimeFigureOut">
               <a:rPr lang="zh-CN" altLang="en-US" smtClean="0"/>
-              <a:t>2026/7/13</a:t>
+              <a:t>2026/7/14</a:t>
             </a:fld>
             <a:endParaRPr lang="zh-CN" altLang="en-US"/>
           </a:p>
@@ -2354,7 +2262,7 @@
           <a:p>
             <a:fld id="{D993279A-1075-4D69-8304-6D9EBC8FBB92}" type="datetimeFigureOut">
               <a:rPr lang="zh-CN" altLang="en-US" smtClean="0"/>
-              <a:t>2026/7/13</a:t>
+              <a:t>2026/7/14</a:t>
             </a:fld>
             <a:endParaRPr lang="zh-CN" altLang="en-US"/>
           </a:p>
@@ -2495,7 +2403,7 @@
           <a:p>
             <a:fld id="{D993279A-1075-4D69-8304-6D9EBC8FBB92}" type="datetimeFigureOut">
               <a:rPr lang="zh-CN" altLang="en-US" smtClean="0"/>
-              <a:t>2026/7/13</a:t>
+              <a:t>2026/7/14</a:t>
             </a:fld>
             <a:endParaRPr lang="zh-CN" altLang="en-US"/>
           </a:p>
@@ -2608,7 +2516,7 @@
           <a:p>
             <a:fld id="{D993279A-1075-4D69-8304-6D9EBC8FBB92}" type="datetimeFigureOut">
               <a:rPr lang="zh-CN" altLang="en-US" smtClean="0"/>
-              <a:t>2026/7/13</a:t>
+              <a:t>2026/7/14</a:t>
             </a:fld>
             <a:endParaRPr lang="zh-CN" altLang="en-US"/>
           </a:p>
@@ -2919,7 +2827,7 @@
           <a:p>
             <a:fld id="{D993279A-1075-4D69-8304-6D9EBC8FBB92}" type="datetimeFigureOut">
               <a:rPr lang="zh-CN" altLang="en-US" smtClean="0"/>
-              <a:t>2026/7/13</a:t>
+              <a:t>2026/7/14</a:t>
             </a:fld>
             <a:endParaRPr lang="zh-CN" altLang="en-US"/>
           </a:p>
@@ -3207,7 +3115,7 @@
           <a:p>
             <a:fld id="{D993279A-1075-4D69-8304-6D9EBC8FBB92}" type="datetimeFigureOut">
               <a:rPr lang="zh-CN" altLang="en-US" smtClean="0"/>
-              <a:t>2026/7/13</a:t>
+              <a:t>2026/7/14</a:t>
             </a:fld>
             <a:endParaRPr lang="zh-CN" altLang="en-US"/>
           </a:p>
@@ -3448,7 +3356,7 @@
           <a:p>
             <a:fld id="{D993279A-1075-4D69-8304-6D9EBC8FBB92}" type="datetimeFigureOut">
               <a:rPr lang="zh-CN" altLang="en-US" smtClean="0"/>
-              <a:t>2026/7/13</a:t>
+              <a:t>2026/7/14</a:t>
             </a:fld>
             <a:endParaRPr lang="zh-CN" altLang="en-US"/>
           </a:p>
@@ -3993,9 +3901,29 @@
               <a:rPr lang="zh-CN" altLang="en-US" dirty="0">
                 <a:latin typeface="Calibri Light" panose="020F0302020204030204" pitchFamily="34" charset="0"/>
                 <a:cs typeface="Calibri Light" panose="020F0302020204030204" pitchFamily="34" charset="0"/>
+                <a:hlinkClick r:id="rId2"/>
               </a:rPr>
-              <a:t>https://datatracker.ietf.org/doc/draft-mcw-opsawg-icon-requirements/</a:t>
-            </a:r>
+              <a:t>https://datatracker.ietf.org/doc/draft-mcw-opsawg-icon-requirements</a:t>
+            </a:r>
+            <a:r>
+              <a:rPr lang="zh-CN" altLang="en-US" dirty="0" smtClean="0">
+                <a:latin typeface="Calibri Light" panose="020F0302020204030204" pitchFamily="34" charset="0"/>
+                <a:cs typeface="Calibri Light" panose="020F0302020204030204" pitchFamily="34" charset="0"/>
+                <a:hlinkClick r:id="rId2"/>
+              </a:rPr>
+              <a:t>/</a:t>
+            </a:r>
+            <a:r>
+              <a:rPr lang="zh-CN" altLang="en-US" dirty="0" smtClean="0">
+                <a:latin typeface="Calibri Light" panose="020F0302020204030204" pitchFamily="34" charset="0"/>
+                <a:cs typeface="Calibri Light" panose="020F0302020204030204" pitchFamily="34" charset="0"/>
+              </a:rPr>
+              <a:t> </a:t>
+            </a:r>
+            <a:endParaRPr lang="zh-CN" altLang="en-US" dirty="0">
+              <a:latin typeface="Calibri Light" panose="020F0302020204030204" pitchFamily="34" charset="0"/>
+              <a:cs typeface="Calibri Light" panose="020F0302020204030204" pitchFamily="34" charset="0"/>
+            </a:endParaRPr>
           </a:p>
         </p:txBody>
       </p:sp>
@@ -4056,13 +3984,14 @@
           <a:bodyPr/>
           <a:lstStyle/>
           <a:p>
+            <a:pPr algn="ctr"/>
             <a:r>
               <a:rPr lang="en-US" dirty="0" smtClean="0">
                 <a:latin typeface="Calibri Light" panose="020F0302020204030204" pitchFamily="34" charset="0"/>
                 <a:ea typeface="Calibri Light" panose="020F0302020204030204" pitchFamily="34" charset="0"/>
                 <a:cs typeface="Calibri Light" panose="020F0302020204030204" pitchFamily="34" charset="0"/>
               </a:rPr>
-              <a:t>Scope &amp; Key Terminology</a:t>
+              <a:t>Scope</a:t>
             </a:r>
             <a:endParaRPr lang="en-US" dirty="0">
               <a:latin typeface="Calibri Light" panose="020F0302020204030204" pitchFamily="34" charset="0"/>
@@ -4085,33 +4014,30 @@
         <p:spPr>
           <a:xfrm>
             <a:off x="838200" y="1409989"/>
-            <a:ext cx="11165378" cy="5206942"/>
+            <a:ext cx="10898080" cy="5206942"/>
           </a:xfrm>
         </p:spPr>
         <p:txBody>
           <a:bodyPr>
-            <a:normAutofit fontScale="92500"/>
+            <a:normAutofit/>
           </a:bodyPr>
           <a:lstStyle/>
           <a:p>
             <a:r>
-              <a:rPr lang="en-US" dirty="0" smtClean="0">
+              <a:rPr lang="en-US" altLang="zh-CN" dirty="0" smtClean="0">
                 <a:latin typeface="Calibri" panose="020F0502020204030204" pitchFamily="34" charset="0"/>
                 <a:ea typeface="Calibri" panose="020F0502020204030204" pitchFamily="34" charset="0"/>
                 <a:cs typeface="Calibri" panose="020F0502020204030204" pitchFamily="34" charset="0"/>
               </a:rPr>
-              <a:t>Scope</a:t>
-            </a:r>
-          </a:p>
-          <a:p>
-            <a:pPr lvl="1"/>
+              <a:t>Defines </a:t>
+            </a:r>
             <a:r>
               <a:rPr lang="en-US" altLang="zh-CN" dirty="0">
                 <a:latin typeface="Calibri" panose="020F0502020204030204" pitchFamily="34" charset="0"/>
                 <a:ea typeface="Calibri" panose="020F0502020204030204" pitchFamily="34" charset="0"/>
                 <a:cs typeface="Calibri" panose="020F0502020204030204" pitchFamily="34" charset="0"/>
               </a:rPr>
-              <a:t>Defines the architecture and </a:t>
+              <a:t>the architecture and </a:t>
             </a:r>
             <a:r>
               <a:rPr lang="en-US" altLang="zh-CN" dirty="0" smtClean="0">
@@ -4127,7 +4053,7 @@
                 <a:ea typeface="Calibri" panose="020F0502020204030204" pitchFamily="34" charset="0"/>
                 <a:cs typeface="Calibri" panose="020F0502020204030204" pitchFamily="34" charset="0"/>
               </a:rPr>
-              <a:t>between an agent and its supervision system </a:t>
+              <a:t>between an agent and its </a:t>
             </a:r>
             <a:r>
               <a:rPr lang="en-US" altLang="zh-CN" dirty="0" smtClean="0">
@@ -4135,32 +4061,17 @@
                 <a:ea typeface="Calibri" panose="020F0502020204030204" pitchFamily="34" charset="0"/>
                 <a:cs typeface="Calibri" panose="020F0502020204030204" pitchFamily="34" charset="0"/>
               </a:rPr>
-              <a:t>that enables to see </a:t>
-            </a:r>
-            <a:r>
-              <a:rPr lang="en-US" altLang="zh-CN" dirty="0">
-                <a:latin typeface="Calibri" panose="020F0502020204030204" pitchFamily="34" charset="0"/>
-                <a:ea typeface="Calibri" panose="020F0502020204030204" pitchFamily="34" charset="0"/>
-                <a:cs typeface="Calibri" panose="020F0502020204030204" pitchFamily="34" charset="0"/>
-              </a:rPr>
-              <a:t>what an agent is doing, bound what it is allowed to do, and intervene when </a:t>
-            </a:r>
-            <a:r>
-              <a:rPr lang="en-US" altLang="zh-CN" dirty="0" smtClean="0">
-                <a:latin typeface="Calibri" panose="020F0502020204030204" pitchFamily="34" charset="0"/>
-                <a:ea typeface="Calibri" panose="020F0502020204030204" pitchFamily="34" charset="0"/>
-                <a:cs typeface="Calibri" panose="020F0502020204030204" pitchFamily="34" charset="0"/>
-              </a:rPr>
-              <a:t>necessary</a:t>
-            </a:r>
-            <a:endParaRPr lang="en-US" altLang="zh-CN" dirty="0">
+              <a:t>management plane </a:t>
+            </a:r>
+          </a:p>
+          <a:p>
+            <a:endParaRPr lang="en-US" dirty="0" smtClean="0">
               <a:latin typeface="Calibri" panose="020F0502020204030204" pitchFamily="34" charset="0"/>
               <a:ea typeface="Calibri" panose="020F0502020204030204" pitchFamily="34" charset="0"/>
               <a:cs typeface="Calibri" panose="020F0502020204030204" pitchFamily="34" charset="0"/>
             </a:endParaRPr>
           </a:p>
           <a:p>
-            <a:pPr lvl="1"/>
             <a:r>
               <a:rPr lang="en-US" dirty="0" smtClean="0">
                 <a:latin typeface="Calibri" panose="020F0502020204030204" pitchFamily="34" charset="0"/>
@@ -4169,9 +4080,14 @@
               </a:rPr>
               <a:t>Solution-neutral</a:t>
             </a:r>
-          </a:p>
-          <a:p>
-            <a:pPr lvl="2"/>
+            <a:endParaRPr lang="en-US" dirty="0" smtClean="0">
+              <a:latin typeface="Calibri" panose="020F0502020204030204" pitchFamily="34" charset="0"/>
+              <a:ea typeface="Calibri" panose="020F0502020204030204" pitchFamily="34" charset="0"/>
+              <a:cs typeface="Calibri" panose="020F0502020204030204" pitchFamily="34" charset="0"/>
+            </a:endParaRPr>
+          </a:p>
+          <a:p>
+            <a:pPr lvl="1"/>
             <a:r>
               <a:rPr lang="en-US" dirty="0">
                 <a:latin typeface="Calibri" panose="020F0502020204030204" pitchFamily="34" charset="0"/>
@@ -4190,18 +4106,32 @@
             </a:r>
           </a:p>
           <a:p>
-            <a:pPr lvl="1"/>
+            <a:endParaRPr lang="en-US" dirty="0" smtClean="0">
+              <a:latin typeface="Calibri" panose="020F0502020204030204" pitchFamily="34" charset="0"/>
+              <a:ea typeface="Calibri" panose="020F0502020204030204" pitchFamily="34" charset="0"/>
+              <a:cs typeface="Calibri" panose="020F0502020204030204" pitchFamily="34" charset="0"/>
+            </a:endParaRPr>
+          </a:p>
+          <a:p>
+            <a:r>
+              <a:rPr lang="en-US" dirty="0" smtClean="0">
+                <a:latin typeface="Calibri" panose="020F0502020204030204" pitchFamily="34" charset="0"/>
+                <a:ea typeface="Calibri" panose="020F0502020204030204" pitchFamily="34" charset="0"/>
+                <a:cs typeface="Calibri" panose="020F0502020204030204" pitchFamily="34" charset="0"/>
+              </a:rPr>
+              <a:t>Companion </a:t>
+            </a:r>
             <a:r>
               <a:rPr lang="en-US" dirty="0">
                 <a:latin typeface="Calibri" panose="020F0502020204030204" pitchFamily="34" charset="0"/>
                 <a:ea typeface="Calibri" panose="020F0502020204030204" pitchFamily="34" charset="0"/>
                 <a:cs typeface="Calibri" panose="020F0502020204030204" pitchFamily="34" charset="0"/>
               </a:rPr>
-              <a:t>Companion Problem Statement</a:t>
-            </a:r>
-          </a:p>
-          <a:p>
-            <a:pPr lvl="2"/>
+              <a:t>Problem Statement</a:t>
+            </a:r>
+          </a:p>
+          <a:p>
+            <a:pPr lvl="1"/>
             <a:r>
               <a:rPr lang="en-US" dirty="0">
                 <a:latin typeface="Calibri" panose="020F0502020204030204" pitchFamily="34" charset="0"/>
@@ -4255,97 +4185,6 @@
               <a:ea typeface="Calibri" panose="020F0502020204030204" pitchFamily="34" charset="0"/>
               <a:cs typeface="Calibri" panose="020F0502020204030204" pitchFamily="34" charset="0"/>
             </a:endParaRPr>
-          </a:p>
-          <a:p>
-            <a:r>
-              <a:rPr lang="en-US" dirty="0" smtClean="0">
-                <a:latin typeface="Calibri" panose="020F0502020204030204" pitchFamily="34" charset="0"/>
-                <a:ea typeface="Calibri" panose="020F0502020204030204" pitchFamily="34" charset="0"/>
-                <a:cs typeface="Calibri" panose="020F0502020204030204" pitchFamily="34" charset="0"/>
-              </a:rPr>
-              <a:t>Key Terms</a:t>
-            </a:r>
-          </a:p>
-          <a:p>
-            <a:pPr lvl="1"/>
-            <a:r>
-              <a:rPr lang="en-US" dirty="0" smtClean="0">
-                <a:latin typeface="Calibri" panose="020F0502020204030204" pitchFamily="34" charset="0"/>
-                <a:ea typeface="Calibri" panose="020F0502020204030204" pitchFamily="34" charset="0"/>
-                <a:cs typeface="Calibri" panose="020F0502020204030204" pitchFamily="34" charset="0"/>
-              </a:rPr>
-              <a:t>Supervisor</a:t>
-            </a:r>
-          </a:p>
-          <a:p>
-            <a:pPr lvl="2"/>
-            <a:r>
-              <a:rPr lang="en-US" dirty="0">
-                <a:latin typeface="Calibri" panose="020F0502020204030204" pitchFamily="34" charset="0"/>
-                <a:ea typeface="Calibri" panose="020F0502020204030204" pitchFamily="34" charset="0"/>
-                <a:cs typeface="Calibri" panose="020F0502020204030204" pitchFamily="34" charset="0"/>
-              </a:rPr>
-              <a:t>The entity responsible for monitoring, controlling, and intervening in the agent's lifecycle </a:t>
-            </a:r>
-            <a:r>
-              <a:rPr lang="en-US" dirty="0" smtClean="0">
-                <a:latin typeface="Calibri" panose="020F0502020204030204" pitchFamily="34" charset="0"/>
-                <a:ea typeface="Calibri" panose="020F0502020204030204" pitchFamily="34" charset="0"/>
-                <a:cs typeface="Calibri" panose="020F0502020204030204" pitchFamily="34" charset="0"/>
-              </a:rPr>
-              <a:t>—it could be </a:t>
-            </a:r>
-            <a:r>
-              <a:rPr lang="en-US" dirty="0">
-                <a:latin typeface="Calibri" panose="020F0502020204030204" pitchFamily="34" charset="0"/>
-                <a:ea typeface="Calibri" panose="020F0502020204030204" pitchFamily="34" charset="0"/>
-                <a:cs typeface="Calibri" panose="020F0502020204030204" pitchFamily="34" charset="0"/>
-              </a:rPr>
-              <a:t>a human operator, an automated high-privilege supervision system, or an orchestrator</a:t>
-            </a:r>
-            <a:r>
-              <a:rPr lang="en-US" dirty="0" smtClean="0">
-                <a:latin typeface="Calibri" panose="020F0502020204030204" pitchFamily="34" charset="0"/>
-                <a:ea typeface="Calibri" panose="020F0502020204030204" pitchFamily="34" charset="0"/>
-                <a:cs typeface="Calibri" panose="020F0502020204030204" pitchFamily="34" charset="0"/>
-              </a:rPr>
-              <a:t>.</a:t>
-            </a:r>
-          </a:p>
-          <a:p>
-            <a:pPr lvl="1"/>
-            <a:r>
-              <a:rPr lang="en-US" dirty="0" smtClean="0">
-                <a:latin typeface="Calibri" panose="020F0502020204030204" pitchFamily="34" charset="0"/>
-                <a:ea typeface="Calibri" panose="020F0502020204030204" pitchFamily="34" charset="0"/>
-                <a:cs typeface="Calibri" panose="020F0502020204030204" pitchFamily="34" charset="0"/>
-              </a:rPr>
-              <a:t>Agent </a:t>
-            </a:r>
-            <a:r>
-              <a:rPr lang="en-US" dirty="0" smtClean="0">
-                <a:latin typeface="Calibri" panose="020F0502020204030204" pitchFamily="34" charset="0"/>
-                <a:ea typeface="Calibri" panose="020F0502020204030204" pitchFamily="34" charset="0"/>
-                <a:cs typeface="Calibri" panose="020F0502020204030204" pitchFamily="34" charset="0"/>
-              </a:rPr>
-              <a:t>Supervision/orchestration</a:t>
-            </a:r>
-            <a:endParaRPr lang="en-US" dirty="0" smtClean="0">
-              <a:latin typeface="Calibri" panose="020F0502020204030204" pitchFamily="34" charset="0"/>
-              <a:ea typeface="Calibri" panose="020F0502020204030204" pitchFamily="34" charset="0"/>
-              <a:cs typeface="Calibri" panose="020F0502020204030204" pitchFamily="34" charset="0"/>
-            </a:endParaRPr>
-          </a:p>
-          <a:p>
-            <a:pPr lvl="2"/>
-            <a:r>
-              <a:rPr lang="en-US" dirty="0">
-                <a:latin typeface="Calibri" panose="020F0502020204030204" pitchFamily="34" charset="0"/>
-                <a:ea typeface="Calibri" panose="020F0502020204030204" pitchFamily="34" charset="0"/>
-                <a:cs typeface="Calibri" panose="020F0502020204030204" pitchFamily="34" charset="0"/>
-              </a:rPr>
-              <a:t>The administrative and operational capabilities that continuously monitor, constrain, and guide agent behavior, retaining ultimate authority to modify, overrule, or terminate operations.</a:t>
-            </a:r>
           </a:p>
           <a:p>
             <a:pPr lvl="2"/>
@@ -4437,602 +4276,6 @@
       </p:sp>
       <p:sp>
         <p:nvSpPr>
-          <p:cNvPr id="4" name="Shape 3">
-            <a:extLst>
-              <a:ext uri="{FF2B5EF4-FFF2-40B4-BE49-F238E27FC236}">
-                <a16:creationId xmlns="" xmlns:a16="http://schemas.microsoft.com/office/drawing/2014/main" id="{084A49AC-22B0-479D-84F4-E5240D126EB4}"/>
-              </a:ext>
-            </a:extLst>
-          </p:cNvPr>
-          <p:cNvSpPr/>
-          <p:nvPr/>
-        </p:nvSpPr>
-        <p:spPr>
-          <a:xfrm>
-            <a:off x="99753" y="1328117"/>
-            <a:ext cx="7726680" cy="2764654"/>
-          </a:xfrm>
-          <a:prstGeom prst="roundRect">
-            <a:avLst>
-              <a:gd name="adj" fmla="val 4324"/>
-            </a:avLst>
-          </a:prstGeom>
-          <a:solidFill>
-            <a:srgbClr val="EAF1F5"/>
-          </a:solidFill>
-          <a:ln w="15875">
-            <a:solidFill>
-              <a:srgbClr val="065A82"/>
-            </a:solidFill>
-            <a:prstDash val="solid"/>
-          </a:ln>
-        </p:spPr>
-      </p:sp>
-      <p:sp>
-        <p:nvSpPr>
-          <p:cNvPr id="5" name="Text 4">
-            <a:extLst>
-              <a:ext uri="{FF2B5EF4-FFF2-40B4-BE49-F238E27FC236}">
-                <a16:creationId xmlns="" xmlns:a16="http://schemas.microsoft.com/office/drawing/2014/main" id="{E14E1904-9F56-42DE-94AC-08636BE459DB}"/>
-              </a:ext>
-            </a:extLst>
-          </p:cNvPr>
-          <p:cNvSpPr/>
-          <p:nvPr/>
-        </p:nvSpPr>
-        <p:spPr>
-          <a:xfrm>
-            <a:off x="282633" y="1387553"/>
-            <a:ext cx="5486400" cy="256032"/>
-          </a:xfrm>
-          <a:prstGeom prst="rect">
-            <a:avLst/>
-          </a:prstGeom>
-          <a:noFill/>
-          <a:ln/>
-        </p:spPr>
-        <p:txBody>
-          <a:bodyPr wrap="square" rtlCol="0" anchor="ctr"/>
-          <a:lstStyle/>
-          <a:p>
-            <a:pPr marL="0" indent="0">
-              <a:buNone/>
-            </a:pPr>
-            <a:r>
-              <a:rPr lang="en-US" sz="1050" b="1" kern="0" spc="150" dirty="0">
-                <a:solidFill>
-                  <a:srgbClr val="065A82"/>
-                </a:solidFill>
-                <a:latin typeface="Calibri" panose="020F0502020204030204" pitchFamily="34" charset="0"/>
-                <a:ea typeface="Calibri" panose="020F0502020204030204" pitchFamily="34" charset="0"/>
-                <a:cs typeface="Calibri" panose="020F0502020204030204" pitchFamily="34" charset="0"/>
-              </a:rPr>
-              <a:t>AGENT </a:t>
-            </a:r>
-            <a:r>
-              <a:rPr lang="en-US" sz="1050" b="1" kern="0" spc="150" dirty="0" smtClean="0">
-                <a:solidFill>
-                  <a:srgbClr val="065A82"/>
-                </a:solidFill>
-                <a:latin typeface="Calibri" panose="020F0502020204030204" pitchFamily="34" charset="0"/>
-                <a:ea typeface="Calibri" panose="020F0502020204030204" pitchFamily="34" charset="0"/>
-                <a:cs typeface="Calibri" panose="020F0502020204030204" pitchFamily="34" charset="0"/>
-              </a:rPr>
-              <a:t>MANAGEMENT PLANE</a:t>
-            </a:r>
-            <a:endParaRPr lang="en-US" sz="1050" dirty="0">
-              <a:latin typeface="Calibri" panose="020F0502020204030204" pitchFamily="34" charset="0"/>
-              <a:ea typeface="Calibri" panose="020F0502020204030204" pitchFamily="34" charset="0"/>
-              <a:cs typeface="Calibri" panose="020F0502020204030204" pitchFamily="34" charset="0"/>
-            </a:endParaRPr>
-          </a:p>
-        </p:txBody>
-      </p:sp>
-      <p:sp>
-        <p:nvSpPr>
-          <p:cNvPr id="8" name="Shape 7">
-            <a:extLst>
-              <a:ext uri="{FF2B5EF4-FFF2-40B4-BE49-F238E27FC236}">
-                <a16:creationId xmlns="" xmlns:a16="http://schemas.microsoft.com/office/drawing/2014/main" id="{A1E3834F-61D2-47DF-A6DD-1128B2086890}"/>
-              </a:ext>
-            </a:extLst>
-          </p:cNvPr>
-          <p:cNvSpPr/>
-          <p:nvPr/>
-        </p:nvSpPr>
-        <p:spPr>
-          <a:xfrm>
-            <a:off x="374073" y="2247089"/>
-            <a:ext cx="7232073" cy="658368"/>
-          </a:xfrm>
-          <a:prstGeom prst="roundRect">
-            <a:avLst>
-              <a:gd name="adj" fmla="val 8333"/>
-            </a:avLst>
-          </a:prstGeom>
-          <a:solidFill>
-            <a:srgbClr val="FFFFFF"/>
-          </a:solidFill>
-          <a:ln w="15875">
-            <a:solidFill>
-              <a:srgbClr val="1C7293"/>
-            </a:solidFill>
-            <a:prstDash val="solid"/>
-          </a:ln>
-        </p:spPr>
-      </p:sp>
-      <p:sp>
-        <p:nvSpPr>
-          <p:cNvPr id="9" name="Text 8">
-            <a:extLst>
-              <a:ext uri="{FF2B5EF4-FFF2-40B4-BE49-F238E27FC236}">
-                <a16:creationId xmlns="" xmlns:a16="http://schemas.microsoft.com/office/drawing/2014/main" id="{BD8BDB0D-9DFE-4382-99D3-4D92871BEBB8}"/>
-              </a:ext>
-            </a:extLst>
-          </p:cNvPr>
-          <p:cNvSpPr/>
-          <p:nvPr/>
-        </p:nvSpPr>
-        <p:spPr>
-          <a:xfrm>
-            <a:off x="511233" y="2274521"/>
-            <a:ext cx="2194560" cy="219456"/>
-          </a:xfrm>
-          <a:prstGeom prst="rect">
-            <a:avLst/>
-          </a:prstGeom>
-          <a:noFill/>
-          <a:ln/>
-        </p:spPr>
-        <p:txBody>
-          <a:bodyPr wrap="square" rtlCol="0" anchor="ctr"/>
-          <a:lstStyle/>
-          <a:p>
-            <a:pPr marL="0" indent="0">
-              <a:buNone/>
-            </a:pPr>
-            <a:r>
-              <a:rPr lang="en-US" sz="950" b="1" dirty="0" smtClean="0">
-                <a:solidFill>
-                  <a:srgbClr val="1C7293"/>
-                </a:solidFill>
-                <a:latin typeface="Calibri" panose="020F0502020204030204" pitchFamily="34" charset="0"/>
-                <a:ea typeface="Calibri" panose="020F0502020204030204" pitchFamily="34" charset="0"/>
-                <a:cs typeface="Calibri" panose="020F0502020204030204" pitchFamily="34" charset="0"/>
-              </a:rPr>
-              <a:t>Agent Supervisor/client</a:t>
-            </a:r>
-            <a:endParaRPr lang="en-US" sz="950" dirty="0">
-              <a:latin typeface="Calibri" panose="020F0502020204030204" pitchFamily="34" charset="0"/>
-              <a:ea typeface="Calibri" panose="020F0502020204030204" pitchFamily="34" charset="0"/>
-              <a:cs typeface="Calibri" panose="020F0502020204030204" pitchFamily="34" charset="0"/>
-            </a:endParaRPr>
-          </a:p>
-        </p:txBody>
-      </p:sp>
-      <p:sp>
-        <p:nvSpPr>
-          <p:cNvPr id="10" name="Shape 9">
-            <a:extLst>
-              <a:ext uri="{FF2B5EF4-FFF2-40B4-BE49-F238E27FC236}">
-                <a16:creationId xmlns="" xmlns:a16="http://schemas.microsoft.com/office/drawing/2014/main" id="{4C3E7FC3-82A4-44D7-9B20-FF42D54A4D31}"/>
-              </a:ext>
-            </a:extLst>
-          </p:cNvPr>
-          <p:cNvSpPr/>
-          <p:nvPr/>
-        </p:nvSpPr>
-        <p:spPr>
-          <a:xfrm>
-            <a:off x="963053" y="2530828"/>
-            <a:ext cx="1874520" cy="310896"/>
-          </a:xfrm>
-          <a:prstGeom prst="roundRect">
-            <a:avLst>
-              <a:gd name="adj" fmla="val 14706"/>
-            </a:avLst>
-          </a:prstGeom>
-          <a:solidFill>
-            <a:srgbClr val="1C7293"/>
-          </a:solidFill>
-          <a:ln w="12700">
-            <a:solidFill>
-              <a:srgbClr val="1C7293"/>
-            </a:solidFill>
-            <a:prstDash val="solid"/>
-          </a:ln>
-        </p:spPr>
-      </p:sp>
-      <p:sp>
-        <p:nvSpPr>
-          <p:cNvPr id="11" name="Text 10">
-            <a:extLst>
-              <a:ext uri="{FF2B5EF4-FFF2-40B4-BE49-F238E27FC236}">
-                <a16:creationId xmlns="" xmlns:a16="http://schemas.microsoft.com/office/drawing/2014/main" id="{DE8F064D-56AD-4F90-AB08-0714FA4E4182}"/>
-              </a:ext>
-            </a:extLst>
-          </p:cNvPr>
-          <p:cNvSpPr/>
-          <p:nvPr/>
-        </p:nvSpPr>
-        <p:spPr>
-          <a:xfrm>
-            <a:off x="282633" y="2521587"/>
-            <a:ext cx="3230880" cy="310896"/>
-          </a:xfrm>
-          <a:prstGeom prst="rect">
-            <a:avLst/>
-          </a:prstGeom>
-          <a:noFill/>
-          <a:ln/>
-        </p:spPr>
-        <p:txBody>
-          <a:bodyPr wrap="square" rtlCol="0" anchor="ctr"/>
-          <a:lstStyle/>
-          <a:p>
-            <a:pPr marL="0" indent="0" algn="ctr">
-              <a:buNone/>
-            </a:pPr>
-            <a:r>
-              <a:rPr lang="en-US" sz="1100" b="1" dirty="0">
-                <a:solidFill>
-                  <a:srgbClr val="FFFFFF"/>
-                </a:solidFill>
-                <a:latin typeface="Calibri" panose="020F0502020204030204" pitchFamily="34" charset="0"/>
-                <a:ea typeface="Calibri" panose="020F0502020204030204" pitchFamily="34" charset="0"/>
-                <a:cs typeface="Calibri" panose="020F0502020204030204" pitchFamily="34" charset="0"/>
-              </a:rPr>
-              <a:t>Observability</a:t>
-            </a:r>
-            <a:endParaRPr lang="en-US" sz="1100" dirty="0">
-              <a:latin typeface="Calibri" panose="020F0502020204030204" pitchFamily="34" charset="0"/>
-              <a:ea typeface="Calibri" panose="020F0502020204030204" pitchFamily="34" charset="0"/>
-              <a:cs typeface="Calibri" panose="020F0502020204030204" pitchFamily="34" charset="0"/>
-            </a:endParaRPr>
-          </a:p>
-        </p:txBody>
-      </p:sp>
-      <p:sp>
-        <p:nvSpPr>
-          <p:cNvPr id="12" name="Shape 11">
-            <a:extLst>
-              <a:ext uri="{FF2B5EF4-FFF2-40B4-BE49-F238E27FC236}">
-                <a16:creationId xmlns="" xmlns:a16="http://schemas.microsoft.com/office/drawing/2014/main" id="{50911C78-4C0C-4660-87F8-D05FE2DEFB5E}"/>
-              </a:ext>
-            </a:extLst>
-          </p:cNvPr>
-          <p:cNvSpPr/>
-          <p:nvPr/>
-        </p:nvSpPr>
-        <p:spPr>
-          <a:xfrm>
-            <a:off x="2909455" y="2521940"/>
-            <a:ext cx="1964087" cy="310896"/>
-          </a:xfrm>
-          <a:prstGeom prst="roundRect">
-            <a:avLst>
-              <a:gd name="adj" fmla="val 14706"/>
-            </a:avLst>
-          </a:prstGeom>
-          <a:solidFill>
-            <a:srgbClr val="1C7293"/>
-          </a:solidFill>
-          <a:ln w="12700">
-            <a:solidFill>
-              <a:srgbClr val="1C7293"/>
-            </a:solidFill>
-            <a:prstDash val="solid"/>
-          </a:ln>
-        </p:spPr>
-      </p:sp>
-      <p:sp>
-        <p:nvSpPr>
-          <p:cNvPr id="13" name="Text 12">
-            <a:extLst>
-              <a:ext uri="{FF2B5EF4-FFF2-40B4-BE49-F238E27FC236}">
-                <a16:creationId xmlns="" xmlns:a16="http://schemas.microsoft.com/office/drawing/2014/main" id="{C0211E05-C7AE-4C7E-916D-D648E59EAF77}"/>
-              </a:ext>
-            </a:extLst>
-          </p:cNvPr>
-          <p:cNvSpPr/>
-          <p:nvPr/>
-        </p:nvSpPr>
-        <p:spPr>
-          <a:xfrm>
-            <a:off x="2185922" y="2521587"/>
-            <a:ext cx="3230880" cy="310896"/>
-          </a:xfrm>
-          <a:prstGeom prst="rect">
-            <a:avLst/>
-          </a:prstGeom>
-          <a:noFill/>
-          <a:ln/>
-        </p:spPr>
-        <p:txBody>
-          <a:bodyPr wrap="square" rtlCol="0" anchor="ctr"/>
-          <a:lstStyle/>
-          <a:p>
-            <a:pPr marL="0" indent="0" algn="ctr">
-              <a:buNone/>
-            </a:pPr>
-            <a:r>
-              <a:rPr lang="en-US" sz="1100" b="1" dirty="0">
-                <a:solidFill>
-                  <a:srgbClr val="FFFFFF"/>
-                </a:solidFill>
-                <a:latin typeface="Calibri" panose="020F0502020204030204" pitchFamily="34" charset="0"/>
-                <a:ea typeface="Calibri" panose="020F0502020204030204" pitchFamily="34" charset="0"/>
-                <a:cs typeface="Calibri" panose="020F0502020204030204" pitchFamily="34" charset="0"/>
-              </a:rPr>
-              <a:t>Control</a:t>
-            </a:r>
-            <a:endParaRPr lang="en-US" sz="1100" dirty="0">
-              <a:latin typeface="Calibri" panose="020F0502020204030204" pitchFamily="34" charset="0"/>
-              <a:ea typeface="Calibri" panose="020F0502020204030204" pitchFamily="34" charset="0"/>
-              <a:cs typeface="Calibri" panose="020F0502020204030204" pitchFamily="34" charset="0"/>
-            </a:endParaRPr>
-          </a:p>
-        </p:txBody>
-      </p:sp>
-      <p:sp>
-        <p:nvSpPr>
-          <p:cNvPr id="14" name="Shape 13">
-            <a:extLst>
-              <a:ext uri="{FF2B5EF4-FFF2-40B4-BE49-F238E27FC236}">
-                <a16:creationId xmlns="" xmlns:a16="http://schemas.microsoft.com/office/drawing/2014/main" id="{11A12F61-F2D3-4C92-92F2-93CF044584DF}"/>
-              </a:ext>
-            </a:extLst>
-          </p:cNvPr>
-          <p:cNvSpPr/>
-          <p:nvPr/>
-        </p:nvSpPr>
-        <p:spPr>
-          <a:xfrm>
-            <a:off x="4969095" y="2521587"/>
-            <a:ext cx="1925089" cy="310896"/>
-          </a:xfrm>
-          <a:prstGeom prst="roundRect">
-            <a:avLst>
-              <a:gd name="adj" fmla="val 14706"/>
-            </a:avLst>
-          </a:prstGeom>
-          <a:solidFill>
-            <a:srgbClr val="1C7293"/>
-          </a:solidFill>
-          <a:ln w="12700">
-            <a:solidFill>
-              <a:srgbClr val="1C7293"/>
-            </a:solidFill>
-            <a:prstDash val="solid"/>
-          </a:ln>
-        </p:spPr>
-      </p:sp>
-      <p:sp>
-        <p:nvSpPr>
-          <p:cNvPr id="15" name="Text 14">
-            <a:extLst>
-              <a:ext uri="{FF2B5EF4-FFF2-40B4-BE49-F238E27FC236}">
-                <a16:creationId xmlns="" xmlns:a16="http://schemas.microsoft.com/office/drawing/2014/main" id="{99537C58-24EC-4FCF-8EDF-6445F71A6305}"/>
-              </a:ext>
-            </a:extLst>
-          </p:cNvPr>
-          <p:cNvSpPr/>
-          <p:nvPr/>
-        </p:nvSpPr>
-        <p:spPr>
-          <a:xfrm>
-            <a:off x="4237046" y="2506270"/>
-            <a:ext cx="3230880" cy="310896"/>
-          </a:xfrm>
-          <a:prstGeom prst="rect">
-            <a:avLst/>
-          </a:prstGeom>
-          <a:noFill/>
-          <a:ln/>
-        </p:spPr>
-        <p:txBody>
-          <a:bodyPr wrap="square" rtlCol="0" anchor="ctr"/>
-          <a:lstStyle/>
-          <a:p>
-            <a:pPr marL="0" indent="0" algn="ctr">
-              <a:buNone/>
-            </a:pPr>
-            <a:r>
-              <a:rPr lang="en-US" sz="1100" b="1" dirty="0">
-                <a:solidFill>
-                  <a:srgbClr val="FFFFFF"/>
-                </a:solidFill>
-                <a:latin typeface="Calibri" panose="020F0502020204030204" pitchFamily="34" charset="0"/>
-                <a:ea typeface="Calibri" panose="020F0502020204030204" pitchFamily="34" charset="0"/>
-                <a:cs typeface="Calibri" panose="020F0502020204030204" pitchFamily="34" charset="0"/>
-              </a:rPr>
-              <a:t>Intervention</a:t>
-            </a:r>
-            <a:endParaRPr lang="en-US" sz="1100" dirty="0">
-              <a:latin typeface="Calibri" panose="020F0502020204030204" pitchFamily="34" charset="0"/>
-              <a:ea typeface="Calibri" panose="020F0502020204030204" pitchFamily="34" charset="0"/>
-              <a:cs typeface="Calibri" panose="020F0502020204030204" pitchFamily="34" charset="0"/>
-            </a:endParaRPr>
-          </a:p>
-        </p:txBody>
-      </p:sp>
-      <p:sp>
-        <p:nvSpPr>
-          <p:cNvPr id="17" name="Text 16">
-            <a:extLst>
-              <a:ext uri="{FF2B5EF4-FFF2-40B4-BE49-F238E27FC236}">
-                <a16:creationId xmlns="" xmlns:a16="http://schemas.microsoft.com/office/drawing/2014/main" id="{11C60039-1D73-45C5-BCDD-09191E6C51F7}"/>
-              </a:ext>
-            </a:extLst>
-          </p:cNvPr>
-          <p:cNvSpPr/>
-          <p:nvPr/>
-        </p:nvSpPr>
-        <p:spPr>
-          <a:xfrm>
-            <a:off x="4234646" y="3033473"/>
-            <a:ext cx="2103120" cy="274320"/>
-          </a:xfrm>
-          <a:prstGeom prst="rect">
-            <a:avLst/>
-          </a:prstGeom>
-          <a:noFill/>
-          <a:ln/>
-        </p:spPr>
-        <p:txBody>
-          <a:bodyPr wrap="square" rtlCol="0" anchor="ctr"/>
-          <a:lstStyle/>
-          <a:p>
-            <a:pPr marL="0" indent="0">
-              <a:buNone/>
-            </a:pPr>
-            <a:r>
-              <a:rPr lang="en-US" sz="1050" i="1" dirty="0" smtClean="0">
-                <a:solidFill>
-                  <a:srgbClr val="5B6B78"/>
-                </a:solidFill>
-                <a:latin typeface="Calibri" panose="020F0502020204030204" pitchFamily="34" charset="0"/>
-                <a:ea typeface="Calibri" panose="020F0502020204030204" pitchFamily="34" charset="0"/>
-                <a:cs typeface="Calibri" panose="020F0502020204030204" pitchFamily="34" charset="0"/>
-              </a:rPr>
-              <a:t>Management </a:t>
-            </a:r>
-            <a:r>
-              <a:rPr lang="en-US" sz="1050" i="1" dirty="0" smtClean="0">
-                <a:solidFill>
-                  <a:srgbClr val="5B6B78"/>
-                </a:solidFill>
-                <a:latin typeface="Calibri" panose="020F0502020204030204" pitchFamily="34" charset="0"/>
-                <a:ea typeface="Calibri" panose="020F0502020204030204" pitchFamily="34" charset="0"/>
-                <a:cs typeface="Calibri" panose="020F0502020204030204" pitchFamily="34" charset="0"/>
-              </a:rPr>
-              <a:t>Interface</a:t>
-            </a:r>
-            <a:endParaRPr lang="en-US" sz="1050" dirty="0">
-              <a:latin typeface="Calibri" panose="020F0502020204030204" pitchFamily="34" charset="0"/>
-              <a:ea typeface="Calibri" panose="020F0502020204030204" pitchFamily="34" charset="0"/>
-              <a:cs typeface="Calibri" panose="020F0502020204030204" pitchFamily="34" charset="0"/>
-            </a:endParaRPr>
-          </a:p>
-        </p:txBody>
-      </p:sp>
-      <p:sp>
-        <p:nvSpPr>
-          <p:cNvPr id="18" name="Shape 17">
-            <a:extLst>
-              <a:ext uri="{FF2B5EF4-FFF2-40B4-BE49-F238E27FC236}">
-                <a16:creationId xmlns="" xmlns:a16="http://schemas.microsoft.com/office/drawing/2014/main" id="{71AD3023-618D-4E2C-BC52-E288B8EEC79D}"/>
-              </a:ext>
-            </a:extLst>
-          </p:cNvPr>
-          <p:cNvSpPr/>
-          <p:nvPr/>
-        </p:nvSpPr>
-        <p:spPr>
-          <a:xfrm>
-            <a:off x="229741" y="3369948"/>
-            <a:ext cx="7323513" cy="502920"/>
-          </a:xfrm>
-          <a:prstGeom prst="roundRect">
-            <a:avLst>
-              <a:gd name="adj" fmla="val 14545"/>
-            </a:avLst>
-          </a:prstGeom>
-          <a:solidFill>
-            <a:srgbClr val="E8A33D"/>
-          </a:solidFill>
-          <a:ln w="12700">
-            <a:solidFill>
-              <a:srgbClr val="E8A33D"/>
-            </a:solidFill>
-            <a:prstDash val="solid"/>
-          </a:ln>
-        </p:spPr>
-      </p:sp>
-      <p:sp>
-        <p:nvSpPr>
-          <p:cNvPr id="19" name="Text 18">
-            <a:extLst>
-              <a:ext uri="{FF2B5EF4-FFF2-40B4-BE49-F238E27FC236}">
-                <a16:creationId xmlns="" xmlns:a16="http://schemas.microsoft.com/office/drawing/2014/main" id="{5D74EED8-82B6-4AA2-A162-53BF5C8F9FA8}"/>
-              </a:ext>
-            </a:extLst>
-          </p:cNvPr>
-          <p:cNvSpPr/>
-          <p:nvPr/>
-        </p:nvSpPr>
-        <p:spPr>
-          <a:xfrm>
-            <a:off x="142824" y="3369948"/>
-            <a:ext cx="6940972" cy="502920"/>
-          </a:xfrm>
-          <a:prstGeom prst="rect">
-            <a:avLst/>
-          </a:prstGeom>
-          <a:noFill/>
-          <a:ln/>
-        </p:spPr>
-        <p:txBody>
-          <a:bodyPr wrap="square" rtlCol="0" anchor="ctr"/>
-          <a:lstStyle/>
-          <a:p>
-            <a:pPr marL="0" indent="0" algn="ctr">
-              <a:buNone/>
-            </a:pPr>
-            <a:r>
-              <a:rPr lang="en-US" sz="1300" b="1" dirty="0">
-                <a:solidFill>
-                  <a:srgbClr val="1A2340"/>
-                </a:solidFill>
-                <a:latin typeface="Calibri" panose="020F0502020204030204" pitchFamily="34" charset="0"/>
-                <a:ea typeface="Calibri" panose="020F0502020204030204" pitchFamily="34" charset="0"/>
-                <a:cs typeface="Calibri" panose="020F0502020204030204" pitchFamily="34" charset="0"/>
-              </a:rPr>
-              <a:t>S</a:t>
-            </a:r>
-            <a:r>
-              <a:rPr lang="en-US" sz="1300" b="1" dirty="0" smtClean="0">
-                <a:solidFill>
-                  <a:srgbClr val="1A2340"/>
-                </a:solidFill>
-                <a:latin typeface="Calibri" panose="020F0502020204030204" pitchFamily="34" charset="0"/>
-                <a:ea typeface="Calibri" panose="020F0502020204030204" pitchFamily="34" charset="0"/>
-                <a:cs typeface="Calibri" panose="020F0502020204030204" pitchFamily="34" charset="0"/>
-              </a:rPr>
-              <a:t>upervision</a:t>
-            </a:r>
-            <a:r>
-              <a:rPr lang="en-US" sz="1300" b="1" dirty="0" smtClean="0">
-                <a:solidFill>
-                  <a:srgbClr val="1A2340"/>
-                </a:solidFill>
-                <a:latin typeface="Calibri" panose="020F0502020204030204" pitchFamily="34" charset="0"/>
-                <a:ea typeface="Calibri" panose="020F0502020204030204" pitchFamily="34" charset="0"/>
-                <a:cs typeface="Calibri" panose="020F0502020204030204" pitchFamily="34" charset="0"/>
-              </a:rPr>
-              <a:t> Enforcement </a:t>
-            </a:r>
-            <a:r>
-              <a:rPr lang="en-US" sz="1300" b="1" dirty="0" smtClean="0">
-                <a:solidFill>
-                  <a:srgbClr val="1A2340"/>
-                </a:solidFill>
-                <a:latin typeface="Calibri" panose="020F0502020204030204" pitchFamily="34" charset="0"/>
-                <a:ea typeface="Calibri" panose="020F0502020204030204" pitchFamily="34" charset="0"/>
-                <a:cs typeface="Calibri" panose="020F0502020204030204" pitchFamily="34" charset="0"/>
-              </a:rPr>
-              <a:t>Entity/server</a:t>
-            </a:r>
-            <a:endParaRPr lang="en-US" sz="1300" dirty="0">
-              <a:latin typeface="Calibri" panose="020F0502020204030204" pitchFamily="34" charset="0"/>
-              <a:ea typeface="Calibri" panose="020F0502020204030204" pitchFamily="34" charset="0"/>
-              <a:cs typeface="Calibri" panose="020F0502020204030204" pitchFamily="34" charset="0"/>
-            </a:endParaRPr>
-          </a:p>
-        </p:txBody>
-      </p:sp>
-      <p:sp>
-        <p:nvSpPr>
           <p:cNvPr id="21" name="Shape 20">
             <a:extLst>
               <a:ext uri="{FF2B5EF4-FFF2-40B4-BE49-F238E27FC236}">
@@ -5045,8 +4288,8 @@
         </p:nvSpPr>
         <p:spPr>
           <a:xfrm>
-            <a:off x="99754" y="4295345"/>
-            <a:ext cx="7726680" cy="1444752"/>
+            <a:off x="52829" y="3902775"/>
+            <a:ext cx="6507769" cy="1444752"/>
           </a:xfrm>
           <a:prstGeom prst="roundRect">
             <a:avLst>
@@ -5078,8 +4321,8 @@
         </p:nvSpPr>
         <p:spPr>
           <a:xfrm>
-            <a:off x="282633" y="4368497"/>
-            <a:ext cx="5486400" cy="256032"/>
+            <a:off x="235708" y="3975927"/>
+            <a:ext cx="4620901" cy="256032"/>
           </a:xfrm>
           <a:prstGeom prst="rect">
             <a:avLst/>
@@ -5127,8 +4370,8 @@
         </p:nvSpPr>
         <p:spPr>
           <a:xfrm>
-            <a:off x="374073" y="4679393"/>
-            <a:ext cx="7232073" cy="438912"/>
+            <a:off x="327149" y="4286823"/>
+            <a:ext cx="6091188" cy="438912"/>
           </a:xfrm>
           <a:prstGeom prst="roundRect">
             <a:avLst>
@@ -5160,8 +4403,8 @@
         </p:nvSpPr>
         <p:spPr>
           <a:xfrm>
-            <a:off x="374073" y="4679393"/>
-            <a:ext cx="6350924" cy="438912"/>
+            <a:off x="767722" y="4269158"/>
+            <a:ext cx="5349043" cy="438912"/>
           </a:xfrm>
           <a:prstGeom prst="rect">
             <a:avLst/>
@@ -5209,8 +4452,8 @@
         </p:nvSpPr>
         <p:spPr>
           <a:xfrm>
-            <a:off x="374073" y="5246321"/>
-            <a:ext cx="7232073" cy="384048"/>
+            <a:off x="300734" y="4853751"/>
+            <a:ext cx="6091188" cy="384048"/>
           </a:xfrm>
           <a:prstGeom prst="roundRect">
             <a:avLst>
@@ -5242,8 +4485,8 @@
         </p:nvSpPr>
         <p:spPr>
           <a:xfrm>
-            <a:off x="374073" y="5246321"/>
-            <a:ext cx="6458989" cy="384048"/>
+            <a:off x="659657" y="4853751"/>
+            <a:ext cx="5440061" cy="384048"/>
           </a:xfrm>
           <a:prstGeom prst="rect">
             <a:avLst/>
@@ -5291,8 +4534,8 @@
         </p:nvSpPr>
         <p:spPr>
           <a:xfrm>
-            <a:off x="4234646" y="5758162"/>
-            <a:ext cx="2103120" cy="274320"/>
+            <a:off x="3577095" y="5374898"/>
+            <a:ext cx="1771345" cy="274320"/>
           </a:xfrm>
           <a:prstGeom prst="rect">
             <a:avLst/>
@@ -5340,8 +4583,8 @@
         </p:nvSpPr>
         <p:spPr>
           <a:xfrm>
-            <a:off x="99754" y="6041849"/>
-            <a:ext cx="7726680" cy="411480"/>
+            <a:off x="52829" y="5667344"/>
+            <a:ext cx="6507769" cy="411480"/>
           </a:xfrm>
           <a:prstGeom prst="roundRect">
             <a:avLst>
@@ -5373,8 +4616,8 @@
         </p:nvSpPr>
         <p:spPr>
           <a:xfrm>
-            <a:off x="-238115" y="6050546"/>
-            <a:ext cx="8387542" cy="411480"/>
+            <a:off x="805287" y="5655260"/>
+            <a:ext cx="5422674" cy="411480"/>
           </a:xfrm>
           <a:prstGeom prst="rect">
             <a:avLst/>
@@ -5408,46 +4651,6 @@
           </a:p>
         </p:txBody>
       </p:sp>
-      <p:cxnSp>
-        <p:nvCxnSpPr>
-          <p:cNvPr id="39" name="直接箭头连接符 38">
-            <a:extLst>
-              <a:ext uri="{FF2B5EF4-FFF2-40B4-BE49-F238E27FC236}">
-                <a16:creationId xmlns="" xmlns:a16="http://schemas.microsoft.com/office/drawing/2014/main" id="{EBD885E5-79FC-4839-855C-3F187FD4B3EB}"/>
-              </a:ext>
-            </a:extLst>
-          </p:cNvPr>
-          <p:cNvCxnSpPr/>
-          <p:nvPr/>
-        </p:nvCxnSpPr>
-        <p:spPr>
-          <a:xfrm flipH="1">
-            <a:off x="3952376" y="2900972"/>
-            <a:ext cx="6560" cy="521927"/>
-          </a:xfrm>
-          <a:prstGeom prst="straightConnector1">
-            <a:avLst/>
-          </a:prstGeom>
-          <a:ln w="38100">
-            <a:headEnd type="triangle"/>
-            <a:tailEnd type="triangle"/>
-          </a:ln>
-        </p:spPr>
-        <p:style>
-          <a:lnRef idx="1">
-            <a:schemeClr val="accent1"/>
-          </a:lnRef>
-          <a:fillRef idx="0">
-            <a:schemeClr val="accent1"/>
-          </a:fillRef>
-          <a:effectRef idx="0">
-            <a:schemeClr val="accent1"/>
-          </a:effectRef>
-          <a:fontRef idx="minor">
-            <a:schemeClr val="tx1"/>
-          </a:fontRef>
-        </p:style>
-      </p:cxnSp>
       <p:cxnSp>
         <p:nvCxnSpPr>
           <p:cNvPr id="41" name="直接箭头连接符 40">
@@ -5464,7 +4667,7 @@
         </p:nvCxnSpPr>
         <p:spPr>
           <a:xfrm>
-            <a:off x="4048784" y="5730730"/>
+            <a:off x="3391233" y="5347466"/>
             <a:ext cx="0" cy="329184"/>
           </a:xfrm>
           <a:prstGeom prst="straightConnector1">
@@ -5492,7 +4695,759 @@
       </p:cxnSp>
       <p:sp>
         <p:nvSpPr>
-          <p:cNvPr id="32" name="Shape 5">
+          <p:cNvPr id="7" name="文本框 6"/>
+          <p:cNvSpPr txBox="1"/>
+          <p:nvPr/>
+        </p:nvSpPr>
+        <p:spPr>
+          <a:xfrm>
+            <a:off x="6639827" y="1205938"/>
+            <a:ext cx="5596661" cy="5539978"/>
+          </a:xfrm>
+          <a:prstGeom prst="rect">
+            <a:avLst/>
+          </a:prstGeom>
+          <a:noFill/>
+        </p:spPr>
+        <p:txBody>
+          <a:bodyPr wrap="square" rtlCol="0">
+            <a:spAutoFit/>
+          </a:bodyPr>
+          <a:lstStyle/>
+          <a:p>
+            <a:r>
+              <a:rPr lang="en-US" sz="2000" dirty="0" smtClean="0">
+                <a:latin typeface="Calibri" panose="020F0502020204030204" pitchFamily="34" charset="0"/>
+                <a:ea typeface="Calibri" panose="020F0502020204030204" pitchFamily="34" charset="0"/>
+                <a:cs typeface="Calibri" panose="020F0502020204030204" pitchFamily="34" charset="0"/>
+              </a:rPr>
+              <a:t>Human </a:t>
+            </a:r>
+            <a:r>
+              <a:rPr lang="en-US" sz="2000" dirty="0" smtClean="0">
+                <a:latin typeface="Calibri" panose="020F0502020204030204" pitchFamily="34" charset="0"/>
+                <a:ea typeface="Calibri" panose="020F0502020204030204" pitchFamily="34" charset="0"/>
+                <a:cs typeface="Calibri" panose="020F0502020204030204" pitchFamily="34" charset="0"/>
+              </a:rPr>
+              <a:t>Oversight - </a:t>
+            </a:r>
+            <a:r>
+              <a:rPr lang="en-US" dirty="0" smtClean="0">
+                <a:latin typeface="Calibri" panose="020F0502020204030204" pitchFamily="34" charset="0"/>
+                <a:ea typeface="Calibri" panose="020F0502020204030204" pitchFamily="34" charset="0"/>
+                <a:cs typeface="Calibri" panose="020F0502020204030204" pitchFamily="34" charset="0"/>
+              </a:rPr>
+              <a:t>the </a:t>
+            </a:r>
+            <a:r>
+              <a:rPr lang="en-US" dirty="0">
+                <a:latin typeface="Calibri" panose="020F0502020204030204" pitchFamily="34" charset="0"/>
+                <a:ea typeface="Calibri" panose="020F0502020204030204" pitchFamily="34" charset="0"/>
+                <a:cs typeface="Calibri" panose="020F0502020204030204" pitchFamily="34" charset="0"/>
+              </a:rPr>
+              <a:t>top-level </a:t>
+            </a:r>
+            <a:r>
+              <a:rPr lang="en-US" dirty="0" smtClean="0">
+                <a:latin typeface="Calibri" panose="020F0502020204030204" pitchFamily="34" charset="0"/>
+                <a:ea typeface="Calibri" panose="020F0502020204030204" pitchFamily="34" charset="0"/>
+                <a:cs typeface="Calibri" panose="020F0502020204030204" pitchFamily="34" charset="0"/>
+              </a:rPr>
+              <a:t>authority </a:t>
+            </a:r>
+            <a:endParaRPr lang="en-US" dirty="0" smtClean="0">
+              <a:latin typeface="Calibri" panose="020F0502020204030204" pitchFamily="34" charset="0"/>
+              <a:ea typeface="Calibri" panose="020F0502020204030204" pitchFamily="34" charset="0"/>
+              <a:cs typeface="Calibri" panose="020F0502020204030204" pitchFamily="34" charset="0"/>
+            </a:endParaRPr>
+          </a:p>
+          <a:p>
+            <a:pPr marL="342900" indent="-342900">
+              <a:buFont typeface="Arial" panose="020B0604020202020204" pitchFamily="34" charset="0"/>
+              <a:buChar char="•"/>
+            </a:pPr>
+            <a:r>
+              <a:rPr lang="en-US" dirty="0" smtClean="0">
+                <a:latin typeface="Calibri" panose="020F0502020204030204" pitchFamily="34" charset="0"/>
+                <a:ea typeface="Calibri" panose="020F0502020204030204" pitchFamily="34" charset="0"/>
+                <a:cs typeface="Calibri" panose="020F0502020204030204" pitchFamily="34" charset="0"/>
+              </a:rPr>
+              <a:t>Agent runtime monitoring</a:t>
+            </a:r>
+          </a:p>
+          <a:p>
+            <a:pPr marL="342900" indent="-342900">
+              <a:buFont typeface="Arial" panose="020B0604020202020204" pitchFamily="34" charset="0"/>
+              <a:buChar char="•"/>
+            </a:pPr>
+            <a:r>
+              <a:rPr lang="en-US" dirty="0" smtClean="0">
+                <a:latin typeface="Calibri" panose="020F0502020204030204" pitchFamily="34" charset="0"/>
+                <a:ea typeface="Calibri" panose="020F0502020204030204" pitchFamily="34" charset="0"/>
+                <a:cs typeface="Calibri" panose="020F0502020204030204" pitchFamily="34" charset="0"/>
+              </a:rPr>
+              <a:t>Policy </a:t>
+            </a:r>
+            <a:r>
+              <a:rPr lang="en-US" dirty="0" smtClean="0">
+                <a:latin typeface="Calibri" panose="020F0502020204030204" pitchFamily="34" charset="0"/>
+                <a:ea typeface="Calibri" panose="020F0502020204030204" pitchFamily="34" charset="0"/>
+                <a:cs typeface="Calibri" panose="020F0502020204030204" pitchFamily="34" charset="0"/>
+              </a:rPr>
+              <a:t>&amp; constraint injection</a:t>
+            </a:r>
+          </a:p>
+          <a:p>
+            <a:pPr marL="342900" indent="-342900">
+              <a:buFont typeface="Arial" panose="020B0604020202020204" pitchFamily="34" charset="0"/>
+              <a:buChar char="•"/>
+            </a:pPr>
+            <a:r>
+              <a:rPr lang="en-US" dirty="0" smtClean="0">
+                <a:latin typeface="Calibri" panose="020F0502020204030204" pitchFamily="34" charset="0"/>
+                <a:ea typeface="Calibri" panose="020F0502020204030204" pitchFamily="34" charset="0"/>
+                <a:cs typeface="Calibri" panose="020F0502020204030204" pitchFamily="34" charset="0"/>
+              </a:rPr>
+              <a:t>Emergency </a:t>
+            </a:r>
+            <a:r>
+              <a:rPr lang="en-US" dirty="0" smtClean="0">
+                <a:latin typeface="Calibri" panose="020F0502020204030204" pitchFamily="34" charset="0"/>
+                <a:ea typeface="Calibri" panose="020F0502020204030204" pitchFamily="34" charset="0"/>
+                <a:cs typeface="Calibri" panose="020F0502020204030204" pitchFamily="34" charset="0"/>
+              </a:rPr>
+              <a:t>intervention trigger</a:t>
+            </a:r>
+          </a:p>
+          <a:p>
+            <a:pPr marL="342900" indent="-342900">
+              <a:buFont typeface="Arial" panose="020B0604020202020204" pitchFamily="34" charset="0"/>
+              <a:buChar char="•"/>
+            </a:pPr>
+            <a:r>
+              <a:rPr lang="en-US" altLang="zh-CN" dirty="0" smtClean="0">
+                <a:latin typeface="Calibri" panose="020F0502020204030204" pitchFamily="34" charset="0"/>
+                <a:ea typeface="Calibri" panose="020F0502020204030204" pitchFamily="34" charset="0"/>
+                <a:cs typeface="Calibri" panose="020F0502020204030204" pitchFamily="34" charset="0"/>
+              </a:rPr>
+              <a:t>Escalation request handling</a:t>
+            </a:r>
+          </a:p>
+          <a:p>
+            <a:pPr marL="342900" indent="-342900">
+              <a:buFont typeface="Arial" panose="020B0604020202020204" pitchFamily="34" charset="0"/>
+              <a:buChar char="•"/>
+            </a:pPr>
+            <a:r>
+              <a:rPr lang="en-US" altLang="zh-CN" dirty="0" smtClean="0">
+                <a:latin typeface="Calibri" panose="020F0502020204030204" pitchFamily="34" charset="0"/>
+                <a:ea typeface="Calibri" panose="020F0502020204030204" pitchFamily="34" charset="0"/>
+                <a:cs typeface="Calibri" panose="020F0502020204030204" pitchFamily="34" charset="0"/>
+              </a:rPr>
+              <a:t>Post-execution </a:t>
+            </a:r>
+            <a:r>
+              <a:rPr lang="en-US" altLang="zh-CN" dirty="0" smtClean="0">
+                <a:latin typeface="Calibri" panose="020F0502020204030204" pitchFamily="34" charset="0"/>
+                <a:ea typeface="Calibri" panose="020F0502020204030204" pitchFamily="34" charset="0"/>
+                <a:cs typeface="Calibri" panose="020F0502020204030204" pitchFamily="34" charset="0"/>
+              </a:rPr>
+              <a:t>feedback</a:t>
+            </a:r>
+            <a:endParaRPr lang="en-US" sz="2000" dirty="0" smtClean="0">
+              <a:latin typeface="Calibri" panose="020F0502020204030204" pitchFamily="34" charset="0"/>
+              <a:ea typeface="Calibri" panose="020F0502020204030204" pitchFamily="34" charset="0"/>
+              <a:cs typeface="Calibri" panose="020F0502020204030204" pitchFamily="34" charset="0"/>
+            </a:endParaRPr>
+          </a:p>
+          <a:p>
+            <a:endParaRPr lang="en-US" sz="2000" dirty="0" smtClean="0">
+              <a:latin typeface="Calibri" panose="020F0502020204030204" pitchFamily="34" charset="0"/>
+              <a:ea typeface="Calibri" panose="020F0502020204030204" pitchFamily="34" charset="0"/>
+              <a:cs typeface="Calibri" panose="020F0502020204030204" pitchFamily="34" charset="0"/>
+            </a:endParaRPr>
+          </a:p>
+          <a:p>
+            <a:r>
+              <a:rPr lang="en-US" sz="2000" dirty="0" smtClean="0">
+                <a:latin typeface="Calibri" panose="020F0502020204030204" pitchFamily="34" charset="0"/>
+                <a:ea typeface="Calibri" panose="020F0502020204030204" pitchFamily="34" charset="0"/>
+                <a:cs typeface="Calibri" panose="020F0502020204030204" pitchFamily="34" charset="0"/>
+              </a:rPr>
+              <a:t>Agent </a:t>
+            </a:r>
+            <a:r>
+              <a:rPr lang="en-US" sz="2000" dirty="0" smtClean="0">
+                <a:latin typeface="Calibri" panose="020F0502020204030204" pitchFamily="34" charset="0"/>
+                <a:ea typeface="Calibri" panose="020F0502020204030204" pitchFamily="34" charset="0"/>
+                <a:cs typeface="Calibri" panose="020F0502020204030204" pitchFamily="34" charset="0"/>
+              </a:rPr>
+              <a:t>Management Plane – agent control and observability hub</a:t>
+            </a:r>
+            <a:endParaRPr lang="en-US" sz="2000" dirty="0" smtClean="0">
+              <a:latin typeface="Calibri" panose="020F0502020204030204" pitchFamily="34" charset="0"/>
+              <a:ea typeface="Calibri" panose="020F0502020204030204" pitchFamily="34" charset="0"/>
+              <a:cs typeface="Calibri" panose="020F0502020204030204" pitchFamily="34" charset="0"/>
+            </a:endParaRPr>
+          </a:p>
+          <a:p>
+            <a:pPr marL="342900" indent="-342900">
+              <a:buFont typeface="Arial" panose="020B0604020202020204" pitchFamily="34" charset="0"/>
+              <a:buChar char="•"/>
+            </a:pPr>
+            <a:r>
+              <a:rPr lang="en-US" dirty="0" smtClean="0">
+                <a:latin typeface="Calibri" panose="020F0502020204030204" pitchFamily="34" charset="0"/>
+                <a:ea typeface="Calibri" panose="020F0502020204030204" pitchFamily="34" charset="0"/>
+                <a:cs typeface="Calibri" panose="020F0502020204030204" pitchFamily="34" charset="0"/>
+              </a:rPr>
+              <a:t>Agent runtime telemetry data collection</a:t>
+            </a:r>
+          </a:p>
+          <a:p>
+            <a:pPr marL="342900" indent="-342900">
+              <a:buFont typeface="Arial" panose="020B0604020202020204" pitchFamily="34" charset="0"/>
+              <a:buChar char="•"/>
+            </a:pPr>
+            <a:r>
+              <a:rPr lang="en-US" dirty="0" smtClean="0">
+                <a:latin typeface="Calibri" panose="020F0502020204030204" pitchFamily="34" charset="0"/>
+                <a:ea typeface="Calibri" panose="020F0502020204030204" pitchFamily="34" charset="0"/>
+                <a:cs typeface="Calibri" panose="020F0502020204030204" pitchFamily="34" charset="0"/>
+              </a:rPr>
+              <a:t>Control policy validation and distribution</a:t>
+            </a:r>
+          </a:p>
+          <a:p>
+            <a:pPr marL="342900" indent="-342900">
+              <a:buFont typeface="Arial" panose="020B0604020202020204" pitchFamily="34" charset="0"/>
+              <a:buChar char="•"/>
+            </a:pPr>
+            <a:r>
+              <a:rPr lang="en-US" dirty="0" smtClean="0">
+                <a:latin typeface="Calibri" panose="020F0502020204030204" pitchFamily="34" charset="0"/>
+                <a:ea typeface="Calibri" panose="020F0502020204030204" pitchFamily="34" charset="0"/>
+                <a:cs typeface="Calibri" panose="020F0502020204030204" pitchFamily="34" charset="0"/>
+              </a:rPr>
+              <a:t>Agent runtime intervention instruction (e.g., kill switch, pause/resume, or rollback)</a:t>
+            </a:r>
+          </a:p>
+          <a:p>
+            <a:pPr marL="342900" indent="-342900">
+              <a:buFont typeface="Arial" panose="020B0604020202020204" pitchFamily="34" charset="0"/>
+              <a:buChar char="•"/>
+            </a:pPr>
+            <a:endParaRPr lang="en-US" dirty="0" smtClean="0">
+              <a:latin typeface="Calibri" panose="020F0502020204030204" pitchFamily="34" charset="0"/>
+              <a:ea typeface="Calibri" panose="020F0502020204030204" pitchFamily="34" charset="0"/>
+              <a:cs typeface="Calibri" panose="020F0502020204030204" pitchFamily="34" charset="0"/>
+            </a:endParaRPr>
+          </a:p>
+          <a:p>
+            <a:pPr marL="342900" indent="-342900">
+              <a:buFont typeface="Arial" panose="020B0604020202020204" pitchFamily="34" charset="0"/>
+              <a:buChar char="•"/>
+            </a:pPr>
+            <a:endParaRPr lang="en-US" sz="2000" dirty="0" smtClean="0">
+              <a:latin typeface="Calibri" panose="020F0502020204030204" pitchFamily="34" charset="0"/>
+              <a:ea typeface="Calibri" panose="020F0502020204030204" pitchFamily="34" charset="0"/>
+              <a:cs typeface="Calibri" panose="020F0502020204030204" pitchFamily="34" charset="0"/>
+            </a:endParaRPr>
+          </a:p>
+          <a:p>
+            <a:r>
+              <a:rPr lang="en-US" sz="2000" dirty="0" smtClean="0">
+                <a:latin typeface="Calibri" panose="020F0502020204030204" pitchFamily="34" charset="0"/>
+                <a:ea typeface="Calibri" panose="020F0502020204030204" pitchFamily="34" charset="0"/>
+                <a:cs typeface="Calibri" panose="020F0502020204030204" pitchFamily="34" charset="0"/>
+              </a:rPr>
+              <a:t>Agent Execution Plane – agent runtime environment</a:t>
+            </a:r>
+          </a:p>
+          <a:p>
+            <a:pPr marL="342900" indent="-342900">
+              <a:buFont typeface="Arial" panose="020B0604020202020204" pitchFamily="34" charset="0"/>
+              <a:buChar char="•"/>
+            </a:pPr>
+            <a:r>
+              <a:rPr lang="en-US" dirty="0" smtClean="0">
+                <a:latin typeface="Calibri" panose="020F0502020204030204" pitchFamily="34" charset="0"/>
+                <a:ea typeface="Calibri" panose="020F0502020204030204" pitchFamily="34" charset="0"/>
+                <a:cs typeface="Calibri" panose="020F0502020204030204" pitchFamily="34" charset="0"/>
+              </a:rPr>
+              <a:t>LLM inference</a:t>
+            </a:r>
+          </a:p>
+          <a:p>
+            <a:pPr marL="342900" indent="-342900">
+              <a:buFont typeface="Arial" panose="020B0604020202020204" pitchFamily="34" charset="0"/>
+              <a:buChar char="•"/>
+            </a:pPr>
+            <a:r>
+              <a:rPr lang="en-US" dirty="0" smtClean="0">
+                <a:latin typeface="Calibri" panose="020F0502020204030204" pitchFamily="34" charset="0"/>
+                <a:ea typeface="Calibri" panose="020F0502020204030204" pitchFamily="34" charset="0"/>
+                <a:cs typeface="Calibri" panose="020F0502020204030204" pitchFamily="34" charset="0"/>
+              </a:rPr>
+              <a:t>Policy-compliant network operation task execution</a:t>
+            </a:r>
+          </a:p>
+          <a:p>
+            <a:pPr marL="342900" indent="-342900">
+              <a:buFont typeface="Arial" panose="020B0604020202020204" pitchFamily="34" charset="0"/>
+              <a:buChar char="•"/>
+            </a:pPr>
+            <a:r>
+              <a:rPr lang="en-US" dirty="0" smtClean="0">
+                <a:latin typeface="Calibri" panose="020F0502020204030204" pitchFamily="34" charset="0"/>
+                <a:ea typeface="Calibri" panose="020F0502020204030204" pitchFamily="34" charset="0"/>
+                <a:cs typeface="Calibri" panose="020F0502020204030204" pitchFamily="34" charset="0"/>
+              </a:rPr>
+              <a:t>Execution result feedback and reporting</a:t>
+            </a:r>
+          </a:p>
+        </p:txBody>
+      </p:sp>
+      <p:sp>
+        <p:nvSpPr>
+          <p:cNvPr id="38" name="Text 32">
+            <a:extLst>
+              <a:ext uri="{FF2B5EF4-FFF2-40B4-BE49-F238E27FC236}">
+                <a16:creationId xmlns="" xmlns:a16="http://schemas.microsoft.com/office/drawing/2014/main" id="{DB643E20-E179-4E84-B69F-68EC3ED12F7C}"/>
+              </a:ext>
+            </a:extLst>
+          </p:cNvPr>
+          <p:cNvSpPr/>
+          <p:nvPr/>
+        </p:nvSpPr>
+        <p:spPr>
+          <a:xfrm>
+            <a:off x="1337693" y="3445264"/>
+            <a:ext cx="1771345" cy="274320"/>
+          </a:xfrm>
+          <a:prstGeom prst="rect">
+            <a:avLst/>
+          </a:prstGeom>
+          <a:noFill/>
+          <a:ln/>
+        </p:spPr>
+        <p:txBody>
+          <a:bodyPr wrap="square" rtlCol="0" anchor="ctr"/>
+          <a:lstStyle/>
+          <a:p>
+            <a:pPr marL="0" indent="0">
+              <a:buNone/>
+            </a:pPr>
+            <a:r>
+              <a:rPr lang="en-US" sz="1050" i="1" dirty="0" smtClean="0">
+                <a:solidFill>
+                  <a:srgbClr val="5B6B78"/>
+                </a:solidFill>
+                <a:latin typeface="Calibri" panose="020F0502020204030204" pitchFamily="34" charset="0"/>
+                <a:ea typeface="Calibri" panose="020F0502020204030204" pitchFamily="34" charset="0"/>
+                <a:cs typeface="Calibri" panose="020F0502020204030204" pitchFamily="34" charset="0"/>
+              </a:rPr>
+              <a:t>Agent observability data streaming</a:t>
+            </a:r>
+            <a:endParaRPr lang="en-US" sz="1050" dirty="0">
+              <a:latin typeface="Calibri" panose="020F0502020204030204" pitchFamily="34" charset="0"/>
+              <a:ea typeface="Calibri" panose="020F0502020204030204" pitchFamily="34" charset="0"/>
+              <a:cs typeface="Calibri" panose="020F0502020204030204" pitchFamily="34" charset="0"/>
+            </a:endParaRPr>
+          </a:p>
+        </p:txBody>
+      </p:sp>
+      <p:sp>
+        <p:nvSpPr>
+          <p:cNvPr id="40" name="Shape 3">
+            <a:extLst>
+              <a:ext uri="{FF2B5EF4-FFF2-40B4-BE49-F238E27FC236}">
+                <a16:creationId xmlns="" xmlns:a16="http://schemas.microsoft.com/office/drawing/2014/main" id="{084A49AC-22B0-479D-84F4-E5240D126EB4}"/>
+              </a:ext>
+            </a:extLst>
+          </p:cNvPr>
+          <p:cNvSpPr/>
+          <p:nvPr/>
+        </p:nvSpPr>
+        <p:spPr>
+          <a:xfrm>
+            <a:off x="123959" y="2200523"/>
+            <a:ext cx="6365508" cy="1020336"/>
+          </a:xfrm>
+          <a:prstGeom prst="roundRect">
+            <a:avLst>
+              <a:gd name="adj" fmla="val 4324"/>
+            </a:avLst>
+          </a:prstGeom>
+          <a:solidFill>
+            <a:srgbClr val="EAF1F5"/>
+          </a:solidFill>
+          <a:ln w="15875">
+            <a:solidFill>
+              <a:srgbClr val="065A82"/>
+            </a:solidFill>
+            <a:prstDash val="solid"/>
+          </a:ln>
+        </p:spPr>
+      </p:sp>
+      <p:sp>
+        <p:nvSpPr>
+          <p:cNvPr id="42" name="Text 4">
+            <a:extLst>
+              <a:ext uri="{FF2B5EF4-FFF2-40B4-BE49-F238E27FC236}">
+                <a16:creationId xmlns="" xmlns:a16="http://schemas.microsoft.com/office/drawing/2014/main" id="{E14E1904-9F56-42DE-94AC-08636BE459DB}"/>
+              </a:ext>
+            </a:extLst>
+          </p:cNvPr>
+          <p:cNvSpPr/>
+          <p:nvPr/>
+        </p:nvSpPr>
+        <p:spPr>
+          <a:xfrm>
+            <a:off x="141742" y="2231920"/>
+            <a:ext cx="4620901" cy="256032"/>
+          </a:xfrm>
+          <a:prstGeom prst="rect">
+            <a:avLst/>
+          </a:prstGeom>
+          <a:noFill/>
+          <a:ln/>
+        </p:spPr>
+        <p:txBody>
+          <a:bodyPr wrap="square" rtlCol="0" anchor="ctr"/>
+          <a:lstStyle/>
+          <a:p>
+            <a:pPr marL="0" indent="0">
+              <a:buNone/>
+            </a:pPr>
+            <a:r>
+              <a:rPr lang="en-US" sz="1050" b="1" kern="0" spc="150" dirty="0">
+                <a:solidFill>
+                  <a:srgbClr val="065A82"/>
+                </a:solidFill>
+                <a:latin typeface="Calibri" panose="020F0502020204030204" pitchFamily="34" charset="0"/>
+                <a:ea typeface="Calibri" panose="020F0502020204030204" pitchFamily="34" charset="0"/>
+                <a:cs typeface="Calibri" panose="020F0502020204030204" pitchFamily="34" charset="0"/>
+              </a:rPr>
+              <a:t>AGENT </a:t>
+            </a:r>
+            <a:r>
+              <a:rPr lang="en-US" sz="1050" b="1" kern="0" spc="150" dirty="0" smtClean="0">
+                <a:solidFill>
+                  <a:srgbClr val="065A82"/>
+                </a:solidFill>
+                <a:latin typeface="Calibri" panose="020F0502020204030204" pitchFamily="34" charset="0"/>
+                <a:ea typeface="Calibri" panose="020F0502020204030204" pitchFamily="34" charset="0"/>
+                <a:cs typeface="Calibri" panose="020F0502020204030204" pitchFamily="34" charset="0"/>
+              </a:rPr>
+              <a:t>MANAGEMENT PLANE</a:t>
+            </a:r>
+            <a:endParaRPr lang="en-US" sz="1050" dirty="0">
+              <a:latin typeface="Calibri" panose="020F0502020204030204" pitchFamily="34" charset="0"/>
+              <a:ea typeface="Calibri" panose="020F0502020204030204" pitchFamily="34" charset="0"/>
+              <a:cs typeface="Calibri" panose="020F0502020204030204" pitchFamily="34" charset="0"/>
+            </a:endParaRPr>
+          </a:p>
+        </p:txBody>
+      </p:sp>
+      <p:sp>
+        <p:nvSpPr>
+          <p:cNvPr id="47" name="Shape 9">
+            <a:extLst>
+              <a:ext uri="{FF2B5EF4-FFF2-40B4-BE49-F238E27FC236}">
+                <a16:creationId xmlns="" xmlns:a16="http://schemas.microsoft.com/office/drawing/2014/main" id="{4C3E7FC3-82A4-44D7-9B20-FF42D54A4D31}"/>
+              </a:ext>
+            </a:extLst>
+          </p:cNvPr>
+          <p:cNvSpPr/>
+          <p:nvPr/>
+        </p:nvSpPr>
+        <p:spPr>
+          <a:xfrm>
+            <a:off x="300734" y="2759561"/>
+            <a:ext cx="1578808" cy="310896"/>
+          </a:xfrm>
+          <a:prstGeom prst="roundRect">
+            <a:avLst>
+              <a:gd name="adj" fmla="val 14706"/>
+            </a:avLst>
+          </a:prstGeom>
+          <a:solidFill>
+            <a:srgbClr val="1C7293"/>
+          </a:solidFill>
+          <a:ln w="12700">
+            <a:solidFill>
+              <a:srgbClr val="1C7293"/>
+            </a:solidFill>
+            <a:prstDash val="solid"/>
+          </a:ln>
+        </p:spPr>
+      </p:sp>
+      <p:sp>
+        <p:nvSpPr>
+          <p:cNvPr id="48" name="Text 10">
+            <a:extLst>
+              <a:ext uri="{FF2B5EF4-FFF2-40B4-BE49-F238E27FC236}">
+                <a16:creationId xmlns="" xmlns:a16="http://schemas.microsoft.com/office/drawing/2014/main" id="{DE8F064D-56AD-4F90-AB08-0714FA4E4182}"/>
+              </a:ext>
+            </a:extLst>
+          </p:cNvPr>
+          <p:cNvSpPr/>
+          <p:nvPr/>
+        </p:nvSpPr>
+        <p:spPr>
+          <a:xfrm>
+            <a:off x="141742" y="2741896"/>
+            <a:ext cx="1778766" cy="310896"/>
+          </a:xfrm>
+          <a:prstGeom prst="rect">
+            <a:avLst/>
+          </a:prstGeom>
+          <a:noFill/>
+          <a:ln/>
+        </p:spPr>
+        <p:txBody>
+          <a:bodyPr wrap="square" rtlCol="0" anchor="ctr"/>
+          <a:lstStyle/>
+          <a:p>
+            <a:pPr marL="0" indent="0" algn="ctr">
+              <a:buNone/>
+            </a:pPr>
+            <a:r>
+              <a:rPr lang="en-US" sz="1100" b="1" dirty="0">
+                <a:solidFill>
+                  <a:srgbClr val="FFFFFF"/>
+                </a:solidFill>
+                <a:latin typeface="Calibri" panose="020F0502020204030204" pitchFamily="34" charset="0"/>
+                <a:ea typeface="Calibri" panose="020F0502020204030204" pitchFamily="34" charset="0"/>
+                <a:cs typeface="Calibri" panose="020F0502020204030204" pitchFamily="34" charset="0"/>
+              </a:rPr>
+              <a:t>Observability</a:t>
+            </a:r>
+            <a:endParaRPr lang="en-US" sz="1100" dirty="0">
+              <a:latin typeface="Calibri" panose="020F0502020204030204" pitchFamily="34" charset="0"/>
+              <a:ea typeface="Calibri" panose="020F0502020204030204" pitchFamily="34" charset="0"/>
+              <a:cs typeface="Calibri" panose="020F0502020204030204" pitchFamily="34" charset="0"/>
+            </a:endParaRPr>
+          </a:p>
+        </p:txBody>
+      </p:sp>
+      <p:sp>
+        <p:nvSpPr>
+          <p:cNvPr id="49" name="Shape 11">
+            <a:extLst>
+              <a:ext uri="{FF2B5EF4-FFF2-40B4-BE49-F238E27FC236}">
+                <a16:creationId xmlns="" xmlns:a16="http://schemas.microsoft.com/office/drawing/2014/main" id="{50911C78-4C0C-4660-87F8-D05FE2DEFB5E}"/>
+              </a:ext>
+            </a:extLst>
+          </p:cNvPr>
+          <p:cNvSpPr/>
+          <p:nvPr/>
+        </p:nvSpPr>
+        <p:spPr>
+          <a:xfrm>
+            <a:off x="2139913" y="2741079"/>
+            <a:ext cx="1654245" cy="310896"/>
+          </a:xfrm>
+          <a:prstGeom prst="roundRect">
+            <a:avLst>
+              <a:gd name="adj" fmla="val 14706"/>
+            </a:avLst>
+          </a:prstGeom>
+          <a:solidFill>
+            <a:srgbClr val="1C7293"/>
+          </a:solidFill>
+          <a:ln w="12700">
+            <a:solidFill>
+              <a:srgbClr val="1C7293"/>
+            </a:solidFill>
+            <a:prstDash val="solid"/>
+          </a:ln>
+        </p:spPr>
+      </p:sp>
+      <p:sp>
+        <p:nvSpPr>
+          <p:cNvPr id="50" name="Text 12">
+            <a:extLst>
+              <a:ext uri="{FF2B5EF4-FFF2-40B4-BE49-F238E27FC236}">
+                <a16:creationId xmlns="" xmlns:a16="http://schemas.microsoft.com/office/drawing/2014/main" id="{C0211E05-C7AE-4C7E-916D-D648E59EAF77}"/>
+              </a:ext>
+            </a:extLst>
+          </p:cNvPr>
+          <p:cNvSpPr/>
+          <p:nvPr/>
+        </p:nvSpPr>
+        <p:spPr>
+          <a:xfrm>
+            <a:off x="1606436" y="2732286"/>
+            <a:ext cx="2721197" cy="310896"/>
+          </a:xfrm>
+          <a:prstGeom prst="rect">
+            <a:avLst/>
+          </a:prstGeom>
+          <a:noFill/>
+          <a:ln/>
+        </p:spPr>
+        <p:txBody>
+          <a:bodyPr wrap="square" rtlCol="0" anchor="ctr"/>
+          <a:lstStyle/>
+          <a:p>
+            <a:pPr marL="0" indent="0" algn="ctr">
+              <a:buNone/>
+            </a:pPr>
+            <a:r>
+              <a:rPr lang="en-US" sz="1100" b="1" dirty="0">
+                <a:solidFill>
+                  <a:srgbClr val="FFFFFF"/>
+                </a:solidFill>
+                <a:latin typeface="Calibri" panose="020F0502020204030204" pitchFamily="34" charset="0"/>
+                <a:ea typeface="Calibri" panose="020F0502020204030204" pitchFamily="34" charset="0"/>
+                <a:cs typeface="Calibri" panose="020F0502020204030204" pitchFamily="34" charset="0"/>
+              </a:rPr>
+              <a:t>Control</a:t>
+            </a:r>
+            <a:endParaRPr lang="en-US" sz="1100" dirty="0">
+              <a:latin typeface="Calibri" panose="020F0502020204030204" pitchFamily="34" charset="0"/>
+              <a:ea typeface="Calibri" panose="020F0502020204030204" pitchFamily="34" charset="0"/>
+              <a:cs typeface="Calibri" panose="020F0502020204030204" pitchFamily="34" charset="0"/>
+            </a:endParaRPr>
+          </a:p>
+        </p:txBody>
+      </p:sp>
+      <p:sp>
+        <p:nvSpPr>
+          <p:cNvPr id="51" name="Shape 13">
+            <a:extLst>
+              <a:ext uri="{FF2B5EF4-FFF2-40B4-BE49-F238E27FC236}">
+                <a16:creationId xmlns="" xmlns:a16="http://schemas.microsoft.com/office/drawing/2014/main" id="{11A12F61-F2D3-4C92-92F2-93CF044584DF}"/>
+              </a:ext>
+            </a:extLst>
+          </p:cNvPr>
+          <p:cNvSpPr/>
+          <p:nvPr/>
+        </p:nvSpPr>
+        <p:spPr>
+          <a:xfrm>
+            <a:off x="4097119" y="2742662"/>
+            <a:ext cx="1621399" cy="310896"/>
+          </a:xfrm>
+          <a:prstGeom prst="roundRect">
+            <a:avLst>
+              <a:gd name="adj" fmla="val 14706"/>
+            </a:avLst>
+          </a:prstGeom>
+          <a:solidFill>
+            <a:srgbClr val="1C7293"/>
+          </a:solidFill>
+          <a:ln w="12700">
+            <a:solidFill>
+              <a:srgbClr val="1C7293"/>
+            </a:solidFill>
+            <a:prstDash val="solid"/>
+          </a:ln>
+        </p:spPr>
+      </p:sp>
+      <p:sp>
+        <p:nvSpPr>
+          <p:cNvPr id="52" name="Text 14">
+            <a:extLst>
+              <a:ext uri="{FF2B5EF4-FFF2-40B4-BE49-F238E27FC236}">
+                <a16:creationId xmlns="" xmlns:a16="http://schemas.microsoft.com/office/drawing/2014/main" id="{99537C58-24EC-4FCF-8EDF-6445F71A6305}"/>
+              </a:ext>
+            </a:extLst>
+          </p:cNvPr>
+          <p:cNvSpPr/>
+          <p:nvPr/>
+        </p:nvSpPr>
+        <p:spPr>
+          <a:xfrm>
+            <a:off x="3731483" y="2735203"/>
+            <a:ext cx="2352670" cy="310896"/>
+          </a:xfrm>
+          <a:prstGeom prst="rect">
+            <a:avLst/>
+          </a:prstGeom>
+          <a:noFill/>
+          <a:ln/>
+        </p:spPr>
+        <p:txBody>
+          <a:bodyPr wrap="square" rtlCol="0" anchor="ctr"/>
+          <a:lstStyle/>
+          <a:p>
+            <a:pPr marL="0" indent="0" algn="ctr">
+              <a:buNone/>
+            </a:pPr>
+            <a:r>
+              <a:rPr lang="en-US" sz="1100" b="1" dirty="0">
+                <a:solidFill>
+                  <a:srgbClr val="FFFFFF"/>
+                </a:solidFill>
+                <a:latin typeface="Calibri" panose="020F0502020204030204" pitchFamily="34" charset="0"/>
+                <a:ea typeface="Calibri" panose="020F0502020204030204" pitchFamily="34" charset="0"/>
+                <a:cs typeface="Calibri" panose="020F0502020204030204" pitchFamily="34" charset="0"/>
+              </a:rPr>
+              <a:t>Intervention</a:t>
+            </a:r>
+            <a:endParaRPr lang="en-US" sz="1100" dirty="0">
+              <a:latin typeface="Calibri" panose="020F0502020204030204" pitchFamily="34" charset="0"/>
+              <a:ea typeface="Calibri" panose="020F0502020204030204" pitchFamily="34" charset="0"/>
+              <a:cs typeface="Calibri" panose="020F0502020204030204" pitchFamily="34" charset="0"/>
+            </a:endParaRPr>
+          </a:p>
+        </p:txBody>
+      </p:sp>
+      <p:sp>
+        <p:nvSpPr>
+          <p:cNvPr id="54" name="Text 32">
+            <a:extLst>
+              <a:ext uri="{FF2B5EF4-FFF2-40B4-BE49-F238E27FC236}">
+                <a16:creationId xmlns="" xmlns:a16="http://schemas.microsoft.com/office/drawing/2014/main" id="{DB643E20-E179-4E84-B69F-68EC3ED12F7C}"/>
+              </a:ext>
+            </a:extLst>
+          </p:cNvPr>
+          <p:cNvSpPr/>
+          <p:nvPr/>
+        </p:nvSpPr>
+        <p:spPr>
+          <a:xfrm>
+            <a:off x="3577662" y="3395818"/>
+            <a:ext cx="2168362" cy="274320"/>
+          </a:xfrm>
+          <a:prstGeom prst="rect">
+            <a:avLst/>
+          </a:prstGeom>
+          <a:noFill/>
+          <a:ln/>
+        </p:spPr>
+        <p:txBody>
+          <a:bodyPr wrap="square" rtlCol="0" anchor="ctr"/>
+          <a:lstStyle/>
+          <a:p>
+            <a:pPr marL="0" indent="0">
+              <a:buNone/>
+            </a:pPr>
+            <a:r>
+              <a:rPr lang="en-US" sz="1050" i="1" dirty="0" smtClean="0">
+                <a:solidFill>
+                  <a:srgbClr val="5B6B78"/>
+                </a:solidFill>
+                <a:latin typeface="Calibri" panose="020F0502020204030204" pitchFamily="34" charset="0"/>
+                <a:ea typeface="Calibri" panose="020F0502020204030204" pitchFamily="34" charset="0"/>
+                <a:cs typeface="Calibri" panose="020F0502020204030204" pitchFamily="34" charset="0"/>
+              </a:rPr>
+              <a:t>Agent control &amp; Intervention signals</a:t>
+            </a:r>
+            <a:endParaRPr lang="en-US" sz="1050" dirty="0">
+              <a:latin typeface="Calibri" panose="020F0502020204030204" pitchFamily="34" charset="0"/>
+              <a:ea typeface="Calibri" panose="020F0502020204030204" pitchFamily="34" charset="0"/>
+              <a:cs typeface="Calibri" panose="020F0502020204030204" pitchFamily="34" charset="0"/>
+            </a:endParaRPr>
+          </a:p>
+        </p:txBody>
+      </p:sp>
+      <p:sp>
+        <p:nvSpPr>
+          <p:cNvPr id="55" name="Shape 5">
             <a:extLst>
               <a:ext uri="{FF2B5EF4-FFF2-40B4-BE49-F238E27FC236}">
                 <a16:creationId xmlns:a16="http://schemas.microsoft.com/office/drawing/2014/main" xmlns="" id="{311F6CCC-59F5-4E1D-90B0-63E7606D4AFD}"/>
@@ -5504,8 +5459,8 @@
         </p:nvSpPr>
         <p:spPr>
           <a:xfrm>
-            <a:off x="374073" y="1698449"/>
-            <a:ext cx="7232073" cy="402336"/>
+            <a:off x="123959" y="1436766"/>
+            <a:ext cx="6365507" cy="402336"/>
           </a:xfrm>
           <a:prstGeom prst="roundRect">
             <a:avLst>
@@ -5525,7 +5480,7 @@
       </p:sp>
       <p:sp>
         <p:nvSpPr>
-          <p:cNvPr id="37" name="Text 6">
+          <p:cNvPr id="56" name="Text 6">
             <a:extLst>
               <a:ext uri="{FF2B5EF4-FFF2-40B4-BE49-F238E27FC236}">
                 <a16:creationId xmlns:a16="http://schemas.microsoft.com/office/drawing/2014/main" xmlns="" id="{3FFC70D4-DBA4-48C3-9A8E-E4EDAE9D7836}"/>
@@ -5537,8 +5492,8 @@
         </p:nvSpPr>
         <p:spPr>
           <a:xfrm>
-            <a:off x="374073" y="1698449"/>
-            <a:ext cx="7232073" cy="402336"/>
+            <a:off x="226751" y="1428069"/>
+            <a:ext cx="6091188" cy="402336"/>
           </a:xfrm>
           <a:prstGeom prst="rect">
             <a:avLst/>
@@ -5568,207 +5523,132 @@
           </a:p>
         </p:txBody>
       </p:sp>
-      <p:sp>
-        <p:nvSpPr>
-          <p:cNvPr id="7" name="文本框 6"/>
-          <p:cNvSpPr txBox="1"/>
+      <p:cxnSp>
+        <p:nvCxnSpPr>
+          <p:cNvPr id="57" name="直接箭头连接符 56">
+            <a:extLst>
+              <a:ext uri="{FF2B5EF4-FFF2-40B4-BE49-F238E27FC236}">
+                <a16:creationId xmlns="" xmlns:a16="http://schemas.microsoft.com/office/drawing/2014/main" id="{C32315DC-1FC1-4A2E-AF69-4F5D5251C572}"/>
+              </a:ext>
+            </a:extLst>
+          </p:cNvPr>
+          <p:cNvCxnSpPr>
+            <a:cxnSpLocks/>
+          </p:cNvCxnSpPr>
+          <p:nvPr/>
+        </p:nvCxnSpPr>
+        <p:spPr>
+          <a:xfrm flipH="1">
+            <a:off x="3267722" y="1808921"/>
+            <a:ext cx="4623" cy="426782"/>
+          </a:xfrm>
+          <a:prstGeom prst="straightConnector1">
+            <a:avLst/>
+          </a:prstGeom>
+          <a:ln w="38100">
+            <a:headEnd type="triangle"/>
+            <a:tailEnd type="triangle"/>
+          </a:ln>
+        </p:spPr>
+        <p:style>
+          <a:lnRef idx="1">
+            <a:schemeClr val="accent1"/>
+          </a:lnRef>
+          <a:fillRef idx="0">
+            <a:schemeClr val="accent1"/>
+          </a:fillRef>
+          <a:effectRef idx="0">
+            <a:schemeClr val="accent1"/>
+          </a:effectRef>
+          <a:fontRef idx="minor">
+            <a:schemeClr val="tx1"/>
+          </a:fontRef>
+        </p:style>
+      </p:cxnSp>
+      <p:sp>
+        <p:nvSpPr>
+          <p:cNvPr id="28" name="下箭头 27"/>
+          <p:cNvSpPr/>
           <p:nvPr/>
         </p:nvSpPr>
         <p:spPr>
           <a:xfrm>
-            <a:off x="7879263" y="1585113"/>
-            <a:ext cx="4271832" cy="4708981"/>
+            <a:off x="3391233" y="3212104"/>
+            <a:ext cx="166541" cy="672481"/>
           </a:xfrm>
-          <a:prstGeom prst="rect">
+          <a:prstGeom prst="downArrow">
             <a:avLst/>
           </a:prstGeom>
-          <a:noFill/>
         </p:spPr>
+        <p:style>
+          <a:lnRef idx="2">
+            <a:schemeClr val="accent1">
+              <a:shade val="50000"/>
+            </a:schemeClr>
+          </a:lnRef>
+          <a:fillRef idx="1">
+            <a:schemeClr val="accent1"/>
+          </a:fillRef>
+          <a:effectRef idx="0">
+            <a:schemeClr val="accent1"/>
+          </a:effectRef>
+          <a:fontRef idx="minor">
+            <a:schemeClr val="lt1"/>
+          </a:fontRef>
+        </p:style>
         <p:txBody>
-          <a:bodyPr wrap="square" rtlCol="0">
-            <a:spAutoFit/>
-          </a:bodyPr>
+          <a:bodyPr rtlCol="0" anchor="ctr"/>
           <a:lstStyle/>
           <a:p>
-            <a:r>
-              <a:rPr lang="en-US" sz="2000" dirty="0" smtClean="0">
-                <a:latin typeface="Calibri" panose="020F0502020204030204" pitchFamily="34" charset="0"/>
-                <a:ea typeface="Calibri" panose="020F0502020204030204" pitchFamily="34" charset="0"/>
-                <a:cs typeface="Calibri" panose="020F0502020204030204" pitchFamily="34" charset="0"/>
-              </a:rPr>
-              <a:t>Human Oversight</a:t>
-            </a:r>
-          </a:p>
-          <a:p>
-            <a:pPr marL="342900" indent="-342900">
-              <a:buFont typeface="Arial" panose="020B0604020202020204" pitchFamily="34" charset="0"/>
-              <a:buChar char="•"/>
-            </a:pPr>
-            <a:r>
-              <a:rPr lang="en-US" dirty="0">
-                <a:latin typeface="Calibri" panose="020F0502020204030204" pitchFamily="34" charset="0"/>
-                <a:ea typeface="Calibri" panose="020F0502020204030204" pitchFamily="34" charset="0"/>
-                <a:cs typeface="Calibri" panose="020F0502020204030204" pitchFamily="34" charset="0"/>
-              </a:rPr>
-              <a:t>The top-level authority in the Agent Supervision Plane</a:t>
-            </a:r>
-            <a:r>
-              <a:rPr lang="en-US" dirty="0" smtClean="0">
-                <a:latin typeface="Calibri" panose="020F0502020204030204" pitchFamily="34" charset="0"/>
-                <a:ea typeface="Calibri" panose="020F0502020204030204" pitchFamily="34" charset="0"/>
-                <a:cs typeface="Calibri" panose="020F0502020204030204" pitchFamily="34" charset="0"/>
-              </a:rPr>
-              <a:t>.</a:t>
-            </a:r>
-          </a:p>
-          <a:p>
-            <a:pPr marL="800100" lvl="1" indent="-342900">
-              <a:buFont typeface="Arial" panose="020B0604020202020204" pitchFamily="34" charset="0"/>
-              <a:buChar char="•"/>
-            </a:pPr>
-            <a:r>
-              <a:rPr lang="en-US" dirty="0" smtClean="0">
-                <a:latin typeface="Calibri" panose="020F0502020204030204" pitchFamily="34" charset="0"/>
-                <a:ea typeface="Calibri" panose="020F0502020204030204" pitchFamily="34" charset="0"/>
-                <a:cs typeface="Calibri" panose="020F0502020204030204" pitchFamily="34" charset="0"/>
-              </a:rPr>
-              <a:t>Policy &amp; constraint injection</a:t>
-            </a:r>
-          </a:p>
-          <a:p>
-            <a:pPr marL="800100" lvl="1" indent="-342900">
-              <a:buFont typeface="Arial" panose="020B0604020202020204" pitchFamily="34" charset="0"/>
-              <a:buChar char="•"/>
-            </a:pPr>
-            <a:r>
-              <a:rPr lang="en-US" dirty="0" smtClean="0">
-                <a:latin typeface="Calibri" panose="020F0502020204030204" pitchFamily="34" charset="0"/>
-                <a:ea typeface="Calibri" panose="020F0502020204030204" pitchFamily="34" charset="0"/>
-                <a:cs typeface="Calibri" panose="020F0502020204030204" pitchFamily="34" charset="0"/>
-              </a:rPr>
-              <a:t>Escalation Handling</a:t>
-            </a:r>
-          </a:p>
-          <a:p>
-            <a:pPr marL="800100" lvl="1" indent="-342900">
-              <a:buFont typeface="Arial" panose="020B0604020202020204" pitchFamily="34" charset="0"/>
-              <a:buChar char="•"/>
-            </a:pPr>
-            <a:r>
-              <a:rPr lang="en-US" dirty="0" smtClean="0">
-                <a:latin typeface="Calibri" panose="020F0502020204030204" pitchFamily="34" charset="0"/>
-                <a:ea typeface="Calibri" panose="020F0502020204030204" pitchFamily="34" charset="0"/>
-                <a:cs typeface="Calibri" panose="020F0502020204030204" pitchFamily="34" charset="0"/>
-              </a:rPr>
-              <a:t>Emergency intervention trigger</a:t>
-            </a:r>
-          </a:p>
-          <a:p>
-            <a:pPr marL="800100" lvl="1" indent="-342900">
-              <a:buFont typeface="Arial" panose="020B0604020202020204" pitchFamily="34" charset="0"/>
-              <a:buChar char="•"/>
-            </a:pPr>
-            <a:r>
-              <a:rPr lang="en-US" altLang="zh-CN" dirty="0" smtClean="0">
-                <a:latin typeface="Calibri" panose="020F0502020204030204" pitchFamily="34" charset="0"/>
-                <a:ea typeface="Calibri" panose="020F0502020204030204" pitchFamily="34" charset="0"/>
-                <a:cs typeface="Calibri" panose="020F0502020204030204" pitchFamily="34" charset="0"/>
-              </a:rPr>
-              <a:t>Post-execution feedback</a:t>
-            </a:r>
-            <a:endParaRPr lang="en-US" sz="2000" dirty="0" smtClean="0">
-              <a:latin typeface="Calibri" panose="020F0502020204030204" pitchFamily="34" charset="0"/>
-              <a:ea typeface="Calibri" panose="020F0502020204030204" pitchFamily="34" charset="0"/>
-              <a:cs typeface="Calibri" panose="020F0502020204030204" pitchFamily="34" charset="0"/>
-            </a:endParaRPr>
-          </a:p>
-          <a:p>
-            <a:endParaRPr lang="en-US" sz="2000" dirty="0" smtClean="0">
-              <a:latin typeface="Calibri" panose="020F0502020204030204" pitchFamily="34" charset="0"/>
-              <a:ea typeface="Calibri" panose="020F0502020204030204" pitchFamily="34" charset="0"/>
-              <a:cs typeface="Calibri" panose="020F0502020204030204" pitchFamily="34" charset="0"/>
-            </a:endParaRPr>
-          </a:p>
-          <a:p>
-            <a:r>
-              <a:rPr lang="en-US" sz="2000" dirty="0" smtClean="0">
-                <a:latin typeface="Calibri" panose="020F0502020204030204" pitchFamily="34" charset="0"/>
-                <a:ea typeface="Calibri" panose="020F0502020204030204" pitchFamily="34" charset="0"/>
-                <a:cs typeface="Calibri" panose="020F0502020204030204" pitchFamily="34" charset="0"/>
-              </a:rPr>
-              <a:t>Agent Supervisor/client</a:t>
-            </a:r>
-          </a:p>
-          <a:p>
-            <a:pPr marL="342900" indent="-342900">
-              <a:buFont typeface="Arial" panose="020B0604020202020204" pitchFamily="34" charset="0"/>
-              <a:buChar char="•"/>
-            </a:pPr>
-            <a:r>
-              <a:rPr lang="en-US" dirty="0">
-                <a:latin typeface="Calibri" panose="020F0502020204030204" pitchFamily="34" charset="0"/>
-                <a:ea typeface="Calibri" panose="020F0502020204030204" pitchFamily="34" charset="0"/>
-                <a:cs typeface="Calibri" panose="020F0502020204030204" pitchFamily="34" charset="0"/>
-              </a:rPr>
-              <a:t>Acts on behalf of operators to monitor, control, and </a:t>
-            </a:r>
-            <a:r>
-              <a:rPr lang="en-US" dirty="0" smtClean="0">
-                <a:latin typeface="Calibri" panose="020F0502020204030204" pitchFamily="34" charset="0"/>
-                <a:ea typeface="Calibri" panose="020F0502020204030204" pitchFamily="34" charset="0"/>
-                <a:cs typeface="Calibri" panose="020F0502020204030204" pitchFamily="34" charset="0"/>
-              </a:rPr>
-              <a:t>intervene across agents</a:t>
-            </a:r>
-          </a:p>
-          <a:p>
-            <a:endParaRPr lang="en-US" sz="2000" dirty="0" smtClean="0">
-              <a:latin typeface="Calibri" panose="020F0502020204030204" pitchFamily="34" charset="0"/>
-              <a:ea typeface="Calibri" panose="020F0502020204030204" pitchFamily="34" charset="0"/>
-              <a:cs typeface="Calibri" panose="020F0502020204030204" pitchFamily="34" charset="0"/>
-            </a:endParaRPr>
-          </a:p>
-          <a:p>
-            <a:r>
-              <a:rPr lang="en-US" sz="2000" dirty="0" smtClean="0">
-                <a:latin typeface="Calibri" panose="020F0502020204030204" pitchFamily="34" charset="0"/>
-                <a:ea typeface="Calibri" panose="020F0502020204030204" pitchFamily="34" charset="0"/>
-                <a:cs typeface="Calibri" panose="020F0502020204030204" pitchFamily="34" charset="0"/>
-              </a:rPr>
-              <a:t>Supervision Enforcement Entity</a:t>
-            </a:r>
-          </a:p>
-          <a:p>
-            <a:pPr marL="342900" indent="-342900">
-              <a:buFont typeface="Arial" panose="020B0604020202020204" pitchFamily="34" charset="0"/>
-              <a:buChar char="•"/>
-            </a:pPr>
-            <a:r>
-              <a:rPr lang="en-US" dirty="0">
-                <a:latin typeface="Calibri" panose="020F0502020204030204" pitchFamily="34" charset="0"/>
-                <a:ea typeface="Calibri" panose="020F0502020204030204" pitchFamily="34" charset="0"/>
-                <a:cs typeface="Calibri" panose="020F0502020204030204" pitchFamily="34" charset="0"/>
-              </a:rPr>
-              <a:t>The unified bridge between supervision signals and native agent execution.</a:t>
-            </a:r>
-          </a:p>
-          <a:p>
-            <a:pPr marL="342900" indent="-342900">
-              <a:buFont typeface="Arial" panose="020B0604020202020204" pitchFamily="34" charset="0"/>
-              <a:buChar char="•"/>
-            </a:pPr>
-            <a:endParaRPr lang="en-US" sz="2000" dirty="0">
-              <a:latin typeface="Calibri" panose="020F0502020204030204" pitchFamily="34" charset="0"/>
-              <a:ea typeface="Calibri" panose="020F0502020204030204" pitchFamily="34" charset="0"/>
-              <a:cs typeface="Calibri" panose="020F0502020204030204" pitchFamily="34" charset="0"/>
-            </a:endParaRPr>
+            <a:pPr algn="ctr"/>
+            <a:endParaRPr lang="en-US"/>
+          </a:p>
+        </p:txBody>
+      </p:sp>
+      <p:sp>
+        <p:nvSpPr>
+          <p:cNvPr id="58" name="下箭头 57"/>
+          <p:cNvSpPr/>
+          <p:nvPr/>
+        </p:nvSpPr>
+        <p:spPr>
+          <a:xfrm rot="10800000">
+            <a:off x="2967037" y="3203090"/>
+            <a:ext cx="146214" cy="682285"/>
+          </a:xfrm>
+          <a:prstGeom prst="downArrow">
+            <a:avLst/>
+          </a:prstGeom>
+        </p:spPr>
+        <p:style>
+          <a:lnRef idx="2">
+            <a:schemeClr val="accent1">
+              <a:shade val="50000"/>
+            </a:schemeClr>
+          </a:lnRef>
+          <a:fillRef idx="1">
+            <a:schemeClr val="accent1"/>
+          </a:fillRef>
+          <a:effectRef idx="0">
+            <a:schemeClr val="accent1"/>
+          </a:effectRef>
+          <a:fontRef idx="minor">
+            <a:schemeClr val="lt1"/>
+          </a:fontRef>
+        </p:style>
+        <p:txBody>
+          <a:bodyPr rtlCol="0" anchor="ctr"/>
+          <a:lstStyle/>
+          <a:p>
+            <a:pPr algn="ctr"/>
+            <a:endParaRPr lang="en-US"/>
           </a:p>
         </p:txBody>
       </p:sp>
     </p:spTree>
     <p:extLst>
       <p:ext uri="{BB962C8B-B14F-4D97-AF65-F5344CB8AC3E}">
-        <p14:creationId xmlns:p14="http://schemas.microsoft.com/office/powerpoint/2010/main" val="374784209"/>
+        <p14:creationId xmlns:p14="http://schemas.microsoft.com/office/powerpoint/2010/main" val="3827317366"/>
       </p:ext>
     </p:extLst>
   </p:cSld>
@@ -5804,13 +5684,7 @@
       </p:grpSpPr>
       <p:sp>
         <p:nvSpPr>
-          <p:cNvPr id="2" name="标题 1">
-            <a:extLst>
-              <a:ext uri="{FF2B5EF4-FFF2-40B4-BE49-F238E27FC236}">
-                <a16:creationId xmlns="" xmlns:a16="http://schemas.microsoft.com/office/drawing/2014/main" id="{1E9543EA-3131-444F-84A4-D17330176CA2}"/>
-              </a:ext>
-            </a:extLst>
-          </p:cNvPr>
+          <p:cNvPr id="2" name="标题 1"/>
           <p:cNvSpPr>
             <a:spLocks noGrp="1"/>
           </p:cNvSpPr>
@@ -5820,7 +5694,7 @@
         </p:nvSpPr>
         <p:spPr>
           <a:xfrm>
-            <a:off x="838200" y="107430"/>
+            <a:off x="811567" y="154127"/>
             <a:ext cx="10515600" cy="1325563"/>
           </a:xfrm>
         </p:spPr>
@@ -5831,341 +5705,1208 @@
           <a:lstStyle/>
           <a:p>
             <a:r>
-              <a:rPr lang="en-US" altLang="zh-CN" dirty="0">
-                <a:latin typeface="Calibri Light" panose="020F0302020204030204" pitchFamily="34" charset="0"/>
-                <a:ea typeface="Calibri Light" panose="020F0302020204030204" pitchFamily="34" charset="0"/>
-                <a:cs typeface="Calibri Light" panose="020F0302020204030204" pitchFamily="34" charset="0"/>
-              </a:rPr>
-              <a:t>Agent Observability Requirements</a:t>
-            </a:r>
-            <a:endParaRPr lang="zh-CN" altLang="en-US" dirty="0">
-              <a:latin typeface="Calibri Light" panose="020F0302020204030204" pitchFamily="34" charset="0"/>
-              <a:cs typeface="Calibri Light" panose="020F0302020204030204" pitchFamily="34" charset="0"/>
-            </a:endParaRPr>
+              <a:rPr lang="en-US" altLang="zh-CN" sz="3600" dirty="0" smtClean="0"/>
+              <a:t>Deriving Requirements from Problem Statements-Agent Observability</a:t>
+            </a:r>
+            <a:endParaRPr lang="en-US" sz="3600" dirty="0"/>
           </a:p>
         </p:txBody>
       </p:sp>
-      <p:sp>
-        <p:nvSpPr>
-          <p:cNvPr id="3" name="内容占位符 2">
-            <a:extLst>
-              <a:ext uri="{FF2B5EF4-FFF2-40B4-BE49-F238E27FC236}">
-                <a16:creationId xmlns="" xmlns:a16="http://schemas.microsoft.com/office/drawing/2014/main" id="{CA5A97EF-FE90-45DB-B31F-611000FFB070}"/>
-              </a:ext>
-            </a:extLst>
-          </p:cNvPr>
-          <p:cNvSpPr>
-            <a:spLocks noGrp="1"/>
-          </p:cNvSpPr>
+      <p:graphicFrame>
+        <p:nvGraphicFramePr>
+          <p:cNvPr id="5" name="表格 4"/>
+          <p:cNvGraphicFramePr>
+            <a:graphicFrameLocks noGrp="1"/>
+          </p:cNvGraphicFramePr>
           <p:nvPr>
-            <p:ph idx="1"/>
+            <p:extLst>
+              <p:ext uri="{D42A27DB-BD31-4B8C-83A1-F6EECF244321}">
+                <p14:modId xmlns:p14="http://schemas.microsoft.com/office/powerpoint/2010/main" val="1413903433"/>
+              </p:ext>
+            </p:extLst>
           </p:nvPr>
+        </p:nvGraphicFramePr>
+        <p:xfrm>
+          <a:off x="478284" y="2127760"/>
+          <a:ext cx="11182165" cy="4165315"/>
+        </p:xfrm>
+        <a:graphic>
+          <a:graphicData uri="http://schemas.openxmlformats.org/drawingml/2006/table">
+            <a:tbl>
+              <a:tblPr firstRow="1" bandRow="1">
+                <a:tableStyleId>{5C22544A-7EE6-4342-B048-85BDC9FD1C3A}</a:tableStyleId>
+              </a:tblPr>
+              <a:tblGrid>
+                <a:gridCol w="3727388"/>
+                <a:gridCol w="3326600"/>
+                <a:gridCol w="4128177"/>
+              </a:tblGrid>
+              <a:tr h="668706">
+                <a:tc>
+                  <a:txBody>
+                    <a:bodyPr/>
+                    <a:lstStyle/>
+                    <a:p>
+                      <a:r>
+                        <a:rPr lang="en-US" sz="1400" dirty="0" smtClean="0">
+                          <a:solidFill>
+                            <a:schemeClr val="bg1"/>
+                          </a:solidFill>
+                        </a:rPr>
+                        <a:t>Problem</a:t>
+                      </a:r>
+                      <a:r>
+                        <a:rPr lang="en-US" sz="1400" baseline="0" dirty="0" smtClean="0">
+                          <a:solidFill>
+                            <a:schemeClr val="bg1"/>
+                          </a:solidFill>
+                        </a:rPr>
+                        <a:t> Statement Gap</a:t>
+                      </a:r>
+                    </a:p>
+                    <a:p>
+                      <a:r>
+                        <a:rPr lang="en-US" sz="1400" baseline="0" dirty="0" smtClean="0">
+                          <a:solidFill>
+                            <a:schemeClr val="bg1"/>
+                          </a:solidFill>
+                        </a:rPr>
+                        <a:t>I-D. </a:t>
+                      </a:r>
+                      <a:r>
+                        <a:rPr lang="en-US" sz="1400" baseline="0" dirty="0" err="1" smtClean="0">
+                          <a:solidFill>
+                            <a:schemeClr val="bg1"/>
+                          </a:solidFill>
+                        </a:rPr>
+                        <a:t>wnd</a:t>
+                      </a:r>
+                      <a:r>
+                        <a:rPr lang="en-US" sz="1400" baseline="0" dirty="0" smtClean="0">
+                          <a:solidFill>
+                            <a:schemeClr val="bg1"/>
+                          </a:solidFill>
+                        </a:rPr>
+                        <a:t>-opsawg-icon-</a:t>
+                      </a:r>
+                      <a:r>
+                        <a:rPr lang="en-US" sz="1400" baseline="0" dirty="0" err="1" smtClean="0">
+                          <a:solidFill>
+                            <a:schemeClr val="bg1"/>
+                          </a:solidFill>
+                        </a:rPr>
+                        <a:t>ps</a:t>
+                      </a:r>
+                      <a:endParaRPr lang="en-US" sz="1400" dirty="0">
+                        <a:solidFill>
+                          <a:schemeClr val="bg1"/>
+                        </a:solidFill>
+                      </a:endParaRPr>
+                    </a:p>
+                  </a:txBody>
+                  <a:tcPr>
+                    <a:lnL w="12700" cap="flat" cmpd="sng" algn="ctr">
+                      <a:solidFill>
+                        <a:schemeClr val="bg1">
+                          <a:lumMod val="50000"/>
+                        </a:schemeClr>
+                      </a:solidFill>
+                      <a:prstDash val="solid"/>
+                      <a:round/>
+                      <a:headEnd type="none" w="med" len="med"/>
+                      <a:tailEnd type="none" w="med" len="med"/>
+                    </a:lnL>
+                    <a:lnR w="12700" cap="flat" cmpd="sng" algn="ctr">
+                      <a:solidFill>
+                        <a:schemeClr val="bg1">
+                          <a:lumMod val="50000"/>
+                        </a:schemeClr>
+                      </a:solidFill>
+                      <a:prstDash val="solid"/>
+                      <a:round/>
+                      <a:headEnd type="none" w="med" len="med"/>
+                      <a:tailEnd type="none" w="med" len="med"/>
+                    </a:lnR>
+                    <a:lnT w="12700" cap="flat" cmpd="sng" algn="ctr">
+                      <a:solidFill>
+                        <a:schemeClr val="bg1">
+                          <a:lumMod val="50000"/>
+                        </a:schemeClr>
+                      </a:solidFill>
+                      <a:prstDash val="solid"/>
+                      <a:round/>
+                      <a:headEnd type="none" w="med" len="med"/>
+                      <a:tailEnd type="none" w="med" len="med"/>
+                    </a:lnT>
+                    <a:lnB w="12700" cap="flat" cmpd="sng" algn="ctr">
+                      <a:solidFill>
+                        <a:schemeClr val="bg1">
+                          <a:lumMod val="50000"/>
+                        </a:schemeClr>
+                      </a:solidFill>
+                      <a:prstDash val="solid"/>
+                      <a:round/>
+                      <a:headEnd type="none" w="med" len="med"/>
+                      <a:tailEnd type="none" w="med" len="med"/>
+                    </a:lnB>
+                    <a:solidFill>
+                      <a:schemeClr val="tx2">
+                        <a:lumMod val="75000"/>
+                      </a:schemeClr>
+                    </a:solidFill>
+                  </a:tcPr>
+                </a:tc>
+                <a:tc>
+                  <a:txBody>
+                    <a:bodyPr/>
+                    <a:lstStyle/>
+                    <a:p>
+                      <a:r>
+                        <a:rPr lang="en-US" sz="1400" dirty="0" smtClean="0"/>
+                        <a:t>Essential Requirement</a:t>
+                      </a:r>
+                    </a:p>
+                    <a:p>
+                      <a:r>
+                        <a:rPr lang="en-US" sz="1400" dirty="0" smtClean="0"/>
+                        <a:t>I-D.</a:t>
+                      </a:r>
+                      <a:r>
+                        <a:rPr lang="en-US" sz="1400" baseline="0" dirty="0" smtClean="0"/>
+                        <a:t> </a:t>
+                      </a:r>
+                      <a:r>
+                        <a:rPr lang="en-US" sz="1400" baseline="0" dirty="0" err="1" smtClean="0"/>
+                        <a:t>mcw</a:t>
+                      </a:r>
+                      <a:r>
+                        <a:rPr lang="en-US" sz="1400" baseline="0" dirty="0" smtClean="0"/>
+                        <a:t>-opsawg-icon-requirements</a:t>
+                      </a:r>
+                      <a:endParaRPr lang="en-US" sz="1400" dirty="0"/>
+                    </a:p>
+                  </a:txBody>
+                  <a:tcPr>
+                    <a:lnL w="12700" cap="flat" cmpd="sng" algn="ctr">
+                      <a:solidFill>
+                        <a:schemeClr val="bg1">
+                          <a:lumMod val="50000"/>
+                        </a:schemeClr>
+                      </a:solidFill>
+                      <a:prstDash val="solid"/>
+                      <a:round/>
+                      <a:headEnd type="none" w="med" len="med"/>
+                      <a:tailEnd type="none" w="med" len="med"/>
+                    </a:lnL>
+                    <a:lnR w="12700" cap="flat" cmpd="sng" algn="ctr">
+                      <a:solidFill>
+                        <a:schemeClr val="bg1">
+                          <a:lumMod val="50000"/>
+                        </a:schemeClr>
+                      </a:solidFill>
+                      <a:prstDash val="solid"/>
+                      <a:round/>
+                      <a:headEnd type="none" w="med" len="med"/>
+                      <a:tailEnd type="none" w="med" len="med"/>
+                    </a:lnR>
+                    <a:lnT w="12700" cap="flat" cmpd="sng" algn="ctr">
+                      <a:solidFill>
+                        <a:schemeClr val="bg1">
+                          <a:lumMod val="50000"/>
+                        </a:schemeClr>
+                      </a:solidFill>
+                      <a:prstDash val="solid"/>
+                      <a:round/>
+                      <a:headEnd type="none" w="med" len="med"/>
+                      <a:tailEnd type="none" w="med" len="med"/>
+                    </a:lnT>
+                    <a:lnB w="12700" cap="flat" cmpd="sng" algn="ctr">
+                      <a:solidFill>
+                        <a:schemeClr val="bg1">
+                          <a:lumMod val="50000"/>
+                        </a:schemeClr>
+                      </a:solidFill>
+                      <a:prstDash val="solid"/>
+                      <a:round/>
+                      <a:headEnd type="none" w="med" len="med"/>
+                      <a:tailEnd type="none" w="med" len="med"/>
+                    </a:lnB>
+                    <a:solidFill>
+                      <a:schemeClr val="tx2">
+                        <a:lumMod val="75000"/>
+                      </a:schemeClr>
+                    </a:solidFill>
+                  </a:tcPr>
+                </a:tc>
+                <a:tc>
+                  <a:txBody>
+                    <a:bodyPr/>
+                    <a:lstStyle/>
+                    <a:p>
+                      <a:r>
+                        <a:rPr lang="en-US" sz="1400" dirty="0" smtClean="0"/>
+                        <a:t>Description</a:t>
+                      </a:r>
+                      <a:endParaRPr lang="en-US" sz="1400" dirty="0"/>
+                    </a:p>
+                  </a:txBody>
+                  <a:tcPr>
+                    <a:lnL w="12700" cap="flat" cmpd="sng" algn="ctr">
+                      <a:solidFill>
+                        <a:schemeClr val="bg1">
+                          <a:lumMod val="50000"/>
+                        </a:schemeClr>
+                      </a:solidFill>
+                      <a:prstDash val="solid"/>
+                      <a:round/>
+                      <a:headEnd type="none" w="med" len="med"/>
+                      <a:tailEnd type="none" w="med" len="med"/>
+                    </a:lnL>
+                    <a:lnR w="12700" cap="flat" cmpd="sng" algn="ctr">
+                      <a:solidFill>
+                        <a:schemeClr val="bg1">
+                          <a:lumMod val="50000"/>
+                        </a:schemeClr>
+                      </a:solidFill>
+                      <a:prstDash val="solid"/>
+                      <a:round/>
+                      <a:headEnd type="none" w="med" len="med"/>
+                      <a:tailEnd type="none" w="med" len="med"/>
+                    </a:lnR>
+                    <a:lnT w="12700" cap="flat" cmpd="sng" algn="ctr">
+                      <a:solidFill>
+                        <a:schemeClr val="bg1">
+                          <a:lumMod val="50000"/>
+                        </a:schemeClr>
+                      </a:solidFill>
+                      <a:prstDash val="solid"/>
+                      <a:round/>
+                      <a:headEnd type="none" w="med" len="med"/>
+                      <a:tailEnd type="none" w="med" len="med"/>
+                    </a:lnT>
+                    <a:lnB w="12700" cap="flat" cmpd="sng" algn="ctr">
+                      <a:solidFill>
+                        <a:schemeClr val="bg1">
+                          <a:lumMod val="50000"/>
+                        </a:schemeClr>
+                      </a:solidFill>
+                      <a:prstDash val="solid"/>
+                      <a:round/>
+                      <a:headEnd type="none" w="med" len="med"/>
+                      <a:tailEnd type="none" w="med" len="med"/>
+                    </a:lnB>
+                    <a:solidFill>
+                      <a:schemeClr val="tx2">
+                        <a:lumMod val="75000"/>
+                      </a:schemeClr>
+                    </a:solidFill>
+                  </a:tcPr>
+                </a:tc>
+              </a:tr>
+              <a:tr h="848115">
+                <a:tc>
+                  <a:txBody>
+                    <a:bodyPr/>
+                    <a:lstStyle/>
+                    <a:p>
+                      <a:r>
+                        <a:rPr lang="en-US" sz="1400" dirty="0" smtClean="0"/>
+                        <a:t>3.1.1 Limited Transparency in Planning and Decision-Making</a:t>
+                      </a:r>
+                      <a:endParaRPr lang="en-US" sz="1400" dirty="0"/>
+                    </a:p>
+                  </a:txBody>
+                  <a:tcPr>
+                    <a:lnL w="12700" cap="flat" cmpd="sng" algn="ctr">
+                      <a:solidFill>
+                        <a:schemeClr val="bg1">
+                          <a:lumMod val="50000"/>
+                        </a:schemeClr>
+                      </a:solidFill>
+                      <a:prstDash val="solid"/>
+                      <a:round/>
+                      <a:headEnd type="none" w="med" len="med"/>
+                      <a:tailEnd type="none" w="med" len="med"/>
+                    </a:lnL>
+                    <a:lnR w="12700" cap="flat" cmpd="sng" algn="ctr">
+                      <a:solidFill>
+                        <a:schemeClr val="bg1">
+                          <a:lumMod val="50000"/>
+                        </a:schemeClr>
+                      </a:solidFill>
+                      <a:prstDash val="solid"/>
+                      <a:round/>
+                      <a:headEnd type="none" w="med" len="med"/>
+                      <a:tailEnd type="none" w="med" len="med"/>
+                    </a:lnR>
+                    <a:lnT w="12700" cap="flat" cmpd="sng" algn="ctr">
+                      <a:solidFill>
+                        <a:schemeClr val="bg1">
+                          <a:lumMod val="50000"/>
+                        </a:schemeClr>
+                      </a:solidFill>
+                      <a:prstDash val="solid"/>
+                      <a:round/>
+                      <a:headEnd type="none" w="med" len="med"/>
+                      <a:tailEnd type="none" w="med" len="med"/>
+                    </a:lnT>
+                    <a:lnB w="12700" cap="flat" cmpd="sng" algn="ctr">
+                      <a:solidFill>
+                        <a:schemeClr val="bg1">
+                          <a:lumMod val="50000"/>
+                        </a:schemeClr>
+                      </a:solidFill>
+                      <a:prstDash val="solid"/>
+                      <a:round/>
+                      <a:headEnd type="none" w="med" len="med"/>
+                      <a:tailEnd type="none" w="med" len="med"/>
+                    </a:lnB>
+                    <a:lnTlToBr w="12700" cmpd="sng">
+                      <a:noFill/>
+                      <a:prstDash val="solid"/>
+                    </a:lnTlToBr>
+                    <a:lnBlToTr w="12700" cmpd="sng">
+                      <a:noFill/>
+                      <a:prstDash val="solid"/>
+                    </a:lnBlToTr>
+                    <a:solidFill>
+                      <a:schemeClr val="bg1"/>
+                    </a:solidFill>
+                  </a:tcPr>
+                </a:tc>
+                <a:tc>
+                  <a:txBody>
+                    <a:bodyPr/>
+                    <a:lstStyle/>
+                    <a:p>
+                      <a:r>
+                        <a:rPr lang="en-US" sz="1400" dirty="0" smtClean="0"/>
+                        <a:t>OBS-1: Execution Trajectory Capture</a:t>
+                      </a:r>
+                    </a:p>
+                  </a:txBody>
+                  <a:tcPr>
+                    <a:lnL w="12700" cap="flat" cmpd="sng" algn="ctr">
+                      <a:solidFill>
+                        <a:schemeClr val="bg1">
+                          <a:lumMod val="50000"/>
+                        </a:schemeClr>
+                      </a:solidFill>
+                      <a:prstDash val="solid"/>
+                      <a:round/>
+                      <a:headEnd type="none" w="med" len="med"/>
+                      <a:tailEnd type="none" w="med" len="med"/>
+                    </a:lnL>
+                    <a:lnR w="12700" cap="flat" cmpd="sng" algn="ctr">
+                      <a:solidFill>
+                        <a:schemeClr val="bg1">
+                          <a:lumMod val="50000"/>
+                        </a:schemeClr>
+                      </a:solidFill>
+                      <a:prstDash val="solid"/>
+                      <a:round/>
+                      <a:headEnd type="none" w="med" len="med"/>
+                      <a:tailEnd type="none" w="med" len="med"/>
+                    </a:lnR>
+                    <a:lnT w="12700" cap="flat" cmpd="sng" algn="ctr">
+                      <a:solidFill>
+                        <a:schemeClr val="bg1">
+                          <a:lumMod val="50000"/>
+                        </a:schemeClr>
+                      </a:solidFill>
+                      <a:prstDash val="solid"/>
+                      <a:round/>
+                      <a:headEnd type="none" w="med" len="med"/>
+                      <a:tailEnd type="none" w="med" len="med"/>
+                    </a:lnT>
+                    <a:lnB w="12700" cap="flat" cmpd="sng" algn="ctr">
+                      <a:solidFill>
+                        <a:schemeClr val="bg1">
+                          <a:lumMod val="50000"/>
+                        </a:schemeClr>
+                      </a:solidFill>
+                      <a:prstDash val="solid"/>
+                      <a:round/>
+                      <a:headEnd type="none" w="med" len="med"/>
+                      <a:tailEnd type="none" w="med" len="med"/>
+                    </a:lnB>
+                    <a:lnTlToBr w="12700" cmpd="sng">
+                      <a:noFill/>
+                      <a:prstDash val="solid"/>
+                    </a:lnTlToBr>
+                    <a:lnBlToTr w="12700" cmpd="sng">
+                      <a:noFill/>
+                      <a:prstDash val="solid"/>
+                    </a:lnBlToTr>
+                    <a:solidFill>
+                      <a:schemeClr val="bg1"/>
+                    </a:solidFill>
+                  </a:tcPr>
+                </a:tc>
+                <a:tc>
+                  <a:txBody>
+                    <a:bodyPr/>
+                    <a:lstStyle/>
+                    <a:p>
+                      <a:r>
+                        <a:rPr lang="en-US" sz="1400" dirty="0" smtClean="0"/>
+                        <a:t>The full path visible, including the plan, the invoked tools/skills, generated configuration change, and the resulting state</a:t>
+                      </a:r>
+                      <a:endParaRPr lang="en-US" sz="1400" dirty="0"/>
+                    </a:p>
+                  </a:txBody>
+                  <a:tcPr>
+                    <a:lnL w="12700" cap="flat" cmpd="sng" algn="ctr">
+                      <a:solidFill>
+                        <a:schemeClr val="bg1">
+                          <a:lumMod val="50000"/>
+                        </a:schemeClr>
+                      </a:solidFill>
+                      <a:prstDash val="solid"/>
+                      <a:round/>
+                      <a:headEnd type="none" w="med" len="med"/>
+                      <a:tailEnd type="none" w="med" len="med"/>
+                    </a:lnL>
+                    <a:lnR w="12700" cap="flat" cmpd="sng" algn="ctr">
+                      <a:solidFill>
+                        <a:schemeClr val="bg1">
+                          <a:lumMod val="50000"/>
+                        </a:schemeClr>
+                      </a:solidFill>
+                      <a:prstDash val="solid"/>
+                      <a:round/>
+                      <a:headEnd type="none" w="med" len="med"/>
+                      <a:tailEnd type="none" w="med" len="med"/>
+                    </a:lnR>
+                    <a:lnT w="12700" cap="flat" cmpd="sng" algn="ctr">
+                      <a:solidFill>
+                        <a:schemeClr val="bg1">
+                          <a:lumMod val="50000"/>
+                        </a:schemeClr>
+                      </a:solidFill>
+                      <a:prstDash val="solid"/>
+                      <a:round/>
+                      <a:headEnd type="none" w="med" len="med"/>
+                      <a:tailEnd type="none" w="med" len="med"/>
+                    </a:lnT>
+                    <a:lnB w="12700" cap="flat" cmpd="sng" algn="ctr">
+                      <a:solidFill>
+                        <a:schemeClr val="bg1">
+                          <a:lumMod val="50000"/>
+                        </a:schemeClr>
+                      </a:solidFill>
+                      <a:prstDash val="solid"/>
+                      <a:round/>
+                      <a:headEnd type="none" w="med" len="med"/>
+                      <a:tailEnd type="none" w="med" len="med"/>
+                    </a:lnB>
+                    <a:lnTlToBr w="12700" cmpd="sng">
+                      <a:noFill/>
+                      <a:prstDash val="solid"/>
+                    </a:lnTlToBr>
+                    <a:lnBlToTr w="12700" cmpd="sng">
+                      <a:noFill/>
+                      <a:prstDash val="solid"/>
+                    </a:lnBlToTr>
+                    <a:solidFill>
+                      <a:schemeClr val="bg1"/>
+                    </a:solidFill>
+                  </a:tcPr>
+                </a:tc>
+              </a:tr>
+              <a:tr h="1095482">
+                <a:tc>
+                  <a:txBody>
+                    <a:bodyPr/>
+                    <a:lstStyle/>
+                    <a:p>
+                      <a:r>
+                        <a:rPr lang="en-US" sz="1400" dirty="0" smtClean="0"/>
+                        <a:t>5.1</a:t>
+                      </a:r>
+                      <a:r>
+                        <a:rPr lang="en-US" sz="1400" baseline="0" dirty="0" smtClean="0"/>
+                        <a:t> </a:t>
+                      </a:r>
+                      <a:r>
+                        <a:rPr lang="en-US" sz="1400" baseline="0" dirty="0" err="1" smtClean="0"/>
+                        <a:t>OpenTelemetry</a:t>
+                      </a:r>
+                      <a:r>
+                        <a:rPr lang="en-US" altLang="zh-CN" sz="1400" baseline="0" dirty="0" smtClean="0"/>
+                        <a:t> only captures the execution process, not the operational motivation.</a:t>
+                      </a:r>
+                      <a:endParaRPr lang="en-US" sz="1400" dirty="0"/>
+                    </a:p>
+                  </a:txBody>
+                  <a:tcPr>
+                    <a:lnL w="12700" cap="flat" cmpd="sng" algn="ctr">
+                      <a:solidFill>
+                        <a:schemeClr val="bg1">
+                          <a:lumMod val="50000"/>
+                        </a:schemeClr>
+                      </a:solidFill>
+                      <a:prstDash val="solid"/>
+                      <a:round/>
+                      <a:headEnd type="none" w="med" len="med"/>
+                      <a:tailEnd type="none" w="med" len="med"/>
+                    </a:lnL>
+                    <a:lnR w="12700" cap="flat" cmpd="sng" algn="ctr">
+                      <a:solidFill>
+                        <a:schemeClr val="bg1">
+                          <a:lumMod val="50000"/>
+                        </a:schemeClr>
+                      </a:solidFill>
+                      <a:prstDash val="solid"/>
+                      <a:round/>
+                      <a:headEnd type="none" w="med" len="med"/>
+                      <a:tailEnd type="none" w="med" len="med"/>
+                    </a:lnR>
+                    <a:lnT w="12700" cap="flat" cmpd="sng" algn="ctr">
+                      <a:solidFill>
+                        <a:schemeClr val="bg1">
+                          <a:lumMod val="50000"/>
+                        </a:schemeClr>
+                      </a:solidFill>
+                      <a:prstDash val="solid"/>
+                      <a:round/>
+                      <a:headEnd type="none" w="med" len="med"/>
+                      <a:tailEnd type="none" w="med" len="med"/>
+                    </a:lnT>
+                    <a:lnB w="12700" cap="flat" cmpd="sng" algn="ctr">
+                      <a:solidFill>
+                        <a:schemeClr val="bg1">
+                          <a:lumMod val="50000"/>
+                        </a:schemeClr>
+                      </a:solidFill>
+                      <a:prstDash val="solid"/>
+                      <a:round/>
+                      <a:headEnd type="none" w="med" len="med"/>
+                      <a:tailEnd type="none" w="med" len="med"/>
+                    </a:lnB>
+                    <a:lnTlToBr w="12700" cmpd="sng">
+                      <a:noFill/>
+                      <a:prstDash val="solid"/>
+                    </a:lnTlToBr>
+                    <a:lnBlToTr w="12700" cmpd="sng">
+                      <a:noFill/>
+                      <a:prstDash val="solid"/>
+                    </a:lnBlToTr>
+                    <a:solidFill>
+                      <a:schemeClr val="bg1"/>
+                    </a:solidFill>
+                  </a:tcPr>
+                </a:tc>
+                <a:tc>
+                  <a:txBody>
+                    <a:bodyPr/>
+                    <a:lstStyle/>
+                    <a:p>
+                      <a:r>
+                        <a:rPr lang="en-US" sz="1400" dirty="0" smtClean="0"/>
+                        <a:t>OBS-2: Reasoning Provenance Capture</a:t>
+                      </a:r>
+                    </a:p>
+                  </a:txBody>
+                  <a:tcPr>
+                    <a:lnL w="12700" cap="flat" cmpd="sng" algn="ctr">
+                      <a:solidFill>
+                        <a:schemeClr val="bg1">
+                          <a:lumMod val="50000"/>
+                        </a:schemeClr>
+                      </a:solidFill>
+                      <a:prstDash val="solid"/>
+                      <a:round/>
+                      <a:headEnd type="none" w="med" len="med"/>
+                      <a:tailEnd type="none" w="med" len="med"/>
+                    </a:lnL>
+                    <a:lnR w="12700" cap="flat" cmpd="sng" algn="ctr">
+                      <a:solidFill>
+                        <a:schemeClr val="bg1">
+                          <a:lumMod val="50000"/>
+                        </a:schemeClr>
+                      </a:solidFill>
+                      <a:prstDash val="solid"/>
+                      <a:round/>
+                      <a:headEnd type="none" w="med" len="med"/>
+                      <a:tailEnd type="none" w="med" len="med"/>
+                    </a:lnR>
+                    <a:lnT w="12700" cap="flat" cmpd="sng" algn="ctr">
+                      <a:solidFill>
+                        <a:schemeClr val="bg1">
+                          <a:lumMod val="50000"/>
+                        </a:schemeClr>
+                      </a:solidFill>
+                      <a:prstDash val="solid"/>
+                      <a:round/>
+                      <a:headEnd type="none" w="med" len="med"/>
+                      <a:tailEnd type="none" w="med" len="med"/>
+                    </a:lnT>
+                    <a:lnB w="12700" cap="flat" cmpd="sng" algn="ctr">
+                      <a:solidFill>
+                        <a:schemeClr val="bg1">
+                          <a:lumMod val="50000"/>
+                        </a:schemeClr>
+                      </a:solidFill>
+                      <a:prstDash val="solid"/>
+                      <a:round/>
+                      <a:headEnd type="none" w="med" len="med"/>
+                      <a:tailEnd type="none" w="med" len="med"/>
+                    </a:lnB>
+                    <a:lnTlToBr w="12700" cmpd="sng">
+                      <a:noFill/>
+                      <a:prstDash val="solid"/>
+                    </a:lnTlToBr>
+                    <a:lnBlToTr w="12700" cmpd="sng">
+                      <a:noFill/>
+                      <a:prstDash val="solid"/>
+                    </a:lnBlToTr>
+                    <a:solidFill>
+                      <a:schemeClr val="bg1"/>
+                    </a:solidFill>
+                  </a:tcPr>
+                </a:tc>
+                <a:tc>
+                  <a:txBody>
+                    <a:bodyPr/>
+                    <a:lstStyle/>
+                    <a:p>
+                      <a:r>
+                        <a:rPr lang="en-US" sz="1400" dirty="0" smtClean="0"/>
+                        <a:t>Exposes why a decision was made — the operational signals (e.g., alarms, incidents, telemetry streams) and confidence level behind a specific network action.</a:t>
+                      </a:r>
+                    </a:p>
+                  </a:txBody>
+                  <a:tcPr>
+                    <a:lnL w="12700" cap="flat" cmpd="sng" algn="ctr">
+                      <a:solidFill>
+                        <a:schemeClr val="bg1">
+                          <a:lumMod val="50000"/>
+                        </a:schemeClr>
+                      </a:solidFill>
+                      <a:prstDash val="solid"/>
+                      <a:round/>
+                      <a:headEnd type="none" w="med" len="med"/>
+                      <a:tailEnd type="none" w="med" len="med"/>
+                    </a:lnL>
+                    <a:lnR w="12700" cap="flat" cmpd="sng" algn="ctr">
+                      <a:solidFill>
+                        <a:schemeClr val="bg1">
+                          <a:lumMod val="50000"/>
+                        </a:schemeClr>
+                      </a:solidFill>
+                      <a:prstDash val="solid"/>
+                      <a:round/>
+                      <a:headEnd type="none" w="med" len="med"/>
+                      <a:tailEnd type="none" w="med" len="med"/>
+                    </a:lnR>
+                    <a:lnT w="12700" cap="flat" cmpd="sng" algn="ctr">
+                      <a:solidFill>
+                        <a:schemeClr val="bg1">
+                          <a:lumMod val="50000"/>
+                        </a:schemeClr>
+                      </a:solidFill>
+                      <a:prstDash val="solid"/>
+                      <a:round/>
+                      <a:headEnd type="none" w="med" len="med"/>
+                      <a:tailEnd type="none" w="med" len="med"/>
+                    </a:lnT>
+                    <a:lnB w="12700" cap="flat" cmpd="sng" algn="ctr">
+                      <a:solidFill>
+                        <a:schemeClr val="bg1">
+                          <a:lumMod val="50000"/>
+                        </a:schemeClr>
+                      </a:solidFill>
+                      <a:prstDash val="solid"/>
+                      <a:round/>
+                      <a:headEnd type="none" w="med" len="med"/>
+                      <a:tailEnd type="none" w="med" len="med"/>
+                    </a:lnB>
+                    <a:lnTlToBr w="12700" cmpd="sng">
+                      <a:noFill/>
+                      <a:prstDash val="solid"/>
+                    </a:lnTlToBr>
+                    <a:lnBlToTr w="12700" cmpd="sng">
+                      <a:noFill/>
+                      <a:prstDash val="solid"/>
+                    </a:lnBlToTr>
+                    <a:solidFill>
+                      <a:schemeClr val="bg1"/>
+                    </a:solidFill>
+                  </a:tcPr>
+                </a:tc>
+              </a:tr>
+              <a:tr h="848115">
+                <a:tc>
+                  <a:txBody>
+                    <a:bodyPr/>
+                    <a:lstStyle/>
+                    <a:p>
+                      <a:r>
+                        <a:rPr lang="en-US" sz="1400" dirty="0" smtClean="0"/>
+                        <a:t>5.1 lacks</a:t>
+                      </a:r>
+                      <a:r>
+                        <a:rPr lang="en-US" sz="1400" baseline="0" dirty="0" smtClean="0"/>
+                        <a:t> native support for observing metrics such as an agent’s reasoning logic and internal confidence levels</a:t>
+                      </a:r>
+                      <a:endParaRPr lang="en-US" sz="1400" dirty="0"/>
+                    </a:p>
+                  </a:txBody>
+                  <a:tcPr>
+                    <a:lnL w="12700" cap="flat" cmpd="sng" algn="ctr">
+                      <a:solidFill>
+                        <a:schemeClr val="bg1">
+                          <a:lumMod val="50000"/>
+                        </a:schemeClr>
+                      </a:solidFill>
+                      <a:prstDash val="solid"/>
+                      <a:round/>
+                      <a:headEnd type="none" w="med" len="med"/>
+                      <a:tailEnd type="none" w="med" len="med"/>
+                    </a:lnL>
+                    <a:lnR w="12700" cap="flat" cmpd="sng" algn="ctr">
+                      <a:solidFill>
+                        <a:schemeClr val="bg1">
+                          <a:lumMod val="50000"/>
+                        </a:schemeClr>
+                      </a:solidFill>
+                      <a:prstDash val="solid"/>
+                      <a:round/>
+                      <a:headEnd type="none" w="med" len="med"/>
+                      <a:tailEnd type="none" w="med" len="med"/>
+                    </a:lnR>
+                    <a:lnT w="12700" cap="flat" cmpd="sng" algn="ctr">
+                      <a:solidFill>
+                        <a:schemeClr val="bg1">
+                          <a:lumMod val="50000"/>
+                        </a:schemeClr>
+                      </a:solidFill>
+                      <a:prstDash val="solid"/>
+                      <a:round/>
+                      <a:headEnd type="none" w="med" len="med"/>
+                      <a:tailEnd type="none" w="med" len="med"/>
+                    </a:lnT>
+                    <a:lnB w="12700" cap="flat" cmpd="sng" algn="ctr">
+                      <a:solidFill>
+                        <a:schemeClr val="bg1">
+                          <a:lumMod val="50000"/>
+                        </a:schemeClr>
+                      </a:solidFill>
+                      <a:prstDash val="solid"/>
+                      <a:round/>
+                      <a:headEnd type="none" w="med" len="med"/>
+                      <a:tailEnd type="none" w="med" len="med"/>
+                    </a:lnB>
+                    <a:lnTlToBr w="12700" cmpd="sng">
+                      <a:noFill/>
+                      <a:prstDash val="solid"/>
+                    </a:lnTlToBr>
+                    <a:lnBlToTr w="12700" cmpd="sng">
+                      <a:noFill/>
+                      <a:prstDash val="solid"/>
+                    </a:lnBlToTr>
+                    <a:solidFill>
+                      <a:schemeClr val="bg1"/>
+                    </a:solidFill>
+                  </a:tcPr>
+                </a:tc>
+                <a:tc>
+                  <a:txBody>
+                    <a:bodyPr/>
+                    <a:lstStyle/>
+                    <a:p>
+                      <a:r>
+                        <a:rPr lang="en-US" sz="1400" dirty="0" smtClean="0"/>
+                        <a:t>OBS-3: Operational Metrics Collection</a:t>
+                      </a:r>
+                    </a:p>
+                  </a:txBody>
+                  <a:tcPr>
+                    <a:lnL w="12700" cap="flat" cmpd="sng" algn="ctr">
+                      <a:solidFill>
+                        <a:schemeClr val="bg1">
+                          <a:lumMod val="50000"/>
+                        </a:schemeClr>
+                      </a:solidFill>
+                      <a:prstDash val="solid"/>
+                      <a:round/>
+                      <a:headEnd type="none" w="med" len="med"/>
+                      <a:tailEnd type="none" w="med" len="med"/>
+                    </a:lnL>
+                    <a:lnR w="12700" cap="flat" cmpd="sng" algn="ctr">
+                      <a:solidFill>
+                        <a:schemeClr val="bg1">
+                          <a:lumMod val="50000"/>
+                        </a:schemeClr>
+                      </a:solidFill>
+                      <a:prstDash val="solid"/>
+                      <a:round/>
+                      <a:headEnd type="none" w="med" len="med"/>
+                      <a:tailEnd type="none" w="med" len="med"/>
+                    </a:lnR>
+                    <a:lnT w="12700" cap="flat" cmpd="sng" algn="ctr">
+                      <a:solidFill>
+                        <a:schemeClr val="bg1">
+                          <a:lumMod val="50000"/>
+                        </a:schemeClr>
+                      </a:solidFill>
+                      <a:prstDash val="solid"/>
+                      <a:round/>
+                      <a:headEnd type="none" w="med" len="med"/>
+                      <a:tailEnd type="none" w="med" len="med"/>
+                    </a:lnT>
+                    <a:lnB w="12700" cap="flat" cmpd="sng" algn="ctr">
+                      <a:solidFill>
+                        <a:schemeClr val="bg1">
+                          <a:lumMod val="50000"/>
+                        </a:schemeClr>
+                      </a:solidFill>
+                      <a:prstDash val="solid"/>
+                      <a:round/>
+                      <a:headEnd type="none" w="med" len="med"/>
+                      <a:tailEnd type="none" w="med" len="med"/>
+                    </a:lnB>
+                    <a:lnTlToBr w="12700" cmpd="sng">
+                      <a:noFill/>
+                      <a:prstDash val="solid"/>
+                    </a:lnTlToBr>
+                    <a:lnBlToTr w="12700" cmpd="sng">
+                      <a:noFill/>
+                      <a:prstDash val="solid"/>
+                    </a:lnBlToTr>
+                    <a:solidFill>
+                      <a:schemeClr val="bg1"/>
+                    </a:solidFill>
+                  </a:tcPr>
+                </a:tc>
+                <a:tc>
+                  <a:txBody>
+                    <a:bodyPr/>
+                    <a:lstStyle/>
+                    <a:p>
+                      <a:r>
+                        <a:rPr lang="en-US" sz="1400" dirty="0" smtClean="0"/>
+                        <a:t>Tracks an agent's own operational health and performance</a:t>
+                      </a:r>
+                      <a:endParaRPr lang="en-US" sz="1400" dirty="0"/>
+                    </a:p>
+                  </a:txBody>
+                  <a:tcPr>
+                    <a:lnL w="12700" cap="flat" cmpd="sng" algn="ctr">
+                      <a:solidFill>
+                        <a:schemeClr val="bg1">
+                          <a:lumMod val="50000"/>
+                        </a:schemeClr>
+                      </a:solidFill>
+                      <a:prstDash val="solid"/>
+                      <a:round/>
+                      <a:headEnd type="none" w="med" len="med"/>
+                      <a:tailEnd type="none" w="med" len="med"/>
+                    </a:lnL>
+                    <a:lnR w="12700" cap="flat" cmpd="sng" algn="ctr">
+                      <a:solidFill>
+                        <a:schemeClr val="bg1">
+                          <a:lumMod val="50000"/>
+                        </a:schemeClr>
+                      </a:solidFill>
+                      <a:prstDash val="solid"/>
+                      <a:round/>
+                      <a:headEnd type="none" w="med" len="med"/>
+                      <a:tailEnd type="none" w="med" len="med"/>
+                    </a:lnR>
+                    <a:lnT w="12700" cap="flat" cmpd="sng" algn="ctr">
+                      <a:solidFill>
+                        <a:schemeClr val="bg1">
+                          <a:lumMod val="50000"/>
+                        </a:schemeClr>
+                      </a:solidFill>
+                      <a:prstDash val="solid"/>
+                      <a:round/>
+                      <a:headEnd type="none" w="med" len="med"/>
+                      <a:tailEnd type="none" w="med" len="med"/>
+                    </a:lnT>
+                    <a:lnB w="12700" cap="flat" cmpd="sng" algn="ctr">
+                      <a:solidFill>
+                        <a:schemeClr val="bg1">
+                          <a:lumMod val="50000"/>
+                        </a:schemeClr>
+                      </a:solidFill>
+                      <a:prstDash val="solid"/>
+                      <a:round/>
+                      <a:headEnd type="none" w="med" len="med"/>
+                      <a:tailEnd type="none" w="med" len="med"/>
+                    </a:lnB>
+                    <a:lnTlToBr w="12700" cmpd="sng">
+                      <a:noFill/>
+                      <a:prstDash val="solid"/>
+                    </a:lnTlToBr>
+                    <a:lnBlToTr w="12700" cmpd="sng">
+                      <a:noFill/>
+                      <a:prstDash val="solid"/>
+                    </a:lnBlToTr>
+                    <a:solidFill>
+                      <a:schemeClr val="bg1"/>
+                    </a:solidFill>
+                  </a:tcPr>
+                </a:tc>
+              </a:tr>
+              <a:tr h="704897">
+                <a:tc>
+                  <a:txBody>
+                    <a:bodyPr/>
+                    <a:lstStyle/>
+                    <a:p>
+                      <a:r>
+                        <a:rPr lang="en-US" sz="1400" dirty="0" smtClean="0"/>
+                        <a:t>3.1.2. Ambiguity of Accountability Attribution</a:t>
+                      </a:r>
+                      <a:endParaRPr lang="en-US" sz="1400" dirty="0"/>
+                    </a:p>
+                  </a:txBody>
+                  <a:tcPr>
+                    <a:lnL w="12700" cap="flat" cmpd="sng" algn="ctr">
+                      <a:solidFill>
+                        <a:schemeClr val="bg1">
+                          <a:lumMod val="50000"/>
+                        </a:schemeClr>
+                      </a:solidFill>
+                      <a:prstDash val="solid"/>
+                      <a:round/>
+                      <a:headEnd type="none" w="med" len="med"/>
+                      <a:tailEnd type="none" w="med" len="med"/>
+                    </a:lnL>
+                    <a:lnR w="12700" cap="flat" cmpd="sng" algn="ctr">
+                      <a:solidFill>
+                        <a:schemeClr val="bg1">
+                          <a:lumMod val="50000"/>
+                        </a:schemeClr>
+                      </a:solidFill>
+                      <a:prstDash val="solid"/>
+                      <a:round/>
+                      <a:headEnd type="none" w="med" len="med"/>
+                      <a:tailEnd type="none" w="med" len="med"/>
+                    </a:lnR>
+                    <a:lnT w="12700" cap="flat" cmpd="sng" algn="ctr">
+                      <a:solidFill>
+                        <a:schemeClr val="bg1">
+                          <a:lumMod val="50000"/>
+                        </a:schemeClr>
+                      </a:solidFill>
+                      <a:prstDash val="solid"/>
+                      <a:round/>
+                      <a:headEnd type="none" w="med" len="med"/>
+                      <a:tailEnd type="none" w="med" len="med"/>
+                    </a:lnT>
+                    <a:lnB w="12700" cap="flat" cmpd="sng" algn="ctr">
+                      <a:solidFill>
+                        <a:schemeClr val="bg1">
+                          <a:lumMod val="50000"/>
+                        </a:schemeClr>
+                      </a:solidFill>
+                      <a:prstDash val="solid"/>
+                      <a:round/>
+                      <a:headEnd type="none" w="med" len="med"/>
+                      <a:tailEnd type="none" w="med" len="med"/>
+                    </a:lnB>
+                    <a:lnTlToBr w="12700" cmpd="sng">
+                      <a:noFill/>
+                      <a:prstDash val="solid"/>
+                    </a:lnTlToBr>
+                    <a:lnBlToTr w="12700" cmpd="sng">
+                      <a:noFill/>
+                      <a:prstDash val="solid"/>
+                    </a:lnBlToTr>
+                    <a:solidFill>
+                      <a:schemeClr val="bg1"/>
+                    </a:solidFill>
+                  </a:tcPr>
+                </a:tc>
+                <a:tc>
+                  <a:txBody>
+                    <a:bodyPr/>
+                    <a:lstStyle/>
+                    <a:p>
+                      <a:r>
+                        <a:rPr lang="en-US" sz="1400" dirty="0" smtClean="0"/>
+                        <a:t>OBS-4: Auditability and Accountability</a:t>
+                      </a:r>
+                    </a:p>
+                  </a:txBody>
+                  <a:tcPr>
+                    <a:lnL w="12700" cap="flat" cmpd="sng" algn="ctr">
+                      <a:solidFill>
+                        <a:schemeClr val="bg1">
+                          <a:lumMod val="50000"/>
+                        </a:schemeClr>
+                      </a:solidFill>
+                      <a:prstDash val="solid"/>
+                      <a:round/>
+                      <a:headEnd type="none" w="med" len="med"/>
+                      <a:tailEnd type="none" w="med" len="med"/>
+                    </a:lnL>
+                    <a:lnR w="12700" cap="flat" cmpd="sng" algn="ctr">
+                      <a:solidFill>
+                        <a:schemeClr val="bg1">
+                          <a:lumMod val="50000"/>
+                        </a:schemeClr>
+                      </a:solidFill>
+                      <a:prstDash val="solid"/>
+                      <a:round/>
+                      <a:headEnd type="none" w="med" len="med"/>
+                      <a:tailEnd type="none" w="med" len="med"/>
+                    </a:lnR>
+                    <a:lnT w="12700" cap="flat" cmpd="sng" algn="ctr">
+                      <a:solidFill>
+                        <a:schemeClr val="bg1">
+                          <a:lumMod val="50000"/>
+                        </a:schemeClr>
+                      </a:solidFill>
+                      <a:prstDash val="solid"/>
+                      <a:round/>
+                      <a:headEnd type="none" w="med" len="med"/>
+                      <a:tailEnd type="none" w="med" len="med"/>
+                    </a:lnT>
+                    <a:lnB w="12700" cap="flat" cmpd="sng" algn="ctr">
+                      <a:solidFill>
+                        <a:schemeClr val="bg1">
+                          <a:lumMod val="50000"/>
+                        </a:schemeClr>
+                      </a:solidFill>
+                      <a:prstDash val="solid"/>
+                      <a:round/>
+                      <a:headEnd type="none" w="med" len="med"/>
+                      <a:tailEnd type="none" w="med" len="med"/>
+                    </a:lnB>
+                    <a:lnTlToBr w="12700" cmpd="sng">
+                      <a:noFill/>
+                      <a:prstDash val="solid"/>
+                    </a:lnTlToBr>
+                    <a:lnBlToTr w="12700" cmpd="sng">
+                      <a:noFill/>
+                      <a:prstDash val="solid"/>
+                    </a:lnBlToTr>
+                    <a:solidFill>
+                      <a:schemeClr val="bg1"/>
+                    </a:solidFill>
+                  </a:tcPr>
+                </a:tc>
+                <a:tc>
+                  <a:txBody>
+                    <a:bodyPr/>
+                    <a:lstStyle/>
+                    <a:p>
+                      <a:r>
+                        <a:rPr lang="en-US" sz="1400" dirty="0" smtClean="0"/>
+                        <a:t>attribution of failures to responsible entities</a:t>
+                      </a:r>
+                      <a:endParaRPr lang="en-US" sz="1400" dirty="0"/>
+                    </a:p>
+                  </a:txBody>
+                  <a:tcPr>
+                    <a:lnL w="12700" cap="flat" cmpd="sng" algn="ctr">
+                      <a:solidFill>
+                        <a:schemeClr val="bg1">
+                          <a:lumMod val="50000"/>
+                        </a:schemeClr>
+                      </a:solidFill>
+                      <a:prstDash val="solid"/>
+                      <a:round/>
+                      <a:headEnd type="none" w="med" len="med"/>
+                      <a:tailEnd type="none" w="med" len="med"/>
+                    </a:lnL>
+                    <a:lnR w="12700" cap="flat" cmpd="sng" algn="ctr">
+                      <a:solidFill>
+                        <a:schemeClr val="bg1">
+                          <a:lumMod val="50000"/>
+                        </a:schemeClr>
+                      </a:solidFill>
+                      <a:prstDash val="solid"/>
+                      <a:round/>
+                      <a:headEnd type="none" w="med" len="med"/>
+                      <a:tailEnd type="none" w="med" len="med"/>
+                    </a:lnR>
+                    <a:lnT w="12700" cap="flat" cmpd="sng" algn="ctr">
+                      <a:solidFill>
+                        <a:schemeClr val="bg1">
+                          <a:lumMod val="50000"/>
+                        </a:schemeClr>
+                      </a:solidFill>
+                      <a:prstDash val="solid"/>
+                      <a:round/>
+                      <a:headEnd type="none" w="med" len="med"/>
+                      <a:tailEnd type="none" w="med" len="med"/>
+                    </a:lnT>
+                    <a:lnB w="12700" cap="flat" cmpd="sng" algn="ctr">
+                      <a:solidFill>
+                        <a:schemeClr val="bg1">
+                          <a:lumMod val="50000"/>
+                        </a:schemeClr>
+                      </a:solidFill>
+                      <a:prstDash val="solid"/>
+                      <a:round/>
+                      <a:headEnd type="none" w="med" len="med"/>
+                      <a:tailEnd type="none" w="med" len="med"/>
+                    </a:lnB>
+                    <a:lnTlToBr w="12700" cmpd="sng">
+                      <a:noFill/>
+                      <a:prstDash val="solid"/>
+                    </a:lnTlToBr>
+                    <a:lnBlToTr w="12700" cmpd="sng">
+                      <a:noFill/>
+                      <a:prstDash val="solid"/>
+                    </a:lnBlToTr>
+                    <a:solidFill>
+                      <a:schemeClr val="bg1"/>
+                    </a:solidFill>
+                  </a:tcPr>
+                </a:tc>
+              </a:tr>
+            </a:tbl>
+          </a:graphicData>
+        </a:graphic>
+      </p:graphicFrame>
+      <p:sp>
+        <p:nvSpPr>
+          <p:cNvPr id="6" name="矩形 5"/>
+          <p:cNvSpPr/>
+          <p:nvPr/>
         </p:nvSpPr>
         <p:spPr>
           <a:xfrm>
-            <a:off x="838200" y="1605491"/>
-            <a:ext cx="10575175" cy="5044691"/>
+            <a:off x="478284" y="1479690"/>
+            <a:ext cx="9922276" cy="461665"/>
           </a:xfrm>
+          <a:prstGeom prst="rect">
+            <a:avLst/>
+          </a:prstGeom>
         </p:spPr>
         <p:txBody>
-          <a:bodyPr>
-            <a:normAutofit fontScale="92500" lnSpcReduction="10000"/>
+          <a:bodyPr wrap="square">
+            <a:spAutoFit/>
           </a:bodyPr>
           <a:lstStyle/>
           <a:p>
             <a:r>
-              <a:rPr lang="en-US" altLang="zh-CN" dirty="0">
+              <a:rPr lang="en-US" altLang="zh-CN" sz="2400" dirty="0">
                 <a:latin typeface="Calibri" panose="020F0502020204030204" pitchFamily="34" charset="0"/>
                 <a:ea typeface="Calibri" panose="020F0502020204030204" pitchFamily="34" charset="0"/>
                 <a:cs typeface="Calibri" panose="020F0502020204030204" pitchFamily="34" charset="0"/>
               </a:rPr>
               <a:t>See what agents did, why they did it, and how they're performing.</a:t>
             </a:r>
-          </a:p>
-          <a:p>
-            <a:r>
-              <a:rPr lang="en-US" altLang="zh-CN" dirty="0">
-                <a:latin typeface="Calibri" panose="020F0502020204030204" pitchFamily="34" charset="0"/>
-                <a:ea typeface="Calibri" panose="020F0502020204030204" pitchFamily="34" charset="0"/>
-                <a:cs typeface="Calibri" panose="020F0502020204030204" pitchFamily="34" charset="0"/>
-              </a:rPr>
-              <a:t>OBS-1: Execution Trajectory Capture</a:t>
-            </a:r>
-          </a:p>
-          <a:p>
-            <a:pPr lvl="1"/>
-            <a:r>
-              <a:rPr lang="en-US" altLang="zh-CN" dirty="0">
-                <a:latin typeface="Calibri" panose="020F0502020204030204" pitchFamily="34" charset="0"/>
-                <a:ea typeface="Calibri" panose="020F0502020204030204" pitchFamily="34" charset="0"/>
-                <a:cs typeface="Calibri" panose="020F0502020204030204" pitchFamily="34" charset="0"/>
-              </a:rPr>
-              <a:t>Makes the full path from </a:t>
-            </a:r>
-            <a:r>
-              <a:rPr lang="en-US" altLang="zh-CN" dirty="0" smtClean="0">
-                <a:latin typeface="Calibri" panose="020F0502020204030204" pitchFamily="34" charset="0"/>
-                <a:ea typeface="Calibri" panose="020F0502020204030204" pitchFamily="34" charset="0"/>
-                <a:cs typeface="Calibri" panose="020F0502020204030204" pitchFamily="34" charset="0"/>
-              </a:rPr>
-              <a:t>reasoning </a:t>
-            </a:r>
-            <a:r>
-              <a:rPr lang="en-US" altLang="zh-CN" dirty="0">
-                <a:latin typeface="Calibri" panose="020F0502020204030204" pitchFamily="34" charset="0"/>
-                <a:ea typeface="Calibri" panose="020F0502020204030204" pitchFamily="34" charset="0"/>
-                <a:cs typeface="Calibri" panose="020F0502020204030204" pitchFamily="34" charset="0"/>
-              </a:rPr>
-              <a:t>to network </a:t>
-            </a:r>
-            <a:r>
-              <a:rPr lang="en-US" altLang="zh-CN" dirty="0" smtClean="0">
-                <a:latin typeface="Calibri" panose="020F0502020204030204" pitchFamily="34" charset="0"/>
-                <a:ea typeface="Calibri" panose="020F0502020204030204" pitchFamily="34" charset="0"/>
-                <a:cs typeface="Calibri" panose="020F0502020204030204" pitchFamily="34" charset="0"/>
-              </a:rPr>
-              <a:t>observations</a:t>
-            </a:r>
-            <a:r>
-              <a:rPr lang="en-US" altLang="zh-CN" dirty="0" smtClean="0">
-                <a:latin typeface="Calibri" panose="020F0502020204030204" pitchFamily="34" charset="0"/>
-                <a:ea typeface="Calibri" panose="020F0502020204030204" pitchFamily="34" charset="0"/>
-                <a:cs typeface="Calibri" panose="020F0502020204030204" pitchFamily="34" charset="0"/>
-              </a:rPr>
-              <a:t> visible, including the </a:t>
-            </a:r>
-            <a:r>
-              <a:rPr lang="en-US" altLang="zh-CN" dirty="0">
-                <a:latin typeface="Calibri" panose="020F0502020204030204" pitchFamily="34" charset="0"/>
-                <a:ea typeface="Calibri" panose="020F0502020204030204" pitchFamily="34" charset="0"/>
-                <a:cs typeface="Calibri" panose="020F0502020204030204" pitchFamily="34" charset="0"/>
-              </a:rPr>
-              <a:t>plan, </a:t>
-            </a:r>
-            <a:r>
-              <a:rPr lang="en-US" altLang="zh-CN" dirty="0" smtClean="0">
-                <a:latin typeface="Calibri" panose="020F0502020204030204" pitchFamily="34" charset="0"/>
-                <a:ea typeface="Calibri" panose="020F0502020204030204" pitchFamily="34" charset="0"/>
-                <a:cs typeface="Calibri" panose="020F0502020204030204" pitchFamily="34" charset="0"/>
-              </a:rPr>
-              <a:t>the invoked tools/skills, generated </a:t>
-            </a:r>
-            <a:r>
-              <a:rPr lang="en-US" altLang="zh-CN" dirty="0">
-                <a:latin typeface="Calibri" panose="020F0502020204030204" pitchFamily="34" charset="0"/>
-                <a:ea typeface="Calibri" panose="020F0502020204030204" pitchFamily="34" charset="0"/>
-                <a:cs typeface="Calibri" panose="020F0502020204030204" pitchFamily="34" charset="0"/>
-              </a:rPr>
-              <a:t>configuration </a:t>
-            </a:r>
-            <a:r>
-              <a:rPr lang="en-US" altLang="zh-CN" dirty="0" smtClean="0">
-                <a:latin typeface="Calibri" panose="020F0502020204030204" pitchFamily="34" charset="0"/>
-                <a:ea typeface="Calibri" panose="020F0502020204030204" pitchFamily="34" charset="0"/>
-                <a:cs typeface="Calibri" panose="020F0502020204030204" pitchFamily="34" charset="0"/>
-              </a:rPr>
-              <a:t>change, </a:t>
-            </a:r>
-            <a:r>
-              <a:rPr lang="en-US" altLang="zh-CN" dirty="0">
-                <a:latin typeface="Calibri" panose="020F0502020204030204" pitchFamily="34" charset="0"/>
-                <a:ea typeface="Calibri" panose="020F0502020204030204" pitchFamily="34" charset="0"/>
-                <a:cs typeface="Calibri" panose="020F0502020204030204" pitchFamily="34" charset="0"/>
-              </a:rPr>
-              <a:t>and the resulting state</a:t>
-            </a:r>
-            <a:r>
-              <a:rPr lang="en-US" altLang="zh-CN" dirty="0" smtClean="0">
-                <a:latin typeface="Calibri" panose="020F0502020204030204" pitchFamily="34" charset="0"/>
-                <a:ea typeface="Calibri" panose="020F0502020204030204" pitchFamily="34" charset="0"/>
-                <a:cs typeface="Calibri" panose="020F0502020204030204" pitchFamily="34" charset="0"/>
-              </a:rPr>
-              <a:t>.</a:t>
-            </a:r>
-            <a:endParaRPr lang="en-US" altLang="zh-CN" dirty="0">
+            <a:endParaRPr lang="en-US" altLang="zh-CN" sz="2400" dirty="0">
               <a:latin typeface="Calibri" panose="020F0502020204030204" pitchFamily="34" charset="0"/>
               <a:ea typeface="Calibri" panose="020F0502020204030204" pitchFamily="34" charset="0"/>
               <a:cs typeface="Calibri" panose="020F0502020204030204" pitchFamily="34" charset="0"/>
             </a:endParaRPr>
           </a:p>
-          <a:p>
-            <a:r>
-              <a:rPr lang="en-US" altLang="zh-CN" dirty="0">
-                <a:latin typeface="Calibri" panose="020F0502020204030204" pitchFamily="34" charset="0"/>
-                <a:ea typeface="Calibri" panose="020F0502020204030204" pitchFamily="34" charset="0"/>
-                <a:cs typeface="Calibri" panose="020F0502020204030204" pitchFamily="34" charset="0"/>
-              </a:rPr>
-              <a:t>OBS-2: Reasoning Provenance Capture</a:t>
-            </a:r>
-          </a:p>
-          <a:p>
-            <a:pPr lvl="1"/>
-            <a:r>
-              <a:rPr lang="en-US" altLang="zh-CN" dirty="0">
-                <a:latin typeface="Calibri" panose="020F0502020204030204" pitchFamily="34" charset="0"/>
-                <a:ea typeface="Calibri" panose="020F0502020204030204" pitchFamily="34" charset="0"/>
-                <a:cs typeface="Calibri" panose="020F0502020204030204" pitchFamily="34" charset="0"/>
-              </a:rPr>
-              <a:t>Exposes why a decision was </a:t>
-            </a:r>
-            <a:r>
-              <a:rPr lang="en-US" altLang="zh-CN" dirty="0" smtClean="0">
-                <a:latin typeface="Calibri" panose="020F0502020204030204" pitchFamily="34" charset="0"/>
-                <a:ea typeface="Calibri" panose="020F0502020204030204" pitchFamily="34" charset="0"/>
-                <a:cs typeface="Calibri" panose="020F0502020204030204" pitchFamily="34" charset="0"/>
-              </a:rPr>
-              <a:t>made </a:t>
-            </a:r>
-            <a:r>
-              <a:rPr lang="en-US" altLang="zh-CN" dirty="0">
-                <a:latin typeface="Calibri" panose="020F0502020204030204" pitchFamily="34" charset="0"/>
-                <a:ea typeface="Calibri" panose="020F0502020204030204" pitchFamily="34" charset="0"/>
-                <a:cs typeface="Calibri" panose="020F0502020204030204" pitchFamily="34" charset="0"/>
-              </a:rPr>
-              <a:t>— the operational </a:t>
-            </a:r>
-            <a:r>
-              <a:rPr lang="en-US" altLang="zh-CN" dirty="0" smtClean="0">
-                <a:latin typeface="Calibri" panose="020F0502020204030204" pitchFamily="34" charset="0"/>
-                <a:ea typeface="Calibri" panose="020F0502020204030204" pitchFamily="34" charset="0"/>
-                <a:cs typeface="Calibri" panose="020F0502020204030204" pitchFamily="34" charset="0"/>
-              </a:rPr>
-              <a:t>signals (e.g., alarms, incidents, telemetry streams) </a:t>
-            </a:r>
-            <a:r>
-              <a:rPr lang="en-US" altLang="zh-CN" dirty="0">
-                <a:latin typeface="Calibri" panose="020F0502020204030204" pitchFamily="34" charset="0"/>
-                <a:ea typeface="Calibri" panose="020F0502020204030204" pitchFamily="34" charset="0"/>
-                <a:cs typeface="Calibri" panose="020F0502020204030204" pitchFamily="34" charset="0"/>
-              </a:rPr>
-              <a:t>and confidence level behind a specific network action</a:t>
-            </a:r>
-            <a:r>
-              <a:rPr lang="en-US" altLang="zh-CN" dirty="0" smtClean="0">
-                <a:latin typeface="Calibri" panose="020F0502020204030204" pitchFamily="34" charset="0"/>
-                <a:ea typeface="Calibri" panose="020F0502020204030204" pitchFamily="34" charset="0"/>
-                <a:cs typeface="Calibri" panose="020F0502020204030204" pitchFamily="34" charset="0"/>
-              </a:rPr>
-              <a:t>.</a:t>
-            </a:r>
-            <a:endParaRPr lang="en-US" altLang="zh-CN" dirty="0">
-              <a:latin typeface="Calibri" panose="020F0502020204030204" pitchFamily="34" charset="0"/>
-              <a:ea typeface="Calibri" panose="020F0502020204030204" pitchFamily="34" charset="0"/>
-              <a:cs typeface="Calibri" panose="020F0502020204030204" pitchFamily="34" charset="0"/>
-            </a:endParaRPr>
-          </a:p>
-          <a:p>
-            <a:r>
-              <a:rPr lang="en-US" altLang="zh-CN" dirty="0">
-                <a:latin typeface="Calibri" panose="020F0502020204030204" pitchFamily="34" charset="0"/>
-                <a:ea typeface="Calibri" panose="020F0502020204030204" pitchFamily="34" charset="0"/>
-                <a:cs typeface="Calibri" panose="020F0502020204030204" pitchFamily="34" charset="0"/>
-              </a:rPr>
-              <a:t>OBS-3: Operational Metrics Collection</a:t>
-            </a:r>
-          </a:p>
-          <a:p>
-            <a:pPr lvl="1"/>
-            <a:r>
-              <a:rPr lang="en-US" altLang="zh-CN" dirty="0">
-                <a:latin typeface="Calibri" panose="020F0502020204030204" pitchFamily="34" charset="0"/>
-                <a:ea typeface="Calibri" panose="020F0502020204030204" pitchFamily="34" charset="0"/>
-                <a:cs typeface="Calibri" panose="020F0502020204030204" pitchFamily="34" charset="0"/>
-              </a:rPr>
-              <a:t>Tracks an agent's own operational health </a:t>
-            </a:r>
-            <a:r>
-              <a:rPr lang="en-US" altLang="zh-CN" dirty="0" smtClean="0">
-                <a:latin typeface="Calibri" panose="020F0502020204030204" pitchFamily="34" charset="0"/>
-                <a:ea typeface="Calibri" panose="020F0502020204030204" pitchFamily="34" charset="0"/>
-                <a:cs typeface="Calibri" panose="020F0502020204030204" pitchFamily="34" charset="0"/>
-              </a:rPr>
-              <a:t>and performance, e.g., </a:t>
-            </a:r>
-            <a:r>
-              <a:rPr lang="en-US" altLang="zh-CN" dirty="0" smtClean="0">
-                <a:latin typeface="Calibri" panose="020F0502020204030204" pitchFamily="34" charset="0"/>
-                <a:ea typeface="Calibri" panose="020F0502020204030204" pitchFamily="34" charset="0"/>
-                <a:cs typeface="Calibri" panose="020F0502020204030204" pitchFamily="34" charset="0"/>
-              </a:rPr>
-              <a:t>error </a:t>
-            </a:r>
-            <a:r>
-              <a:rPr lang="en-US" altLang="zh-CN" dirty="0">
-                <a:latin typeface="Calibri" panose="020F0502020204030204" pitchFamily="34" charset="0"/>
-                <a:ea typeface="Calibri" panose="020F0502020204030204" pitchFamily="34" charset="0"/>
-                <a:cs typeface="Calibri" panose="020F0502020204030204" pitchFamily="34" charset="0"/>
-              </a:rPr>
-              <a:t>rates, rollback frequency, completion </a:t>
-            </a:r>
-            <a:r>
-              <a:rPr lang="en-US" altLang="zh-CN" dirty="0" smtClean="0">
-                <a:latin typeface="Calibri" panose="020F0502020204030204" pitchFamily="34" charset="0"/>
-                <a:ea typeface="Calibri" panose="020F0502020204030204" pitchFamily="34" charset="0"/>
-                <a:cs typeface="Calibri" panose="020F0502020204030204" pitchFamily="34" charset="0"/>
-              </a:rPr>
-              <a:t>performance, token consumption.</a:t>
-            </a:r>
-            <a:endParaRPr lang="en-US" altLang="zh-CN" dirty="0">
-              <a:latin typeface="Calibri" panose="020F0502020204030204" pitchFamily="34" charset="0"/>
-              <a:ea typeface="Calibri" panose="020F0502020204030204" pitchFamily="34" charset="0"/>
-              <a:cs typeface="Calibri" panose="020F0502020204030204" pitchFamily="34" charset="0"/>
-            </a:endParaRPr>
-          </a:p>
-          <a:p>
-            <a:r>
-              <a:rPr lang="en-US" altLang="zh-CN" dirty="0">
-                <a:latin typeface="Calibri" panose="020F0502020204030204" pitchFamily="34" charset="0"/>
-                <a:ea typeface="Calibri" panose="020F0502020204030204" pitchFamily="34" charset="0"/>
-                <a:cs typeface="Calibri" panose="020F0502020204030204" pitchFamily="34" charset="0"/>
-              </a:rPr>
-              <a:t>OBS-4: Multi-Agent Correlation</a:t>
-            </a:r>
-          </a:p>
-          <a:p>
-            <a:pPr lvl="1"/>
-            <a:r>
-              <a:rPr lang="en-US" altLang="zh-CN" dirty="0">
-                <a:latin typeface="Calibri" panose="020F0502020204030204" pitchFamily="34" charset="0"/>
-                <a:ea typeface="Calibri" panose="020F0502020204030204" pitchFamily="34" charset="0"/>
-                <a:cs typeface="Calibri" panose="020F0502020204030204" pitchFamily="34" charset="0"/>
-              </a:rPr>
-              <a:t>Cross-agent execution tracing, decision-making path, </a:t>
-            </a:r>
-            <a:r>
-              <a:rPr lang="en-US" altLang="zh-CN" dirty="0" smtClean="0">
-                <a:latin typeface="Calibri" panose="020F0502020204030204" pitchFamily="34" charset="0"/>
-                <a:ea typeface="Calibri" panose="020F0502020204030204" pitchFamily="34" charset="0"/>
-                <a:cs typeface="Calibri" panose="020F0502020204030204" pitchFamily="34" charset="0"/>
-              </a:rPr>
-              <a:t>metric </a:t>
-            </a:r>
-            <a:r>
-              <a:rPr lang="en-US" altLang="zh-CN" dirty="0">
-                <a:latin typeface="Calibri" panose="020F0502020204030204" pitchFamily="34" charset="0"/>
-                <a:ea typeface="Calibri" panose="020F0502020204030204" pitchFamily="34" charset="0"/>
-                <a:cs typeface="Calibri" panose="020F0502020204030204" pitchFamily="34" charset="0"/>
-              </a:rPr>
-              <a:t>collection and measurement.</a:t>
-            </a:r>
-            <a:endParaRPr lang="en-US" altLang="zh-CN" dirty="0">
-              <a:latin typeface="Calibri" panose="020F0502020204030204" pitchFamily="34" charset="0"/>
-              <a:ea typeface="Calibri" panose="020F0502020204030204" pitchFamily="34" charset="0"/>
-              <a:cs typeface="Calibri" panose="020F0502020204030204" pitchFamily="34" charset="0"/>
-            </a:endParaRPr>
-          </a:p>
-          <a:p>
-            <a:endParaRPr lang="zh-CN" altLang="en-US" dirty="0">
-              <a:latin typeface="Calibri" panose="020F0502020204030204" pitchFamily="34" charset="0"/>
-              <a:cs typeface="Calibri" panose="020F0502020204030204" pitchFamily="34" charset="0"/>
-            </a:endParaRPr>
-          </a:p>
         </p:txBody>
       </p:sp>
     </p:spTree>
     <p:extLst>
       <p:ext uri="{BB962C8B-B14F-4D97-AF65-F5344CB8AC3E}">
-        <p14:creationId xmlns:p14="http://schemas.microsoft.com/office/powerpoint/2010/main" val="4147912469"/>
+        <p14:creationId xmlns:p14="http://schemas.microsoft.com/office/powerpoint/2010/main" val="3367772689"/>
       </p:ext>
     </p:extLst>
   </p:cSld>
@@ -6201,13 +6942,7 @@
       </p:grpSpPr>
       <p:sp>
         <p:nvSpPr>
-          <p:cNvPr id="2" name="标题 1">
-            <a:extLst>
-              <a:ext uri="{FF2B5EF4-FFF2-40B4-BE49-F238E27FC236}">
-                <a16:creationId xmlns="" xmlns:a16="http://schemas.microsoft.com/office/drawing/2014/main" id="{824FAEC5-7814-4802-BDD4-BD5389F73389}"/>
-              </a:ext>
-            </a:extLst>
-          </p:cNvPr>
+          <p:cNvPr id="2" name="标题 1"/>
           <p:cNvSpPr>
             <a:spLocks noGrp="1"/>
           </p:cNvSpPr>
@@ -6217,8 +6952,8 @@
         </p:nvSpPr>
         <p:spPr>
           <a:xfrm>
-            <a:off x="488011" y="84425"/>
-            <a:ext cx="11215977" cy="1325563"/>
+            <a:off x="802689" y="6939"/>
+            <a:ext cx="10515600" cy="1325563"/>
           </a:xfrm>
         </p:spPr>
         <p:txBody>
@@ -6228,346 +6963,1686 @@
           <a:lstStyle/>
           <a:p>
             <a:r>
-              <a:rPr lang="en-US" altLang="zh-CN" dirty="0">
-                <a:latin typeface="Calibri Light" panose="020F0302020204030204" pitchFamily="34" charset="0"/>
-                <a:ea typeface="Calibri Light" panose="020F0302020204030204" pitchFamily="34" charset="0"/>
-                <a:cs typeface="Calibri Light" panose="020F0302020204030204" pitchFamily="34" charset="0"/>
-              </a:rPr>
-              <a:t>Agent Control Requirements </a:t>
-            </a:r>
-            <a:endParaRPr lang="zh-CN" altLang="en-US" dirty="0">
-              <a:latin typeface="Calibri Light" panose="020F0302020204030204" pitchFamily="34" charset="0"/>
-              <a:cs typeface="Calibri Light" panose="020F0302020204030204" pitchFamily="34" charset="0"/>
-            </a:endParaRPr>
+              <a:rPr lang="en-US" altLang="zh-CN" sz="3600" dirty="0" smtClean="0"/>
+              <a:t>Deriving Requirements from Problem Statements-Agent Control</a:t>
+            </a:r>
+            <a:endParaRPr lang="en-US" sz="3600" dirty="0"/>
           </a:p>
         </p:txBody>
       </p:sp>
-      <p:sp>
-        <p:nvSpPr>
-          <p:cNvPr id="3" name="内容占位符 2">
-            <a:extLst>
-              <a:ext uri="{FF2B5EF4-FFF2-40B4-BE49-F238E27FC236}">
-                <a16:creationId xmlns="" xmlns:a16="http://schemas.microsoft.com/office/drawing/2014/main" id="{88448AB7-F29E-43C6-8C89-947BD405CDCF}"/>
-              </a:ext>
-            </a:extLst>
-          </p:cNvPr>
-          <p:cNvSpPr>
-            <a:spLocks noGrp="1"/>
-          </p:cNvSpPr>
+      <p:graphicFrame>
+        <p:nvGraphicFramePr>
+          <p:cNvPr id="4" name="表格 3"/>
+          <p:cNvGraphicFramePr>
+            <a:graphicFrameLocks noGrp="1"/>
+          </p:cNvGraphicFramePr>
           <p:nvPr>
-            <p:ph idx="1"/>
+            <p:extLst>
+              <p:ext uri="{D42A27DB-BD31-4B8C-83A1-F6EECF244321}">
+                <p14:modId xmlns:p14="http://schemas.microsoft.com/office/powerpoint/2010/main" val="1823474629"/>
+              </p:ext>
+            </p:extLst>
           </p:nvPr>
+        </p:nvGraphicFramePr>
+        <p:xfrm>
+          <a:off x="664714" y="1722777"/>
+          <a:ext cx="11182165" cy="4913399"/>
+        </p:xfrm>
+        <a:graphic>
+          <a:graphicData uri="http://schemas.openxmlformats.org/drawingml/2006/table">
+            <a:tbl>
+              <a:tblPr firstRow="1" bandRow="1">
+                <a:tableStyleId>{5C22544A-7EE6-4342-B048-85BDC9FD1C3A}</a:tableStyleId>
+              </a:tblPr>
+              <a:tblGrid>
+                <a:gridCol w="3727388"/>
+                <a:gridCol w="3326600"/>
+                <a:gridCol w="4128177"/>
+              </a:tblGrid>
+              <a:tr h="523782">
+                <a:tc>
+                  <a:txBody>
+                    <a:bodyPr/>
+                    <a:lstStyle/>
+                    <a:p>
+                      <a:r>
+                        <a:rPr lang="en-US" sz="1050" dirty="0" smtClean="0">
+                          <a:solidFill>
+                            <a:schemeClr val="bg1"/>
+                          </a:solidFill>
+                        </a:rPr>
+                        <a:t>Problem</a:t>
+                      </a:r>
+                      <a:r>
+                        <a:rPr lang="en-US" sz="1050" baseline="0" dirty="0" smtClean="0">
+                          <a:solidFill>
+                            <a:schemeClr val="bg1"/>
+                          </a:solidFill>
+                        </a:rPr>
+                        <a:t> Statement Gap</a:t>
+                      </a:r>
+                    </a:p>
+                    <a:p>
+                      <a:r>
+                        <a:rPr lang="en-US" sz="1050" baseline="0" dirty="0" smtClean="0">
+                          <a:solidFill>
+                            <a:schemeClr val="bg1"/>
+                          </a:solidFill>
+                        </a:rPr>
+                        <a:t>I-D. </a:t>
+                      </a:r>
+                      <a:r>
+                        <a:rPr lang="en-US" sz="1050" baseline="0" dirty="0" err="1" smtClean="0">
+                          <a:solidFill>
+                            <a:schemeClr val="bg1"/>
+                          </a:solidFill>
+                        </a:rPr>
+                        <a:t>wnd</a:t>
+                      </a:r>
+                      <a:r>
+                        <a:rPr lang="en-US" sz="1050" baseline="0" dirty="0" smtClean="0">
+                          <a:solidFill>
+                            <a:schemeClr val="bg1"/>
+                          </a:solidFill>
+                        </a:rPr>
+                        <a:t>-opsawg-icon-</a:t>
+                      </a:r>
+                      <a:r>
+                        <a:rPr lang="en-US" sz="1050" baseline="0" dirty="0" err="1" smtClean="0">
+                          <a:solidFill>
+                            <a:schemeClr val="bg1"/>
+                          </a:solidFill>
+                        </a:rPr>
+                        <a:t>ps</a:t>
+                      </a:r>
+                      <a:endParaRPr lang="en-US" sz="1050" dirty="0">
+                        <a:solidFill>
+                          <a:schemeClr val="bg1"/>
+                        </a:solidFill>
+                      </a:endParaRPr>
+                    </a:p>
+                  </a:txBody>
+                  <a:tcPr>
+                    <a:lnL w="12700" cap="flat" cmpd="sng" algn="ctr">
+                      <a:solidFill>
+                        <a:schemeClr val="bg1">
+                          <a:lumMod val="50000"/>
+                        </a:schemeClr>
+                      </a:solidFill>
+                      <a:prstDash val="solid"/>
+                      <a:round/>
+                      <a:headEnd type="none" w="med" len="med"/>
+                      <a:tailEnd type="none" w="med" len="med"/>
+                    </a:lnL>
+                    <a:lnR w="12700" cap="flat" cmpd="sng" algn="ctr">
+                      <a:solidFill>
+                        <a:schemeClr val="bg1">
+                          <a:lumMod val="50000"/>
+                        </a:schemeClr>
+                      </a:solidFill>
+                      <a:prstDash val="solid"/>
+                      <a:round/>
+                      <a:headEnd type="none" w="med" len="med"/>
+                      <a:tailEnd type="none" w="med" len="med"/>
+                    </a:lnR>
+                    <a:lnT w="12700" cap="flat" cmpd="sng" algn="ctr">
+                      <a:solidFill>
+                        <a:schemeClr val="bg1">
+                          <a:lumMod val="50000"/>
+                        </a:schemeClr>
+                      </a:solidFill>
+                      <a:prstDash val="solid"/>
+                      <a:round/>
+                      <a:headEnd type="none" w="med" len="med"/>
+                      <a:tailEnd type="none" w="med" len="med"/>
+                    </a:lnT>
+                    <a:lnB w="12700" cap="flat" cmpd="sng" algn="ctr">
+                      <a:solidFill>
+                        <a:schemeClr val="bg1">
+                          <a:lumMod val="50000"/>
+                        </a:schemeClr>
+                      </a:solidFill>
+                      <a:prstDash val="solid"/>
+                      <a:round/>
+                      <a:headEnd type="none" w="med" len="med"/>
+                      <a:tailEnd type="none" w="med" len="med"/>
+                    </a:lnB>
+                    <a:solidFill>
+                      <a:schemeClr val="tx2">
+                        <a:lumMod val="75000"/>
+                      </a:schemeClr>
+                    </a:solidFill>
+                  </a:tcPr>
+                </a:tc>
+                <a:tc>
+                  <a:txBody>
+                    <a:bodyPr/>
+                    <a:lstStyle/>
+                    <a:p>
+                      <a:r>
+                        <a:rPr lang="en-US" sz="1050" dirty="0" smtClean="0"/>
+                        <a:t>Essential Requirement</a:t>
+                      </a:r>
+                    </a:p>
+                    <a:p>
+                      <a:r>
+                        <a:rPr lang="en-US" sz="1050" dirty="0" smtClean="0"/>
+                        <a:t>I-D.</a:t>
+                      </a:r>
+                      <a:r>
+                        <a:rPr lang="en-US" sz="1050" baseline="0" dirty="0" smtClean="0"/>
+                        <a:t> </a:t>
+                      </a:r>
+                      <a:r>
+                        <a:rPr lang="en-US" sz="1050" baseline="0" dirty="0" err="1" smtClean="0"/>
+                        <a:t>mcw</a:t>
+                      </a:r>
+                      <a:r>
+                        <a:rPr lang="en-US" sz="1050" baseline="0" dirty="0" smtClean="0"/>
+                        <a:t>-opsawg-icon-requirements</a:t>
+                      </a:r>
+                      <a:endParaRPr lang="en-US" sz="1050" dirty="0"/>
+                    </a:p>
+                  </a:txBody>
+                  <a:tcPr>
+                    <a:lnL w="12700" cap="flat" cmpd="sng" algn="ctr">
+                      <a:solidFill>
+                        <a:schemeClr val="bg1">
+                          <a:lumMod val="50000"/>
+                        </a:schemeClr>
+                      </a:solidFill>
+                      <a:prstDash val="solid"/>
+                      <a:round/>
+                      <a:headEnd type="none" w="med" len="med"/>
+                      <a:tailEnd type="none" w="med" len="med"/>
+                    </a:lnL>
+                    <a:lnR w="12700" cap="flat" cmpd="sng" algn="ctr">
+                      <a:solidFill>
+                        <a:schemeClr val="bg1">
+                          <a:lumMod val="50000"/>
+                        </a:schemeClr>
+                      </a:solidFill>
+                      <a:prstDash val="solid"/>
+                      <a:round/>
+                      <a:headEnd type="none" w="med" len="med"/>
+                      <a:tailEnd type="none" w="med" len="med"/>
+                    </a:lnR>
+                    <a:lnT w="12700" cap="flat" cmpd="sng" algn="ctr">
+                      <a:solidFill>
+                        <a:schemeClr val="bg1">
+                          <a:lumMod val="50000"/>
+                        </a:schemeClr>
+                      </a:solidFill>
+                      <a:prstDash val="solid"/>
+                      <a:round/>
+                      <a:headEnd type="none" w="med" len="med"/>
+                      <a:tailEnd type="none" w="med" len="med"/>
+                    </a:lnT>
+                    <a:lnB w="12700" cap="flat" cmpd="sng" algn="ctr">
+                      <a:solidFill>
+                        <a:schemeClr val="bg1">
+                          <a:lumMod val="50000"/>
+                        </a:schemeClr>
+                      </a:solidFill>
+                      <a:prstDash val="solid"/>
+                      <a:round/>
+                      <a:headEnd type="none" w="med" len="med"/>
+                      <a:tailEnd type="none" w="med" len="med"/>
+                    </a:lnB>
+                    <a:solidFill>
+                      <a:schemeClr val="tx2">
+                        <a:lumMod val="75000"/>
+                      </a:schemeClr>
+                    </a:solidFill>
+                  </a:tcPr>
+                </a:tc>
+                <a:tc>
+                  <a:txBody>
+                    <a:bodyPr/>
+                    <a:lstStyle/>
+                    <a:p>
+                      <a:r>
+                        <a:rPr lang="en-US" sz="1050" dirty="0" smtClean="0"/>
+                        <a:t>Description</a:t>
+                      </a:r>
+                      <a:endParaRPr lang="en-US" sz="1050" dirty="0"/>
+                    </a:p>
+                  </a:txBody>
+                  <a:tcPr>
+                    <a:lnL w="12700" cap="flat" cmpd="sng" algn="ctr">
+                      <a:solidFill>
+                        <a:schemeClr val="bg1">
+                          <a:lumMod val="50000"/>
+                        </a:schemeClr>
+                      </a:solidFill>
+                      <a:prstDash val="solid"/>
+                      <a:round/>
+                      <a:headEnd type="none" w="med" len="med"/>
+                      <a:tailEnd type="none" w="med" len="med"/>
+                    </a:lnL>
+                    <a:lnR w="12700" cap="flat" cmpd="sng" algn="ctr">
+                      <a:solidFill>
+                        <a:schemeClr val="bg1">
+                          <a:lumMod val="50000"/>
+                        </a:schemeClr>
+                      </a:solidFill>
+                      <a:prstDash val="solid"/>
+                      <a:round/>
+                      <a:headEnd type="none" w="med" len="med"/>
+                      <a:tailEnd type="none" w="med" len="med"/>
+                    </a:lnR>
+                    <a:lnT w="12700" cap="flat" cmpd="sng" algn="ctr">
+                      <a:solidFill>
+                        <a:schemeClr val="bg1">
+                          <a:lumMod val="50000"/>
+                        </a:schemeClr>
+                      </a:solidFill>
+                      <a:prstDash val="solid"/>
+                      <a:round/>
+                      <a:headEnd type="none" w="med" len="med"/>
+                      <a:tailEnd type="none" w="med" len="med"/>
+                    </a:lnT>
+                    <a:lnB w="12700" cap="flat" cmpd="sng" algn="ctr">
+                      <a:solidFill>
+                        <a:schemeClr val="bg1">
+                          <a:lumMod val="50000"/>
+                        </a:schemeClr>
+                      </a:solidFill>
+                      <a:prstDash val="solid"/>
+                      <a:round/>
+                      <a:headEnd type="none" w="med" len="med"/>
+                      <a:tailEnd type="none" w="med" len="med"/>
+                    </a:lnB>
+                    <a:solidFill>
+                      <a:schemeClr val="tx2">
+                        <a:lumMod val="75000"/>
+                      </a:schemeClr>
+                    </a:solidFill>
+                  </a:tcPr>
+                </a:tc>
+              </a:tr>
+              <a:tr h="848115">
+                <a:tc>
+                  <a:txBody>
+                    <a:bodyPr/>
+                    <a:lstStyle/>
+                    <a:p>
+                      <a:r>
+                        <a:rPr lang="en-US" sz="1050" dirty="0" smtClean="0"/>
+                        <a:t>3.2.2</a:t>
+                      </a:r>
+                      <a:r>
+                        <a:rPr lang="en-US" sz="1050" baseline="0" dirty="0" smtClean="0"/>
+                        <a:t> Static IAM Limitation</a:t>
+                      </a:r>
+                      <a:endParaRPr lang="en-US" sz="1050" dirty="0"/>
+                    </a:p>
+                  </a:txBody>
+                  <a:tcPr>
+                    <a:lnL w="12700" cap="flat" cmpd="sng" algn="ctr">
+                      <a:solidFill>
+                        <a:schemeClr val="bg1">
+                          <a:lumMod val="50000"/>
+                        </a:schemeClr>
+                      </a:solidFill>
+                      <a:prstDash val="solid"/>
+                      <a:round/>
+                      <a:headEnd type="none" w="med" len="med"/>
+                      <a:tailEnd type="none" w="med" len="med"/>
+                    </a:lnL>
+                    <a:lnR w="12700" cap="flat" cmpd="sng" algn="ctr">
+                      <a:solidFill>
+                        <a:schemeClr val="bg1">
+                          <a:lumMod val="50000"/>
+                        </a:schemeClr>
+                      </a:solidFill>
+                      <a:prstDash val="solid"/>
+                      <a:round/>
+                      <a:headEnd type="none" w="med" len="med"/>
+                      <a:tailEnd type="none" w="med" len="med"/>
+                    </a:lnR>
+                    <a:lnT w="12700" cap="flat" cmpd="sng" algn="ctr">
+                      <a:solidFill>
+                        <a:schemeClr val="bg1">
+                          <a:lumMod val="50000"/>
+                        </a:schemeClr>
+                      </a:solidFill>
+                      <a:prstDash val="solid"/>
+                      <a:round/>
+                      <a:headEnd type="none" w="med" len="med"/>
+                      <a:tailEnd type="none" w="med" len="med"/>
+                    </a:lnT>
+                    <a:lnB w="12700" cap="flat" cmpd="sng" algn="ctr">
+                      <a:solidFill>
+                        <a:schemeClr val="bg1">
+                          <a:lumMod val="50000"/>
+                        </a:schemeClr>
+                      </a:solidFill>
+                      <a:prstDash val="solid"/>
+                      <a:round/>
+                      <a:headEnd type="none" w="med" len="med"/>
+                      <a:tailEnd type="none" w="med" len="med"/>
+                    </a:lnB>
+                    <a:lnTlToBr w="12700" cmpd="sng">
+                      <a:noFill/>
+                      <a:prstDash val="solid"/>
+                    </a:lnTlToBr>
+                    <a:lnBlToTr w="12700" cmpd="sng">
+                      <a:noFill/>
+                      <a:prstDash val="solid"/>
+                    </a:lnBlToTr>
+                    <a:solidFill>
+                      <a:schemeClr val="bg1"/>
+                    </a:solidFill>
+                  </a:tcPr>
+                </a:tc>
+                <a:tc>
+                  <a:txBody>
+                    <a:bodyPr/>
+                    <a:lstStyle/>
+                    <a:p>
+                      <a:r>
+                        <a:rPr lang="en-US" sz="1050" dirty="0" smtClean="0"/>
+                        <a:t>CTL-1: Access &amp; Permission</a:t>
+                      </a:r>
+                    </a:p>
+                    <a:p>
+                      <a:endParaRPr lang="en-US" sz="1050" dirty="0" smtClean="0"/>
+                    </a:p>
+                  </a:txBody>
+                  <a:tcPr>
+                    <a:lnL w="12700" cap="flat" cmpd="sng" algn="ctr">
+                      <a:solidFill>
+                        <a:schemeClr val="bg1">
+                          <a:lumMod val="50000"/>
+                        </a:schemeClr>
+                      </a:solidFill>
+                      <a:prstDash val="solid"/>
+                      <a:round/>
+                      <a:headEnd type="none" w="med" len="med"/>
+                      <a:tailEnd type="none" w="med" len="med"/>
+                    </a:lnL>
+                    <a:lnR w="12700" cap="flat" cmpd="sng" algn="ctr">
+                      <a:solidFill>
+                        <a:schemeClr val="bg1">
+                          <a:lumMod val="50000"/>
+                        </a:schemeClr>
+                      </a:solidFill>
+                      <a:prstDash val="solid"/>
+                      <a:round/>
+                      <a:headEnd type="none" w="med" len="med"/>
+                      <a:tailEnd type="none" w="med" len="med"/>
+                    </a:lnR>
+                    <a:lnT w="12700" cap="flat" cmpd="sng" algn="ctr">
+                      <a:solidFill>
+                        <a:schemeClr val="bg1">
+                          <a:lumMod val="50000"/>
+                        </a:schemeClr>
+                      </a:solidFill>
+                      <a:prstDash val="solid"/>
+                      <a:round/>
+                      <a:headEnd type="none" w="med" len="med"/>
+                      <a:tailEnd type="none" w="med" len="med"/>
+                    </a:lnT>
+                    <a:lnB w="12700" cap="flat" cmpd="sng" algn="ctr">
+                      <a:solidFill>
+                        <a:schemeClr val="bg1">
+                          <a:lumMod val="50000"/>
+                        </a:schemeClr>
+                      </a:solidFill>
+                      <a:prstDash val="solid"/>
+                      <a:round/>
+                      <a:headEnd type="none" w="med" len="med"/>
+                      <a:tailEnd type="none" w="med" len="med"/>
+                    </a:lnB>
+                    <a:lnTlToBr w="12700" cmpd="sng">
+                      <a:noFill/>
+                      <a:prstDash val="solid"/>
+                    </a:lnTlToBr>
+                    <a:lnBlToTr w="12700" cmpd="sng">
+                      <a:noFill/>
+                      <a:prstDash val="solid"/>
+                    </a:lnBlToTr>
+                    <a:solidFill>
+                      <a:schemeClr val="bg1"/>
+                    </a:solidFill>
+                  </a:tcPr>
+                </a:tc>
+                <a:tc>
+                  <a:txBody>
+                    <a:bodyPr/>
+                    <a:lstStyle/>
+                    <a:p>
+                      <a:r>
+                        <a:rPr lang="en-US" sz="1050" dirty="0" smtClean="0"/>
+                        <a:t>Limits each agent's operational scope to specific network domains/areas, devices, protocols and tools as well as network configuration access control (e.g., datastores, modules, nodes, RPCs, etc.)</a:t>
+                      </a:r>
+                    </a:p>
+                  </a:txBody>
+                  <a:tcPr>
+                    <a:lnL w="12700" cap="flat" cmpd="sng" algn="ctr">
+                      <a:solidFill>
+                        <a:schemeClr val="bg1">
+                          <a:lumMod val="50000"/>
+                        </a:schemeClr>
+                      </a:solidFill>
+                      <a:prstDash val="solid"/>
+                      <a:round/>
+                      <a:headEnd type="none" w="med" len="med"/>
+                      <a:tailEnd type="none" w="med" len="med"/>
+                    </a:lnL>
+                    <a:lnR w="12700" cap="flat" cmpd="sng" algn="ctr">
+                      <a:solidFill>
+                        <a:schemeClr val="bg1">
+                          <a:lumMod val="50000"/>
+                        </a:schemeClr>
+                      </a:solidFill>
+                      <a:prstDash val="solid"/>
+                      <a:round/>
+                      <a:headEnd type="none" w="med" len="med"/>
+                      <a:tailEnd type="none" w="med" len="med"/>
+                    </a:lnR>
+                    <a:lnT w="12700" cap="flat" cmpd="sng" algn="ctr">
+                      <a:solidFill>
+                        <a:schemeClr val="bg1">
+                          <a:lumMod val="50000"/>
+                        </a:schemeClr>
+                      </a:solidFill>
+                      <a:prstDash val="solid"/>
+                      <a:round/>
+                      <a:headEnd type="none" w="med" len="med"/>
+                      <a:tailEnd type="none" w="med" len="med"/>
+                    </a:lnT>
+                    <a:lnB w="12700" cap="flat" cmpd="sng" algn="ctr">
+                      <a:solidFill>
+                        <a:schemeClr val="bg1">
+                          <a:lumMod val="50000"/>
+                        </a:schemeClr>
+                      </a:solidFill>
+                      <a:prstDash val="solid"/>
+                      <a:round/>
+                      <a:headEnd type="none" w="med" len="med"/>
+                      <a:tailEnd type="none" w="med" len="med"/>
+                    </a:lnB>
+                    <a:lnTlToBr w="12700" cmpd="sng">
+                      <a:noFill/>
+                      <a:prstDash val="solid"/>
+                    </a:lnTlToBr>
+                    <a:lnBlToTr w="12700" cmpd="sng">
+                      <a:noFill/>
+                      <a:prstDash val="solid"/>
+                    </a:lnBlToTr>
+                    <a:solidFill>
+                      <a:schemeClr val="bg1"/>
+                    </a:solidFill>
+                  </a:tcPr>
+                </a:tc>
+              </a:tr>
+              <a:tr h="368126">
+                <a:tc>
+                  <a:txBody>
+                    <a:bodyPr/>
+                    <a:lstStyle/>
+                    <a:p>
+                      <a:r>
+                        <a:rPr lang="en-US" sz="1050" dirty="0" smtClean="0"/>
+                        <a:t>3.2.1. Inadequacy of Deterministic Constraints</a:t>
+                      </a:r>
+                      <a:endParaRPr lang="en-US" sz="1050" dirty="0"/>
+                    </a:p>
+                  </a:txBody>
+                  <a:tcPr>
+                    <a:lnL w="12700" cap="flat" cmpd="sng" algn="ctr">
+                      <a:solidFill>
+                        <a:schemeClr val="bg1">
+                          <a:lumMod val="50000"/>
+                        </a:schemeClr>
+                      </a:solidFill>
+                      <a:prstDash val="solid"/>
+                      <a:round/>
+                      <a:headEnd type="none" w="med" len="med"/>
+                      <a:tailEnd type="none" w="med" len="med"/>
+                    </a:lnL>
+                    <a:lnR w="12700" cap="flat" cmpd="sng" algn="ctr">
+                      <a:solidFill>
+                        <a:schemeClr val="bg1">
+                          <a:lumMod val="50000"/>
+                        </a:schemeClr>
+                      </a:solidFill>
+                      <a:prstDash val="solid"/>
+                      <a:round/>
+                      <a:headEnd type="none" w="med" len="med"/>
+                      <a:tailEnd type="none" w="med" len="med"/>
+                    </a:lnR>
+                    <a:lnT w="12700" cap="flat" cmpd="sng" algn="ctr">
+                      <a:solidFill>
+                        <a:schemeClr val="bg1">
+                          <a:lumMod val="50000"/>
+                        </a:schemeClr>
+                      </a:solidFill>
+                      <a:prstDash val="solid"/>
+                      <a:round/>
+                      <a:headEnd type="none" w="med" len="med"/>
+                      <a:tailEnd type="none" w="med" len="med"/>
+                    </a:lnT>
+                    <a:lnB w="12700" cap="flat" cmpd="sng" algn="ctr">
+                      <a:solidFill>
+                        <a:schemeClr val="bg1">
+                          <a:lumMod val="50000"/>
+                        </a:schemeClr>
+                      </a:solidFill>
+                      <a:prstDash val="solid"/>
+                      <a:round/>
+                      <a:headEnd type="none" w="med" len="med"/>
+                      <a:tailEnd type="none" w="med" len="med"/>
+                    </a:lnB>
+                    <a:lnTlToBr w="12700" cmpd="sng">
+                      <a:noFill/>
+                      <a:prstDash val="solid"/>
+                    </a:lnTlToBr>
+                    <a:lnBlToTr w="12700" cmpd="sng">
+                      <a:noFill/>
+                      <a:prstDash val="solid"/>
+                    </a:lnBlToTr>
+                    <a:solidFill>
+                      <a:schemeClr val="bg1"/>
+                    </a:solidFill>
+                  </a:tcPr>
+                </a:tc>
+                <a:tc>
+                  <a:txBody>
+                    <a:bodyPr/>
+                    <a:lstStyle/>
+                    <a:p>
+                      <a:r>
+                        <a:rPr lang="en-US" sz="1050" dirty="0" smtClean="0"/>
+                        <a:t>CTL-2: Intent Validation &amp; Alignment</a:t>
+                      </a:r>
+                    </a:p>
+                    <a:p>
+                      <a:endParaRPr lang="en-US" sz="1050" dirty="0" smtClean="0"/>
+                    </a:p>
+                  </a:txBody>
+                  <a:tcPr>
+                    <a:lnL w="12700" cap="flat" cmpd="sng" algn="ctr">
+                      <a:solidFill>
+                        <a:schemeClr val="bg1">
+                          <a:lumMod val="50000"/>
+                        </a:schemeClr>
+                      </a:solidFill>
+                      <a:prstDash val="solid"/>
+                      <a:round/>
+                      <a:headEnd type="none" w="med" len="med"/>
+                      <a:tailEnd type="none" w="med" len="med"/>
+                    </a:lnL>
+                    <a:lnR w="12700" cap="flat" cmpd="sng" algn="ctr">
+                      <a:solidFill>
+                        <a:schemeClr val="bg1">
+                          <a:lumMod val="50000"/>
+                        </a:schemeClr>
+                      </a:solidFill>
+                      <a:prstDash val="solid"/>
+                      <a:round/>
+                      <a:headEnd type="none" w="med" len="med"/>
+                      <a:tailEnd type="none" w="med" len="med"/>
+                    </a:lnR>
+                    <a:lnT w="12700" cap="flat" cmpd="sng" algn="ctr">
+                      <a:solidFill>
+                        <a:schemeClr val="bg1">
+                          <a:lumMod val="50000"/>
+                        </a:schemeClr>
+                      </a:solidFill>
+                      <a:prstDash val="solid"/>
+                      <a:round/>
+                      <a:headEnd type="none" w="med" len="med"/>
+                      <a:tailEnd type="none" w="med" len="med"/>
+                    </a:lnT>
+                    <a:lnB w="12700" cap="flat" cmpd="sng" algn="ctr">
+                      <a:solidFill>
+                        <a:schemeClr val="bg1">
+                          <a:lumMod val="50000"/>
+                        </a:schemeClr>
+                      </a:solidFill>
+                      <a:prstDash val="solid"/>
+                      <a:round/>
+                      <a:headEnd type="none" w="med" len="med"/>
+                      <a:tailEnd type="none" w="med" len="med"/>
+                    </a:lnB>
+                    <a:lnTlToBr w="12700" cmpd="sng">
+                      <a:noFill/>
+                      <a:prstDash val="solid"/>
+                    </a:lnTlToBr>
+                    <a:lnBlToTr w="12700" cmpd="sng">
+                      <a:noFill/>
+                      <a:prstDash val="solid"/>
+                    </a:lnBlToTr>
+                    <a:solidFill>
+                      <a:schemeClr val="bg1"/>
+                    </a:solidFill>
+                  </a:tcPr>
+                </a:tc>
+                <a:tc>
+                  <a:txBody>
+                    <a:bodyPr/>
+                    <a:lstStyle/>
+                    <a:p>
+                      <a:r>
+                        <a:rPr lang="en-US" sz="1050" dirty="0" smtClean="0"/>
+                        <a:t>Requires the agent to check that what it is about to configure actually matches the operational intent it was given, before committing.</a:t>
+                      </a:r>
+                    </a:p>
+                    <a:p>
+                      <a:endParaRPr lang="en-US" sz="1050" dirty="0" smtClean="0"/>
+                    </a:p>
+                  </a:txBody>
+                  <a:tcPr>
+                    <a:lnL w="12700" cap="flat" cmpd="sng" algn="ctr">
+                      <a:solidFill>
+                        <a:schemeClr val="bg1">
+                          <a:lumMod val="50000"/>
+                        </a:schemeClr>
+                      </a:solidFill>
+                      <a:prstDash val="solid"/>
+                      <a:round/>
+                      <a:headEnd type="none" w="med" len="med"/>
+                      <a:tailEnd type="none" w="med" len="med"/>
+                    </a:lnL>
+                    <a:lnR w="12700" cap="flat" cmpd="sng" algn="ctr">
+                      <a:solidFill>
+                        <a:schemeClr val="bg1">
+                          <a:lumMod val="50000"/>
+                        </a:schemeClr>
+                      </a:solidFill>
+                      <a:prstDash val="solid"/>
+                      <a:round/>
+                      <a:headEnd type="none" w="med" len="med"/>
+                      <a:tailEnd type="none" w="med" len="med"/>
+                    </a:lnR>
+                    <a:lnT w="12700" cap="flat" cmpd="sng" algn="ctr">
+                      <a:solidFill>
+                        <a:schemeClr val="bg1">
+                          <a:lumMod val="50000"/>
+                        </a:schemeClr>
+                      </a:solidFill>
+                      <a:prstDash val="solid"/>
+                      <a:round/>
+                      <a:headEnd type="none" w="med" len="med"/>
+                      <a:tailEnd type="none" w="med" len="med"/>
+                    </a:lnT>
+                    <a:lnB w="12700" cap="flat" cmpd="sng" algn="ctr">
+                      <a:solidFill>
+                        <a:schemeClr val="bg1">
+                          <a:lumMod val="50000"/>
+                        </a:schemeClr>
+                      </a:solidFill>
+                      <a:prstDash val="solid"/>
+                      <a:round/>
+                      <a:headEnd type="none" w="med" len="med"/>
+                      <a:tailEnd type="none" w="med" len="med"/>
+                    </a:lnB>
+                    <a:lnTlToBr w="12700" cmpd="sng">
+                      <a:noFill/>
+                      <a:prstDash val="solid"/>
+                    </a:lnTlToBr>
+                    <a:lnBlToTr w="12700" cmpd="sng">
+                      <a:noFill/>
+                      <a:prstDash val="solid"/>
+                    </a:lnBlToTr>
+                    <a:solidFill>
+                      <a:schemeClr val="bg1"/>
+                    </a:solidFill>
+                  </a:tcPr>
+                </a:tc>
+              </a:tr>
+              <a:tr h="524669">
+                <a:tc>
+                  <a:txBody>
+                    <a:bodyPr/>
+                    <a:lstStyle/>
+                    <a:p>
+                      <a:r>
+                        <a:rPr lang="en-US" sz="1050" dirty="0" smtClean="0"/>
+                        <a:t>3.2.1. Inadequacy of Deterministic Constraints</a:t>
+                      </a:r>
+                      <a:endParaRPr lang="en-US" sz="1050" dirty="0"/>
+                    </a:p>
+                  </a:txBody>
+                  <a:tcPr>
+                    <a:lnL w="12700" cap="flat" cmpd="sng" algn="ctr">
+                      <a:solidFill>
+                        <a:schemeClr val="bg1">
+                          <a:lumMod val="50000"/>
+                        </a:schemeClr>
+                      </a:solidFill>
+                      <a:prstDash val="solid"/>
+                      <a:round/>
+                      <a:headEnd type="none" w="med" len="med"/>
+                      <a:tailEnd type="none" w="med" len="med"/>
+                    </a:lnL>
+                    <a:lnR w="12700" cap="flat" cmpd="sng" algn="ctr">
+                      <a:solidFill>
+                        <a:schemeClr val="bg1">
+                          <a:lumMod val="50000"/>
+                        </a:schemeClr>
+                      </a:solidFill>
+                      <a:prstDash val="solid"/>
+                      <a:round/>
+                      <a:headEnd type="none" w="med" len="med"/>
+                      <a:tailEnd type="none" w="med" len="med"/>
+                    </a:lnR>
+                    <a:lnT w="12700" cap="flat" cmpd="sng" algn="ctr">
+                      <a:solidFill>
+                        <a:schemeClr val="bg1">
+                          <a:lumMod val="50000"/>
+                        </a:schemeClr>
+                      </a:solidFill>
+                      <a:prstDash val="solid"/>
+                      <a:round/>
+                      <a:headEnd type="none" w="med" len="med"/>
+                      <a:tailEnd type="none" w="med" len="med"/>
+                    </a:lnT>
+                    <a:lnB w="12700" cap="flat" cmpd="sng" algn="ctr">
+                      <a:solidFill>
+                        <a:schemeClr val="bg1">
+                          <a:lumMod val="50000"/>
+                        </a:schemeClr>
+                      </a:solidFill>
+                      <a:prstDash val="solid"/>
+                      <a:round/>
+                      <a:headEnd type="none" w="med" len="med"/>
+                      <a:tailEnd type="none" w="med" len="med"/>
+                    </a:lnB>
+                    <a:lnTlToBr w="12700" cmpd="sng">
+                      <a:noFill/>
+                      <a:prstDash val="solid"/>
+                    </a:lnTlToBr>
+                    <a:lnBlToTr w="12700" cmpd="sng">
+                      <a:noFill/>
+                      <a:prstDash val="solid"/>
+                    </a:lnBlToTr>
+                    <a:solidFill>
+                      <a:schemeClr val="bg1"/>
+                    </a:solidFill>
+                  </a:tcPr>
+                </a:tc>
+                <a:tc>
+                  <a:txBody>
+                    <a:bodyPr/>
+                    <a:lstStyle/>
+                    <a:p>
+                      <a:r>
+                        <a:rPr lang="en-US" sz="1050" dirty="0" smtClean="0"/>
+                        <a:t>CTL-3: Temporal &amp; Data/Context Validity</a:t>
+                      </a:r>
+                    </a:p>
+                    <a:p>
+                      <a:endParaRPr lang="en-US" sz="1050" dirty="0" smtClean="0"/>
+                    </a:p>
+                  </a:txBody>
+                  <a:tcPr>
+                    <a:lnL w="12700" cap="flat" cmpd="sng" algn="ctr">
+                      <a:solidFill>
+                        <a:schemeClr val="bg1">
+                          <a:lumMod val="50000"/>
+                        </a:schemeClr>
+                      </a:solidFill>
+                      <a:prstDash val="solid"/>
+                      <a:round/>
+                      <a:headEnd type="none" w="med" len="med"/>
+                      <a:tailEnd type="none" w="med" len="med"/>
+                    </a:lnL>
+                    <a:lnR w="12700" cap="flat" cmpd="sng" algn="ctr">
+                      <a:solidFill>
+                        <a:schemeClr val="bg1">
+                          <a:lumMod val="50000"/>
+                        </a:schemeClr>
+                      </a:solidFill>
+                      <a:prstDash val="solid"/>
+                      <a:round/>
+                      <a:headEnd type="none" w="med" len="med"/>
+                      <a:tailEnd type="none" w="med" len="med"/>
+                    </a:lnR>
+                    <a:lnT w="12700" cap="flat" cmpd="sng" algn="ctr">
+                      <a:solidFill>
+                        <a:schemeClr val="bg1">
+                          <a:lumMod val="50000"/>
+                        </a:schemeClr>
+                      </a:solidFill>
+                      <a:prstDash val="solid"/>
+                      <a:round/>
+                      <a:headEnd type="none" w="med" len="med"/>
+                      <a:tailEnd type="none" w="med" len="med"/>
+                    </a:lnT>
+                    <a:lnB w="12700" cap="flat" cmpd="sng" algn="ctr">
+                      <a:solidFill>
+                        <a:schemeClr val="bg1">
+                          <a:lumMod val="50000"/>
+                        </a:schemeClr>
+                      </a:solidFill>
+                      <a:prstDash val="solid"/>
+                      <a:round/>
+                      <a:headEnd type="none" w="med" len="med"/>
+                      <a:tailEnd type="none" w="med" len="med"/>
+                    </a:lnB>
+                    <a:lnTlToBr w="12700" cmpd="sng">
+                      <a:noFill/>
+                      <a:prstDash val="solid"/>
+                    </a:lnTlToBr>
+                    <a:lnBlToTr w="12700" cmpd="sng">
+                      <a:noFill/>
+                      <a:prstDash val="solid"/>
+                    </a:lnBlToTr>
+                    <a:solidFill>
+                      <a:schemeClr val="bg1"/>
+                    </a:solidFill>
+                  </a:tcPr>
+                </a:tc>
+                <a:tc>
+                  <a:txBody>
+                    <a:bodyPr/>
+                    <a:lstStyle/>
+                    <a:p>
+                      <a:r>
+                        <a:rPr lang="en-US" sz="1050" dirty="0" smtClean="0"/>
+                        <a:t>Ties an agent's actions to a valid operating window and to network state that is still current.</a:t>
+                      </a:r>
+                    </a:p>
+                    <a:p>
+                      <a:endParaRPr lang="en-US" sz="1050" dirty="0" smtClean="0"/>
+                    </a:p>
+                  </a:txBody>
+                  <a:tcPr>
+                    <a:lnL w="12700" cap="flat" cmpd="sng" algn="ctr">
+                      <a:solidFill>
+                        <a:schemeClr val="bg1">
+                          <a:lumMod val="50000"/>
+                        </a:schemeClr>
+                      </a:solidFill>
+                      <a:prstDash val="solid"/>
+                      <a:round/>
+                      <a:headEnd type="none" w="med" len="med"/>
+                      <a:tailEnd type="none" w="med" len="med"/>
+                    </a:lnL>
+                    <a:lnR w="12700" cap="flat" cmpd="sng" algn="ctr">
+                      <a:solidFill>
+                        <a:schemeClr val="bg1">
+                          <a:lumMod val="50000"/>
+                        </a:schemeClr>
+                      </a:solidFill>
+                      <a:prstDash val="solid"/>
+                      <a:round/>
+                      <a:headEnd type="none" w="med" len="med"/>
+                      <a:tailEnd type="none" w="med" len="med"/>
+                    </a:lnR>
+                    <a:lnT w="12700" cap="flat" cmpd="sng" algn="ctr">
+                      <a:solidFill>
+                        <a:schemeClr val="bg1">
+                          <a:lumMod val="50000"/>
+                        </a:schemeClr>
+                      </a:solidFill>
+                      <a:prstDash val="solid"/>
+                      <a:round/>
+                      <a:headEnd type="none" w="med" len="med"/>
+                      <a:tailEnd type="none" w="med" len="med"/>
+                    </a:lnT>
+                    <a:lnB w="12700" cap="flat" cmpd="sng" algn="ctr">
+                      <a:solidFill>
+                        <a:schemeClr val="bg1">
+                          <a:lumMod val="50000"/>
+                        </a:schemeClr>
+                      </a:solidFill>
+                      <a:prstDash val="solid"/>
+                      <a:round/>
+                      <a:headEnd type="none" w="med" len="med"/>
+                      <a:tailEnd type="none" w="med" len="med"/>
+                    </a:lnB>
+                    <a:lnTlToBr w="12700" cmpd="sng">
+                      <a:noFill/>
+                      <a:prstDash val="solid"/>
+                    </a:lnTlToBr>
+                    <a:lnBlToTr w="12700" cmpd="sng">
+                      <a:noFill/>
+                      <a:prstDash val="solid"/>
+                    </a:lnBlToTr>
+                    <a:solidFill>
+                      <a:schemeClr val="bg1"/>
+                    </a:solidFill>
+                  </a:tcPr>
+                </a:tc>
+              </a:tr>
+              <a:tr h="541538">
+                <a:tc>
+                  <a:txBody>
+                    <a:bodyPr/>
+                    <a:lstStyle/>
+                    <a:p>
+                      <a:r>
+                        <a:rPr lang="en-US" sz="1050" dirty="0" smtClean="0"/>
+                        <a:t>3.2.2 Static IAM Limitation</a:t>
+                      </a:r>
+                    </a:p>
+                    <a:p>
+                      <a:endParaRPr lang="en-US" sz="1050" dirty="0"/>
+                    </a:p>
+                  </a:txBody>
+                  <a:tcPr>
+                    <a:lnL w="12700" cap="flat" cmpd="sng" algn="ctr">
+                      <a:solidFill>
+                        <a:schemeClr val="bg1">
+                          <a:lumMod val="50000"/>
+                        </a:schemeClr>
+                      </a:solidFill>
+                      <a:prstDash val="solid"/>
+                      <a:round/>
+                      <a:headEnd type="none" w="med" len="med"/>
+                      <a:tailEnd type="none" w="med" len="med"/>
+                    </a:lnL>
+                    <a:lnR w="12700" cap="flat" cmpd="sng" algn="ctr">
+                      <a:solidFill>
+                        <a:schemeClr val="bg1">
+                          <a:lumMod val="50000"/>
+                        </a:schemeClr>
+                      </a:solidFill>
+                      <a:prstDash val="solid"/>
+                      <a:round/>
+                      <a:headEnd type="none" w="med" len="med"/>
+                      <a:tailEnd type="none" w="med" len="med"/>
+                    </a:lnR>
+                    <a:lnT w="12700" cap="flat" cmpd="sng" algn="ctr">
+                      <a:solidFill>
+                        <a:schemeClr val="bg1">
+                          <a:lumMod val="50000"/>
+                        </a:schemeClr>
+                      </a:solidFill>
+                      <a:prstDash val="solid"/>
+                      <a:round/>
+                      <a:headEnd type="none" w="med" len="med"/>
+                      <a:tailEnd type="none" w="med" len="med"/>
+                    </a:lnT>
+                    <a:lnB w="12700" cap="flat" cmpd="sng" algn="ctr">
+                      <a:solidFill>
+                        <a:schemeClr val="bg1">
+                          <a:lumMod val="50000"/>
+                        </a:schemeClr>
+                      </a:solidFill>
+                      <a:prstDash val="solid"/>
+                      <a:round/>
+                      <a:headEnd type="none" w="med" len="med"/>
+                      <a:tailEnd type="none" w="med" len="med"/>
+                    </a:lnB>
+                    <a:lnTlToBr w="12700" cmpd="sng">
+                      <a:noFill/>
+                      <a:prstDash val="solid"/>
+                    </a:lnTlToBr>
+                    <a:lnBlToTr w="12700" cmpd="sng">
+                      <a:noFill/>
+                      <a:prstDash val="solid"/>
+                    </a:lnBlToTr>
+                    <a:solidFill>
+                      <a:schemeClr val="bg1"/>
+                    </a:solidFill>
+                  </a:tcPr>
+                </a:tc>
+                <a:tc>
+                  <a:txBody>
+                    <a:bodyPr/>
+                    <a:lstStyle/>
+                    <a:p>
+                      <a:r>
+                        <a:rPr lang="en-US" sz="1050" dirty="0" smtClean="0"/>
+                        <a:t>CTL-4: Authorization &amp; Approval</a:t>
+                      </a:r>
+                    </a:p>
+                    <a:p>
+                      <a:endParaRPr lang="en-US" sz="1050" dirty="0" smtClean="0"/>
+                    </a:p>
+                  </a:txBody>
+                  <a:tcPr>
+                    <a:lnL w="12700" cap="flat" cmpd="sng" algn="ctr">
+                      <a:solidFill>
+                        <a:schemeClr val="bg1">
+                          <a:lumMod val="50000"/>
+                        </a:schemeClr>
+                      </a:solidFill>
+                      <a:prstDash val="solid"/>
+                      <a:round/>
+                      <a:headEnd type="none" w="med" len="med"/>
+                      <a:tailEnd type="none" w="med" len="med"/>
+                    </a:lnL>
+                    <a:lnR w="12700" cap="flat" cmpd="sng" algn="ctr">
+                      <a:solidFill>
+                        <a:schemeClr val="bg1">
+                          <a:lumMod val="50000"/>
+                        </a:schemeClr>
+                      </a:solidFill>
+                      <a:prstDash val="solid"/>
+                      <a:round/>
+                      <a:headEnd type="none" w="med" len="med"/>
+                      <a:tailEnd type="none" w="med" len="med"/>
+                    </a:lnR>
+                    <a:lnT w="12700" cap="flat" cmpd="sng" algn="ctr">
+                      <a:solidFill>
+                        <a:schemeClr val="bg1">
+                          <a:lumMod val="50000"/>
+                        </a:schemeClr>
+                      </a:solidFill>
+                      <a:prstDash val="solid"/>
+                      <a:round/>
+                      <a:headEnd type="none" w="med" len="med"/>
+                      <a:tailEnd type="none" w="med" len="med"/>
+                    </a:lnT>
+                    <a:lnB w="12700" cap="flat" cmpd="sng" algn="ctr">
+                      <a:solidFill>
+                        <a:schemeClr val="bg1">
+                          <a:lumMod val="50000"/>
+                        </a:schemeClr>
+                      </a:solidFill>
+                      <a:prstDash val="solid"/>
+                      <a:round/>
+                      <a:headEnd type="none" w="med" len="med"/>
+                      <a:tailEnd type="none" w="med" len="med"/>
+                    </a:lnB>
+                    <a:lnTlToBr w="12700" cmpd="sng">
+                      <a:noFill/>
+                      <a:prstDash val="solid"/>
+                    </a:lnTlToBr>
+                    <a:lnBlToTr w="12700" cmpd="sng">
+                      <a:noFill/>
+                      <a:prstDash val="solid"/>
+                    </a:lnBlToTr>
+                    <a:solidFill>
+                      <a:schemeClr val="bg1"/>
+                    </a:solidFill>
+                  </a:tcPr>
+                </a:tc>
+                <a:tc>
+                  <a:txBody>
+                    <a:bodyPr/>
+                    <a:lstStyle/>
+                    <a:p>
+                      <a:r>
+                        <a:rPr lang="en-US" sz="1050" dirty="0" smtClean="0"/>
+                        <a:t>Specifies of some network operations as requiring a human decision before execution.</a:t>
+                      </a:r>
+                    </a:p>
+                    <a:p>
+                      <a:endParaRPr lang="en-US" sz="1050" dirty="0" smtClean="0"/>
+                    </a:p>
+                  </a:txBody>
+                  <a:tcPr>
+                    <a:lnL w="12700" cap="flat" cmpd="sng" algn="ctr">
+                      <a:solidFill>
+                        <a:schemeClr val="bg1">
+                          <a:lumMod val="50000"/>
+                        </a:schemeClr>
+                      </a:solidFill>
+                      <a:prstDash val="solid"/>
+                      <a:round/>
+                      <a:headEnd type="none" w="med" len="med"/>
+                      <a:tailEnd type="none" w="med" len="med"/>
+                    </a:lnL>
+                    <a:lnR w="12700" cap="flat" cmpd="sng" algn="ctr">
+                      <a:solidFill>
+                        <a:schemeClr val="bg1">
+                          <a:lumMod val="50000"/>
+                        </a:schemeClr>
+                      </a:solidFill>
+                      <a:prstDash val="solid"/>
+                      <a:round/>
+                      <a:headEnd type="none" w="med" len="med"/>
+                      <a:tailEnd type="none" w="med" len="med"/>
+                    </a:lnR>
+                    <a:lnT w="12700" cap="flat" cmpd="sng" algn="ctr">
+                      <a:solidFill>
+                        <a:schemeClr val="bg1">
+                          <a:lumMod val="50000"/>
+                        </a:schemeClr>
+                      </a:solidFill>
+                      <a:prstDash val="solid"/>
+                      <a:round/>
+                      <a:headEnd type="none" w="med" len="med"/>
+                      <a:tailEnd type="none" w="med" len="med"/>
+                    </a:lnT>
+                    <a:lnB w="12700" cap="flat" cmpd="sng" algn="ctr">
+                      <a:solidFill>
+                        <a:schemeClr val="bg1">
+                          <a:lumMod val="50000"/>
+                        </a:schemeClr>
+                      </a:solidFill>
+                      <a:prstDash val="solid"/>
+                      <a:round/>
+                      <a:headEnd type="none" w="med" len="med"/>
+                      <a:tailEnd type="none" w="med" len="med"/>
+                    </a:lnB>
+                    <a:lnTlToBr w="12700" cmpd="sng">
+                      <a:noFill/>
+                      <a:prstDash val="solid"/>
+                    </a:lnTlToBr>
+                    <a:lnBlToTr w="12700" cmpd="sng">
+                      <a:noFill/>
+                      <a:prstDash val="solid"/>
+                    </a:lnBlToTr>
+                    <a:solidFill>
+                      <a:schemeClr val="bg1"/>
+                    </a:solidFill>
+                  </a:tcPr>
+                </a:tc>
+              </a:tr>
+              <a:tr h="399580">
+                <a:tc>
+                  <a:txBody>
+                    <a:bodyPr/>
+                    <a:lstStyle/>
+                    <a:p>
+                      <a:r>
+                        <a:rPr lang="en-US" sz="1050" dirty="0" smtClean="0"/>
+                        <a:t>3.2.1. Inadequacy of Deterministic Constraints</a:t>
+                      </a:r>
+                    </a:p>
+                    <a:p>
+                      <a:endParaRPr lang="en-US" sz="1050" dirty="0"/>
+                    </a:p>
+                  </a:txBody>
+                  <a:tcPr>
+                    <a:lnL w="12700" cap="flat" cmpd="sng" algn="ctr">
+                      <a:solidFill>
+                        <a:schemeClr val="bg1">
+                          <a:lumMod val="50000"/>
+                        </a:schemeClr>
+                      </a:solidFill>
+                      <a:prstDash val="solid"/>
+                      <a:round/>
+                      <a:headEnd type="none" w="med" len="med"/>
+                      <a:tailEnd type="none" w="med" len="med"/>
+                    </a:lnL>
+                    <a:lnR w="12700" cap="flat" cmpd="sng" algn="ctr">
+                      <a:solidFill>
+                        <a:schemeClr val="bg1">
+                          <a:lumMod val="50000"/>
+                        </a:schemeClr>
+                      </a:solidFill>
+                      <a:prstDash val="solid"/>
+                      <a:round/>
+                      <a:headEnd type="none" w="med" len="med"/>
+                      <a:tailEnd type="none" w="med" len="med"/>
+                    </a:lnR>
+                    <a:lnT w="12700" cap="flat" cmpd="sng" algn="ctr">
+                      <a:solidFill>
+                        <a:schemeClr val="bg1">
+                          <a:lumMod val="50000"/>
+                        </a:schemeClr>
+                      </a:solidFill>
+                      <a:prstDash val="solid"/>
+                      <a:round/>
+                      <a:headEnd type="none" w="med" len="med"/>
+                      <a:tailEnd type="none" w="med" len="med"/>
+                    </a:lnT>
+                    <a:lnB w="12700" cap="flat" cmpd="sng" algn="ctr">
+                      <a:solidFill>
+                        <a:schemeClr val="bg1">
+                          <a:lumMod val="50000"/>
+                        </a:schemeClr>
+                      </a:solidFill>
+                      <a:prstDash val="solid"/>
+                      <a:round/>
+                      <a:headEnd type="none" w="med" len="med"/>
+                      <a:tailEnd type="none" w="med" len="med"/>
+                    </a:lnB>
+                    <a:lnTlToBr w="12700" cmpd="sng">
+                      <a:noFill/>
+                      <a:prstDash val="solid"/>
+                    </a:lnTlToBr>
+                    <a:lnBlToTr w="12700" cmpd="sng">
+                      <a:noFill/>
+                      <a:prstDash val="solid"/>
+                    </a:lnBlToTr>
+                    <a:solidFill>
+                      <a:schemeClr val="bg1"/>
+                    </a:solidFill>
+                  </a:tcPr>
+                </a:tc>
+                <a:tc>
+                  <a:txBody>
+                    <a:bodyPr/>
+                    <a:lstStyle/>
+                    <a:p>
+                      <a:r>
+                        <a:rPr lang="en-US" sz="1050" dirty="0" smtClean="0"/>
+                        <a:t>CTL-5: Failure &amp; Liveness</a:t>
+                      </a:r>
+                    </a:p>
+                    <a:p>
+                      <a:endParaRPr lang="en-US" sz="1050" dirty="0" smtClean="0"/>
+                    </a:p>
+                  </a:txBody>
+                  <a:tcPr>
+                    <a:lnL w="12700" cap="flat" cmpd="sng" algn="ctr">
+                      <a:solidFill>
+                        <a:schemeClr val="bg1">
+                          <a:lumMod val="50000"/>
+                        </a:schemeClr>
+                      </a:solidFill>
+                      <a:prstDash val="solid"/>
+                      <a:round/>
+                      <a:headEnd type="none" w="med" len="med"/>
+                      <a:tailEnd type="none" w="med" len="med"/>
+                    </a:lnL>
+                    <a:lnR w="12700" cap="flat" cmpd="sng" algn="ctr">
+                      <a:solidFill>
+                        <a:schemeClr val="bg1">
+                          <a:lumMod val="50000"/>
+                        </a:schemeClr>
+                      </a:solidFill>
+                      <a:prstDash val="solid"/>
+                      <a:round/>
+                      <a:headEnd type="none" w="med" len="med"/>
+                      <a:tailEnd type="none" w="med" len="med"/>
+                    </a:lnR>
+                    <a:lnT w="12700" cap="flat" cmpd="sng" algn="ctr">
+                      <a:solidFill>
+                        <a:schemeClr val="bg1">
+                          <a:lumMod val="50000"/>
+                        </a:schemeClr>
+                      </a:solidFill>
+                      <a:prstDash val="solid"/>
+                      <a:round/>
+                      <a:headEnd type="none" w="med" len="med"/>
+                      <a:tailEnd type="none" w="med" len="med"/>
+                    </a:lnT>
+                    <a:lnB w="12700" cap="flat" cmpd="sng" algn="ctr">
+                      <a:solidFill>
+                        <a:schemeClr val="bg1">
+                          <a:lumMod val="50000"/>
+                        </a:schemeClr>
+                      </a:solidFill>
+                      <a:prstDash val="solid"/>
+                      <a:round/>
+                      <a:headEnd type="none" w="med" len="med"/>
+                      <a:tailEnd type="none" w="med" len="med"/>
+                    </a:lnB>
+                    <a:lnTlToBr w="12700" cmpd="sng">
+                      <a:noFill/>
+                      <a:prstDash val="solid"/>
+                    </a:lnTlToBr>
+                    <a:lnBlToTr w="12700" cmpd="sng">
+                      <a:noFill/>
+                      <a:prstDash val="solid"/>
+                    </a:lnBlToTr>
+                    <a:solidFill>
+                      <a:schemeClr val="bg1"/>
+                    </a:solidFill>
+                  </a:tcPr>
+                </a:tc>
+                <a:tc>
+                  <a:txBody>
+                    <a:bodyPr/>
+                    <a:lstStyle/>
+                    <a:p>
+                      <a:r>
+                        <a:rPr lang="en-US" sz="1050" dirty="0" smtClean="0"/>
+                        <a:t>Defines what an agent does when it encounters predefined failure, and requires it to continuously report its liveness.</a:t>
+                      </a:r>
+                    </a:p>
+                    <a:p>
+                      <a:endParaRPr lang="en-US" sz="1050" dirty="0" smtClean="0"/>
+                    </a:p>
+                  </a:txBody>
+                  <a:tcPr>
+                    <a:lnL w="12700" cap="flat" cmpd="sng" algn="ctr">
+                      <a:solidFill>
+                        <a:schemeClr val="bg1">
+                          <a:lumMod val="50000"/>
+                        </a:schemeClr>
+                      </a:solidFill>
+                      <a:prstDash val="solid"/>
+                      <a:round/>
+                      <a:headEnd type="none" w="med" len="med"/>
+                      <a:tailEnd type="none" w="med" len="med"/>
+                    </a:lnL>
+                    <a:lnR w="12700" cap="flat" cmpd="sng" algn="ctr">
+                      <a:solidFill>
+                        <a:schemeClr val="bg1">
+                          <a:lumMod val="50000"/>
+                        </a:schemeClr>
+                      </a:solidFill>
+                      <a:prstDash val="solid"/>
+                      <a:round/>
+                      <a:headEnd type="none" w="med" len="med"/>
+                      <a:tailEnd type="none" w="med" len="med"/>
+                    </a:lnR>
+                    <a:lnT w="12700" cap="flat" cmpd="sng" algn="ctr">
+                      <a:solidFill>
+                        <a:schemeClr val="bg1">
+                          <a:lumMod val="50000"/>
+                        </a:schemeClr>
+                      </a:solidFill>
+                      <a:prstDash val="solid"/>
+                      <a:round/>
+                      <a:headEnd type="none" w="med" len="med"/>
+                      <a:tailEnd type="none" w="med" len="med"/>
+                    </a:lnT>
+                    <a:lnB w="12700" cap="flat" cmpd="sng" algn="ctr">
+                      <a:solidFill>
+                        <a:schemeClr val="bg1">
+                          <a:lumMod val="50000"/>
+                        </a:schemeClr>
+                      </a:solidFill>
+                      <a:prstDash val="solid"/>
+                      <a:round/>
+                      <a:headEnd type="none" w="med" len="med"/>
+                      <a:tailEnd type="none" w="med" len="med"/>
+                    </a:lnB>
+                    <a:lnTlToBr w="12700" cmpd="sng">
+                      <a:noFill/>
+                      <a:prstDash val="solid"/>
+                    </a:lnTlToBr>
+                    <a:lnBlToTr w="12700" cmpd="sng">
+                      <a:noFill/>
+                      <a:prstDash val="solid"/>
+                    </a:lnBlToTr>
+                    <a:solidFill>
+                      <a:schemeClr val="bg1"/>
+                    </a:solidFill>
+                  </a:tcPr>
+                </a:tc>
+              </a:tr>
+              <a:tr h="1095482">
+                <a:tc>
+                  <a:txBody>
+                    <a:bodyPr/>
+                    <a:lstStyle/>
+                    <a:p>
+                      <a:r>
+                        <a:rPr lang="en-US" sz="1050" dirty="0" smtClean="0"/>
+                        <a:t>3.2.2. Static IAM Limitation</a:t>
+                      </a:r>
+                    </a:p>
+                    <a:p>
+                      <a:r>
+                        <a:rPr lang="en-US" sz="1050" dirty="0" smtClean="0"/>
+                        <a:t>3.2.3. Fragmentation Across Heterogeneous Integration Layers</a:t>
+                      </a:r>
+                    </a:p>
+                    <a:p>
+                      <a:r>
+                        <a:rPr lang="en-US" sz="1050" dirty="0" smtClean="0"/>
+                        <a:t>3.2.4. Multi-Vendor Dependency Risks</a:t>
+                      </a:r>
+                      <a:endParaRPr lang="en-US" sz="1050" dirty="0"/>
+                    </a:p>
+                  </a:txBody>
+                  <a:tcPr>
+                    <a:lnL w="12700" cap="flat" cmpd="sng" algn="ctr">
+                      <a:solidFill>
+                        <a:schemeClr val="bg1">
+                          <a:lumMod val="50000"/>
+                        </a:schemeClr>
+                      </a:solidFill>
+                      <a:prstDash val="solid"/>
+                      <a:round/>
+                      <a:headEnd type="none" w="med" len="med"/>
+                      <a:tailEnd type="none" w="med" len="med"/>
+                    </a:lnL>
+                    <a:lnR w="12700" cap="flat" cmpd="sng" algn="ctr">
+                      <a:solidFill>
+                        <a:schemeClr val="bg1">
+                          <a:lumMod val="50000"/>
+                        </a:schemeClr>
+                      </a:solidFill>
+                      <a:prstDash val="solid"/>
+                      <a:round/>
+                      <a:headEnd type="none" w="med" len="med"/>
+                      <a:tailEnd type="none" w="med" len="med"/>
+                    </a:lnR>
+                    <a:lnT w="12700" cap="flat" cmpd="sng" algn="ctr">
+                      <a:solidFill>
+                        <a:schemeClr val="bg1">
+                          <a:lumMod val="50000"/>
+                        </a:schemeClr>
+                      </a:solidFill>
+                      <a:prstDash val="solid"/>
+                      <a:round/>
+                      <a:headEnd type="none" w="med" len="med"/>
+                      <a:tailEnd type="none" w="med" len="med"/>
+                    </a:lnT>
+                    <a:lnB w="12700" cap="flat" cmpd="sng" algn="ctr">
+                      <a:solidFill>
+                        <a:schemeClr val="bg1">
+                          <a:lumMod val="50000"/>
+                        </a:schemeClr>
+                      </a:solidFill>
+                      <a:prstDash val="solid"/>
+                      <a:round/>
+                      <a:headEnd type="none" w="med" len="med"/>
+                      <a:tailEnd type="none" w="med" len="med"/>
+                    </a:lnB>
+                    <a:lnTlToBr w="12700" cmpd="sng">
+                      <a:noFill/>
+                      <a:prstDash val="solid"/>
+                    </a:lnTlToBr>
+                    <a:lnBlToTr w="12700" cmpd="sng">
+                      <a:noFill/>
+                      <a:prstDash val="solid"/>
+                    </a:lnBlToTr>
+                    <a:solidFill>
+                      <a:schemeClr val="bg1"/>
+                    </a:solidFill>
+                  </a:tcPr>
+                </a:tc>
+                <a:tc>
+                  <a:txBody>
+                    <a:bodyPr/>
+                    <a:lstStyle/>
+                    <a:p>
+                      <a:r>
+                        <a:rPr lang="en-US" sz="1050" dirty="0" smtClean="0"/>
+                        <a:t>CTL-6: Global and Dynamic Boundary Adaptation</a:t>
+                      </a:r>
+                    </a:p>
+                  </a:txBody>
+                  <a:tcPr>
+                    <a:lnL w="12700" cap="flat" cmpd="sng" algn="ctr">
+                      <a:solidFill>
+                        <a:schemeClr val="bg1">
+                          <a:lumMod val="50000"/>
+                        </a:schemeClr>
+                      </a:solidFill>
+                      <a:prstDash val="solid"/>
+                      <a:round/>
+                      <a:headEnd type="none" w="med" len="med"/>
+                      <a:tailEnd type="none" w="med" len="med"/>
+                    </a:lnL>
+                    <a:lnR w="12700" cap="flat" cmpd="sng" algn="ctr">
+                      <a:solidFill>
+                        <a:schemeClr val="bg1">
+                          <a:lumMod val="50000"/>
+                        </a:schemeClr>
+                      </a:solidFill>
+                      <a:prstDash val="solid"/>
+                      <a:round/>
+                      <a:headEnd type="none" w="med" len="med"/>
+                      <a:tailEnd type="none" w="med" len="med"/>
+                    </a:lnR>
+                    <a:lnT w="12700" cap="flat" cmpd="sng" algn="ctr">
+                      <a:solidFill>
+                        <a:schemeClr val="bg1">
+                          <a:lumMod val="50000"/>
+                        </a:schemeClr>
+                      </a:solidFill>
+                      <a:prstDash val="solid"/>
+                      <a:round/>
+                      <a:headEnd type="none" w="med" len="med"/>
+                      <a:tailEnd type="none" w="med" len="med"/>
+                    </a:lnT>
+                    <a:lnB w="12700" cap="flat" cmpd="sng" algn="ctr">
+                      <a:solidFill>
+                        <a:schemeClr val="bg1">
+                          <a:lumMod val="50000"/>
+                        </a:schemeClr>
+                      </a:solidFill>
+                      <a:prstDash val="solid"/>
+                      <a:round/>
+                      <a:headEnd type="none" w="med" len="med"/>
+                      <a:tailEnd type="none" w="med" len="med"/>
+                    </a:lnB>
+                    <a:lnTlToBr w="12700" cmpd="sng">
+                      <a:noFill/>
+                      <a:prstDash val="solid"/>
+                    </a:lnTlToBr>
+                    <a:lnBlToTr w="12700" cmpd="sng">
+                      <a:noFill/>
+                      <a:prstDash val="solid"/>
+                    </a:lnBlToTr>
+                    <a:solidFill>
+                      <a:schemeClr val="bg1"/>
+                    </a:solidFill>
+                  </a:tcPr>
+                </a:tc>
+                <a:tc>
+                  <a:txBody>
+                    <a:bodyPr/>
+                    <a:lstStyle/>
+                    <a:p>
+                      <a:r>
+                        <a:rPr lang="en-US" sz="1050" dirty="0" smtClean="0"/>
+                        <a:t>Supports the injection of global coordination control policies</a:t>
+                      </a:r>
+                    </a:p>
+                    <a:p>
+                      <a:r>
+                        <a:rPr lang="en-US" sz="1050" dirty="0" smtClean="0"/>
+                        <a:t>across multi-agent environments, and enable dynamic adjustment</a:t>
+                      </a:r>
+                      <a:r>
+                        <a:rPr lang="en-US" sz="1050" baseline="0" dirty="0" smtClean="0"/>
+                        <a:t> </a:t>
+                      </a:r>
+                      <a:r>
+                        <a:rPr lang="en-US" sz="1050" dirty="0" smtClean="0"/>
+                        <a:t>(e.g., tighten the agent's permissible access from RW to</a:t>
+                      </a:r>
+                      <a:r>
+                        <a:rPr lang="en-US" sz="1050" baseline="0" dirty="0" smtClean="0"/>
+                        <a:t> RO</a:t>
+                      </a:r>
+                      <a:r>
+                        <a:rPr lang="en-US" sz="1050" dirty="0" smtClean="0"/>
+                        <a:t>) of operational bounds based on the network's current operational state.</a:t>
+                      </a:r>
+                    </a:p>
+                  </a:txBody>
+                  <a:tcPr>
+                    <a:lnL w="12700" cap="flat" cmpd="sng" algn="ctr">
+                      <a:solidFill>
+                        <a:schemeClr val="bg1">
+                          <a:lumMod val="50000"/>
+                        </a:schemeClr>
+                      </a:solidFill>
+                      <a:prstDash val="solid"/>
+                      <a:round/>
+                      <a:headEnd type="none" w="med" len="med"/>
+                      <a:tailEnd type="none" w="med" len="med"/>
+                    </a:lnL>
+                    <a:lnR w="12700" cap="flat" cmpd="sng" algn="ctr">
+                      <a:solidFill>
+                        <a:schemeClr val="bg1">
+                          <a:lumMod val="50000"/>
+                        </a:schemeClr>
+                      </a:solidFill>
+                      <a:prstDash val="solid"/>
+                      <a:round/>
+                      <a:headEnd type="none" w="med" len="med"/>
+                      <a:tailEnd type="none" w="med" len="med"/>
+                    </a:lnR>
+                    <a:lnT w="12700" cap="flat" cmpd="sng" algn="ctr">
+                      <a:solidFill>
+                        <a:schemeClr val="bg1">
+                          <a:lumMod val="50000"/>
+                        </a:schemeClr>
+                      </a:solidFill>
+                      <a:prstDash val="solid"/>
+                      <a:round/>
+                      <a:headEnd type="none" w="med" len="med"/>
+                      <a:tailEnd type="none" w="med" len="med"/>
+                    </a:lnT>
+                    <a:lnB w="12700" cap="flat" cmpd="sng" algn="ctr">
+                      <a:solidFill>
+                        <a:schemeClr val="bg1">
+                          <a:lumMod val="50000"/>
+                        </a:schemeClr>
+                      </a:solidFill>
+                      <a:prstDash val="solid"/>
+                      <a:round/>
+                      <a:headEnd type="none" w="med" len="med"/>
+                      <a:tailEnd type="none" w="med" len="med"/>
+                    </a:lnB>
+                    <a:lnTlToBr w="12700" cmpd="sng">
+                      <a:noFill/>
+                      <a:prstDash val="solid"/>
+                    </a:lnTlToBr>
+                    <a:lnBlToTr w="12700" cmpd="sng">
+                      <a:noFill/>
+                      <a:prstDash val="solid"/>
+                    </a:lnBlToTr>
+                    <a:solidFill>
+                      <a:schemeClr val="bg1"/>
+                    </a:solidFill>
+                  </a:tcPr>
+                </a:tc>
+              </a:tr>
+            </a:tbl>
+          </a:graphicData>
+        </a:graphic>
+      </p:graphicFrame>
+      <p:sp>
+        <p:nvSpPr>
+          <p:cNvPr id="5" name="矩形 4"/>
+          <p:cNvSpPr/>
+          <p:nvPr/>
         </p:nvSpPr>
         <p:spPr>
           <a:xfrm>
-            <a:off x="838198" y="1409988"/>
-            <a:ext cx="10957562" cy="5215256"/>
+            <a:off x="664714" y="1332502"/>
+            <a:ext cx="3830600" cy="400110"/>
           </a:xfrm>
+          <a:prstGeom prst="rect">
+            <a:avLst/>
+          </a:prstGeom>
         </p:spPr>
         <p:txBody>
-          <a:bodyPr>
-            <a:normAutofit fontScale="92500" lnSpcReduction="20000"/>
+          <a:bodyPr wrap="none">
+            <a:spAutoFit/>
           </a:bodyPr>
           <a:lstStyle/>
           <a:p>
             <a:r>
-              <a:rPr lang="en-US" altLang="zh-CN" dirty="0">
+              <a:rPr lang="en-US" altLang="zh-CN" sz="2000" dirty="0">
                 <a:latin typeface="Calibri" panose="020F0502020204030204" pitchFamily="34" charset="0"/>
                 <a:ea typeface="Calibri" panose="020F0502020204030204" pitchFamily="34" charset="0"/>
                 <a:cs typeface="Calibri" panose="020F0502020204030204" pitchFamily="34" charset="0"/>
               </a:rPr>
-              <a:t>Set a boundary for agent behaviors.</a:t>
-            </a:r>
-          </a:p>
-          <a:p>
-            <a:r>
-              <a:rPr lang="en-US" altLang="zh-CN" dirty="0">
+              <a:t>Set a boundary for agent </a:t>
+            </a:r>
+            <a:r>
+              <a:rPr lang="en-US" altLang="zh-CN" sz="2000" dirty="0" smtClean="0">
                 <a:latin typeface="Calibri" panose="020F0502020204030204" pitchFamily="34" charset="0"/>
                 <a:ea typeface="Calibri" panose="020F0502020204030204" pitchFamily="34" charset="0"/>
                 <a:cs typeface="Calibri" panose="020F0502020204030204" pitchFamily="34" charset="0"/>
               </a:rPr>
-              <a:t>CTL-1: Access &amp; Permission</a:t>
-            </a:r>
-          </a:p>
-          <a:p>
-            <a:pPr lvl="1"/>
-            <a:r>
-              <a:rPr lang="en-US" altLang="zh-CN" dirty="0" smtClean="0">
-                <a:latin typeface="Calibri" panose="020F0502020204030204" pitchFamily="34" charset="0"/>
-                <a:ea typeface="Calibri" panose="020F0502020204030204" pitchFamily="34" charset="0"/>
-                <a:cs typeface="Calibri" panose="020F0502020204030204" pitchFamily="34" charset="0"/>
-              </a:rPr>
-              <a:t>Limits </a:t>
-            </a:r>
-            <a:r>
-              <a:rPr lang="en-US" altLang="zh-CN" dirty="0">
-                <a:latin typeface="Calibri" panose="020F0502020204030204" pitchFamily="34" charset="0"/>
-                <a:ea typeface="Calibri" panose="020F0502020204030204" pitchFamily="34" charset="0"/>
-                <a:cs typeface="Calibri" panose="020F0502020204030204" pitchFamily="34" charset="0"/>
-              </a:rPr>
-              <a:t>each agent's </a:t>
-            </a:r>
-            <a:r>
-              <a:rPr lang="en-US" altLang="zh-CN" dirty="0" smtClean="0">
-                <a:latin typeface="Calibri" panose="020F0502020204030204" pitchFamily="34" charset="0"/>
-                <a:ea typeface="Calibri" panose="020F0502020204030204" pitchFamily="34" charset="0"/>
-                <a:cs typeface="Calibri" panose="020F0502020204030204" pitchFamily="34" charset="0"/>
-              </a:rPr>
-              <a:t>operational scope to specific network domains/areas, devices, protocols and tools as well as </a:t>
-            </a:r>
-            <a:r>
-              <a:rPr lang="en-US" altLang="zh-CN" dirty="0" smtClean="0">
-                <a:latin typeface="Calibri" panose="020F0502020204030204" pitchFamily="34" charset="0"/>
-                <a:ea typeface="Calibri" panose="020F0502020204030204" pitchFamily="34" charset="0"/>
-                <a:cs typeface="Calibri" panose="020F0502020204030204" pitchFamily="34" charset="0"/>
-              </a:rPr>
-              <a:t>network configuration </a:t>
-            </a:r>
-            <a:r>
-              <a:rPr lang="en-US" altLang="zh-CN" dirty="0" smtClean="0">
-                <a:latin typeface="Calibri" panose="020F0502020204030204" pitchFamily="34" charset="0"/>
-                <a:ea typeface="Calibri" panose="020F0502020204030204" pitchFamily="34" charset="0"/>
-                <a:cs typeface="Calibri" panose="020F0502020204030204" pitchFamily="34" charset="0"/>
-              </a:rPr>
-              <a:t>access control (e.g., datastores, modules, nodes, RPCs, etc.)</a:t>
-            </a:r>
-          </a:p>
-          <a:p>
-            <a:r>
-              <a:rPr lang="en-US" altLang="zh-CN" dirty="0" smtClean="0">
-                <a:latin typeface="Calibri" panose="020F0502020204030204" pitchFamily="34" charset="0"/>
-                <a:ea typeface="Calibri" panose="020F0502020204030204" pitchFamily="34" charset="0"/>
-                <a:cs typeface="Calibri" panose="020F0502020204030204" pitchFamily="34" charset="0"/>
-              </a:rPr>
-              <a:t>CTL-2</a:t>
-            </a:r>
-            <a:r>
-              <a:rPr lang="en-US" altLang="zh-CN" dirty="0">
-                <a:latin typeface="Calibri" panose="020F0502020204030204" pitchFamily="34" charset="0"/>
-                <a:ea typeface="Calibri" panose="020F0502020204030204" pitchFamily="34" charset="0"/>
-                <a:cs typeface="Calibri" panose="020F0502020204030204" pitchFamily="34" charset="0"/>
-              </a:rPr>
-              <a:t>: Intent Validation &amp; Alignment</a:t>
-            </a:r>
-          </a:p>
-          <a:p>
-            <a:pPr lvl="1"/>
-            <a:r>
-              <a:rPr lang="en-US" altLang="zh-CN" dirty="0">
-                <a:latin typeface="Calibri" panose="020F0502020204030204" pitchFamily="34" charset="0"/>
-                <a:ea typeface="Calibri" panose="020F0502020204030204" pitchFamily="34" charset="0"/>
-                <a:cs typeface="Calibri" panose="020F0502020204030204" pitchFamily="34" charset="0"/>
-              </a:rPr>
-              <a:t>Requires the agent to check that what it is about to configure actually matches the operational intent it was given, before committing</a:t>
-            </a:r>
-            <a:r>
-              <a:rPr lang="en-US" altLang="zh-CN" dirty="0" smtClean="0">
-                <a:latin typeface="Calibri" panose="020F0502020204030204" pitchFamily="34" charset="0"/>
-                <a:ea typeface="Calibri" panose="020F0502020204030204" pitchFamily="34" charset="0"/>
-                <a:cs typeface="Calibri" panose="020F0502020204030204" pitchFamily="34" charset="0"/>
-              </a:rPr>
-              <a:t>.</a:t>
-            </a:r>
-            <a:endParaRPr lang="en-US" altLang="zh-CN" dirty="0">
+              <a:t>behaviors</a:t>
+            </a:r>
+            <a:endParaRPr lang="en-US" altLang="zh-CN" sz="2000" dirty="0">
               <a:latin typeface="Calibri" panose="020F0502020204030204" pitchFamily="34" charset="0"/>
               <a:ea typeface="Calibri" panose="020F0502020204030204" pitchFamily="34" charset="0"/>
               <a:cs typeface="Calibri" panose="020F0502020204030204" pitchFamily="34" charset="0"/>
             </a:endParaRPr>
           </a:p>
-          <a:p>
-            <a:r>
-              <a:rPr lang="en-US" altLang="zh-CN" dirty="0">
-                <a:latin typeface="Calibri" panose="020F0502020204030204" pitchFamily="34" charset="0"/>
-                <a:ea typeface="Calibri" panose="020F0502020204030204" pitchFamily="34" charset="0"/>
-                <a:cs typeface="Calibri" panose="020F0502020204030204" pitchFamily="34" charset="0"/>
-              </a:rPr>
-              <a:t>CTL-3: Temporal &amp; Data/Context Validity</a:t>
-            </a:r>
-          </a:p>
-          <a:p>
-            <a:pPr lvl="1"/>
-            <a:r>
-              <a:rPr lang="en-US" altLang="zh-CN" dirty="0">
-                <a:latin typeface="Calibri" panose="020F0502020204030204" pitchFamily="34" charset="0"/>
-                <a:ea typeface="Calibri" panose="020F0502020204030204" pitchFamily="34" charset="0"/>
-                <a:cs typeface="Calibri" panose="020F0502020204030204" pitchFamily="34" charset="0"/>
-              </a:rPr>
-              <a:t>Ties an agent's actions to a valid operating window and to network state that is still </a:t>
-            </a:r>
-            <a:r>
-              <a:rPr lang="en-US" altLang="zh-CN" dirty="0" smtClean="0">
-                <a:latin typeface="Calibri" panose="020F0502020204030204" pitchFamily="34" charset="0"/>
-                <a:ea typeface="Calibri" panose="020F0502020204030204" pitchFamily="34" charset="0"/>
-                <a:cs typeface="Calibri" panose="020F0502020204030204" pitchFamily="34" charset="0"/>
-              </a:rPr>
-              <a:t>current.</a:t>
-            </a:r>
-            <a:endParaRPr lang="en-US" altLang="zh-CN" dirty="0">
-              <a:latin typeface="Calibri" panose="020F0502020204030204" pitchFamily="34" charset="0"/>
-              <a:ea typeface="Calibri" panose="020F0502020204030204" pitchFamily="34" charset="0"/>
-              <a:cs typeface="Calibri" panose="020F0502020204030204" pitchFamily="34" charset="0"/>
-            </a:endParaRPr>
-          </a:p>
-          <a:p>
-            <a:r>
-              <a:rPr lang="en-US" altLang="zh-CN" dirty="0">
-                <a:latin typeface="Calibri" panose="020F0502020204030204" pitchFamily="34" charset="0"/>
-                <a:ea typeface="Calibri" panose="020F0502020204030204" pitchFamily="34" charset="0"/>
-                <a:cs typeface="Calibri" panose="020F0502020204030204" pitchFamily="34" charset="0"/>
-              </a:rPr>
-              <a:t>CTL-4: Authorization &amp; Approval</a:t>
-            </a:r>
-          </a:p>
-          <a:p>
-            <a:pPr lvl="1"/>
-            <a:r>
-              <a:rPr lang="en-US" altLang="zh-CN" dirty="0" smtClean="0">
-                <a:latin typeface="Calibri" panose="020F0502020204030204" pitchFamily="34" charset="0"/>
-                <a:ea typeface="Calibri" panose="020F0502020204030204" pitchFamily="34" charset="0"/>
-                <a:cs typeface="Calibri" panose="020F0502020204030204" pitchFamily="34" charset="0"/>
-              </a:rPr>
-              <a:t>Specifies of some</a:t>
-            </a:r>
-            <a:r>
-              <a:rPr lang="en-US" altLang="zh-CN" dirty="0" smtClean="0">
-                <a:latin typeface="Calibri" panose="020F0502020204030204" pitchFamily="34" charset="0"/>
-                <a:ea typeface="Calibri" panose="020F0502020204030204" pitchFamily="34" charset="0"/>
-                <a:cs typeface="Calibri" panose="020F0502020204030204" pitchFamily="34" charset="0"/>
-              </a:rPr>
-              <a:t> </a:t>
-            </a:r>
-            <a:r>
-              <a:rPr lang="en-US" altLang="zh-CN" dirty="0">
-                <a:latin typeface="Calibri" panose="020F0502020204030204" pitchFamily="34" charset="0"/>
-                <a:ea typeface="Calibri" panose="020F0502020204030204" pitchFamily="34" charset="0"/>
-                <a:cs typeface="Calibri" panose="020F0502020204030204" pitchFamily="34" charset="0"/>
-              </a:rPr>
-              <a:t>network </a:t>
-            </a:r>
-            <a:r>
-              <a:rPr lang="en-US" altLang="zh-CN" dirty="0" smtClean="0">
-                <a:latin typeface="Calibri" panose="020F0502020204030204" pitchFamily="34" charset="0"/>
-                <a:ea typeface="Calibri" panose="020F0502020204030204" pitchFamily="34" charset="0"/>
-                <a:cs typeface="Calibri" panose="020F0502020204030204" pitchFamily="34" charset="0"/>
-              </a:rPr>
-              <a:t>operations </a:t>
-            </a:r>
-            <a:r>
-              <a:rPr lang="en-US" altLang="zh-CN" dirty="0" smtClean="0">
-                <a:latin typeface="Calibri" panose="020F0502020204030204" pitchFamily="34" charset="0"/>
-                <a:ea typeface="Calibri" panose="020F0502020204030204" pitchFamily="34" charset="0"/>
-                <a:cs typeface="Calibri" panose="020F0502020204030204" pitchFamily="34" charset="0"/>
-              </a:rPr>
-              <a:t>as </a:t>
-            </a:r>
-            <a:r>
-              <a:rPr lang="en-US" altLang="zh-CN" dirty="0">
-                <a:latin typeface="Calibri" panose="020F0502020204030204" pitchFamily="34" charset="0"/>
-                <a:ea typeface="Calibri" panose="020F0502020204030204" pitchFamily="34" charset="0"/>
-                <a:cs typeface="Calibri" panose="020F0502020204030204" pitchFamily="34" charset="0"/>
-              </a:rPr>
-              <a:t>requiring a human decision before </a:t>
-            </a:r>
-            <a:r>
-              <a:rPr lang="en-US" altLang="zh-CN" dirty="0" smtClean="0">
-                <a:latin typeface="Calibri" panose="020F0502020204030204" pitchFamily="34" charset="0"/>
-                <a:ea typeface="Calibri" panose="020F0502020204030204" pitchFamily="34" charset="0"/>
-                <a:cs typeface="Calibri" panose="020F0502020204030204" pitchFamily="34" charset="0"/>
-              </a:rPr>
-              <a:t>execution.</a:t>
-            </a:r>
-            <a:endParaRPr lang="en-US" altLang="zh-CN" dirty="0">
-              <a:latin typeface="Calibri" panose="020F0502020204030204" pitchFamily="34" charset="0"/>
-              <a:ea typeface="Calibri" panose="020F0502020204030204" pitchFamily="34" charset="0"/>
-              <a:cs typeface="Calibri" panose="020F0502020204030204" pitchFamily="34" charset="0"/>
-            </a:endParaRPr>
-          </a:p>
-          <a:p>
-            <a:r>
-              <a:rPr lang="en-US" altLang="zh-CN" dirty="0">
-                <a:latin typeface="Calibri" panose="020F0502020204030204" pitchFamily="34" charset="0"/>
-                <a:ea typeface="Calibri" panose="020F0502020204030204" pitchFamily="34" charset="0"/>
-                <a:cs typeface="Calibri" panose="020F0502020204030204" pitchFamily="34" charset="0"/>
-              </a:rPr>
-              <a:t>CTL-5: Failure &amp; Liveness</a:t>
-            </a:r>
-          </a:p>
-          <a:p>
-            <a:pPr lvl="1"/>
-            <a:r>
-              <a:rPr lang="en-US" altLang="zh-CN" dirty="0">
-                <a:latin typeface="Calibri" panose="020F0502020204030204" pitchFamily="34" charset="0"/>
-                <a:ea typeface="Calibri" panose="020F0502020204030204" pitchFamily="34" charset="0"/>
-                <a:cs typeface="Calibri" panose="020F0502020204030204" pitchFamily="34" charset="0"/>
-              </a:rPr>
-              <a:t>Defines what an agent does when </a:t>
-            </a:r>
-            <a:r>
-              <a:rPr lang="en-US" altLang="zh-CN" dirty="0" smtClean="0">
-                <a:latin typeface="Calibri" panose="020F0502020204030204" pitchFamily="34" charset="0"/>
-                <a:ea typeface="Calibri" panose="020F0502020204030204" pitchFamily="34" charset="0"/>
-                <a:cs typeface="Calibri" panose="020F0502020204030204" pitchFamily="34" charset="0"/>
-              </a:rPr>
-              <a:t>it encounters predefined failure</a:t>
-            </a:r>
-            <a:r>
-              <a:rPr lang="en-US" altLang="zh-CN" dirty="0" smtClean="0">
-                <a:latin typeface="Calibri" panose="020F0502020204030204" pitchFamily="34" charset="0"/>
-                <a:ea typeface="Calibri" panose="020F0502020204030204" pitchFamily="34" charset="0"/>
-                <a:cs typeface="Calibri" panose="020F0502020204030204" pitchFamily="34" charset="0"/>
-              </a:rPr>
-              <a:t>, </a:t>
-            </a:r>
-            <a:r>
-              <a:rPr lang="en-US" altLang="zh-CN" dirty="0">
-                <a:latin typeface="Calibri" panose="020F0502020204030204" pitchFamily="34" charset="0"/>
-                <a:ea typeface="Calibri" panose="020F0502020204030204" pitchFamily="34" charset="0"/>
-                <a:cs typeface="Calibri" panose="020F0502020204030204" pitchFamily="34" charset="0"/>
-              </a:rPr>
-              <a:t>and requires it to continuously </a:t>
-            </a:r>
-            <a:r>
-              <a:rPr lang="en-US" altLang="zh-CN" dirty="0" smtClean="0">
-                <a:latin typeface="Calibri" panose="020F0502020204030204" pitchFamily="34" charset="0"/>
-                <a:ea typeface="Calibri" panose="020F0502020204030204" pitchFamily="34" charset="0"/>
-                <a:cs typeface="Calibri" panose="020F0502020204030204" pitchFamily="34" charset="0"/>
-              </a:rPr>
-              <a:t>report its liveness</a:t>
-            </a:r>
-            <a:r>
-              <a:rPr lang="en-US" altLang="zh-CN" dirty="0" smtClean="0">
-                <a:latin typeface="Calibri" panose="020F0502020204030204" pitchFamily="34" charset="0"/>
-                <a:ea typeface="Calibri" panose="020F0502020204030204" pitchFamily="34" charset="0"/>
-                <a:cs typeface="Calibri" panose="020F0502020204030204" pitchFamily="34" charset="0"/>
-              </a:rPr>
-              <a:t>.</a:t>
-            </a:r>
-            <a:endParaRPr lang="en-US" altLang="zh-CN" dirty="0">
-              <a:latin typeface="Calibri" panose="020F0502020204030204" pitchFamily="34" charset="0"/>
-              <a:ea typeface="Calibri" panose="020F0502020204030204" pitchFamily="34" charset="0"/>
-              <a:cs typeface="Calibri" panose="020F0502020204030204" pitchFamily="34" charset="0"/>
-            </a:endParaRPr>
-          </a:p>
-          <a:p>
-            <a:pPr lvl="1"/>
-            <a:endParaRPr lang="en-US" altLang="zh-CN" dirty="0">
-              <a:latin typeface="Calibri" panose="020F0502020204030204" pitchFamily="34" charset="0"/>
-              <a:ea typeface="Calibri" panose="020F0502020204030204" pitchFamily="34" charset="0"/>
-              <a:cs typeface="Calibri" panose="020F0502020204030204" pitchFamily="34" charset="0"/>
-            </a:endParaRPr>
-          </a:p>
-          <a:p>
-            <a:endParaRPr lang="zh-CN" altLang="en-US" dirty="0">
-              <a:latin typeface="Calibri" panose="020F0502020204030204" pitchFamily="34" charset="0"/>
-              <a:cs typeface="Calibri" panose="020F0502020204030204" pitchFamily="34" charset="0"/>
-            </a:endParaRPr>
-          </a:p>
         </p:txBody>
       </p:sp>
     </p:spTree>
     <p:extLst>
       <p:ext uri="{BB962C8B-B14F-4D97-AF65-F5344CB8AC3E}">
-        <p14:creationId xmlns:p14="http://schemas.microsoft.com/office/powerpoint/2010/main" val="3505180484"/>
+        <p14:creationId xmlns:p14="http://schemas.microsoft.com/office/powerpoint/2010/main" val="2089646700"/>
       </p:ext>
     </p:extLst>
   </p:cSld>
@@ -6603,13 +8678,7 @@
       </p:grpSpPr>
       <p:sp>
         <p:nvSpPr>
-          <p:cNvPr id="2" name="标题 1">
-            <a:extLst>
-              <a:ext uri="{FF2B5EF4-FFF2-40B4-BE49-F238E27FC236}">
-                <a16:creationId xmlns="" xmlns:a16="http://schemas.microsoft.com/office/drawing/2014/main" id="{5DA4F520-B074-4471-B42B-B29DFB85A1DD}"/>
-              </a:ext>
-            </a:extLst>
-          </p:cNvPr>
+          <p:cNvPr id="2" name="标题 1"/>
           <p:cNvSpPr>
             <a:spLocks noGrp="1"/>
           </p:cNvSpPr>
@@ -6617,7 +8686,12 @@
             <p:ph type="title"/>
           </p:nvPr>
         </p:nvSpPr>
-        <p:spPr/>
+        <p:spPr>
+          <a:xfrm>
+            <a:off x="625136" y="0"/>
+            <a:ext cx="10515600" cy="1325563"/>
+          </a:xfrm>
+        </p:spPr>
         <p:txBody>
           <a:bodyPr>
             <a:normAutofit/>
@@ -6625,108 +8699,1270 @@
           <a:lstStyle/>
           <a:p>
             <a:r>
-              <a:rPr lang="en-US" altLang="zh-CN" dirty="0">
-                <a:latin typeface="Calibri Light" panose="020F0302020204030204" pitchFamily="34" charset="0"/>
-                <a:ea typeface="Calibri Light" panose="020F0302020204030204" pitchFamily="34" charset="0"/>
-                <a:cs typeface="Calibri Light" panose="020F0302020204030204" pitchFamily="34" charset="0"/>
-              </a:rPr>
-              <a:t>Agent Intervention Requirements</a:t>
-            </a:r>
-            <a:endParaRPr lang="zh-CN" altLang="en-US" dirty="0">
-              <a:latin typeface="Calibri Light" panose="020F0302020204030204" pitchFamily="34" charset="0"/>
-              <a:cs typeface="Calibri Light" panose="020F0302020204030204" pitchFamily="34" charset="0"/>
-            </a:endParaRPr>
+              <a:rPr lang="en-US" altLang="zh-CN" sz="3600" dirty="0" smtClean="0"/>
+              <a:t>Deriving Requirements from Problem Statements-Agent Intervention</a:t>
+            </a:r>
+            <a:endParaRPr lang="en-US" sz="3600" dirty="0"/>
           </a:p>
         </p:txBody>
       </p:sp>
-      <p:sp>
-        <p:nvSpPr>
-          <p:cNvPr id="3" name="内容占位符 2">
-            <a:extLst>
-              <a:ext uri="{FF2B5EF4-FFF2-40B4-BE49-F238E27FC236}">
-                <a16:creationId xmlns="" xmlns:a16="http://schemas.microsoft.com/office/drawing/2014/main" id="{0656D31C-579C-4A31-81EF-445957A060BA}"/>
-              </a:ext>
-            </a:extLst>
-          </p:cNvPr>
-          <p:cNvSpPr>
-            <a:spLocks noGrp="1"/>
-          </p:cNvSpPr>
+      <p:graphicFrame>
+        <p:nvGraphicFramePr>
+          <p:cNvPr id="4" name="表格 3"/>
+          <p:cNvGraphicFramePr>
+            <a:graphicFrameLocks noGrp="1"/>
+          </p:cNvGraphicFramePr>
           <p:nvPr>
-            <p:ph idx="1"/>
+            <p:extLst>
+              <p:ext uri="{D42A27DB-BD31-4B8C-83A1-F6EECF244321}">
+                <p14:modId xmlns:p14="http://schemas.microsoft.com/office/powerpoint/2010/main" val="4178013609"/>
+              </p:ext>
+            </p:extLst>
           </p:nvPr>
+        </p:nvGraphicFramePr>
+        <p:xfrm>
+          <a:off x="427052" y="1510229"/>
+          <a:ext cx="11495659" cy="5154636"/>
+        </p:xfrm>
+        <a:graphic>
+          <a:graphicData uri="http://schemas.openxmlformats.org/drawingml/2006/table">
+            <a:tbl>
+              <a:tblPr firstRow="1" bandRow="1">
+                <a:tableStyleId>{5C22544A-7EE6-4342-B048-85BDC9FD1C3A}</a:tableStyleId>
+              </a:tblPr>
+              <a:tblGrid>
+                <a:gridCol w="4011783"/>
+                <a:gridCol w="3239965"/>
+                <a:gridCol w="4243911"/>
+              </a:tblGrid>
+              <a:tr h="544193">
+                <a:tc>
+                  <a:txBody>
+                    <a:bodyPr/>
+                    <a:lstStyle/>
+                    <a:p>
+                      <a:r>
+                        <a:rPr lang="en-US" sz="1400" dirty="0" smtClean="0">
+                          <a:solidFill>
+                            <a:schemeClr val="bg1"/>
+                          </a:solidFill>
+                        </a:rPr>
+                        <a:t>Problem</a:t>
+                      </a:r>
+                      <a:r>
+                        <a:rPr lang="en-US" sz="1400" baseline="0" dirty="0" smtClean="0">
+                          <a:solidFill>
+                            <a:schemeClr val="bg1"/>
+                          </a:solidFill>
+                        </a:rPr>
+                        <a:t> Statement Gap</a:t>
+                      </a:r>
+                    </a:p>
+                    <a:p>
+                      <a:r>
+                        <a:rPr lang="en-US" sz="1400" baseline="0" dirty="0" smtClean="0">
+                          <a:solidFill>
+                            <a:schemeClr val="bg1"/>
+                          </a:solidFill>
+                        </a:rPr>
+                        <a:t>I-D. </a:t>
+                      </a:r>
+                      <a:r>
+                        <a:rPr lang="en-US" sz="1400" baseline="0" dirty="0" err="1" smtClean="0">
+                          <a:solidFill>
+                            <a:schemeClr val="bg1"/>
+                          </a:solidFill>
+                        </a:rPr>
+                        <a:t>wnd</a:t>
+                      </a:r>
+                      <a:r>
+                        <a:rPr lang="en-US" sz="1400" baseline="0" dirty="0" smtClean="0">
+                          <a:solidFill>
+                            <a:schemeClr val="bg1"/>
+                          </a:solidFill>
+                        </a:rPr>
+                        <a:t>-opsawg-icon-</a:t>
+                      </a:r>
+                      <a:r>
+                        <a:rPr lang="en-US" sz="1400" baseline="0" dirty="0" err="1" smtClean="0">
+                          <a:solidFill>
+                            <a:schemeClr val="bg1"/>
+                          </a:solidFill>
+                        </a:rPr>
+                        <a:t>ps</a:t>
+                      </a:r>
+                      <a:endParaRPr lang="en-US" sz="1400" dirty="0">
+                        <a:solidFill>
+                          <a:schemeClr val="bg1"/>
+                        </a:solidFill>
+                      </a:endParaRPr>
+                    </a:p>
+                  </a:txBody>
+                  <a:tcPr>
+                    <a:lnL w="12700" cap="flat" cmpd="sng" algn="ctr">
+                      <a:solidFill>
+                        <a:schemeClr val="bg1">
+                          <a:lumMod val="50000"/>
+                        </a:schemeClr>
+                      </a:solidFill>
+                      <a:prstDash val="solid"/>
+                      <a:round/>
+                      <a:headEnd type="none" w="med" len="med"/>
+                      <a:tailEnd type="none" w="med" len="med"/>
+                    </a:lnL>
+                    <a:lnR w="12700" cap="flat" cmpd="sng" algn="ctr">
+                      <a:solidFill>
+                        <a:schemeClr val="bg1">
+                          <a:lumMod val="50000"/>
+                        </a:schemeClr>
+                      </a:solidFill>
+                      <a:prstDash val="solid"/>
+                      <a:round/>
+                      <a:headEnd type="none" w="med" len="med"/>
+                      <a:tailEnd type="none" w="med" len="med"/>
+                    </a:lnR>
+                    <a:lnT w="12700" cap="flat" cmpd="sng" algn="ctr">
+                      <a:solidFill>
+                        <a:schemeClr val="bg1">
+                          <a:lumMod val="50000"/>
+                        </a:schemeClr>
+                      </a:solidFill>
+                      <a:prstDash val="solid"/>
+                      <a:round/>
+                      <a:headEnd type="none" w="med" len="med"/>
+                      <a:tailEnd type="none" w="med" len="med"/>
+                    </a:lnT>
+                    <a:lnB w="12700" cap="flat" cmpd="sng" algn="ctr">
+                      <a:solidFill>
+                        <a:schemeClr val="bg1">
+                          <a:lumMod val="50000"/>
+                        </a:schemeClr>
+                      </a:solidFill>
+                      <a:prstDash val="solid"/>
+                      <a:round/>
+                      <a:headEnd type="none" w="med" len="med"/>
+                      <a:tailEnd type="none" w="med" len="med"/>
+                    </a:lnB>
+                    <a:solidFill>
+                      <a:schemeClr val="tx2">
+                        <a:lumMod val="75000"/>
+                      </a:schemeClr>
+                    </a:solidFill>
+                  </a:tcPr>
+                </a:tc>
+                <a:tc>
+                  <a:txBody>
+                    <a:bodyPr/>
+                    <a:lstStyle/>
+                    <a:p>
+                      <a:r>
+                        <a:rPr lang="en-US" sz="1400" dirty="0" smtClean="0"/>
+                        <a:t>Essential Requirement</a:t>
+                      </a:r>
+                    </a:p>
+                    <a:p>
+                      <a:r>
+                        <a:rPr lang="en-US" sz="1400" dirty="0" smtClean="0"/>
+                        <a:t>I-D.</a:t>
+                      </a:r>
+                      <a:r>
+                        <a:rPr lang="en-US" sz="1400" baseline="0" dirty="0" smtClean="0"/>
+                        <a:t> </a:t>
+                      </a:r>
+                      <a:r>
+                        <a:rPr lang="en-US" sz="1400" baseline="0" dirty="0" err="1" smtClean="0"/>
+                        <a:t>mcw</a:t>
+                      </a:r>
+                      <a:r>
+                        <a:rPr lang="en-US" sz="1400" baseline="0" dirty="0" smtClean="0"/>
+                        <a:t>-opsawg-icon-requirements</a:t>
+                      </a:r>
+                      <a:endParaRPr lang="en-US" sz="1400" dirty="0"/>
+                    </a:p>
+                  </a:txBody>
+                  <a:tcPr>
+                    <a:lnL w="12700" cap="flat" cmpd="sng" algn="ctr">
+                      <a:solidFill>
+                        <a:schemeClr val="bg1">
+                          <a:lumMod val="50000"/>
+                        </a:schemeClr>
+                      </a:solidFill>
+                      <a:prstDash val="solid"/>
+                      <a:round/>
+                      <a:headEnd type="none" w="med" len="med"/>
+                      <a:tailEnd type="none" w="med" len="med"/>
+                    </a:lnL>
+                    <a:lnR w="12700" cap="flat" cmpd="sng" algn="ctr">
+                      <a:solidFill>
+                        <a:schemeClr val="bg1">
+                          <a:lumMod val="50000"/>
+                        </a:schemeClr>
+                      </a:solidFill>
+                      <a:prstDash val="solid"/>
+                      <a:round/>
+                      <a:headEnd type="none" w="med" len="med"/>
+                      <a:tailEnd type="none" w="med" len="med"/>
+                    </a:lnR>
+                    <a:lnT w="12700" cap="flat" cmpd="sng" algn="ctr">
+                      <a:solidFill>
+                        <a:schemeClr val="bg1">
+                          <a:lumMod val="50000"/>
+                        </a:schemeClr>
+                      </a:solidFill>
+                      <a:prstDash val="solid"/>
+                      <a:round/>
+                      <a:headEnd type="none" w="med" len="med"/>
+                      <a:tailEnd type="none" w="med" len="med"/>
+                    </a:lnT>
+                    <a:lnB w="12700" cap="flat" cmpd="sng" algn="ctr">
+                      <a:solidFill>
+                        <a:schemeClr val="bg1">
+                          <a:lumMod val="50000"/>
+                        </a:schemeClr>
+                      </a:solidFill>
+                      <a:prstDash val="solid"/>
+                      <a:round/>
+                      <a:headEnd type="none" w="med" len="med"/>
+                      <a:tailEnd type="none" w="med" len="med"/>
+                    </a:lnB>
+                    <a:solidFill>
+                      <a:schemeClr val="tx2">
+                        <a:lumMod val="75000"/>
+                      </a:schemeClr>
+                    </a:solidFill>
+                  </a:tcPr>
+                </a:tc>
+                <a:tc>
+                  <a:txBody>
+                    <a:bodyPr/>
+                    <a:lstStyle/>
+                    <a:p>
+                      <a:r>
+                        <a:rPr lang="en-US" sz="1400" dirty="0" smtClean="0"/>
+                        <a:t>Description</a:t>
+                      </a:r>
+                      <a:endParaRPr lang="en-US" sz="1400" dirty="0"/>
+                    </a:p>
+                  </a:txBody>
+                  <a:tcPr>
+                    <a:lnL w="12700" cap="flat" cmpd="sng" algn="ctr">
+                      <a:solidFill>
+                        <a:schemeClr val="bg1">
+                          <a:lumMod val="50000"/>
+                        </a:schemeClr>
+                      </a:solidFill>
+                      <a:prstDash val="solid"/>
+                      <a:round/>
+                      <a:headEnd type="none" w="med" len="med"/>
+                      <a:tailEnd type="none" w="med" len="med"/>
+                    </a:lnL>
+                    <a:lnR w="12700" cap="flat" cmpd="sng" algn="ctr">
+                      <a:solidFill>
+                        <a:schemeClr val="bg1">
+                          <a:lumMod val="50000"/>
+                        </a:schemeClr>
+                      </a:solidFill>
+                      <a:prstDash val="solid"/>
+                      <a:round/>
+                      <a:headEnd type="none" w="med" len="med"/>
+                      <a:tailEnd type="none" w="med" len="med"/>
+                    </a:lnR>
+                    <a:lnT w="12700" cap="flat" cmpd="sng" algn="ctr">
+                      <a:solidFill>
+                        <a:schemeClr val="bg1">
+                          <a:lumMod val="50000"/>
+                        </a:schemeClr>
+                      </a:solidFill>
+                      <a:prstDash val="solid"/>
+                      <a:round/>
+                      <a:headEnd type="none" w="med" len="med"/>
+                      <a:tailEnd type="none" w="med" len="med"/>
+                    </a:lnT>
+                    <a:lnB w="12700" cap="flat" cmpd="sng" algn="ctr">
+                      <a:solidFill>
+                        <a:schemeClr val="bg1">
+                          <a:lumMod val="50000"/>
+                        </a:schemeClr>
+                      </a:solidFill>
+                      <a:prstDash val="solid"/>
+                      <a:round/>
+                      <a:headEnd type="none" w="med" len="med"/>
+                      <a:tailEnd type="none" w="med" len="med"/>
+                    </a:lnB>
+                    <a:solidFill>
+                      <a:schemeClr val="tx2">
+                        <a:lumMod val="75000"/>
+                      </a:schemeClr>
+                    </a:solidFill>
+                  </a:tcPr>
+                </a:tc>
+              </a:tr>
+              <a:tr h="2202523">
+                <a:tc>
+                  <a:txBody>
+                    <a:bodyPr/>
+                    <a:lstStyle/>
+                    <a:p>
+                      <a:r>
+                        <a:rPr lang="en-US" sz="1400" dirty="0" smtClean="0"/>
+                        <a:t>3.3.1</a:t>
+                      </a:r>
+                      <a:r>
+                        <a:rPr lang="en-US" sz="1400" baseline="0" dirty="0" smtClean="0"/>
+                        <a:t> lack of human oversight Essential human oversight capabilities including execution interruption</a:t>
+                      </a:r>
+                      <a:endParaRPr lang="en-US" sz="1400" dirty="0" smtClean="0"/>
+                    </a:p>
+                    <a:p>
+                      <a:r>
+                        <a:rPr lang="en-US" sz="1400" dirty="0" smtClean="0"/>
+                        <a:t>5.5 absence of an interface that allows an authorized authority outside the framework or outside the agent application to signal intervention;</a:t>
+                      </a:r>
+                      <a:r>
+                        <a:rPr lang="en-US" sz="1400" baseline="0" dirty="0" smtClean="0"/>
+                        <a:t> </a:t>
+                      </a:r>
+                      <a:r>
+                        <a:rPr lang="en-US" sz="1400" dirty="0" smtClean="0"/>
+                        <a:t>current practice of</a:t>
+                      </a:r>
+                      <a:r>
+                        <a:rPr lang="en-US" sz="1400" baseline="0" dirty="0" smtClean="0"/>
+                        <a:t> intervention lacks soft redirect, scope restriction, checkpoint, task suspension, rollback, hard termination</a:t>
+                      </a:r>
+                    </a:p>
+                  </a:txBody>
+                  <a:tcPr>
+                    <a:lnL w="12700" cap="flat" cmpd="sng" algn="ctr">
+                      <a:solidFill>
+                        <a:schemeClr val="bg1">
+                          <a:lumMod val="50000"/>
+                        </a:schemeClr>
+                      </a:solidFill>
+                      <a:prstDash val="solid"/>
+                      <a:round/>
+                      <a:headEnd type="none" w="med" len="med"/>
+                      <a:tailEnd type="none" w="med" len="med"/>
+                    </a:lnL>
+                    <a:lnR w="12700" cap="flat" cmpd="sng" algn="ctr">
+                      <a:solidFill>
+                        <a:schemeClr val="bg1">
+                          <a:lumMod val="50000"/>
+                        </a:schemeClr>
+                      </a:solidFill>
+                      <a:prstDash val="solid"/>
+                      <a:round/>
+                      <a:headEnd type="none" w="med" len="med"/>
+                      <a:tailEnd type="none" w="med" len="med"/>
+                    </a:lnR>
+                    <a:lnT w="12700" cap="flat" cmpd="sng" algn="ctr">
+                      <a:solidFill>
+                        <a:schemeClr val="bg1">
+                          <a:lumMod val="50000"/>
+                        </a:schemeClr>
+                      </a:solidFill>
+                      <a:prstDash val="solid"/>
+                      <a:round/>
+                      <a:headEnd type="none" w="med" len="med"/>
+                      <a:tailEnd type="none" w="med" len="med"/>
+                    </a:lnT>
+                    <a:lnB w="12700" cap="flat" cmpd="sng" algn="ctr">
+                      <a:solidFill>
+                        <a:schemeClr val="bg1">
+                          <a:lumMod val="50000"/>
+                        </a:schemeClr>
+                      </a:solidFill>
+                      <a:prstDash val="solid"/>
+                      <a:round/>
+                      <a:headEnd type="none" w="med" len="med"/>
+                      <a:tailEnd type="none" w="med" len="med"/>
+                    </a:lnB>
+                    <a:lnTlToBr w="12700" cmpd="sng">
+                      <a:noFill/>
+                      <a:prstDash val="solid"/>
+                    </a:lnTlToBr>
+                    <a:lnBlToTr w="12700" cmpd="sng">
+                      <a:noFill/>
+                      <a:prstDash val="solid"/>
+                    </a:lnBlToTr>
+                    <a:solidFill>
+                      <a:schemeClr val="bg1"/>
+                    </a:solidFill>
+                  </a:tcPr>
+                </a:tc>
+                <a:tc>
+                  <a:txBody>
+                    <a:bodyPr/>
+                    <a:lstStyle/>
+                    <a:p>
+                      <a:r>
+                        <a:rPr lang="en-US" sz="1400" dirty="0" smtClean="0"/>
+                        <a:t>INT-1: Execution Interruption</a:t>
+                      </a:r>
+                    </a:p>
+                    <a:p>
+                      <a:endParaRPr lang="en-US" sz="1400" dirty="0" smtClean="0"/>
+                    </a:p>
+                  </a:txBody>
+                  <a:tcPr>
+                    <a:lnL w="12700" cap="flat" cmpd="sng" algn="ctr">
+                      <a:solidFill>
+                        <a:schemeClr val="bg1">
+                          <a:lumMod val="50000"/>
+                        </a:schemeClr>
+                      </a:solidFill>
+                      <a:prstDash val="solid"/>
+                      <a:round/>
+                      <a:headEnd type="none" w="med" len="med"/>
+                      <a:tailEnd type="none" w="med" len="med"/>
+                    </a:lnL>
+                    <a:lnR w="12700" cap="flat" cmpd="sng" algn="ctr">
+                      <a:solidFill>
+                        <a:schemeClr val="bg1">
+                          <a:lumMod val="50000"/>
+                        </a:schemeClr>
+                      </a:solidFill>
+                      <a:prstDash val="solid"/>
+                      <a:round/>
+                      <a:headEnd type="none" w="med" len="med"/>
+                      <a:tailEnd type="none" w="med" len="med"/>
+                    </a:lnR>
+                    <a:lnT w="12700" cap="flat" cmpd="sng" algn="ctr">
+                      <a:solidFill>
+                        <a:schemeClr val="bg1">
+                          <a:lumMod val="50000"/>
+                        </a:schemeClr>
+                      </a:solidFill>
+                      <a:prstDash val="solid"/>
+                      <a:round/>
+                      <a:headEnd type="none" w="med" len="med"/>
+                      <a:tailEnd type="none" w="med" len="med"/>
+                    </a:lnT>
+                    <a:lnB w="12700" cap="flat" cmpd="sng" algn="ctr">
+                      <a:solidFill>
+                        <a:schemeClr val="bg1">
+                          <a:lumMod val="50000"/>
+                        </a:schemeClr>
+                      </a:solidFill>
+                      <a:prstDash val="solid"/>
+                      <a:round/>
+                      <a:headEnd type="none" w="med" len="med"/>
+                      <a:tailEnd type="none" w="med" len="med"/>
+                    </a:lnB>
+                    <a:lnTlToBr w="12700" cmpd="sng">
+                      <a:noFill/>
+                      <a:prstDash val="solid"/>
+                    </a:lnTlToBr>
+                    <a:lnBlToTr w="12700" cmpd="sng">
+                      <a:noFill/>
+                      <a:prstDash val="solid"/>
+                    </a:lnBlToTr>
+                    <a:solidFill>
+                      <a:schemeClr val="bg1"/>
+                    </a:solidFill>
+                  </a:tcPr>
+                </a:tc>
+                <a:tc>
+                  <a:txBody>
+                    <a:bodyPr/>
+                    <a:lstStyle/>
+                    <a:p>
+                      <a:r>
+                        <a:rPr lang="en-US" sz="1400" dirty="0" smtClean="0"/>
+                        <a:t>stop or redirect a running agent's runtime execution. Guarantees an agent can be paused/stopped from outside its own decision loop, even if the agent itself is unresponsive or stuck.</a:t>
+                      </a:r>
+                      <a:endParaRPr lang="en-US" sz="1400" dirty="0"/>
+                    </a:p>
+                  </a:txBody>
+                  <a:tcPr>
+                    <a:lnL w="12700" cap="flat" cmpd="sng" algn="ctr">
+                      <a:solidFill>
+                        <a:schemeClr val="bg1">
+                          <a:lumMod val="50000"/>
+                        </a:schemeClr>
+                      </a:solidFill>
+                      <a:prstDash val="solid"/>
+                      <a:round/>
+                      <a:headEnd type="none" w="med" len="med"/>
+                      <a:tailEnd type="none" w="med" len="med"/>
+                    </a:lnL>
+                    <a:lnR w="12700" cap="flat" cmpd="sng" algn="ctr">
+                      <a:solidFill>
+                        <a:schemeClr val="bg1">
+                          <a:lumMod val="50000"/>
+                        </a:schemeClr>
+                      </a:solidFill>
+                      <a:prstDash val="solid"/>
+                      <a:round/>
+                      <a:headEnd type="none" w="med" len="med"/>
+                      <a:tailEnd type="none" w="med" len="med"/>
+                    </a:lnR>
+                    <a:lnT w="12700" cap="flat" cmpd="sng" algn="ctr">
+                      <a:solidFill>
+                        <a:schemeClr val="bg1">
+                          <a:lumMod val="50000"/>
+                        </a:schemeClr>
+                      </a:solidFill>
+                      <a:prstDash val="solid"/>
+                      <a:round/>
+                      <a:headEnd type="none" w="med" len="med"/>
+                      <a:tailEnd type="none" w="med" len="med"/>
+                    </a:lnT>
+                    <a:lnB w="12700" cap="flat" cmpd="sng" algn="ctr">
+                      <a:solidFill>
+                        <a:schemeClr val="bg1">
+                          <a:lumMod val="50000"/>
+                        </a:schemeClr>
+                      </a:solidFill>
+                      <a:prstDash val="solid"/>
+                      <a:round/>
+                      <a:headEnd type="none" w="med" len="med"/>
+                      <a:tailEnd type="none" w="med" len="med"/>
+                    </a:lnB>
+                    <a:lnTlToBr w="12700" cmpd="sng">
+                      <a:noFill/>
+                      <a:prstDash val="solid"/>
+                    </a:lnTlToBr>
+                    <a:lnBlToTr w="12700" cmpd="sng">
+                      <a:noFill/>
+                      <a:prstDash val="solid"/>
+                    </a:lnBlToTr>
+                    <a:solidFill>
+                      <a:schemeClr val="bg1"/>
+                    </a:solidFill>
+                  </a:tcPr>
+                </a:tc>
+              </a:tr>
+              <a:tr h="935318">
+                <a:tc>
+                  <a:txBody>
+                    <a:bodyPr/>
+                    <a:lstStyle/>
+                    <a:p>
+                      <a:r>
+                        <a:rPr lang="en-US" sz="1400" dirty="0" smtClean="0"/>
+                        <a:t>3.3.1. Lack of Human Oversight</a:t>
+                      </a:r>
+                      <a:br>
+                        <a:rPr lang="en-US" sz="1400" dirty="0" smtClean="0"/>
+                      </a:br>
+                      <a:r>
+                        <a:rPr lang="en-US" sz="1400" dirty="0" smtClean="0"/>
+                        <a:t>Essential human oversight capabilities including deterministic transaction rollback and Recovery</a:t>
+                      </a:r>
+                      <a:endParaRPr lang="en-US" sz="1400" dirty="0"/>
+                    </a:p>
+                  </a:txBody>
+                  <a:tcPr>
+                    <a:lnL w="12700" cap="flat" cmpd="sng" algn="ctr">
+                      <a:solidFill>
+                        <a:schemeClr val="bg1">
+                          <a:lumMod val="50000"/>
+                        </a:schemeClr>
+                      </a:solidFill>
+                      <a:prstDash val="solid"/>
+                      <a:round/>
+                      <a:headEnd type="none" w="med" len="med"/>
+                      <a:tailEnd type="none" w="med" len="med"/>
+                    </a:lnL>
+                    <a:lnR w="12700" cap="flat" cmpd="sng" algn="ctr">
+                      <a:solidFill>
+                        <a:schemeClr val="bg1">
+                          <a:lumMod val="50000"/>
+                        </a:schemeClr>
+                      </a:solidFill>
+                      <a:prstDash val="solid"/>
+                      <a:round/>
+                      <a:headEnd type="none" w="med" len="med"/>
+                      <a:tailEnd type="none" w="med" len="med"/>
+                    </a:lnR>
+                    <a:lnT w="12700" cap="flat" cmpd="sng" algn="ctr">
+                      <a:solidFill>
+                        <a:schemeClr val="bg1">
+                          <a:lumMod val="50000"/>
+                        </a:schemeClr>
+                      </a:solidFill>
+                      <a:prstDash val="solid"/>
+                      <a:round/>
+                      <a:headEnd type="none" w="med" len="med"/>
+                      <a:tailEnd type="none" w="med" len="med"/>
+                    </a:lnT>
+                    <a:lnB w="12700" cap="flat" cmpd="sng" algn="ctr">
+                      <a:solidFill>
+                        <a:schemeClr val="bg1">
+                          <a:lumMod val="50000"/>
+                        </a:schemeClr>
+                      </a:solidFill>
+                      <a:prstDash val="solid"/>
+                      <a:round/>
+                      <a:headEnd type="none" w="med" len="med"/>
+                      <a:tailEnd type="none" w="med" len="med"/>
+                    </a:lnB>
+                    <a:lnTlToBr w="12700" cmpd="sng">
+                      <a:noFill/>
+                      <a:prstDash val="solid"/>
+                    </a:lnTlToBr>
+                    <a:lnBlToTr w="12700" cmpd="sng">
+                      <a:noFill/>
+                      <a:prstDash val="solid"/>
+                    </a:lnBlToTr>
+                    <a:solidFill>
+                      <a:schemeClr val="bg1"/>
+                    </a:solidFill>
+                  </a:tcPr>
+                </a:tc>
+                <a:tc>
+                  <a:txBody>
+                    <a:bodyPr/>
+                    <a:lstStyle/>
+                    <a:p>
+                      <a:r>
+                        <a:rPr lang="en-US" sz="1400" dirty="0" smtClean="0"/>
+                        <a:t>INT-2: Rollback and Recovery</a:t>
+                      </a:r>
+                    </a:p>
+                    <a:p>
+                      <a:endParaRPr lang="en-US" sz="1400" dirty="0" smtClean="0"/>
+                    </a:p>
+                  </a:txBody>
+                  <a:tcPr>
+                    <a:lnL w="12700" cap="flat" cmpd="sng" algn="ctr">
+                      <a:solidFill>
+                        <a:schemeClr val="bg1">
+                          <a:lumMod val="50000"/>
+                        </a:schemeClr>
+                      </a:solidFill>
+                      <a:prstDash val="solid"/>
+                      <a:round/>
+                      <a:headEnd type="none" w="med" len="med"/>
+                      <a:tailEnd type="none" w="med" len="med"/>
+                    </a:lnL>
+                    <a:lnR w="12700" cap="flat" cmpd="sng" algn="ctr">
+                      <a:solidFill>
+                        <a:schemeClr val="bg1">
+                          <a:lumMod val="50000"/>
+                        </a:schemeClr>
+                      </a:solidFill>
+                      <a:prstDash val="solid"/>
+                      <a:round/>
+                      <a:headEnd type="none" w="med" len="med"/>
+                      <a:tailEnd type="none" w="med" len="med"/>
+                    </a:lnR>
+                    <a:lnT w="12700" cap="flat" cmpd="sng" algn="ctr">
+                      <a:solidFill>
+                        <a:schemeClr val="bg1">
+                          <a:lumMod val="50000"/>
+                        </a:schemeClr>
+                      </a:solidFill>
+                      <a:prstDash val="solid"/>
+                      <a:round/>
+                      <a:headEnd type="none" w="med" len="med"/>
+                      <a:tailEnd type="none" w="med" len="med"/>
+                    </a:lnT>
+                    <a:lnB w="12700" cap="flat" cmpd="sng" algn="ctr">
+                      <a:solidFill>
+                        <a:schemeClr val="bg1">
+                          <a:lumMod val="50000"/>
+                        </a:schemeClr>
+                      </a:solidFill>
+                      <a:prstDash val="solid"/>
+                      <a:round/>
+                      <a:headEnd type="none" w="med" len="med"/>
+                      <a:tailEnd type="none" w="med" len="med"/>
+                    </a:lnB>
+                    <a:lnTlToBr w="12700" cmpd="sng">
+                      <a:noFill/>
+                      <a:prstDash val="solid"/>
+                    </a:lnTlToBr>
+                    <a:lnBlToTr w="12700" cmpd="sng">
+                      <a:noFill/>
+                      <a:prstDash val="solid"/>
+                    </a:lnBlToTr>
+                    <a:solidFill>
+                      <a:schemeClr val="bg1"/>
+                    </a:solidFill>
+                  </a:tcPr>
+                </a:tc>
+                <a:tc>
+                  <a:txBody>
+                    <a:bodyPr/>
+                    <a:lstStyle/>
+                    <a:p>
+                      <a:r>
+                        <a:rPr lang="en-US" sz="1400" dirty="0" smtClean="0"/>
+                        <a:t>Able to reverse the operations performed by the agent on the network based on different rollback granularity: workflow level, task level, and context level.</a:t>
+                      </a:r>
+                    </a:p>
+                  </a:txBody>
+                  <a:tcPr>
+                    <a:lnL w="12700" cap="flat" cmpd="sng" algn="ctr">
+                      <a:solidFill>
+                        <a:schemeClr val="bg1">
+                          <a:lumMod val="50000"/>
+                        </a:schemeClr>
+                      </a:solidFill>
+                      <a:prstDash val="solid"/>
+                      <a:round/>
+                      <a:headEnd type="none" w="med" len="med"/>
+                      <a:tailEnd type="none" w="med" len="med"/>
+                    </a:lnL>
+                    <a:lnR w="12700" cap="flat" cmpd="sng" algn="ctr">
+                      <a:solidFill>
+                        <a:schemeClr val="bg1">
+                          <a:lumMod val="50000"/>
+                        </a:schemeClr>
+                      </a:solidFill>
+                      <a:prstDash val="solid"/>
+                      <a:round/>
+                      <a:headEnd type="none" w="med" len="med"/>
+                      <a:tailEnd type="none" w="med" len="med"/>
+                    </a:lnR>
+                    <a:lnT w="12700" cap="flat" cmpd="sng" algn="ctr">
+                      <a:solidFill>
+                        <a:schemeClr val="bg1">
+                          <a:lumMod val="50000"/>
+                        </a:schemeClr>
+                      </a:solidFill>
+                      <a:prstDash val="solid"/>
+                      <a:round/>
+                      <a:headEnd type="none" w="med" len="med"/>
+                      <a:tailEnd type="none" w="med" len="med"/>
+                    </a:lnT>
+                    <a:lnB w="12700" cap="flat" cmpd="sng" algn="ctr">
+                      <a:solidFill>
+                        <a:schemeClr val="bg1">
+                          <a:lumMod val="50000"/>
+                        </a:schemeClr>
+                      </a:solidFill>
+                      <a:prstDash val="solid"/>
+                      <a:round/>
+                      <a:headEnd type="none" w="med" len="med"/>
+                      <a:tailEnd type="none" w="med" len="med"/>
+                    </a:lnB>
+                    <a:lnTlToBr w="12700" cmpd="sng">
+                      <a:noFill/>
+                      <a:prstDash val="solid"/>
+                    </a:lnTlToBr>
+                    <a:lnBlToTr w="12700" cmpd="sng">
+                      <a:noFill/>
+                      <a:prstDash val="solid"/>
+                    </a:lnBlToTr>
+                    <a:solidFill>
+                      <a:schemeClr val="bg1"/>
+                    </a:solidFill>
+                  </a:tcPr>
+                </a:tc>
+              </a:tr>
+              <a:tr h="724117">
+                <a:tc>
+                  <a:txBody>
+                    <a:bodyPr/>
+                    <a:lstStyle/>
+                    <a:p>
+                      <a:r>
+                        <a:rPr lang="en-US" sz="1400" kern="1200" dirty="0" smtClean="0">
+                          <a:solidFill>
+                            <a:schemeClr val="dk1"/>
+                          </a:solidFill>
+                          <a:latin typeface="+mn-lt"/>
+                          <a:ea typeface="+mn-ea"/>
+                          <a:cs typeface="+mn-cs"/>
+                        </a:rPr>
+                        <a:t>3.3.1. Lack of Human Oversight</a:t>
+                      </a:r>
+                      <a:br>
+                        <a:rPr lang="en-US" sz="1400" kern="1200" dirty="0" smtClean="0">
+                          <a:solidFill>
+                            <a:schemeClr val="dk1"/>
+                          </a:solidFill>
+                          <a:latin typeface="+mn-lt"/>
+                          <a:ea typeface="+mn-ea"/>
+                          <a:cs typeface="+mn-cs"/>
+                        </a:rPr>
+                      </a:br>
+                      <a:r>
+                        <a:rPr lang="en-US" sz="1400" kern="1200" dirty="0" smtClean="0">
+                          <a:solidFill>
+                            <a:schemeClr val="dk1"/>
+                          </a:solidFill>
+                          <a:latin typeface="+mn-lt"/>
+                          <a:ea typeface="+mn-ea"/>
+                          <a:cs typeface="+mn-cs"/>
+                        </a:rPr>
+                        <a:t>Essential</a:t>
+                      </a:r>
+                      <a:r>
+                        <a:rPr lang="en-US" sz="1400" kern="1200" baseline="0" dirty="0" smtClean="0">
+                          <a:solidFill>
+                            <a:schemeClr val="dk1"/>
+                          </a:solidFill>
+                          <a:latin typeface="+mn-lt"/>
+                          <a:ea typeface="+mn-ea"/>
+                          <a:cs typeface="+mn-cs"/>
+                        </a:rPr>
+                        <a:t> human oversight capabilities including human escalation</a:t>
+                      </a:r>
+                      <a:endParaRPr lang="en-US" sz="1400" kern="1200" dirty="0">
+                        <a:solidFill>
+                          <a:schemeClr val="dk1"/>
+                        </a:solidFill>
+                        <a:latin typeface="+mn-lt"/>
+                        <a:ea typeface="+mn-ea"/>
+                        <a:cs typeface="+mn-cs"/>
+                      </a:endParaRPr>
+                    </a:p>
+                  </a:txBody>
+                  <a:tcPr>
+                    <a:lnL w="12700" cap="flat" cmpd="sng" algn="ctr">
+                      <a:solidFill>
+                        <a:schemeClr val="bg1">
+                          <a:lumMod val="50000"/>
+                        </a:schemeClr>
+                      </a:solidFill>
+                      <a:prstDash val="solid"/>
+                      <a:round/>
+                      <a:headEnd type="none" w="med" len="med"/>
+                      <a:tailEnd type="none" w="med" len="med"/>
+                    </a:lnL>
+                    <a:lnR w="12700" cap="flat" cmpd="sng" algn="ctr">
+                      <a:solidFill>
+                        <a:schemeClr val="bg1">
+                          <a:lumMod val="50000"/>
+                        </a:schemeClr>
+                      </a:solidFill>
+                      <a:prstDash val="solid"/>
+                      <a:round/>
+                      <a:headEnd type="none" w="med" len="med"/>
+                      <a:tailEnd type="none" w="med" len="med"/>
+                    </a:lnR>
+                    <a:lnT w="12700" cap="flat" cmpd="sng" algn="ctr">
+                      <a:solidFill>
+                        <a:schemeClr val="bg1">
+                          <a:lumMod val="50000"/>
+                        </a:schemeClr>
+                      </a:solidFill>
+                      <a:prstDash val="solid"/>
+                      <a:round/>
+                      <a:headEnd type="none" w="med" len="med"/>
+                      <a:tailEnd type="none" w="med" len="med"/>
+                    </a:lnT>
+                    <a:lnB w="12700" cap="flat" cmpd="sng" algn="ctr">
+                      <a:solidFill>
+                        <a:schemeClr val="bg1">
+                          <a:lumMod val="50000"/>
+                        </a:schemeClr>
+                      </a:solidFill>
+                      <a:prstDash val="solid"/>
+                      <a:round/>
+                      <a:headEnd type="none" w="med" len="med"/>
+                      <a:tailEnd type="none" w="med" len="med"/>
+                    </a:lnB>
+                    <a:lnTlToBr w="12700" cmpd="sng">
+                      <a:noFill/>
+                      <a:prstDash val="solid"/>
+                    </a:lnTlToBr>
+                    <a:lnBlToTr w="12700" cmpd="sng">
+                      <a:noFill/>
+                      <a:prstDash val="solid"/>
+                    </a:lnBlToTr>
+                    <a:solidFill>
+                      <a:schemeClr val="bg1"/>
+                    </a:solidFill>
+                  </a:tcPr>
+                </a:tc>
+                <a:tc>
+                  <a:txBody>
+                    <a:bodyPr/>
+                    <a:lstStyle/>
+                    <a:p>
+                      <a:r>
+                        <a:rPr lang="en-US" sz="1400" kern="1200" dirty="0" smtClean="0">
+                          <a:solidFill>
+                            <a:schemeClr val="dk1"/>
+                          </a:solidFill>
+                          <a:latin typeface="+mn-lt"/>
+                          <a:ea typeface="+mn-ea"/>
+                          <a:cs typeface="+mn-cs"/>
+                        </a:rPr>
+                        <a:t>INT-3: Escalation</a:t>
+                      </a:r>
+                    </a:p>
+                    <a:p>
+                      <a:endParaRPr lang="en-US" dirty="0"/>
+                    </a:p>
+                  </a:txBody>
+                  <a:tcPr>
+                    <a:lnL w="12700" cap="flat" cmpd="sng" algn="ctr">
+                      <a:solidFill>
+                        <a:schemeClr val="bg1">
+                          <a:lumMod val="50000"/>
+                        </a:schemeClr>
+                      </a:solidFill>
+                      <a:prstDash val="solid"/>
+                      <a:round/>
+                      <a:headEnd type="none" w="med" len="med"/>
+                      <a:tailEnd type="none" w="med" len="med"/>
+                    </a:lnL>
+                    <a:lnR w="12700" cap="flat" cmpd="sng" algn="ctr">
+                      <a:solidFill>
+                        <a:schemeClr val="bg1">
+                          <a:lumMod val="50000"/>
+                        </a:schemeClr>
+                      </a:solidFill>
+                      <a:prstDash val="solid"/>
+                      <a:round/>
+                      <a:headEnd type="none" w="med" len="med"/>
+                      <a:tailEnd type="none" w="med" len="med"/>
+                    </a:lnR>
+                    <a:lnT w="12700" cap="flat" cmpd="sng" algn="ctr">
+                      <a:solidFill>
+                        <a:schemeClr val="bg1">
+                          <a:lumMod val="50000"/>
+                        </a:schemeClr>
+                      </a:solidFill>
+                      <a:prstDash val="solid"/>
+                      <a:round/>
+                      <a:headEnd type="none" w="med" len="med"/>
+                      <a:tailEnd type="none" w="med" len="med"/>
+                    </a:lnT>
+                    <a:lnB w="12700" cap="flat" cmpd="sng" algn="ctr">
+                      <a:solidFill>
+                        <a:schemeClr val="bg1">
+                          <a:lumMod val="50000"/>
+                        </a:schemeClr>
+                      </a:solidFill>
+                      <a:prstDash val="solid"/>
+                      <a:round/>
+                      <a:headEnd type="none" w="med" len="med"/>
+                      <a:tailEnd type="none" w="med" len="med"/>
+                    </a:lnB>
+                    <a:lnTlToBr w="12700" cmpd="sng">
+                      <a:noFill/>
+                      <a:prstDash val="solid"/>
+                    </a:lnTlToBr>
+                    <a:lnBlToTr w="12700" cmpd="sng">
+                      <a:noFill/>
+                      <a:prstDash val="solid"/>
+                    </a:lnBlToTr>
+                    <a:solidFill>
+                      <a:schemeClr val="bg1"/>
+                    </a:solidFill>
+                  </a:tcPr>
+                </a:tc>
+                <a:tc>
+                  <a:txBody>
+                    <a:bodyPr/>
+                    <a:lstStyle/>
+                    <a:p>
+                      <a:r>
+                        <a:rPr lang="en-US" sz="1400" dirty="0" smtClean="0"/>
+                        <a:t>Moves a decision the current agent can't or shouldn't make alone up to someone with broader authority, without losing context.</a:t>
+                      </a:r>
+                    </a:p>
+                  </a:txBody>
+                  <a:tcPr>
+                    <a:lnL w="12700" cap="flat" cmpd="sng" algn="ctr">
+                      <a:solidFill>
+                        <a:schemeClr val="bg1">
+                          <a:lumMod val="50000"/>
+                        </a:schemeClr>
+                      </a:solidFill>
+                      <a:prstDash val="solid"/>
+                      <a:round/>
+                      <a:headEnd type="none" w="med" len="med"/>
+                      <a:tailEnd type="none" w="med" len="med"/>
+                    </a:lnL>
+                    <a:lnR w="12700" cap="flat" cmpd="sng" algn="ctr">
+                      <a:solidFill>
+                        <a:schemeClr val="bg1">
+                          <a:lumMod val="50000"/>
+                        </a:schemeClr>
+                      </a:solidFill>
+                      <a:prstDash val="solid"/>
+                      <a:round/>
+                      <a:headEnd type="none" w="med" len="med"/>
+                      <a:tailEnd type="none" w="med" len="med"/>
+                    </a:lnR>
+                    <a:lnT w="12700" cap="flat" cmpd="sng" algn="ctr">
+                      <a:solidFill>
+                        <a:schemeClr val="bg1">
+                          <a:lumMod val="50000"/>
+                        </a:schemeClr>
+                      </a:solidFill>
+                      <a:prstDash val="solid"/>
+                      <a:round/>
+                      <a:headEnd type="none" w="med" len="med"/>
+                      <a:tailEnd type="none" w="med" len="med"/>
+                    </a:lnT>
+                    <a:lnB w="12700" cap="flat" cmpd="sng" algn="ctr">
+                      <a:solidFill>
+                        <a:schemeClr val="bg1">
+                          <a:lumMod val="50000"/>
+                        </a:schemeClr>
+                      </a:solidFill>
+                      <a:prstDash val="solid"/>
+                      <a:round/>
+                      <a:headEnd type="none" w="med" len="med"/>
+                      <a:tailEnd type="none" w="med" len="med"/>
+                    </a:lnB>
+                    <a:lnTlToBr w="12700" cmpd="sng">
+                      <a:noFill/>
+                      <a:prstDash val="solid"/>
+                    </a:lnTlToBr>
+                    <a:lnBlToTr w="12700" cmpd="sng">
+                      <a:noFill/>
+                      <a:prstDash val="solid"/>
+                    </a:lnBlToTr>
+                    <a:solidFill>
+                      <a:schemeClr val="bg1"/>
+                    </a:solidFill>
+                  </a:tcPr>
+                </a:tc>
+              </a:tr>
+              <a:tr h="724117">
+                <a:tc>
+                  <a:txBody>
+                    <a:bodyPr/>
+                    <a:lstStyle/>
+                    <a:p>
+                      <a:r>
+                        <a:rPr lang="en-US" sz="1400" dirty="0" smtClean="0"/>
+                        <a:t>4.6 Intervention and Control is concerned with ensuring actions can be corrected or reversed when necessary.</a:t>
+                      </a:r>
+                    </a:p>
+                  </a:txBody>
+                  <a:tcPr>
+                    <a:lnL w="12700" cap="flat" cmpd="sng" algn="ctr">
+                      <a:solidFill>
+                        <a:schemeClr val="bg1">
+                          <a:lumMod val="50000"/>
+                        </a:schemeClr>
+                      </a:solidFill>
+                      <a:prstDash val="solid"/>
+                      <a:round/>
+                      <a:headEnd type="none" w="med" len="med"/>
+                      <a:tailEnd type="none" w="med" len="med"/>
+                    </a:lnL>
+                    <a:lnR w="12700" cap="flat" cmpd="sng" algn="ctr">
+                      <a:solidFill>
+                        <a:schemeClr val="bg1">
+                          <a:lumMod val="50000"/>
+                        </a:schemeClr>
+                      </a:solidFill>
+                      <a:prstDash val="solid"/>
+                      <a:round/>
+                      <a:headEnd type="none" w="med" len="med"/>
+                      <a:tailEnd type="none" w="med" len="med"/>
+                    </a:lnR>
+                    <a:lnT w="12700" cap="flat" cmpd="sng" algn="ctr">
+                      <a:solidFill>
+                        <a:schemeClr val="bg1">
+                          <a:lumMod val="50000"/>
+                        </a:schemeClr>
+                      </a:solidFill>
+                      <a:prstDash val="solid"/>
+                      <a:round/>
+                      <a:headEnd type="none" w="med" len="med"/>
+                      <a:tailEnd type="none" w="med" len="med"/>
+                    </a:lnT>
+                    <a:lnB w="12700" cap="flat" cmpd="sng" algn="ctr">
+                      <a:solidFill>
+                        <a:schemeClr val="bg1">
+                          <a:lumMod val="50000"/>
+                        </a:schemeClr>
+                      </a:solidFill>
+                      <a:prstDash val="solid"/>
+                      <a:round/>
+                      <a:headEnd type="none" w="med" len="med"/>
+                      <a:tailEnd type="none" w="med" len="med"/>
+                    </a:lnB>
+                    <a:lnTlToBr w="12700" cmpd="sng">
+                      <a:noFill/>
+                      <a:prstDash val="solid"/>
+                    </a:lnTlToBr>
+                    <a:lnBlToTr w="12700" cmpd="sng">
+                      <a:noFill/>
+                      <a:prstDash val="solid"/>
+                    </a:lnBlToTr>
+                    <a:solidFill>
+                      <a:schemeClr val="bg1"/>
+                    </a:solidFill>
+                  </a:tcPr>
+                </a:tc>
+                <a:tc>
+                  <a:txBody>
+                    <a:bodyPr/>
+                    <a:lstStyle/>
+                    <a:p>
+                      <a:r>
+                        <a:rPr lang="en-US" sz="1400" dirty="0" smtClean="0"/>
+                        <a:t>INT-4: Correction</a:t>
+                      </a:r>
+                    </a:p>
+                    <a:p>
+                      <a:endParaRPr lang="en-US" sz="1400" dirty="0" smtClean="0"/>
+                    </a:p>
+                  </a:txBody>
+                  <a:tcPr>
+                    <a:lnL w="12700" cap="flat" cmpd="sng" algn="ctr">
+                      <a:solidFill>
+                        <a:schemeClr val="bg1">
+                          <a:lumMod val="50000"/>
+                        </a:schemeClr>
+                      </a:solidFill>
+                      <a:prstDash val="solid"/>
+                      <a:round/>
+                      <a:headEnd type="none" w="med" len="med"/>
+                      <a:tailEnd type="none" w="med" len="med"/>
+                    </a:lnL>
+                    <a:lnR w="12700" cap="flat" cmpd="sng" algn="ctr">
+                      <a:solidFill>
+                        <a:schemeClr val="bg1">
+                          <a:lumMod val="50000"/>
+                        </a:schemeClr>
+                      </a:solidFill>
+                      <a:prstDash val="solid"/>
+                      <a:round/>
+                      <a:headEnd type="none" w="med" len="med"/>
+                      <a:tailEnd type="none" w="med" len="med"/>
+                    </a:lnR>
+                    <a:lnT w="12700" cap="flat" cmpd="sng" algn="ctr">
+                      <a:solidFill>
+                        <a:schemeClr val="bg1">
+                          <a:lumMod val="50000"/>
+                        </a:schemeClr>
+                      </a:solidFill>
+                      <a:prstDash val="solid"/>
+                      <a:round/>
+                      <a:headEnd type="none" w="med" len="med"/>
+                      <a:tailEnd type="none" w="med" len="med"/>
+                    </a:lnT>
+                    <a:lnB w="12700" cap="flat" cmpd="sng" algn="ctr">
+                      <a:solidFill>
+                        <a:schemeClr val="bg1">
+                          <a:lumMod val="50000"/>
+                        </a:schemeClr>
+                      </a:solidFill>
+                      <a:prstDash val="solid"/>
+                      <a:round/>
+                      <a:headEnd type="none" w="med" len="med"/>
+                      <a:tailEnd type="none" w="med" len="med"/>
+                    </a:lnB>
+                    <a:lnTlToBr w="12700" cmpd="sng">
+                      <a:noFill/>
+                      <a:prstDash val="solid"/>
+                    </a:lnTlToBr>
+                    <a:lnBlToTr w="12700" cmpd="sng">
+                      <a:noFill/>
+                      <a:prstDash val="solid"/>
+                    </a:lnBlToTr>
+                    <a:solidFill>
+                      <a:schemeClr val="bg1"/>
+                    </a:solidFill>
+                  </a:tcPr>
+                </a:tc>
+                <a:tc>
+                  <a:txBody>
+                    <a:bodyPr/>
+                    <a:lstStyle/>
+                    <a:p>
+                      <a:r>
+                        <a:rPr lang="en-US" sz="1400" dirty="0" smtClean="0"/>
+                        <a:t>Allows a supervisor to fix what went wrong, e.g., the intent, the data, or the plan instead of only being able to accept or reject the agent's output.</a:t>
+                      </a:r>
+                    </a:p>
+                  </a:txBody>
+                  <a:tcPr>
+                    <a:lnL w="12700" cap="flat" cmpd="sng" algn="ctr">
+                      <a:solidFill>
+                        <a:schemeClr val="bg1">
+                          <a:lumMod val="50000"/>
+                        </a:schemeClr>
+                      </a:solidFill>
+                      <a:prstDash val="solid"/>
+                      <a:round/>
+                      <a:headEnd type="none" w="med" len="med"/>
+                      <a:tailEnd type="none" w="med" len="med"/>
+                    </a:lnL>
+                    <a:lnR w="12700" cap="flat" cmpd="sng" algn="ctr">
+                      <a:solidFill>
+                        <a:schemeClr val="bg1">
+                          <a:lumMod val="50000"/>
+                        </a:schemeClr>
+                      </a:solidFill>
+                      <a:prstDash val="solid"/>
+                      <a:round/>
+                      <a:headEnd type="none" w="med" len="med"/>
+                      <a:tailEnd type="none" w="med" len="med"/>
+                    </a:lnR>
+                    <a:lnT w="12700" cap="flat" cmpd="sng" algn="ctr">
+                      <a:solidFill>
+                        <a:schemeClr val="bg1">
+                          <a:lumMod val="50000"/>
+                        </a:schemeClr>
+                      </a:solidFill>
+                      <a:prstDash val="solid"/>
+                      <a:round/>
+                      <a:headEnd type="none" w="med" len="med"/>
+                      <a:tailEnd type="none" w="med" len="med"/>
+                    </a:lnT>
+                    <a:lnB w="12700" cap="flat" cmpd="sng" algn="ctr">
+                      <a:solidFill>
+                        <a:schemeClr val="bg1">
+                          <a:lumMod val="50000"/>
+                        </a:schemeClr>
+                      </a:solidFill>
+                      <a:prstDash val="solid"/>
+                      <a:round/>
+                      <a:headEnd type="none" w="med" len="med"/>
+                      <a:tailEnd type="none" w="med" len="med"/>
+                    </a:lnB>
+                    <a:lnTlToBr w="12700" cmpd="sng">
+                      <a:noFill/>
+                      <a:prstDash val="solid"/>
+                    </a:lnTlToBr>
+                    <a:lnBlToTr w="12700" cmpd="sng">
+                      <a:noFill/>
+                      <a:prstDash val="solid"/>
+                    </a:lnBlToTr>
+                    <a:solidFill>
+                      <a:schemeClr val="bg1"/>
+                    </a:solidFill>
+                  </a:tcPr>
+                </a:tc>
+              </a:tr>
+            </a:tbl>
+          </a:graphicData>
+        </a:graphic>
+      </p:graphicFrame>
+      <p:sp>
+        <p:nvSpPr>
+          <p:cNvPr id="5" name="矩形 4"/>
+          <p:cNvSpPr/>
+          <p:nvPr/>
         </p:nvSpPr>
         <p:spPr>
           <a:xfrm>
-            <a:off x="838200" y="1541059"/>
-            <a:ext cx="10515600" cy="4984432"/>
+            <a:off x="545237" y="1140897"/>
+            <a:ext cx="10338786" cy="369332"/>
           </a:xfrm>
+          <a:prstGeom prst="rect">
+            <a:avLst/>
+          </a:prstGeom>
         </p:spPr>
         <p:txBody>
-          <a:bodyPr>
-            <a:normAutofit fontScale="92500" lnSpcReduction="10000"/>
+          <a:bodyPr wrap="square">
+            <a:spAutoFit/>
           </a:bodyPr>
           <a:lstStyle/>
           <a:p>
-            <a:r>
-              <a:rPr lang="en-US" altLang="zh-CN" dirty="0" smtClean="0">
-                <a:latin typeface="Calibri" panose="020F0502020204030204" pitchFamily="34" charset="0"/>
-                <a:ea typeface="Calibri" panose="020F0502020204030204" pitchFamily="34" charset="0"/>
-                <a:cs typeface="Calibri" panose="020F0502020204030204" pitchFamily="34" charset="0"/>
-              </a:rPr>
-              <a:t>Emergency runtime </a:t>
-            </a:r>
             <a:r>
               <a:rPr lang="en-US" altLang="zh-CN" dirty="0">
                 <a:latin typeface="Calibri" panose="020F0502020204030204" pitchFamily="34" charset="0"/>
                 <a:ea typeface="Calibri" panose="020F0502020204030204" pitchFamily="34" charset="0"/>
                 <a:cs typeface="Calibri" panose="020F0502020204030204" pitchFamily="34" charset="0"/>
               </a:rPr>
-              <a:t>interruption when the agent deviates from expected behaviors.</a:t>
-            </a:r>
-          </a:p>
-          <a:p>
-            <a:r>
-              <a:rPr lang="en-US" altLang="zh-CN" dirty="0">
-                <a:latin typeface="Calibri" panose="020F0502020204030204" pitchFamily="34" charset="0"/>
-                <a:ea typeface="Calibri" panose="020F0502020204030204" pitchFamily="34" charset="0"/>
-                <a:cs typeface="Calibri" panose="020F0502020204030204" pitchFamily="34" charset="0"/>
-              </a:rPr>
-              <a:t>INT-1: Execution Interruption</a:t>
-            </a:r>
-          </a:p>
-          <a:p>
-            <a:pPr lvl="1"/>
-            <a:r>
-              <a:rPr lang="en-US" altLang="zh-CN" dirty="0">
-                <a:latin typeface="Calibri" panose="020F0502020204030204" pitchFamily="34" charset="0"/>
-                <a:ea typeface="Calibri" panose="020F0502020204030204" pitchFamily="34" charset="0"/>
-                <a:cs typeface="Calibri" panose="020F0502020204030204" pitchFamily="34" charset="0"/>
-              </a:rPr>
-              <a:t>Guarantees an agent can be </a:t>
-            </a:r>
-            <a:r>
-              <a:rPr lang="en-US" altLang="zh-CN" dirty="0" smtClean="0">
-                <a:latin typeface="Calibri" panose="020F0502020204030204" pitchFamily="34" charset="0"/>
-                <a:ea typeface="Calibri" panose="020F0502020204030204" pitchFamily="34" charset="0"/>
-                <a:cs typeface="Calibri" panose="020F0502020204030204" pitchFamily="34" charset="0"/>
-              </a:rPr>
-              <a:t>paused/stopped </a:t>
-            </a:r>
-            <a:r>
-              <a:rPr lang="en-US" altLang="zh-CN" dirty="0">
-                <a:latin typeface="Calibri" panose="020F0502020204030204" pitchFamily="34" charset="0"/>
-                <a:ea typeface="Calibri" panose="020F0502020204030204" pitchFamily="34" charset="0"/>
-                <a:cs typeface="Calibri" panose="020F0502020204030204" pitchFamily="34" charset="0"/>
-              </a:rPr>
-              <a:t>from outside its own decision loop, even if the agent itself is unresponsive or stuck</a:t>
-            </a:r>
-            <a:r>
-              <a:rPr lang="en-US" altLang="zh-CN" dirty="0" smtClean="0">
-                <a:latin typeface="Calibri" panose="020F0502020204030204" pitchFamily="34" charset="0"/>
-                <a:ea typeface="Calibri" panose="020F0502020204030204" pitchFamily="34" charset="0"/>
-                <a:cs typeface="Calibri" panose="020F0502020204030204" pitchFamily="34" charset="0"/>
-              </a:rPr>
-              <a:t>.</a:t>
+              <a:t>Emergency runtime interruption when the agent deviates from expected behaviors.</a:t>
             </a:r>
             <a:endParaRPr lang="en-US" altLang="zh-CN" dirty="0">
               <a:latin typeface="Calibri" panose="020F0502020204030204" pitchFamily="34" charset="0"/>
@@ -6734,298 +9970,12 @@
               <a:cs typeface="Calibri" panose="020F0502020204030204" pitchFamily="34" charset="0"/>
             </a:endParaRPr>
           </a:p>
-          <a:p>
-            <a:r>
-              <a:rPr lang="en-US" altLang="zh-CN" dirty="0">
-                <a:latin typeface="Calibri" panose="020F0502020204030204" pitchFamily="34" charset="0"/>
-                <a:ea typeface="Calibri" panose="020F0502020204030204" pitchFamily="34" charset="0"/>
-                <a:cs typeface="Calibri" panose="020F0502020204030204" pitchFamily="34" charset="0"/>
-              </a:rPr>
-              <a:t>INT-2: Rollback and Recovery</a:t>
-            </a:r>
-          </a:p>
-          <a:p>
-            <a:pPr lvl="1"/>
-            <a:r>
-              <a:rPr lang="en-US" altLang="zh-CN" dirty="0" smtClean="0">
-                <a:latin typeface="Calibri" panose="020F0502020204030204" pitchFamily="34" charset="0"/>
-                <a:ea typeface="Calibri" panose="020F0502020204030204" pitchFamily="34" charset="0"/>
-                <a:cs typeface="Calibri" panose="020F0502020204030204" pitchFamily="34" charset="0"/>
-              </a:rPr>
-              <a:t>Able </a:t>
-            </a:r>
-            <a:r>
-              <a:rPr lang="en-US" altLang="zh-CN" dirty="0" smtClean="0">
-                <a:latin typeface="Calibri" panose="020F0502020204030204" pitchFamily="34" charset="0"/>
-                <a:ea typeface="Calibri" panose="020F0502020204030204" pitchFamily="34" charset="0"/>
-                <a:cs typeface="Calibri" panose="020F0502020204030204" pitchFamily="34" charset="0"/>
-              </a:rPr>
-              <a:t>to </a:t>
-            </a:r>
-            <a:r>
-              <a:rPr lang="en-US" altLang="zh-CN" dirty="0">
-                <a:latin typeface="Calibri" panose="020F0502020204030204" pitchFamily="34" charset="0"/>
-                <a:ea typeface="Calibri" panose="020F0502020204030204" pitchFamily="34" charset="0"/>
-                <a:cs typeface="Calibri" panose="020F0502020204030204" pitchFamily="34" charset="0"/>
-              </a:rPr>
-              <a:t>reverse </a:t>
-            </a:r>
-            <a:r>
-              <a:rPr lang="en-US" altLang="zh-CN" dirty="0" smtClean="0">
-                <a:latin typeface="Calibri" panose="020F0502020204030204" pitchFamily="34" charset="0"/>
-                <a:ea typeface="Calibri" panose="020F0502020204030204" pitchFamily="34" charset="0"/>
-                <a:cs typeface="Calibri" panose="020F0502020204030204" pitchFamily="34" charset="0"/>
-              </a:rPr>
-              <a:t>the operations performed by the agent on the network</a:t>
-            </a:r>
-            <a:r>
-              <a:rPr lang="en-US" altLang="zh-CN" dirty="0">
-                <a:latin typeface="Calibri" panose="020F0502020204030204" pitchFamily="34" charset="0"/>
-                <a:ea typeface="Calibri" panose="020F0502020204030204" pitchFamily="34" charset="0"/>
-                <a:cs typeface="Calibri" panose="020F0502020204030204" pitchFamily="34" charset="0"/>
-              </a:rPr>
-              <a:t> </a:t>
-            </a:r>
-            <a:r>
-              <a:rPr lang="en-US" altLang="zh-CN" dirty="0" smtClean="0">
-                <a:latin typeface="Calibri" panose="020F0502020204030204" pitchFamily="34" charset="0"/>
-                <a:ea typeface="Calibri" panose="020F0502020204030204" pitchFamily="34" charset="0"/>
-                <a:cs typeface="Calibri" panose="020F0502020204030204" pitchFamily="34" charset="0"/>
-              </a:rPr>
-              <a:t>based on d</a:t>
-            </a:r>
-            <a:r>
-              <a:rPr lang="en-US" altLang="zh-CN" dirty="0" smtClean="0">
-                <a:latin typeface="Calibri" panose="020F0502020204030204" pitchFamily="34" charset="0"/>
-                <a:ea typeface="Calibri" panose="020F0502020204030204" pitchFamily="34" charset="0"/>
-                <a:cs typeface="Calibri" panose="020F0502020204030204" pitchFamily="34" charset="0"/>
-              </a:rPr>
-              <a:t>ifferent rollback granularity: workflow </a:t>
-            </a:r>
-            <a:r>
-              <a:rPr lang="en-US" altLang="zh-CN" dirty="0" smtClean="0">
-                <a:latin typeface="Calibri" panose="020F0502020204030204" pitchFamily="34" charset="0"/>
-                <a:ea typeface="Calibri" panose="020F0502020204030204" pitchFamily="34" charset="0"/>
-                <a:cs typeface="Calibri" panose="020F0502020204030204" pitchFamily="34" charset="0"/>
-              </a:rPr>
-              <a:t>level, </a:t>
-            </a:r>
-            <a:r>
-              <a:rPr lang="en-US" altLang="zh-CN" dirty="0" smtClean="0">
-                <a:latin typeface="Calibri" panose="020F0502020204030204" pitchFamily="34" charset="0"/>
-                <a:ea typeface="Calibri" panose="020F0502020204030204" pitchFamily="34" charset="0"/>
-                <a:cs typeface="Calibri" panose="020F0502020204030204" pitchFamily="34" charset="0"/>
-              </a:rPr>
-              <a:t>task </a:t>
-            </a:r>
-            <a:r>
-              <a:rPr lang="en-US" altLang="zh-CN" dirty="0" smtClean="0">
-                <a:latin typeface="Calibri" panose="020F0502020204030204" pitchFamily="34" charset="0"/>
-                <a:ea typeface="Calibri" panose="020F0502020204030204" pitchFamily="34" charset="0"/>
-                <a:cs typeface="Calibri" panose="020F0502020204030204" pitchFamily="34" charset="0"/>
-              </a:rPr>
-              <a:t>level, </a:t>
-            </a:r>
-            <a:r>
-              <a:rPr lang="en-US" altLang="zh-CN" dirty="0" smtClean="0">
-                <a:latin typeface="Calibri" panose="020F0502020204030204" pitchFamily="34" charset="0"/>
-                <a:ea typeface="Calibri" panose="020F0502020204030204" pitchFamily="34" charset="0"/>
-                <a:cs typeface="Calibri" panose="020F0502020204030204" pitchFamily="34" charset="0"/>
-              </a:rPr>
-              <a:t>and </a:t>
-            </a:r>
-            <a:r>
-              <a:rPr lang="en-US" altLang="zh-CN" dirty="0" smtClean="0">
-                <a:latin typeface="Calibri" panose="020F0502020204030204" pitchFamily="34" charset="0"/>
-                <a:ea typeface="Calibri" panose="020F0502020204030204" pitchFamily="34" charset="0"/>
-                <a:cs typeface="Calibri" panose="020F0502020204030204" pitchFamily="34" charset="0"/>
-              </a:rPr>
-              <a:t>context </a:t>
-            </a:r>
-            <a:r>
-              <a:rPr lang="en-US" altLang="zh-CN" dirty="0" smtClean="0">
-                <a:latin typeface="Calibri" panose="020F0502020204030204" pitchFamily="34" charset="0"/>
-                <a:ea typeface="Calibri" panose="020F0502020204030204" pitchFamily="34" charset="0"/>
-                <a:cs typeface="Calibri" panose="020F0502020204030204" pitchFamily="34" charset="0"/>
-              </a:rPr>
-              <a:t>level.</a:t>
-            </a:r>
-            <a:endParaRPr lang="en-US" altLang="zh-CN" dirty="0">
-              <a:latin typeface="Calibri" panose="020F0502020204030204" pitchFamily="34" charset="0"/>
-              <a:ea typeface="Calibri" panose="020F0502020204030204" pitchFamily="34" charset="0"/>
-              <a:cs typeface="Calibri" panose="020F0502020204030204" pitchFamily="34" charset="0"/>
-            </a:endParaRPr>
-          </a:p>
-          <a:p>
-            <a:r>
-              <a:rPr lang="en-US" altLang="zh-CN" dirty="0">
-                <a:latin typeface="Calibri" panose="020F0502020204030204" pitchFamily="34" charset="0"/>
-                <a:ea typeface="Calibri" panose="020F0502020204030204" pitchFamily="34" charset="0"/>
-                <a:cs typeface="Calibri" panose="020F0502020204030204" pitchFamily="34" charset="0"/>
-              </a:rPr>
-              <a:t>INT-3: Escalation</a:t>
-            </a:r>
-          </a:p>
-          <a:p>
-            <a:pPr lvl="1"/>
-            <a:r>
-              <a:rPr lang="en-US" altLang="zh-CN" dirty="0">
-                <a:latin typeface="Calibri" panose="020F0502020204030204" pitchFamily="34" charset="0"/>
-                <a:ea typeface="Calibri" panose="020F0502020204030204" pitchFamily="34" charset="0"/>
-                <a:cs typeface="Calibri" panose="020F0502020204030204" pitchFamily="34" charset="0"/>
-              </a:rPr>
-              <a:t>Moves a decision the current agent </a:t>
-            </a:r>
-            <a:r>
-              <a:rPr lang="en-US" altLang="zh-CN" dirty="0" smtClean="0">
-                <a:latin typeface="Calibri" panose="020F0502020204030204" pitchFamily="34" charset="0"/>
-                <a:ea typeface="Calibri" panose="020F0502020204030204" pitchFamily="34" charset="0"/>
-                <a:cs typeface="Calibri" panose="020F0502020204030204" pitchFamily="34" charset="0"/>
-              </a:rPr>
-              <a:t>can't </a:t>
-            </a:r>
-            <a:r>
-              <a:rPr lang="en-US" altLang="zh-CN" dirty="0">
-                <a:latin typeface="Calibri" panose="020F0502020204030204" pitchFamily="34" charset="0"/>
-                <a:ea typeface="Calibri" panose="020F0502020204030204" pitchFamily="34" charset="0"/>
-                <a:cs typeface="Calibri" panose="020F0502020204030204" pitchFamily="34" charset="0"/>
-              </a:rPr>
-              <a:t>or shouldn't make alone up to someone with broader authority, without losing context</a:t>
-            </a:r>
-            <a:r>
-              <a:rPr lang="en-US" altLang="zh-CN" dirty="0" smtClean="0">
-                <a:latin typeface="Calibri" panose="020F0502020204030204" pitchFamily="34" charset="0"/>
-                <a:ea typeface="Calibri" panose="020F0502020204030204" pitchFamily="34" charset="0"/>
-                <a:cs typeface="Calibri" panose="020F0502020204030204" pitchFamily="34" charset="0"/>
-              </a:rPr>
-              <a:t>.</a:t>
-            </a:r>
-            <a:endParaRPr lang="en-US" altLang="zh-CN" dirty="0">
-              <a:latin typeface="Calibri" panose="020F0502020204030204" pitchFamily="34" charset="0"/>
-              <a:ea typeface="Calibri" panose="020F0502020204030204" pitchFamily="34" charset="0"/>
-              <a:cs typeface="Calibri" panose="020F0502020204030204" pitchFamily="34" charset="0"/>
-            </a:endParaRPr>
-          </a:p>
-          <a:p>
-            <a:r>
-              <a:rPr lang="en-US" altLang="zh-CN" dirty="0">
-                <a:latin typeface="Calibri" panose="020F0502020204030204" pitchFamily="34" charset="0"/>
-                <a:ea typeface="Calibri" panose="020F0502020204030204" pitchFamily="34" charset="0"/>
-                <a:cs typeface="Calibri" panose="020F0502020204030204" pitchFamily="34" charset="0"/>
-              </a:rPr>
-              <a:t>INT-4: </a:t>
-            </a:r>
-            <a:r>
-              <a:rPr lang="en-US" altLang="zh-CN" dirty="0" smtClean="0">
-                <a:latin typeface="Calibri" panose="020F0502020204030204" pitchFamily="34" charset="0"/>
-                <a:ea typeface="Calibri" panose="020F0502020204030204" pitchFamily="34" charset="0"/>
-                <a:cs typeface="Calibri" panose="020F0502020204030204" pitchFamily="34" charset="0"/>
-              </a:rPr>
-              <a:t>Correction</a:t>
-            </a:r>
-          </a:p>
-          <a:p>
-            <a:pPr lvl="1"/>
-            <a:r>
-              <a:rPr lang="en-US" altLang="zh-CN" dirty="0" smtClean="0">
-                <a:latin typeface="Calibri" panose="020F0502020204030204" pitchFamily="34" charset="0"/>
-                <a:ea typeface="Calibri" panose="020F0502020204030204" pitchFamily="34" charset="0"/>
-                <a:cs typeface="Calibri" panose="020F0502020204030204" pitchFamily="34" charset="0"/>
-              </a:rPr>
-              <a:t>Allows</a:t>
-            </a:r>
-            <a:r>
-              <a:rPr lang="en-US" altLang="zh-CN" dirty="0" smtClean="0">
-                <a:latin typeface="Calibri" panose="020F0502020204030204" pitchFamily="34" charset="0"/>
-                <a:ea typeface="Calibri" panose="020F0502020204030204" pitchFamily="34" charset="0"/>
-                <a:cs typeface="Calibri" panose="020F0502020204030204" pitchFamily="34" charset="0"/>
-              </a:rPr>
-              <a:t> </a:t>
-            </a:r>
-            <a:r>
-              <a:rPr lang="en-US" altLang="zh-CN" dirty="0">
-                <a:latin typeface="Calibri" panose="020F0502020204030204" pitchFamily="34" charset="0"/>
-                <a:ea typeface="Calibri" panose="020F0502020204030204" pitchFamily="34" charset="0"/>
-                <a:cs typeface="Calibri" panose="020F0502020204030204" pitchFamily="34" charset="0"/>
-              </a:rPr>
-              <a:t>a supervisor </a:t>
-            </a:r>
-            <a:r>
-              <a:rPr lang="en-US" altLang="zh-CN" dirty="0" smtClean="0">
-                <a:latin typeface="Calibri" panose="020F0502020204030204" pitchFamily="34" charset="0"/>
-                <a:ea typeface="Calibri" panose="020F0502020204030204" pitchFamily="34" charset="0"/>
-                <a:cs typeface="Calibri" panose="020F0502020204030204" pitchFamily="34" charset="0"/>
-              </a:rPr>
-              <a:t>to fix </a:t>
-            </a:r>
-            <a:r>
-              <a:rPr lang="en-US" altLang="zh-CN" dirty="0">
-                <a:latin typeface="Calibri" panose="020F0502020204030204" pitchFamily="34" charset="0"/>
-                <a:ea typeface="Calibri" panose="020F0502020204030204" pitchFamily="34" charset="0"/>
-                <a:cs typeface="Calibri" panose="020F0502020204030204" pitchFamily="34" charset="0"/>
-              </a:rPr>
-              <a:t>what went </a:t>
-            </a:r>
-            <a:r>
-              <a:rPr lang="en-US" altLang="zh-CN" dirty="0" smtClean="0">
-                <a:latin typeface="Calibri" panose="020F0502020204030204" pitchFamily="34" charset="0"/>
-                <a:ea typeface="Calibri" panose="020F0502020204030204" pitchFamily="34" charset="0"/>
-                <a:cs typeface="Calibri" panose="020F0502020204030204" pitchFamily="34" charset="0"/>
-              </a:rPr>
-              <a:t>wrong, e.g., the </a:t>
-            </a:r>
-            <a:r>
-              <a:rPr lang="en-US" altLang="zh-CN" dirty="0">
-                <a:latin typeface="Calibri" panose="020F0502020204030204" pitchFamily="34" charset="0"/>
-                <a:ea typeface="Calibri" panose="020F0502020204030204" pitchFamily="34" charset="0"/>
-                <a:cs typeface="Calibri" panose="020F0502020204030204" pitchFamily="34" charset="0"/>
-              </a:rPr>
-              <a:t>intent, the data, or the </a:t>
-            </a:r>
-            <a:r>
-              <a:rPr lang="en-US" altLang="zh-CN" dirty="0" smtClean="0">
-                <a:latin typeface="Calibri" panose="020F0502020204030204" pitchFamily="34" charset="0"/>
-                <a:ea typeface="Calibri" panose="020F0502020204030204" pitchFamily="34" charset="0"/>
-                <a:cs typeface="Calibri" panose="020F0502020204030204" pitchFamily="34" charset="0"/>
-              </a:rPr>
-              <a:t>plan </a:t>
-            </a:r>
-            <a:r>
-              <a:rPr lang="en-US" altLang="zh-CN" dirty="0">
-                <a:latin typeface="Calibri" panose="020F0502020204030204" pitchFamily="34" charset="0"/>
-                <a:ea typeface="Calibri" panose="020F0502020204030204" pitchFamily="34" charset="0"/>
-                <a:cs typeface="Calibri" panose="020F0502020204030204" pitchFamily="34" charset="0"/>
-              </a:rPr>
-              <a:t>instead of only being able to accept or reject the agent's output.</a:t>
-            </a:r>
-          </a:p>
-          <a:p>
-            <a:pPr lvl="1"/>
-            <a:endParaRPr lang="en-US" altLang="zh-CN" dirty="0">
-              <a:latin typeface="Calibri" panose="020F0502020204030204" pitchFamily="34" charset="0"/>
-              <a:ea typeface="Calibri" panose="020F0502020204030204" pitchFamily="34" charset="0"/>
-              <a:cs typeface="Calibri" panose="020F0502020204030204" pitchFamily="34" charset="0"/>
-            </a:endParaRPr>
-          </a:p>
-          <a:p>
-            <a:endParaRPr lang="en-US" altLang="zh-CN" dirty="0">
-              <a:latin typeface="Calibri" panose="020F0502020204030204" pitchFamily="34" charset="0"/>
-              <a:ea typeface="Calibri" panose="020F0502020204030204" pitchFamily="34" charset="0"/>
-              <a:cs typeface="Calibri" panose="020F0502020204030204" pitchFamily="34" charset="0"/>
-            </a:endParaRPr>
-          </a:p>
-          <a:p>
-            <a:endParaRPr lang="zh-CN" altLang="en-US" dirty="0">
-              <a:latin typeface="Calibri" panose="020F0502020204030204" pitchFamily="34" charset="0"/>
-              <a:cs typeface="Calibri" panose="020F0502020204030204" pitchFamily="34" charset="0"/>
-            </a:endParaRPr>
-          </a:p>
         </p:txBody>
       </p:sp>
     </p:spTree>
     <p:extLst>
       <p:ext uri="{BB962C8B-B14F-4D97-AF65-F5344CB8AC3E}">
-        <p14:creationId xmlns:p14="http://schemas.microsoft.com/office/powerpoint/2010/main" val="4195912275"/>
+        <p14:creationId xmlns:p14="http://schemas.microsoft.com/office/powerpoint/2010/main" val="3904890739"/>
       </p:ext>
     </p:extLst>
   </p:cSld>

--- a/Side Meetings/ICON-requirements.pptx
+++ b/Side Meetings/ICON-requirements.pptx
@@ -203,7 +203,7 @@
           <a:p>
             <a:fld id="{26FD6D93-B7C5-4886-96FE-E919881FC183}" type="datetimeFigureOut">
               <a:rPr lang="en-US" smtClean="0"/>
-              <a:t>7/14/2026</a:t>
+              <a:t>7/15/2026</a:t>
             </a:fld>
             <a:endParaRPr lang="en-US"/>
           </a:p>
@@ -267,35 +267,35 @@
           <a:p>
             <a:pPr lvl="0"/>
             <a:r>
-              <a:rPr lang="zh-CN" altLang="en-US" smtClean="0"/>
+              <a:rPr lang="zh-CN" altLang="en-US"/>
               <a:t>单击此处编辑母版文本样式</a:t>
             </a:r>
           </a:p>
           <a:p>
             <a:pPr lvl="1"/>
             <a:r>
-              <a:rPr lang="zh-CN" altLang="en-US" smtClean="0"/>
+              <a:rPr lang="zh-CN" altLang="en-US"/>
               <a:t>第二级</a:t>
             </a:r>
           </a:p>
           <a:p>
             <a:pPr lvl="2"/>
             <a:r>
-              <a:rPr lang="zh-CN" altLang="en-US" smtClean="0"/>
+              <a:rPr lang="zh-CN" altLang="en-US"/>
               <a:t>第三级</a:t>
             </a:r>
           </a:p>
           <a:p>
             <a:pPr lvl="3"/>
             <a:r>
-              <a:rPr lang="zh-CN" altLang="en-US" smtClean="0"/>
+              <a:rPr lang="zh-CN" altLang="en-US"/>
               <a:t>第四级</a:t>
             </a:r>
           </a:p>
           <a:p>
             <a:pPr lvl="4"/>
             <a:r>
-              <a:rPr lang="zh-CN" altLang="en-US" smtClean="0"/>
+              <a:rPr lang="zh-CN" altLang="en-US"/>
               <a:t>第五级</a:t>
             </a:r>
             <a:endParaRPr lang="en-US"/>
@@ -516,10 +516,9 @@
           <a:lstStyle/>
           <a:p>
             <a:r>
-              <a:rPr lang="en-US" dirty="0" smtClean="0"/>
+              <a:rPr lang="en-US" dirty="0"/>
               <a:t>Orchestration/supervision</a:t>
             </a:r>
-            <a:endParaRPr lang="en-US" dirty="0"/>
           </a:p>
         </p:txBody>
       </p:sp>
@@ -581,7 +580,7 @@
           <p:cNvPr id="2" name="标题 1">
             <a:extLst>
               <a:ext uri="{FF2B5EF4-FFF2-40B4-BE49-F238E27FC236}">
-                <a16:creationId xmlns="" xmlns:a16="http://schemas.microsoft.com/office/drawing/2014/main" id="{0527A8EF-B618-45FC-A1AB-EAFFA9191F1A}"/>
+                <a16:creationId xmlns:a16="http://schemas.microsoft.com/office/drawing/2014/main" id="{0527A8EF-B618-45FC-A1AB-EAFFA9191F1A}"/>
               </a:ext>
             </a:extLst>
           </p:cNvPr>
@@ -618,7 +617,7 @@
           <p:cNvPr id="3" name="副标题 2">
             <a:extLst>
               <a:ext uri="{FF2B5EF4-FFF2-40B4-BE49-F238E27FC236}">
-                <a16:creationId xmlns="" xmlns:a16="http://schemas.microsoft.com/office/drawing/2014/main" id="{21E61DD0-C5A4-4371-B50E-B1C911772DE4}"/>
+                <a16:creationId xmlns:a16="http://schemas.microsoft.com/office/drawing/2014/main" id="{21E61DD0-C5A4-4371-B50E-B1C911772DE4}"/>
               </a:ext>
             </a:extLst>
           </p:cNvPr>
@@ -688,7 +687,7 @@
           <p:cNvPr id="4" name="日期占位符 3">
             <a:extLst>
               <a:ext uri="{FF2B5EF4-FFF2-40B4-BE49-F238E27FC236}">
-                <a16:creationId xmlns="" xmlns:a16="http://schemas.microsoft.com/office/drawing/2014/main" id="{98C54048-0D74-43DC-9291-DFE94D6775C1}"/>
+                <a16:creationId xmlns:a16="http://schemas.microsoft.com/office/drawing/2014/main" id="{98C54048-0D74-43DC-9291-DFE94D6775C1}"/>
               </a:ext>
             </a:extLst>
           </p:cNvPr>
@@ -706,7 +705,7 @@
           <a:p>
             <a:fld id="{D993279A-1075-4D69-8304-6D9EBC8FBB92}" type="datetimeFigureOut">
               <a:rPr lang="zh-CN" altLang="en-US" smtClean="0"/>
-              <a:t>2026/7/14</a:t>
+              <a:t>2026/7/15</a:t>
             </a:fld>
             <a:endParaRPr lang="zh-CN" altLang="en-US"/>
           </a:p>
@@ -717,7 +716,7 @@
           <p:cNvPr id="5" name="页脚占位符 4">
             <a:extLst>
               <a:ext uri="{FF2B5EF4-FFF2-40B4-BE49-F238E27FC236}">
-                <a16:creationId xmlns="" xmlns:a16="http://schemas.microsoft.com/office/drawing/2014/main" id="{E99BCB19-7E1C-4B3A-A4FE-9C69C3DDAB71}"/>
+                <a16:creationId xmlns:a16="http://schemas.microsoft.com/office/drawing/2014/main" id="{E99BCB19-7E1C-4B3A-A4FE-9C69C3DDAB71}"/>
               </a:ext>
             </a:extLst>
           </p:cNvPr>
@@ -742,7 +741,7 @@
           <p:cNvPr id="6" name="灯片编号占位符 5">
             <a:extLst>
               <a:ext uri="{FF2B5EF4-FFF2-40B4-BE49-F238E27FC236}">
-                <a16:creationId xmlns="" xmlns:a16="http://schemas.microsoft.com/office/drawing/2014/main" id="{9DE0E44A-3DDE-4EF9-92DB-FA0A7CB95089}"/>
+                <a16:creationId xmlns:a16="http://schemas.microsoft.com/office/drawing/2014/main" id="{9DE0E44A-3DDE-4EF9-92DB-FA0A7CB95089}"/>
               </a:ext>
             </a:extLst>
           </p:cNvPr>
@@ -801,7 +800,7 @@
           <p:cNvPr id="2" name="标题 1">
             <a:extLst>
               <a:ext uri="{FF2B5EF4-FFF2-40B4-BE49-F238E27FC236}">
-                <a16:creationId xmlns="" xmlns:a16="http://schemas.microsoft.com/office/drawing/2014/main" id="{B78F8E7F-BBFF-4EB3-A6B8-C4DFA3E73FC0}"/>
+                <a16:creationId xmlns:a16="http://schemas.microsoft.com/office/drawing/2014/main" id="{B78F8E7F-BBFF-4EB3-A6B8-C4DFA3E73FC0}"/>
               </a:ext>
             </a:extLst>
           </p:cNvPr>
@@ -829,7 +828,7 @@
           <p:cNvPr id="3" name="竖排文字占位符 2">
             <a:extLst>
               <a:ext uri="{FF2B5EF4-FFF2-40B4-BE49-F238E27FC236}">
-                <a16:creationId xmlns="" xmlns:a16="http://schemas.microsoft.com/office/drawing/2014/main" id="{AAA5EB40-AAC0-48FC-9AC4-9BD164BE1D4C}"/>
+                <a16:creationId xmlns:a16="http://schemas.microsoft.com/office/drawing/2014/main" id="{AAA5EB40-AAC0-48FC-9AC4-9BD164BE1D4C}"/>
               </a:ext>
             </a:extLst>
           </p:cNvPr>
@@ -886,7 +885,7 @@
           <p:cNvPr id="4" name="日期占位符 3">
             <a:extLst>
               <a:ext uri="{FF2B5EF4-FFF2-40B4-BE49-F238E27FC236}">
-                <a16:creationId xmlns="" xmlns:a16="http://schemas.microsoft.com/office/drawing/2014/main" id="{5034DB7F-6493-4E49-887B-EB5B1D4AD652}"/>
+                <a16:creationId xmlns:a16="http://schemas.microsoft.com/office/drawing/2014/main" id="{5034DB7F-6493-4E49-887B-EB5B1D4AD652}"/>
               </a:ext>
             </a:extLst>
           </p:cNvPr>
@@ -904,7 +903,7 @@
           <a:p>
             <a:fld id="{D993279A-1075-4D69-8304-6D9EBC8FBB92}" type="datetimeFigureOut">
               <a:rPr lang="zh-CN" altLang="en-US" smtClean="0"/>
-              <a:t>2026/7/14</a:t>
+              <a:t>2026/7/15</a:t>
             </a:fld>
             <a:endParaRPr lang="zh-CN" altLang="en-US"/>
           </a:p>
@@ -915,7 +914,7 @@
           <p:cNvPr id="5" name="页脚占位符 4">
             <a:extLst>
               <a:ext uri="{FF2B5EF4-FFF2-40B4-BE49-F238E27FC236}">
-                <a16:creationId xmlns="" xmlns:a16="http://schemas.microsoft.com/office/drawing/2014/main" id="{F0317DDB-EBD2-459C-869A-0B0DF1E14EF9}"/>
+                <a16:creationId xmlns:a16="http://schemas.microsoft.com/office/drawing/2014/main" id="{F0317DDB-EBD2-459C-869A-0B0DF1E14EF9}"/>
               </a:ext>
             </a:extLst>
           </p:cNvPr>
@@ -940,7 +939,7 @@
           <p:cNvPr id="6" name="灯片编号占位符 5">
             <a:extLst>
               <a:ext uri="{FF2B5EF4-FFF2-40B4-BE49-F238E27FC236}">
-                <a16:creationId xmlns="" xmlns:a16="http://schemas.microsoft.com/office/drawing/2014/main" id="{49E60790-4E03-4274-B0F8-90FA6860EC54}"/>
+                <a16:creationId xmlns:a16="http://schemas.microsoft.com/office/drawing/2014/main" id="{49E60790-4E03-4274-B0F8-90FA6860EC54}"/>
               </a:ext>
             </a:extLst>
           </p:cNvPr>
@@ -999,7 +998,7 @@
           <p:cNvPr id="2" name="竖排标题 1">
             <a:extLst>
               <a:ext uri="{FF2B5EF4-FFF2-40B4-BE49-F238E27FC236}">
-                <a16:creationId xmlns="" xmlns:a16="http://schemas.microsoft.com/office/drawing/2014/main" id="{A0062ADF-F931-458A-BBFE-F1CE26EEBA67}"/>
+                <a16:creationId xmlns:a16="http://schemas.microsoft.com/office/drawing/2014/main" id="{A0062ADF-F931-458A-BBFE-F1CE26EEBA67}"/>
               </a:ext>
             </a:extLst>
           </p:cNvPr>
@@ -1032,7 +1031,7 @@
           <p:cNvPr id="3" name="竖排文字占位符 2">
             <a:extLst>
               <a:ext uri="{FF2B5EF4-FFF2-40B4-BE49-F238E27FC236}">
-                <a16:creationId xmlns="" xmlns:a16="http://schemas.microsoft.com/office/drawing/2014/main" id="{B7C9C3CE-8F31-4734-9A18-95CCE43809CE}"/>
+                <a16:creationId xmlns:a16="http://schemas.microsoft.com/office/drawing/2014/main" id="{B7C9C3CE-8F31-4734-9A18-95CCE43809CE}"/>
               </a:ext>
             </a:extLst>
           </p:cNvPr>
@@ -1094,7 +1093,7 @@
           <p:cNvPr id="4" name="日期占位符 3">
             <a:extLst>
               <a:ext uri="{FF2B5EF4-FFF2-40B4-BE49-F238E27FC236}">
-                <a16:creationId xmlns="" xmlns:a16="http://schemas.microsoft.com/office/drawing/2014/main" id="{3E215F3C-B04A-447A-B93C-963B50E74028}"/>
+                <a16:creationId xmlns:a16="http://schemas.microsoft.com/office/drawing/2014/main" id="{3E215F3C-B04A-447A-B93C-963B50E74028}"/>
               </a:ext>
             </a:extLst>
           </p:cNvPr>
@@ -1112,7 +1111,7 @@
           <a:p>
             <a:fld id="{D993279A-1075-4D69-8304-6D9EBC8FBB92}" type="datetimeFigureOut">
               <a:rPr lang="zh-CN" altLang="en-US" smtClean="0"/>
-              <a:t>2026/7/14</a:t>
+              <a:t>2026/7/15</a:t>
             </a:fld>
             <a:endParaRPr lang="zh-CN" altLang="en-US"/>
           </a:p>
@@ -1123,7 +1122,7 @@
           <p:cNvPr id="5" name="页脚占位符 4">
             <a:extLst>
               <a:ext uri="{FF2B5EF4-FFF2-40B4-BE49-F238E27FC236}">
-                <a16:creationId xmlns="" xmlns:a16="http://schemas.microsoft.com/office/drawing/2014/main" id="{0FD3474F-AB63-4566-95BD-6967B31910C3}"/>
+                <a16:creationId xmlns:a16="http://schemas.microsoft.com/office/drawing/2014/main" id="{0FD3474F-AB63-4566-95BD-6967B31910C3}"/>
               </a:ext>
             </a:extLst>
           </p:cNvPr>
@@ -1148,7 +1147,7 @@
           <p:cNvPr id="6" name="灯片编号占位符 5">
             <a:extLst>
               <a:ext uri="{FF2B5EF4-FFF2-40B4-BE49-F238E27FC236}">
-                <a16:creationId xmlns="" xmlns:a16="http://schemas.microsoft.com/office/drawing/2014/main" id="{3D7254AE-3680-4BA3-8F0D-0484F84EEBC2}"/>
+                <a16:creationId xmlns:a16="http://schemas.microsoft.com/office/drawing/2014/main" id="{3D7254AE-3680-4BA3-8F0D-0484F84EEBC2}"/>
               </a:ext>
             </a:extLst>
           </p:cNvPr>
@@ -1207,7 +1206,7 @@
           <p:cNvPr id="2" name="标题 1">
             <a:extLst>
               <a:ext uri="{FF2B5EF4-FFF2-40B4-BE49-F238E27FC236}">
-                <a16:creationId xmlns="" xmlns:a16="http://schemas.microsoft.com/office/drawing/2014/main" id="{90C8A2CC-271D-4F26-9AFD-83EDB19AC239}"/>
+                <a16:creationId xmlns:a16="http://schemas.microsoft.com/office/drawing/2014/main" id="{90C8A2CC-271D-4F26-9AFD-83EDB19AC239}"/>
               </a:ext>
             </a:extLst>
           </p:cNvPr>
@@ -1235,7 +1234,7 @@
           <p:cNvPr id="3" name="内容占位符 2">
             <a:extLst>
               <a:ext uri="{FF2B5EF4-FFF2-40B4-BE49-F238E27FC236}">
-                <a16:creationId xmlns="" xmlns:a16="http://schemas.microsoft.com/office/drawing/2014/main" id="{561557DB-2F35-48CD-8644-181EDEDCAE91}"/>
+                <a16:creationId xmlns:a16="http://schemas.microsoft.com/office/drawing/2014/main" id="{561557DB-2F35-48CD-8644-181EDEDCAE91}"/>
               </a:ext>
             </a:extLst>
           </p:cNvPr>
@@ -1292,7 +1291,7 @@
           <p:cNvPr id="4" name="日期占位符 3">
             <a:extLst>
               <a:ext uri="{FF2B5EF4-FFF2-40B4-BE49-F238E27FC236}">
-                <a16:creationId xmlns="" xmlns:a16="http://schemas.microsoft.com/office/drawing/2014/main" id="{2C3D0912-A4EB-4D57-94F0-154DE0AF0CD4}"/>
+                <a16:creationId xmlns:a16="http://schemas.microsoft.com/office/drawing/2014/main" id="{2C3D0912-A4EB-4D57-94F0-154DE0AF0CD4}"/>
               </a:ext>
             </a:extLst>
           </p:cNvPr>
@@ -1310,7 +1309,7 @@
           <a:p>
             <a:fld id="{D993279A-1075-4D69-8304-6D9EBC8FBB92}" type="datetimeFigureOut">
               <a:rPr lang="zh-CN" altLang="en-US" smtClean="0"/>
-              <a:t>2026/7/14</a:t>
+              <a:t>2026/7/15</a:t>
             </a:fld>
             <a:endParaRPr lang="zh-CN" altLang="en-US"/>
           </a:p>
@@ -1321,7 +1320,7 @@
           <p:cNvPr id="5" name="页脚占位符 4">
             <a:extLst>
               <a:ext uri="{FF2B5EF4-FFF2-40B4-BE49-F238E27FC236}">
-                <a16:creationId xmlns="" xmlns:a16="http://schemas.microsoft.com/office/drawing/2014/main" id="{504DCB4C-4AED-4A07-B1DE-F90E28D38655}"/>
+                <a16:creationId xmlns:a16="http://schemas.microsoft.com/office/drawing/2014/main" id="{504DCB4C-4AED-4A07-B1DE-F90E28D38655}"/>
               </a:ext>
             </a:extLst>
           </p:cNvPr>
@@ -1346,7 +1345,7 @@
           <p:cNvPr id="6" name="灯片编号占位符 5">
             <a:extLst>
               <a:ext uri="{FF2B5EF4-FFF2-40B4-BE49-F238E27FC236}">
-                <a16:creationId xmlns="" xmlns:a16="http://schemas.microsoft.com/office/drawing/2014/main" id="{38A26FB8-A57E-411B-963D-F82BF64611B8}"/>
+                <a16:creationId xmlns:a16="http://schemas.microsoft.com/office/drawing/2014/main" id="{38A26FB8-A57E-411B-963D-F82BF64611B8}"/>
               </a:ext>
             </a:extLst>
           </p:cNvPr>
@@ -1405,7 +1404,7 @@
           <p:cNvPr id="2" name="标题 1">
             <a:extLst>
               <a:ext uri="{FF2B5EF4-FFF2-40B4-BE49-F238E27FC236}">
-                <a16:creationId xmlns="" xmlns:a16="http://schemas.microsoft.com/office/drawing/2014/main" id="{FCA1C2A2-1B68-466F-B6BD-F31C431175D1}"/>
+                <a16:creationId xmlns:a16="http://schemas.microsoft.com/office/drawing/2014/main" id="{FCA1C2A2-1B68-466F-B6BD-F31C431175D1}"/>
               </a:ext>
             </a:extLst>
           </p:cNvPr>
@@ -1442,7 +1441,7 @@
           <p:cNvPr id="3" name="文本占位符 2">
             <a:extLst>
               <a:ext uri="{FF2B5EF4-FFF2-40B4-BE49-F238E27FC236}">
-                <a16:creationId xmlns="" xmlns:a16="http://schemas.microsoft.com/office/drawing/2014/main" id="{82888A8F-5FE0-4686-9A3C-5B60926CDFAA}"/>
+                <a16:creationId xmlns:a16="http://schemas.microsoft.com/office/drawing/2014/main" id="{82888A8F-5FE0-4686-9A3C-5B60926CDFAA}"/>
               </a:ext>
             </a:extLst>
           </p:cNvPr>
@@ -1567,7 +1566,7 @@
           <p:cNvPr id="4" name="日期占位符 3">
             <a:extLst>
               <a:ext uri="{FF2B5EF4-FFF2-40B4-BE49-F238E27FC236}">
-                <a16:creationId xmlns="" xmlns:a16="http://schemas.microsoft.com/office/drawing/2014/main" id="{FA3F1393-BF8A-464B-BC3D-D3E48D215DCE}"/>
+                <a16:creationId xmlns:a16="http://schemas.microsoft.com/office/drawing/2014/main" id="{FA3F1393-BF8A-464B-BC3D-D3E48D215DCE}"/>
               </a:ext>
             </a:extLst>
           </p:cNvPr>
@@ -1585,7 +1584,7 @@
           <a:p>
             <a:fld id="{D993279A-1075-4D69-8304-6D9EBC8FBB92}" type="datetimeFigureOut">
               <a:rPr lang="zh-CN" altLang="en-US" smtClean="0"/>
-              <a:t>2026/7/14</a:t>
+              <a:t>2026/7/15</a:t>
             </a:fld>
             <a:endParaRPr lang="zh-CN" altLang="en-US"/>
           </a:p>
@@ -1596,7 +1595,7 @@
           <p:cNvPr id="5" name="页脚占位符 4">
             <a:extLst>
               <a:ext uri="{FF2B5EF4-FFF2-40B4-BE49-F238E27FC236}">
-                <a16:creationId xmlns="" xmlns:a16="http://schemas.microsoft.com/office/drawing/2014/main" id="{0882A640-5224-42C1-8C0B-A910D5A8E9F5}"/>
+                <a16:creationId xmlns:a16="http://schemas.microsoft.com/office/drawing/2014/main" id="{0882A640-5224-42C1-8C0B-A910D5A8E9F5}"/>
               </a:ext>
             </a:extLst>
           </p:cNvPr>
@@ -1621,7 +1620,7 @@
           <p:cNvPr id="6" name="灯片编号占位符 5">
             <a:extLst>
               <a:ext uri="{FF2B5EF4-FFF2-40B4-BE49-F238E27FC236}">
-                <a16:creationId xmlns="" xmlns:a16="http://schemas.microsoft.com/office/drawing/2014/main" id="{FFD84918-1044-4BD8-9CA6-E7568ECCC46A}"/>
+                <a16:creationId xmlns:a16="http://schemas.microsoft.com/office/drawing/2014/main" id="{FFD84918-1044-4BD8-9CA6-E7568ECCC46A}"/>
               </a:ext>
             </a:extLst>
           </p:cNvPr>
@@ -1680,7 +1679,7 @@
           <p:cNvPr id="2" name="标题 1">
             <a:extLst>
               <a:ext uri="{FF2B5EF4-FFF2-40B4-BE49-F238E27FC236}">
-                <a16:creationId xmlns="" xmlns:a16="http://schemas.microsoft.com/office/drawing/2014/main" id="{3A80E2CF-D6DF-4F84-96F7-51710B53A35B}"/>
+                <a16:creationId xmlns:a16="http://schemas.microsoft.com/office/drawing/2014/main" id="{3A80E2CF-D6DF-4F84-96F7-51710B53A35B}"/>
               </a:ext>
             </a:extLst>
           </p:cNvPr>
@@ -1708,7 +1707,7 @@
           <p:cNvPr id="3" name="内容占位符 2">
             <a:extLst>
               <a:ext uri="{FF2B5EF4-FFF2-40B4-BE49-F238E27FC236}">
-                <a16:creationId xmlns="" xmlns:a16="http://schemas.microsoft.com/office/drawing/2014/main" id="{3AFD40B0-9653-4B2B-B98E-58BE5A8836B4}"/>
+                <a16:creationId xmlns:a16="http://schemas.microsoft.com/office/drawing/2014/main" id="{3AFD40B0-9653-4B2B-B98E-58BE5A8836B4}"/>
               </a:ext>
             </a:extLst>
           </p:cNvPr>
@@ -1770,7 +1769,7 @@
           <p:cNvPr id="4" name="内容占位符 3">
             <a:extLst>
               <a:ext uri="{FF2B5EF4-FFF2-40B4-BE49-F238E27FC236}">
-                <a16:creationId xmlns="" xmlns:a16="http://schemas.microsoft.com/office/drawing/2014/main" id="{C1C79EBB-6CC0-4D09-8F09-4FACC597D96A}"/>
+                <a16:creationId xmlns:a16="http://schemas.microsoft.com/office/drawing/2014/main" id="{C1C79EBB-6CC0-4D09-8F09-4FACC597D96A}"/>
               </a:ext>
             </a:extLst>
           </p:cNvPr>
@@ -1832,7 +1831,7 @@
           <p:cNvPr id="5" name="日期占位符 4">
             <a:extLst>
               <a:ext uri="{FF2B5EF4-FFF2-40B4-BE49-F238E27FC236}">
-                <a16:creationId xmlns="" xmlns:a16="http://schemas.microsoft.com/office/drawing/2014/main" id="{BE713B0C-E8B0-46D9-9529-9DD49221F766}"/>
+                <a16:creationId xmlns:a16="http://schemas.microsoft.com/office/drawing/2014/main" id="{BE713B0C-E8B0-46D9-9529-9DD49221F766}"/>
               </a:ext>
             </a:extLst>
           </p:cNvPr>
@@ -1850,7 +1849,7 @@
           <a:p>
             <a:fld id="{D993279A-1075-4D69-8304-6D9EBC8FBB92}" type="datetimeFigureOut">
               <a:rPr lang="zh-CN" altLang="en-US" smtClean="0"/>
-              <a:t>2026/7/14</a:t>
+              <a:t>2026/7/15</a:t>
             </a:fld>
             <a:endParaRPr lang="zh-CN" altLang="en-US"/>
           </a:p>
@@ -1861,7 +1860,7 @@
           <p:cNvPr id="6" name="页脚占位符 5">
             <a:extLst>
               <a:ext uri="{FF2B5EF4-FFF2-40B4-BE49-F238E27FC236}">
-                <a16:creationId xmlns="" xmlns:a16="http://schemas.microsoft.com/office/drawing/2014/main" id="{7469EBD1-A387-46D5-A779-F15B943D86C3}"/>
+                <a16:creationId xmlns:a16="http://schemas.microsoft.com/office/drawing/2014/main" id="{7469EBD1-A387-46D5-A779-F15B943D86C3}"/>
               </a:ext>
             </a:extLst>
           </p:cNvPr>
@@ -1886,7 +1885,7 @@
           <p:cNvPr id="7" name="灯片编号占位符 6">
             <a:extLst>
               <a:ext uri="{FF2B5EF4-FFF2-40B4-BE49-F238E27FC236}">
-                <a16:creationId xmlns="" xmlns:a16="http://schemas.microsoft.com/office/drawing/2014/main" id="{A00D87DF-32E7-4A25-A06F-BD08276A007E}"/>
+                <a16:creationId xmlns:a16="http://schemas.microsoft.com/office/drawing/2014/main" id="{A00D87DF-32E7-4A25-A06F-BD08276A007E}"/>
               </a:ext>
             </a:extLst>
           </p:cNvPr>
@@ -1945,7 +1944,7 @@
           <p:cNvPr id="2" name="标题 1">
             <a:extLst>
               <a:ext uri="{FF2B5EF4-FFF2-40B4-BE49-F238E27FC236}">
-                <a16:creationId xmlns="" xmlns:a16="http://schemas.microsoft.com/office/drawing/2014/main" id="{9A50E6B8-06B1-4775-BF76-451B61B77926}"/>
+                <a16:creationId xmlns:a16="http://schemas.microsoft.com/office/drawing/2014/main" id="{9A50E6B8-06B1-4775-BF76-451B61B77926}"/>
               </a:ext>
             </a:extLst>
           </p:cNvPr>
@@ -1978,7 +1977,7 @@
           <p:cNvPr id="3" name="文本占位符 2">
             <a:extLst>
               <a:ext uri="{FF2B5EF4-FFF2-40B4-BE49-F238E27FC236}">
-                <a16:creationId xmlns="" xmlns:a16="http://schemas.microsoft.com/office/drawing/2014/main" id="{0E4F2227-23B8-487B-B2DD-FAFA62069AEF}"/>
+                <a16:creationId xmlns:a16="http://schemas.microsoft.com/office/drawing/2014/main" id="{0E4F2227-23B8-487B-B2DD-FAFA62069AEF}"/>
               </a:ext>
             </a:extLst>
           </p:cNvPr>
@@ -2049,7 +2048,7 @@
           <p:cNvPr id="4" name="内容占位符 3">
             <a:extLst>
               <a:ext uri="{FF2B5EF4-FFF2-40B4-BE49-F238E27FC236}">
-                <a16:creationId xmlns="" xmlns:a16="http://schemas.microsoft.com/office/drawing/2014/main" id="{5BCA3B2B-FFD4-454D-82B5-F8A4FAD4AFAB}"/>
+                <a16:creationId xmlns:a16="http://schemas.microsoft.com/office/drawing/2014/main" id="{5BCA3B2B-FFD4-454D-82B5-F8A4FAD4AFAB}"/>
               </a:ext>
             </a:extLst>
           </p:cNvPr>
@@ -2111,7 +2110,7 @@
           <p:cNvPr id="5" name="文本占位符 4">
             <a:extLst>
               <a:ext uri="{FF2B5EF4-FFF2-40B4-BE49-F238E27FC236}">
-                <a16:creationId xmlns="" xmlns:a16="http://schemas.microsoft.com/office/drawing/2014/main" id="{6CACA517-FB69-474D-8ED9-F3A024D474D3}"/>
+                <a16:creationId xmlns:a16="http://schemas.microsoft.com/office/drawing/2014/main" id="{6CACA517-FB69-474D-8ED9-F3A024D474D3}"/>
               </a:ext>
             </a:extLst>
           </p:cNvPr>
@@ -2182,7 +2181,7 @@
           <p:cNvPr id="6" name="内容占位符 5">
             <a:extLst>
               <a:ext uri="{FF2B5EF4-FFF2-40B4-BE49-F238E27FC236}">
-                <a16:creationId xmlns="" xmlns:a16="http://schemas.microsoft.com/office/drawing/2014/main" id="{5193FB18-1AB9-4FEE-B4C5-300D5956F8D7}"/>
+                <a16:creationId xmlns:a16="http://schemas.microsoft.com/office/drawing/2014/main" id="{5193FB18-1AB9-4FEE-B4C5-300D5956F8D7}"/>
               </a:ext>
             </a:extLst>
           </p:cNvPr>
@@ -2244,7 +2243,7 @@
           <p:cNvPr id="7" name="日期占位符 6">
             <a:extLst>
               <a:ext uri="{FF2B5EF4-FFF2-40B4-BE49-F238E27FC236}">
-                <a16:creationId xmlns="" xmlns:a16="http://schemas.microsoft.com/office/drawing/2014/main" id="{F15052C3-8663-4375-9822-DF1BCB37581C}"/>
+                <a16:creationId xmlns:a16="http://schemas.microsoft.com/office/drawing/2014/main" id="{F15052C3-8663-4375-9822-DF1BCB37581C}"/>
               </a:ext>
             </a:extLst>
           </p:cNvPr>
@@ -2262,7 +2261,7 @@
           <a:p>
             <a:fld id="{D993279A-1075-4D69-8304-6D9EBC8FBB92}" type="datetimeFigureOut">
               <a:rPr lang="zh-CN" altLang="en-US" smtClean="0"/>
-              <a:t>2026/7/14</a:t>
+              <a:t>2026/7/15</a:t>
             </a:fld>
             <a:endParaRPr lang="zh-CN" altLang="en-US"/>
           </a:p>
@@ -2273,7 +2272,7 @@
           <p:cNvPr id="8" name="页脚占位符 7">
             <a:extLst>
               <a:ext uri="{FF2B5EF4-FFF2-40B4-BE49-F238E27FC236}">
-                <a16:creationId xmlns="" xmlns:a16="http://schemas.microsoft.com/office/drawing/2014/main" id="{A17DFB13-B6E0-4A60-A51B-6B349668BA9C}"/>
+                <a16:creationId xmlns:a16="http://schemas.microsoft.com/office/drawing/2014/main" id="{A17DFB13-B6E0-4A60-A51B-6B349668BA9C}"/>
               </a:ext>
             </a:extLst>
           </p:cNvPr>
@@ -2298,7 +2297,7 @@
           <p:cNvPr id="9" name="灯片编号占位符 8">
             <a:extLst>
               <a:ext uri="{FF2B5EF4-FFF2-40B4-BE49-F238E27FC236}">
-                <a16:creationId xmlns="" xmlns:a16="http://schemas.microsoft.com/office/drawing/2014/main" id="{DBD23DB3-EFFD-4A58-8967-ED07CB65AFEF}"/>
+                <a16:creationId xmlns:a16="http://schemas.microsoft.com/office/drawing/2014/main" id="{DBD23DB3-EFFD-4A58-8967-ED07CB65AFEF}"/>
               </a:ext>
             </a:extLst>
           </p:cNvPr>
@@ -2357,7 +2356,7 @@
           <p:cNvPr id="2" name="标题 1">
             <a:extLst>
               <a:ext uri="{FF2B5EF4-FFF2-40B4-BE49-F238E27FC236}">
-                <a16:creationId xmlns="" xmlns:a16="http://schemas.microsoft.com/office/drawing/2014/main" id="{51C5A552-D46C-441E-ABA9-252F4D870F47}"/>
+                <a16:creationId xmlns:a16="http://schemas.microsoft.com/office/drawing/2014/main" id="{51C5A552-D46C-441E-ABA9-252F4D870F47}"/>
               </a:ext>
             </a:extLst>
           </p:cNvPr>
@@ -2385,7 +2384,7 @@
           <p:cNvPr id="3" name="日期占位符 2">
             <a:extLst>
               <a:ext uri="{FF2B5EF4-FFF2-40B4-BE49-F238E27FC236}">
-                <a16:creationId xmlns="" xmlns:a16="http://schemas.microsoft.com/office/drawing/2014/main" id="{59E27567-6F25-482F-8358-10F3BB7F99FC}"/>
+                <a16:creationId xmlns:a16="http://schemas.microsoft.com/office/drawing/2014/main" id="{59E27567-6F25-482F-8358-10F3BB7F99FC}"/>
               </a:ext>
             </a:extLst>
           </p:cNvPr>
@@ -2403,7 +2402,7 @@
           <a:p>
             <a:fld id="{D993279A-1075-4D69-8304-6D9EBC8FBB92}" type="datetimeFigureOut">
               <a:rPr lang="zh-CN" altLang="en-US" smtClean="0"/>
-              <a:t>2026/7/14</a:t>
+              <a:t>2026/7/15</a:t>
             </a:fld>
             <a:endParaRPr lang="zh-CN" altLang="en-US"/>
           </a:p>
@@ -2414,7 +2413,7 @@
           <p:cNvPr id="4" name="页脚占位符 3">
             <a:extLst>
               <a:ext uri="{FF2B5EF4-FFF2-40B4-BE49-F238E27FC236}">
-                <a16:creationId xmlns="" xmlns:a16="http://schemas.microsoft.com/office/drawing/2014/main" id="{5DF33EB9-0EEE-445F-87E9-B7EE8F23F47B}"/>
+                <a16:creationId xmlns:a16="http://schemas.microsoft.com/office/drawing/2014/main" id="{5DF33EB9-0EEE-445F-87E9-B7EE8F23F47B}"/>
               </a:ext>
             </a:extLst>
           </p:cNvPr>
@@ -2439,7 +2438,7 @@
           <p:cNvPr id="5" name="灯片编号占位符 4">
             <a:extLst>
               <a:ext uri="{FF2B5EF4-FFF2-40B4-BE49-F238E27FC236}">
-                <a16:creationId xmlns="" xmlns:a16="http://schemas.microsoft.com/office/drawing/2014/main" id="{A9FC5A9E-3DEE-4BE2-8776-F102C221BB49}"/>
+                <a16:creationId xmlns:a16="http://schemas.microsoft.com/office/drawing/2014/main" id="{A9FC5A9E-3DEE-4BE2-8776-F102C221BB49}"/>
               </a:ext>
             </a:extLst>
           </p:cNvPr>
@@ -2498,7 +2497,7 @@
           <p:cNvPr id="2" name="日期占位符 1">
             <a:extLst>
               <a:ext uri="{FF2B5EF4-FFF2-40B4-BE49-F238E27FC236}">
-                <a16:creationId xmlns="" xmlns:a16="http://schemas.microsoft.com/office/drawing/2014/main" id="{17F4D103-63DB-4E29-AB60-94510A38CAE3}"/>
+                <a16:creationId xmlns:a16="http://schemas.microsoft.com/office/drawing/2014/main" id="{17F4D103-63DB-4E29-AB60-94510A38CAE3}"/>
               </a:ext>
             </a:extLst>
           </p:cNvPr>
@@ -2516,7 +2515,7 @@
           <a:p>
             <a:fld id="{D993279A-1075-4D69-8304-6D9EBC8FBB92}" type="datetimeFigureOut">
               <a:rPr lang="zh-CN" altLang="en-US" smtClean="0"/>
-              <a:t>2026/7/14</a:t>
+              <a:t>2026/7/15</a:t>
             </a:fld>
             <a:endParaRPr lang="zh-CN" altLang="en-US"/>
           </a:p>
@@ -2527,7 +2526,7 @@
           <p:cNvPr id="3" name="页脚占位符 2">
             <a:extLst>
               <a:ext uri="{FF2B5EF4-FFF2-40B4-BE49-F238E27FC236}">
-                <a16:creationId xmlns="" xmlns:a16="http://schemas.microsoft.com/office/drawing/2014/main" id="{C0C4E14F-8F6F-46FF-87A3-8388C0986D9A}"/>
+                <a16:creationId xmlns:a16="http://schemas.microsoft.com/office/drawing/2014/main" id="{C0C4E14F-8F6F-46FF-87A3-8388C0986D9A}"/>
               </a:ext>
             </a:extLst>
           </p:cNvPr>
@@ -2552,7 +2551,7 @@
           <p:cNvPr id="4" name="灯片编号占位符 3">
             <a:extLst>
               <a:ext uri="{FF2B5EF4-FFF2-40B4-BE49-F238E27FC236}">
-                <a16:creationId xmlns="" xmlns:a16="http://schemas.microsoft.com/office/drawing/2014/main" id="{8DDE86F7-2B44-4B49-83B5-A9D5B972A100}"/>
+                <a16:creationId xmlns:a16="http://schemas.microsoft.com/office/drawing/2014/main" id="{8DDE86F7-2B44-4B49-83B5-A9D5B972A100}"/>
               </a:ext>
             </a:extLst>
           </p:cNvPr>
@@ -2611,7 +2610,7 @@
           <p:cNvPr id="2" name="标题 1">
             <a:extLst>
               <a:ext uri="{FF2B5EF4-FFF2-40B4-BE49-F238E27FC236}">
-                <a16:creationId xmlns="" xmlns:a16="http://schemas.microsoft.com/office/drawing/2014/main" id="{D5568191-0F6C-414C-97F5-0E50B5D3F76E}"/>
+                <a16:creationId xmlns:a16="http://schemas.microsoft.com/office/drawing/2014/main" id="{D5568191-0F6C-414C-97F5-0E50B5D3F76E}"/>
               </a:ext>
             </a:extLst>
           </p:cNvPr>
@@ -2648,7 +2647,7 @@
           <p:cNvPr id="3" name="内容占位符 2">
             <a:extLst>
               <a:ext uri="{FF2B5EF4-FFF2-40B4-BE49-F238E27FC236}">
-                <a16:creationId xmlns="" xmlns:a16="http://schemas.microsoft.com/office/drawing/2014/main" id="{532AC296-366D-4320-93E9-B809BDC94CB2}"/>
+                <a16:creationId xmlns:a16="http://schemas.microsoft.com/office/drawing/2014/main" id="{532AC296-366D-4320-93E9-B809BDC94CB2}"/>
               </a:ext>
             </a:extLst>
           </p:cNvPr>
@@ -2738,7 +2737,7 @@
           <p:cNvPr id="4" name="文本占位符 3">
             <a:extLst>
               <a:ext uri="{FF2B5EF4-FFF2-40B4-BE49-F238E27FC236}">
-                <a16:creationId xmlns="" xmlns:a16="http://schemas.microsoft.com/office/drawing/2014/main" id="{0063932B-C39C-4195-9F36-A8464378D8C4}"/>
+                <a16:creationId xmlns:a16="http://schemas.microsoft.com/office/drawing/2014/main" id="{0063932B-C39C-4195-9F36-A8464378D8C4}"/>
               </a:ext>
             </a:extLst>
           </p:cNvPr>
@@ -2809,7 +2808,7 @@
           <p:cNvPr id="5" name="日期占位符 4">
             <a:extLst>
               <a:ext uri="{FF2B5EF4-FFF2-40B4-BE49-F238E27FC236}">
-                <a16:creationId xmlns="" xmlns:a16="http://schemas.microsoft.com/office/drawing/2014/main" id="{A0B1CCD8-2A36-48D7-B593-AACA0D70EAD7}"/>
+                <a16:creationId xmlns:a16="http://schemas.microsoft.com/office/drawing/2014/main" id="{A0B1CCD8-2A36-48D7-B593-AACA0D70EAD7}"/>
               </a:ext>
             </a:extLst>
           </p:cNvPr>
@@ -2827,7 +2826,7 @@
           <a:p>
             <a:fld id="{D993279A-1075-4D69-8304-6D9EBC8FBB92}" type="datetimeFigureOut">
               <a:rPr lang="zh-CN" altLang="en-US" smtClean="0"/>
-              <a:t>2026/7/14</a:t>
+              <a:t>2026/7/15</a:t>
             </a:fld>
             <a:endParaRPr lang="zh-CN" altLang="en-US"/>
           </a:p>
@@ -2838,7 +2837,7 @@
           <p:cNvPr id="6" name="页脚占位符 5">
             <a:extLst>
               <a:ext uri="{FF2B5EF4-FFF2-40B4-BE49-F238E27FC236}">
-                <a16:creationId xmlns="" xmlns:a16="http://schemas.microsoft.com/office/drawing/2014/main" id="{5C50A4F1-2C73-43CE-A916-C9E07B3ADDC7}"/>
+                <a16:creationId xmlns:a16="http://schemas.microsoft.com/office/drawing/2014/main" id="{5C50A4F1-2C73-43CE-A916-C9E07B3ADDC7}"/>
               </a:ext>
             </a:extLst>
           </p:cNvPr>
@@ -2863,7 +2862,7 @@
           <p:cNvPr id="7" name="灯片编号占位符 6">
             <a:extLst>
               <a:ext uri="{FF2B5EF4-FFF2-40B4-BE49-F238E27FC236}">
-                <a16:creationId xmlns="" xmlns:a16="http://schemas.microsoft.com/office/drawing/2014/main" id="{CBA87266-2570-4E71-BFBC-6AA64821C77B}"/>
+                <a16:creationId xmlns:a16="http://schemas.microsoft.com/office/drawing/2014/main" id="{CBA87266-2570-4E71-BFBC-6AA64821C77B}"/>
               </a:ext>
             </a:extLst>
           </p:cNvPr>
@@ -2922,7 +2921,7 @@
           <p:cNvPr id="2" name="标题 1">
             <a:extLst>
               <a:ext uri="{FF2B5EF4-FFF2-40B4-BE49-F238E27FC236}">
-                <a16:creationId xmlns="" xmlns:a16="http://schemas.microsoft.com/office/drawing/2014/main" id="{EE0599B2-24E7-4391-8F55-0A344B747E4C}"/>
+                <a16:creationId xmlns:a16="http://schemas.microsoft.com/office/drawing/2014/main" id="{EE0599B2-24E7-4391-8F55-0A344B747E4C}"/>
               </a:ext>
             </a:extLst>
           </p:cNvPr>
@@ -2959,7 +2958,7 @@
           <p:cNvPr id="3" name="图片占位符 2">
             <a:extLst>
               <a:ext uri="{FF2B5EF4-FFF2-40B4-BE49-F238E27FC236}">
-                <a16:creationId xmlns="" xmlns:a16="http://schemas.microsoft.com/office/drawing/2014/main" id="{BE374B4F-8A27-4406-AC7D-AB52920B6B86}"/>
+                <a16:creationId xmlns:a16="http://schemas.microsoft.com/office/drawing/2014/main" id="{BE374B4F-8A27-4406-AC7D-AB52920B6B86}"/>
               </a:ext>
             </a:extLst>
           </p:cNvPr>
@@ -3026,7 +3025,7 @@
           <p:cNvPr id="4" name="文本占位符 3">
             <a:extLst>
               <a:ext uri="{FF2B5EF4-FFF2-40B4-BE49-F238E27FC236}">
-                <a16:creationId xmlns="" xmlns:a16="http://schemas.microsoft.com/office/drawing/2014/main" id="{305818E5-25C3-4991-8934-281EA40C8400}"/>
+                <a16:creationId xmlns:a16="http://schemas.microsoft.com/office/drawing/2014/main" id="{305818E5-25C3-4991-8934-281EA40C8400}"/>
               </a:ext>
             </a:extLst>
           </p:cNvPr>
@@ -3097,7 +3096,7 @@
           <p:cNvPr id="5" name="日期占位符 4">
             <a:extLst>
               <a:ext uri="{FF2B5EF4-FFF2-40B4-BE49-F238E27FC236}">
-                <a16:creationId xmlns="" xmlns:a16="http://schemas.microsoft.com/office/drawing/2014/main" id="{941301B6-1149-4DDD-9C1C-BC94F79DF1B1}"/>
+                <a16:creationId xmlns:a16="http://schemas.microsoft.com/office/drawing/2014/main" id="{941301B6-1149-4DDD-9C1C-BC94F79DF1B1}"/>
               </a:ext>
             </a:extLst>
           </p:cNvPr>
@@ -3115,7 +3114,7 @@
           <a:p>
             <a:fld id="{D993279A-1075-4D69-8304-6D9EBC8FBB92}" type="datetimeFigureOut">
               <a:rPr lang="zh-CN" altLang="en-US" smtClean="0"/>
-              <a:t>2026/7/14</a:t>
+              <a:t>2026/7/15</a:t>
             </a:fld>
             <a:endParaRPr lang="zh-CN" altLang="en-US"/>
           </a:p>
@@ -3126,7 +3125,7 @@
           <p:cNvPr id="6" name="页脚占位符 5">
             <a:extLst>
               <a:ext uri="{FF2B5EF4-FFF2-40B4-BE49-F238E27FC236}">
-                <a16:creationId xmlns="" xmlns:a16="http://schemas.microsoft.com/office/drawing/2014/main" id="{A35B3B54-9B23-4A85-A22D-CFC4D62CCF59}"/>
+                <a16:creationId xmlns:a16="http://schemas.microsoft.com/office/drawing/2014/main" id="{A35B3B54-9B23-4A85-A22D-CFC4D62CCF59}"/>
               </a:ext>
             </a:extLst>
           </p:cNvPr>
@@ -3151,7 +3150,7 @@
           <p:cNvPr id="7" name="灯片编号占位符 6">
             <a:extLst>
               <a:ext uri="{FF2B5EF4-FFF2-40B4-BE49-F238E27FC236}">
-                <a16:creationId xmlns="" xmlns:a16="http://schemas.microsoft.com/office/drawing/2014/main" id="{5E3540A1-D2FC-4C4F-8730-45AE7AE81FA7}"/>
+                <a16:creationId xmlns:a16="http://schemas.microsoft.com/office/drawing/2014/main" id="{5E3540A1-D2FC-4C4F-8730-45AE7AE81FA7}"/>
               </a:ext>
             </a:extLst>
           </p:cNvPr>
@@ -3215,7 +3214,7 @@
           <p:cNvPr id="2" name="标题占位符 1">
             <a:extLst>
               <a:ext uri="{FF2B5EF4-FFF2-40B4-BE49-F238E27FC236}">
-                <a16:creationId xmlns="" xmlns:a16="http://schemas.microsoft.com/office/drawing/2014/main" id="{F9A1AFFF-38F9-4CF8-89C5-C23CD407E653}"/>
+                <a16:creationId xmlns:a16="http://schemas.microsoft.com/office/drawing/2014/main" id="{F9A1AFFF-38F9-4CF8-89C5-C23CD407E653}"/>
               </a:ext>
             </a:extLst>
           </p:cNvPr>
@@ -3253,7 +3252,7 @@
           <p:cNvPr id="3" name="文本占位符 2">
             <a:extLst>
               <a:ext uri="{FF2B5EF4-FFF2-40B4-BE49-F238E27FC236}">
-                <a16:creationId xmlns="" xmlns:a16="http://schemas.microsoft.com/office/drawing/2014/main" id="{DD5E842E-D47B-4800-8B91-BF2384D97C93}"/>
+                <a16:creationId xmlns:a16="http://schemas.microsoft.com/office/drawing/2014/main" id="{DD5E842E-D47B-4800-8B91-BF2384D97C93}"/>
               </a:ext>
             </a:extLst>
           </p:cNvPr>
@@ -3320,7 +3319,7 @@
           <p:cNvPr id="4" name="日期占位符 3">
             <a:extLst>
               <a:ext uri="{FF2B5EF4-FFF2-40B4-BE49-F238E27FC236}">
-                <a16:creationId xmlns="" xmlns:a16="http://schemas.microsoft.com/office/drawing/2014/main" id="{6FCA4C76-C2F9-4567-95EC-AD2122AE67EC}"/>
+                <a16:creationId xmlns:a16="http://schemas.microsoft.com/office/drawing/2014/main" id="{6FCA4C76-C2F9-4567-95EC-AD2122AE67EC}"/>
               </a:ext>
             </a:extLst>
           </p:cNvPr>
@@ -3356,7 +3355,7 @@
           <a:p>
             <a:fld id="{D993279A-1075-4D69-8304-6D9EBC8FBB92}" type="datetimeFigureOut">
               <a:rPr lang="zh-CN" altLang="en-US" smtClean="0"/>
-              <a:t>2026/7/14</a:t>
+              <a:t>2026/7/15</a:t>
             </a:fld>
             <a:endParaRPr lang="zh-CN" altLang="en-US"/>
           </a:p>
@@ -3367,7 +3366,7 @@
           <p:cNvPr id="5" name="页脚占位符 4">
             <a:extLst>
               <a:ext uri="{FF2B5EF4-FFF2-40B4-BE49-F238E27FC236}">
-                <a16:creationId xmlns="" xmlns:a16="http://schemas.microsoft.com/office/drawing/2014/main" id="{42914F35-1A1A-4188-8437-3AD2F48F2361}"/>
+                <a16:creationId xmlns:a16="http://schemas.microsoft.com/office/drawing/2014/main" id="{42914F35-1A1A-4188-8437-3AD2F48F2361}"/>
               </a:ext>
             </a:extLst>
           </p:cNvPr>
@@ -3410,7 +3409,7 @@
           <p:cNvPr id="6" name="灯片编号占位符 5">
             <a:extLst>
               <a:ext uri="{FF2B5EF4-FFF2-40B4-BE49-F238E27FC236}">
-                <a16:creationId xmlns="" xmlns:a16="http://schemas.microsoft.com/office/drawing/2014/main" id="{934BC865-325B-47A4-BA1C-86F68BC2983D}"/>
+                <a16:creationId xmlns:a16="http://schemas.microsoft.com/office/drawing/2014/main" id="{934BC865-325B-47A4-BA1C-86F68BC2983D}"/>
               </a:ext>
             </a:extLst>
           </p:cNvPr>
@@ -3778,7 +3777,7 @@
           <p:cNvPr id="3" name="副标题 2">
             <a:extLst>
               <a:ext uri="{FF2B5EF4-FFF2-40B4-BE49-F238E27FC236}">
-                <a16:creationId xmlns="" xmlns:a16="http://schemas.microsoft.com/office/drawing/2014/main" id="{87E166CE-5650-4880-A211-9F72AED653E3}"/>
+                <a16:creationId xmlns:a16="http://schemas.microsoft.com/office/drawing/2014/main" id="{87E166CE-5650-4880-A211-9F72AED653E3}"/>
               </a:ext>
             </a:extLst>
           </p:cNvPr>
@@ -3831,7 +3830,7 @@
           <p:cNvPr id="4" name="Text 4">
             <a:extLst>
               <a:ext uri="{FF2B5EF4-FFF2-40B4-BE49-F238E27FC236}">
-                <a16:creationId xmlns="" xmlns:a16="http://schemas.microsoft.com/office/drawing/2014/main" id="{41F9B342-E7C0-4E51-8237-C08E56CF21C0}"/>
+                <a16:creationId xmlns:a16="http://schemas.microsoft.com/office/drawing/2014/main" id="{41F9B342-E7C0-4E51-8237-C08E56CF21C0}"/>
               </a:ext>
             </a:extLst>
           </p:cNvPr>
@@ -3874,7 +3873,7 @@
           <p:cNvPr id="6" name="文本框 5">
             <a:extLst>
               <a:ext uri="{FF2B5EF4-FFF2-40B4-BE49-F238E27FC236}">
-                <a16:creationId xmlns="" xmlns:a16="http://schemas.microsoft.com/office/drawing/2014/main" id="{981CF869-3C14-4C68-A6D4-EDCE3E969CFD}"/>
+                <a16:creationId xmlns:a16="http://schemas.microsoft.com/office/drawing/2014/main" id="{981CF869-3C14-4C68-A6D4-EDCE3E969CFD}"/>
               </a:ext>
             </a:extLst>
           </p:cNvPr>
@@ -3903,27 +3902,15 @@
                 <a:cs typeface="Calibri Light" panose="020F0302020204030204" pitchFamily="34" charset="0"/>
                 <a:hlinkClick r:id="rId2"/>
               </a:rPr>
-              <a:t>https://datatracker.ietf.org/doc/draft-mcw-opsawg-icon-requirements</a:t>
-            </a:r>
-            <a:r>
-              <a:rPr lang="zh-CN" altLang="en-US" dirty="0" smtClean="0">
-                <a:latin typeface="Calibri Light" panose="020F0302020204030204" pitchFamily="34" charset="0"/>
-                <a:cs typeface="Calibri Light" panose="020F0302020204030204" pitchFamily="34" charset="0"/>
-                <a:hlinkClick r:id="rId2"/>
-              </a:rPr>
-              <a:t>/</a:t>
-            </a:r>
-            <a:r>
-              <a:rPr lang="zh-CN" altLang="en-US" dirty="0" smtClean="0">
+              <a:t>https://datatracker.ietf.org/doc/draft-mcw-opsawg-icon-requirements/</a:t>
+            </a:r>
+            <a:r>
+              <a:rPr lang="zh-CN" altLang="en-US" dirty="0">
                 <a:latin typeface="Calibri Light" panose="020F0302020204030204" pitchFamily="34" charset="0"/>
                 <a:cs typeface="Calibri Light" panose="020F0302020204030204" pitchFamily="34" charset="0"/>
               </a:rPr>
               <a:t> </a:t>
             </a:r>
-            <a:endParaRPr lang="zh-CN" altLang="en-US" dirty="0">
-              <a:latin typeface="Calibri Light" panose="020F0302020204030204" pitchFamily="34" charset="0"/>
-              <a:cs typeface="Calibri Light" panose="020F0302020204030204" pitchFamily="34" charset="0"/>
-            </a:endParaRPr>
           </a:p>
         </p:txBody>
       </p:sp>
@@ -3937,13 +3924,6 @@
   <p:clrMapOvr>
     <a:masterClrMapping/>
   </p:clrMapOvr>
-  <p:timing>
-    <p:tnLst>
-      <p:par>
-        <p:cTn id="1" dur="indefinite" restart="never" nodeType="tmRoot"/>
-      </p:par>
-    </p:tnLst>
-  </p:timing>
 </p:sld>
 </file>
 
@@ -3986,18 +3966,13 @@
           <a:p>
             <a:pPr algn="ctr"/>
             <a:r>
-              <a:rPr lang="en-US" dirty="0" smtClean="0">
+              <a:rPr lang="en-US" dirty="0">
                 <a:latin typeface="Calibri Light" panose="020F0302020204030204" pitchFamily="34" charset="0"/>
                 <a:ea typeface="Calibri Light" panose="020F0302020204030204" pitchFamily="34" charset="0"/>
                 <a:cs typeface="Calibri Light" panose="020F0302020204030204" pitchFamily="34" charset="0"/>
               </a:rPr>
               <a:t>Scope</a:t>
             </a:r>
-            <a:endParaRPr lang="en-US" dirty="0">
-              <a:latin typeface="Calibri Light" panose="020F0302020204030204" pitchFamily="34" charset="0"/>
-              <a:ea typeface="Calibri Light" panose="020F0302020204030204" pitchFamily="34" charset="0"/>
-              <a:cs typeface="Calibri Light" panose="020F0302020204030204" pitchFamily="34" charset="0"/>
-            </a:endParaRPr>
           </a:p>
         </p:txBody>
       </p:sp>
@@ -4024,48 +3999,16 @@
           <a:lstStyle/>
           <a:p>
             <a:r>
-              <a:rPr lang="en-US" altLang="zh-CN" dirty="0" smtClean="0">
-                <a:latin typeface="Calibri" panose="020F0502020204030204" pitchFamily="34" charset="0"/>
-                <a:ea typeface="Calibri" panose="020F0502020204030204" pitchFamily="34" charset="0"/>
-                <a:cs typeface="Calibri" panose="020F0502020204030204" pitchFamily="34" charset="0"/>
-              </a:rPr>
-              <a:t>Defines </a:t>
-            </a:r>
-            <a:r>
               <a:rPr lang="en-US" altLang="zh-CN" dirty="0">
                 <a:latin typeface="Calibri" panose="020F0502020204030204" pitchFamily="34" charset="0"/>
                 <a:ea typeface="Calibri" panose="020F0502020204030204" pitchFamily="34" charset="0"/>
                 <a:cs typeface="Calibri" panose="020F0502020204030204" pitchFamily="34" charset="0"/>
               </a:rPr>
-              <a:t>the architecture and </a:t>
-            </a:r>
-            <a:r>
-              <a:rPr lang="en-US" altLang="zh-CN" dirty="0" smtClean="0">
-                <a:latin typeface="Calibri" panose="020F0502020204030204" pitchFamily="34" charset="0"/>
-                <a:ea typeface="Calibri" panose="020F0502020204030204" pitchFamily="34" charset="0"/>
-                <a:cs typeface="Calibri" panose="020F0502020204030204" pitchFamily="34" charset="0"/>
-              </a:rPr>
-              <a:t>requirements </a:t>
-            </a:r>
-            <a:r>
-              <a:rPr lang="en-US" altLang="zh-CN" dirty="0">
-                <a:latin typeface="Calibri" panose="020F0502020204030204" pitchFamily="34" charset="0"/>
-                <a:ea typeface="Calibri" panose="020F0502020204030204" pitchFamily="34" charset="0"/>
-                <a:cs typeface="Calibri" panose="020F0502020204030204" pitchFamily="34" charset="0"/>
-              </a:rPr>
-              <a:t>between an agent and its </a:t>
-            </a:r>
-            <a:r>
-              <a:rPr lang="en-US" altLang="zh-CN" dirty="0" smtClean="0">
-                <a:latin typeface="Calibri" panose="020F0502020204030204" pitchFamily="34" charset="0"/>
-                <a:ea typeface="Calibri" panose="020F0502020204030204" pitchFamily="34" charset="0"/>
-                <a:cs typeface="Calibri" panose="020F0502020204030204" pitchFamily="34" charset="0"/>
-              </a:rPr>
-              <a:t>management plane </a:t>
-            </a:r>
-          </a:p>
-          <a:p>
-            <a:endParaRPr lang="en-US" dirty="0" smtClean="0">
+              <a:t>Defines the architecture and requirements between an agent and its management plane </a:t>
+            </a:r>
+          </a:p>
+          <a:p>
+            <a:endParaRPr lang="en-US" dirty="0">
               <a:latin typeface="Calibri" panose="020F0502020204030204" pitchFamily="34" charset="0"/>
               <a:ea typeface="Calibri" panose="020F0502020204030204" pitchFamily="34" charset="0"/>
               <a:cs typeface="Calibri" panose="020F0502020204030204" pitchFamily="34" charset="0"/>
@@ -4073,18 +4016,13 @@
           </a:p>
           <a:p>
             <a:r>
-              <a:rPr lang="en-US" dirty="0" smtClean="0">
+              <a:rPr lang="en-US" dirty="0">
                 <a:latin typeface="Calibri" panose="020F0502020204030204" pitchFamily="34" charset="0"/>
                 <a:ea typeface="Calibri" panose="020F0502020204030204" pitchFamily="34" charset="0"/>
                 <a:cs typeface="Calibri" panose="020F0502020204030204" pitchFamily="34" charset="0"/>
               </a:rPr>
               <a:t>Solution-neutral</a:t>
             </a:r>
-            <a:endParaRPr lang="en-US" dirty="0" smtClean="0">
-              <a:latin typeface="Calibri" panose="020F0502020204030204" pitchFamily="34" charset="0"/>
-              <a:ea typeface="Calibri" panose="020F0502020204030204" pitchFamily="34" charset="0"/>
-              <a:cs typeface="Calibri" panose="020F0502020204030204" pitchFamily="34" charset="0"/>
-            </a:endParaRPr>
           </a:p>
           <a:p>
             <a:pPr lvl="1"/>
@@ -4094,40 +4032,24 @@
                 <a:ea typeface="Calibri" panose="020F0502020204030204" pitchFamily="34" charset="0"/>
                 <a:cs typeface="Calibri" panose="020F0502020204030204" pitchFamily="34" charset="0"/>
               </a:rPr>
-              <a:t>Protocols, data model, or API choice is intentionally left for future work</a:t>
-            </a:r>
-            <a:r>
-              <a:rPr lang="en-US" dirty="0" smtClean="0">
-                <a:latin typeface="Calibri" panose="020F0502020204030204" pitchFamily="34" charset="0"/>
-                <a:ea typeface="Calibri" panose="020F0502020204030204" pitchFamily="34" charset="0"/>
-                <a:cs typeface="Calibri" panose="020F0502020204030204" pitchFamily="34" charset="0"/>
-              </a:rPr>
-              <a:t>.</a:t>
-            </a:r>
-          </a:p>
-          <a:p>
-            <a:endParaRPr lang="en-US" dirty="0" smtClean="0">
+              <a:t>Protocols, data model, or API choice is intentionally left for future work.</a:t>
+            </a:r>
+          </a:p>
+          <a:p>
+            <a:endParaRPr lang="en-US" dirty="0">
               <a:latin typeface="Calibri" panose="020F0502020204030204" pitchFamily="34" charset="0"/>
               <a:ea typeface="Calibri" panose="020F0502020204030204" pitchFamily="34" charset="0"/>
               <a:cs typeface="Calibri" panose="020F0502020204030204" pitchFamily="34" charset="0"/>
             </a:endParaRPr>
           </a:p>
           <a:p>
-            <a:r>
-              <a:rPr lang="en-US" dirty="0" smtClean="0">
-                <a:latin typeface="Calibri" panose="020F0502020204030204" pitchFamily="34" charset="0"/>
-                <a:ea typeface="Calibri" panose="020F0502020204030204" pitchFamily="34" charset="0"/>
-                <a:cs typeface="Calibri" panose="020F0502020204030204" pitchFamily="34" charset="0"/>
-              </a:rPr>
-              <a:t>Companion </a:t>
-            </a:r>
             <a:r>
               <a:rPr lang="en-US" dirty="0">
                 <a:latin typeface="Calibri" panose="020F0502020204030204" pitchFamily="34" charset="0"/>
                 <a:ea typeface="Calibri" panose="020F0502020204030204" pitchFamily="34" charset="0"/>
                 <a:cs typeface="Calibri" panose="020F0502020204030204" pitchFamily="34" charset="0"/>
               </a:rPr>
-              <a:t>Problem Statement</a:t>
+              <a:t>Companion Problem Statement</a:t>
             </a:r>
           </a:p>
           <a:p>
@@ -4170,21 +4092,8 @@
                 <a:ea typeface="Calibri" panose="020F0502020204030204" pitchFamily="34" charset="0"/>
                 <a:cs typeface="Calibri" panose="020F0502020204030204" pitchFamily="34" charset="0"/>
               </a:rPr>
-              <a:t> details the operational gaps motivating these </a:t>
-            </a:r>
-            <a:r>
-              <a:rPr lang="en-US" dirty="0" smtClean="0">
-                <a:latin typeface="Calibri" panose="020F0502020204030204" pitchFamily="34" charset="0"/>
-                <a:ea typeface="Calibri" panose="020F0502020204030204" pitchFamily="34" charset="0"/>
-                <a:cs typeface="Calibri" panose="020F0502020204030204" pitchFamily="34" charset="0"/>
-              </a:rPr>
-              <a:t>requirements</a:t>
-            </a:r>
-            <a:endParaRPr lang="en-US" dirty="0">
-              <a:latin typeface="Calibri" panose="020F0502020204030204" pitchFamily="34" charset="0"/>
-              <a:ea typeface="Calibri" panose="020F0502020204030204" pitchFamily="34" charset="0"/>
-              <a:cs typeface="Calibri" panose="020F0502020204030204" pitchFamily="34" charset="0"/>
-            </a:endParaRPr>
+              <a:t> details the operational gaps motivating these requirements</a:t>
+            </a:r>
           </a:p>
           <a:p>
             <a:pPr lvl="2"/>
@@ -4206,13 +4115,6 @@
   <p:clrMapOvr>
     <a:masterClrMapping/>
   </p:clrMapOvr>
-  <p:timing>
-    <p:tnLst>
-      <p:par>
-        <p:cTn id="1" dur="indefinite" restart="never" nodeType="tmRoot"/>
-      </p:par>
-    </p:tnLst>
-  </p:timing>
 </p:sld>
 </file>
 
@@ -4238,7 +4140,7 @@
           <p:cNvPr id="2" name="标题 1">
             <a:extLst>
               <a:ext uri="{FF2B5EF4-FFF2-40B4-BE49-F238E27FC236}">
-                <a16:creationId xmlns="" xmlns:a16="http://schemas.microsoft.com/office/drawing/2014/main" id="{0102B728-6D0A-4D88-A49E-3AE905DDB017}"/>
+                <a16:creationId xmlns:a16="http://schemas.microsoft.com/office/drawing/2014/main" id="{0102B728-6D0A-4D88-A49E-3AE905DDB017}"/>
               </a:ext>
             </a:extLst>
           </p:cNvPr>
@@ -4279,7 +4181,7 @@
           <p:cNvPr id="21" name="Shape 20">
             <a:extLst>
               <a:ext uri="{FF2B5EF4-FFF2-40B4-BE49-F238E27FC236}">
-                <a16:creationId xmlns="" xmlns:a16="http://schemas.microsoft.com/office/drawing/2014/main" id="{BE393F0A-F3C3-4A84-8146-65A2F5B9C1A0}"/>
+                <a16:creationId xmlns:a16="http://schemas.microsoft.com/office/drawing/2014/main" id="{BE393F0A-F3C3-4A84-8146-65A2F5B9C1A0}"/>
               </a:ext>
             </a:extLst>
           </p:cNvPr>
@@ -4312,7 +4214,7 @@
           <p:cNvPr id="22" name="Text 21">
             <a:extLst>
               <a:ext uri="{FF2B5EF4-FFF2-40B4-BE49-F238E27FC236}">
-                <a16:creationId xmlns="" xmlns:a16="http://schemas.microsoft.com/office/drawing/2014/main" id="{9038E49F-4FAC-49B4-9ADA-A881F74F31DF}"/>
+                <a16:creationId xmlns:a16="http://schemas.microsoft.com/office/drawing/2014/main" id="{9038E49F-4FAC-49B4-9ADA-A881F74F31DF}"/>
               </a:ext>
             </a:extLst>
           </p:cNvPr>
@@ -4361,7 +4263,7 @@
           <p:cNvPr id="23" name="Shape 22">
             <a:extLst>
               <a:ext uri="{FF2B5EF4-FFF2-40B4-BE49-F238E27FC236}">
-                <a16:creationId xmlns="" xmlns:a16="http://schemas.microsoft.com/office/drawing/2014/main" id="{09DA8E31-BD8F-4396-9FC4-6CC45869B204}"/>
+                <a16:creationId xmlns:a16="http://schemas.microsoft.com/office/drawing/2014/main" id="{09DA8E31-BD8F-4396-9FC4-6CC45869B204}"/>
               </a:ext>
             </a:extLst>
           </p:cNvPr>
@@ -4394,7 +4296,7 @@
           <p:cNvPr id="24" name="Text 23">
             <a:extLst>
               <a:ext uri="{FF2B5EF4-FFF2-40B4-BE49-F238E27FC236}">
-                <a16:creationId xmlns="" xmlns:a16="http://schemas.microsoft.com/office/drawing/2014/main" id="{E40C1439-EB9A-43B2-AA3A-8EE1B5652F42}"/>
+                <a16:creationId xmlns:a16="http://schemas.microsoft.com/office/drawing/2014/main" id="{E40C1439-EB9A-43B2-AA3A-8EE1B5652F42}"/>
               </a:ext>
             </a:extLst>
           </p:cNvPr>
@@ -4420,7 +4322,7 @@
               <a:buNone/>
             </a:pPr>
             <a:r>
-              <a:rPr lang="en-US" sz="1250" b="1" dirty="0" smtClean="0">
+              <a:rPr lang="en-US" sz="1250" b="1" dirty="0">
                 <a:solidFill>
                   <a:srgbClr val="FFFFFF"/>
                 </a:solidFill>
@@ -4443,7 +4345,7 @@
           <p:cNvPr id="30" name="Shape 29">
             <a:extLst>
               <a:ext uri="{FF2B5EF4-FFF2-40B4-BE49-F238E27FC236}">
-                <a16:creationId xmlns="" xmlns:a16="http://schemas.microsoft.com/office/drawing/2014/main" id="{A6497F40-84A8-49D8-8AC1-DFA838DF2B8C}"/>
+                <a16:creationId xmlns:a16="http://schemas.microsoft.com/office/drawing/2014/main" id="{A6497F40-84A8-49D8-8AC1-DFA838DF2B8C}"/>
               </a:ext>
             </a:extLst>
           </p:cNvPr>
@@ -4476,7 +4378,7 @@
           <p:cNvPr id="31" name="Text 30">
             <a:extLst>
               <a:ext uri="{FF2B5EF4-FFF2-40B4-BE49-F238E27FC236}">
-                <a16:creationId xmlns="" xmlns:a16="http://schemas.microsoft.com/office/drawing/2014/main" id="{D8FA34BD-9341-44A4-A89C-C93F37755A15}"/>
+                <a16:creationId xmlns:a16="http://schemas.microsoft.com/office/drawing/2014/main" id="{D8FA34BD-9341-44A4-A89C-C93F37755A15}"/>
               </a:ext>
             </a:extLst>
           </p:cNvPr>
@@ -4525,7 +4427,7 @@
           <p:cNvPr id="33" name="Text 32">
             <a:extLst>
               <a:ext uri="{FF2B5EF4-FFF2-40B4-BE49-F238E27FC236}">
-                <a16:creationId xmlns="" xmlns:a16="http://schemas.microsoft.com/office/drawing/2014/main" id="{DB643E20-E179-4E84-B69F-68EC3ED12F7C}"/>
+                <a16:creationId xmlns:a16="http://schemas.microsoft.com/office/drawing/2014/main" id="{DB643E20-E179-4E84-B69F-68EC3ED12F7C}"/>
               </a:ext>
             </a:extLst>
           </p:cNvPr>
@@ -4574,7 +4476,7 @@
           <p:cNvPr id="34" name="Shape 33">
             <a:extLst>
               <a:ext uri="{FF2B5EF4-FFF2-40B4-BE49-F238E27FC236}">
-                <a16:creationId xmlns="" xmlns:a16="http://schemas.microsoft.com/office/drawing/2014/main" id="{1CE22825-30C6-4FD9-8CAC-D03ECB628822}"/>
+                <a16:creationId xmlns:a16="http://schemas.microsoft.com/office/drawing/2014/main" id="{1CE22825-30C6-4FD9-8CAC-D03ECB628822}"/>
               </a:ext>
             </a:extLst>
           </p:cNvPr>
@@ -4607,7 +4509,7 @@
           <p:cNvPr id="35" name="Text 34">
             <a:extLst>
               <a:ext uri="{FF2B5EF4-FFF2-40B4-BE49-F238E27FC236}">
-                <a16:creationId xmlns="" xmlns:a16="http://schemas.microsoft.com/office/drawing/2014/main" id="{70C80CF3-6AC4-488C-A61D-DB993BF51A3F}"/>
+                <a16:creationId xmlns:a16="http://schemas.microsoft.com/office/drawing/2014/main" id="{70C80CF3-6AC4-488C-A61D-DB993BF51A3F}"/>
               </a:ext>
             </a:extLst>
           </p:cNvPr>
@@ -4656,7 +4558,7 @@
           <p:cNvPr id="41" name="直接箭头连接符 40">
             <a:extLst>
               <a:ext uri="{FF2B5EF4-FFF2-40B4-BE49-F238E27FC236}">
-                <a16:creationId xmlns="" xmlns:a16="http://schemas.microsoft.com/office/drawing/2014/main" id="{C32315DC-1FC1-4A2E-AF69-4F5D5251C572}"/>
+                <a16:creationId xmlns:a16="http://schemas.microsoft.com/office/drawing/2014/main" id="{C32315DC-1FC1-4A2E-AF69-4F5D5251C572}"/>
               </a:ext>
             </a:extLst>
           </p:cNvPr>
@@ -4716,28 +4618,12 @@
           <a:lstStyle/>
           <a:p>
             <a:r>
-              <a:rPr lang="en-US" sz="2000" dirty="0" smtClean="0">
+              <a:rPr lang="en-US" sz="2000" dirty="0">
                 <a:latin typeface="Calibri" panose="020F0502020204030204" pitchFamily="34" charset="0"/>
                 <a:ea typeface="Calibri" panose="020F0502020204030204" pitchFamily="34" charset="0"/>
                 <a:cs typeface="Calibri" panose="020F0502020204030204" pitchFamily="34" charset="0"/>
               </a:rPr>
-              <a:t>Human </a:t>
-            </a:r>
-            <a:r>
-              <a:rPr lang="en-US" sz="2000" dirty="0" smtClean="0">
-                <a:latin typeface="Calibri" panose="020F0502020204030204" pitchFamily="34" charset="0"/>
-                <a:ea typeface="Calibri" panose="020F0502020204030204" pitchFamily="34" charset="0"/>
-                <a:cs typeface="Calibri" panose="020F0502020204030204" pitchFamily="34" charset="0"/>
-              </a:rPr>
-              <a:t>Oversight - </a:t>
-            </a:r>
-            <a:r>
-              <a:rPr lang="en-US" dirty="0" smtClean="0">
-                <a:latin typeface="Calibri" panose="020F0502020204030204" pitchFamily="34" charset="0"/>
-                <a:ea typeface="Calibri" panose="020F0502020204030204" pitchFamily="34" charset="0"/>
-                <a:cs typeface="Calibri" panose="020F0502020204030204" pitchFamily="34" charset="0"/>
-              </a:rPr>
-              <a:t>the </a:t>
+              <a:t>Human Oversight - </a:t>
             </a:r>
             <a:r>
               <a:rPr lang="en-US" dirty="0">
@@ -4745,21 +4631,8 @@
                 <a:ea typeface="Calibri" panose="020F0502020204030204" pitchFamily="34" charset="0"/>
                 <a:cs typeface="Calibri" panose="020F0502020204030204" pitchFamily="34" charset="0"/>
               </a:rPr>
-              <a:t>top-level </a:t>
-            </a:r>
-            <a:r>
-              <a:rPr lang="en-US" dirty="0" smtClean="0">
-                <a:latin typeface="Calibri" panose="020F0502020204030204" pitchFamily="34" charset="0"/>
-                <a:ea typeface="Calibri" panose="020F0502020204030204" pitchFamily="34" charset="0"/>
-                <a:cs typeface="Calibri" panose="020F0502020204030204" pitchFamily="34" charset="0"/>
-              </a:rPr>
-              <a:t>authority </a:t>
-            </a:r>
-            <a:endParaRPr lang="en-US" dirty="0" smtClean="0">
-              <a:latin typeface="Calibri" panose="020F0502020204030204" pitchFamily="34" charset="0"/>
-              <a:ea typeface="Calibri" panose="020F0502020204030204" pitchFamily="34" charset="0"/>
-              <a:cs typeface="Calibri" panose="020F0502020204030204" pitchFamily="34" charset="0"/>
-            </a:endParaRPr>
+              <a:t>the top-level authority </a:t>
+            </a:r>
           </a:p>
           <a:p>
             <a:pPr marL="342900" indent="-342900">
@@ -4767,7 +4640,7 @@
               <a:buChar char="•"/>
             </a:pPr>
             <a:r>
-              <a:rPr lang="en-US" dirty="0" smtClean="0">
+              <a:rPr lang="en-US" dirty="0">
                 <a:latin typeface="Calibri" panose="020F0502020204030204" pitchFamily="34" charset="0"/>
                 <a:ea typeface="Calibri" panose="020F0502020204030204" pitchFamily="34" charset="0"/>
                 <a:cs typeface="Calibri" panose="020F0502020204030204" pitchFamily="34" charset="0"/>
@@ -4781,20 +4654,26 @@
               <a:buChar char="•"/>
             </a:pPr>
             <a:r>
-              <a:rPr lang="en-US" dirty="0" smtClean="0">
+              <a:rPr lang="en-US" dirty="0">
                 <a:latin typeface="Calibri" panose="020F0502020204030204" pitchFamily="34" charset="0"/>
                 <a:ea typeface="Calibri" panose="020F0502020204030204" pitchFamily="34" charset="0"/>
                 <a:cs typeface="Calibri" panose="020F0502020204030204" pitchFamily="34" charset="0"/>
               </a:rPr>
-              <a:t>Policy </a:t>
-            </a:r>
-            <a:r>
-              <a:rPr lang="en-US" dirty="0" smtClean="0">
+              <a:t>Policy &amp; constraint injection</a:t>
+            </a:r>
+          </a:p>
+          <a:p>
+            <a:pPr marL="342900" indent="-342900">
+              <a:buFont typeface="Arial" panose="020B0604020202020204" pitchFamily="34" charset="0"/>
+              <a:buChar char="•"/>
+            </a:pPr>
+            <a:r>
+              <a:rPr lang="en-US" dirty="0">
                 <a:latin typeface="Calibri" panose="020F0502020204030204" pitchFamily="34" charset="0"/>
                 <a:ea typeface="Calibri" panose="020F0502020204030204" pitchFamily="34" charset="0"/>
                 <a:cs typeface="Calibri" panose="020F0502020204030204" pitchFamily="34" charset="0"/>
               </a:rPr>
-              <a:t>&amp; constraint injection</a:t>
+              <a:t>Emergency intervention trigger</a:t>
             </a:r>
           </a:p>
           <a:p>
@@ -4803,29 +4682,7 @@
               <a:buChar char="•"/>
             </a:pPr>
             <a:r>
-              <a:rPr lang="en-US" dirty="0" smtClean="0">
-                <a:latin typeface="Calibri" panose="020F0502020204030204" pitchFamily="34" charset="0"/>
-                <a:ea typeface="Calibri" panose="020F0502020204030204" pitchFamily="34" charset="0"/>
-                <a:cs typeface="Calibri" panose="020F0502020204030204" pitchFamily="34" charset="0"/>
-              </a:rPr>
-              <a:t>Emergency </a:t>
-            </a:r>
-            <a:r>
-              <a:rPr lang="en-US" dirty="0" smtClean="0">
-                <a:latin typeface="Calibri" panose="020F0502020204030204" pitchFamily="34" charset="0"/>
-                <a:ea typeface="Calibri" panose="020F0502020204030204" pitchFamily="34" charset="0"/>
-                <a:cs typeface="Calibri" panose="020F0502020204030204" pitchFamily="34" charset="0"/>
-              </a:rPr>
-              <a:t>intervention trigger</a:t>
-            </a:r>
-          </a:p>
-          <a:p>
-            <a:pPr marL="342900" indent="-342900">
-              <a:buFont typeface="Arial" panose="020B0604020202020204" pitchFamily="34" charset="0"/>
-              <a:buChar char="•"/>
-            </a:pPr>
-            <a:r>
-              <a:rPr lang="en-US" altLang="zh-CN" dirty="0" smtClean="0">
+              <a:rPr lang="en-US" altLang="zh-CN" dirty="0">
                 <a:latin typeface="Calibri" panose="020F0502020204030204" pitchFamily="34" charset="0"/>
                 <a:ea typeface="Calibri" panose="020F0502020204030204" pitchFamily="34" charset="0"/>
                 <a:cs typeface="Calibri" panose="020F0502020204030204" pitchFamily="34" charset="0"/>
@@ -4839,56 +4696,35 @@
               <a:buChar char="•"/>
             </a:pPr>
             <a:r>
-              <a:rPr lang="en-US" altLang="zh-CN" dirty="0" smtClean="0">
+              <a:rPr lang="en-US" altLang="zh-CN" dirty="0">
                 <a:latin typeface="Calibri" panose="020F0502020204030204" pitchFamily="34" charset="0"/>
                 <a:ea typeface="Calibri" panose="020F0502020204030204" pitchFamily="34" charset="0"/>
                 <a:cs typeface="Calibri" panose="020F0502020204030204" pitchFamily="34" charset="0"/>
               </a:rPr>
-              <a:t>Post-execution </a:t>
-            </a:r>
-            <a:r>
-              <a:rPr lang="en-US" altLang="zh-CN" dirty="0" smtClean="0">
+              <a:t>Post-execution feedback</a:t>
+            </a:r>
+            <a:endParaRPr lang="en-US" sz="2000" dirty="0">
+              <a:latin typeface="Calibri" panose="020F0502020204030204" pitchFamily="34" charset="0"/>
+              <a:ea typeface="Calibri" panose="020F0502020204030204" pitchFamily="34" charset="0"/>
+              <a:cs typeface="Calibri" panose="020F0502020204030204" pitchFamily="34" charset="0"/>
+            </a:endParaRPr>
+          </a:p>
+          <a:p>
+            <a:endParaRPr lang="en-US" sz="2000" dirty="0">
+              <a:latin typeface="Calibri" panose="020F0502020204030204" pitchFamily="34" charset="0"/>
+              <a:ea typeface="Calibri" panose="020F0502020204030204" pitchFamily="34" charset="0"/>
+              <a:cs typeface="Calibri" panose="020F0502020204030204" pitchFamily="34" charset="0"/>
+            </a:endParaRPr>
+          </a:p>
+          <a:p>
+            <a:r>
+              <a:rPr lang="en-US" sz="2000" dirty="0">
                 <a:latin typeface="Calibri" panose="020F0502020204030204" pitchFamily="34" charset="0"/>
                 <a:ea typeface="Calibri" panose="020F0502020204030204" pitchFamily="34" charset="0"/>
                 <a:cs typeface="Calibri" panose="020F0502020204030204" pitchFamily="34" charset="0"/>
               </a:rPr>
-              <a:t>feedback</a:t>
-            </a:r>
-            <a:endParaRPr lang="en-US" sz="2000" dirty="0" smtClean="0">
-              <a:latin typeface="Calibri" panose="020F0502020204030204" pitchFamily="34" charset="0"/>
-              <a:ea typeface="Calibri" panose="020F0502020204030204" pitchFamily="34" charset="0"/>
-              <a:cs typeface="Calibri" panose="020F0502020204030204" pitchFamily="34" charset="0"/>
-            </a:endParaRPr>
-          </a:p>
-          <a:p>
-            <a:endParaRPr lang="en-US" sz="2000" dirty="0" smtClean="0">
-              <a:latin typeface="Calibri" panose="020F0502020204030204" pitchFamily="34" charset="0"/>
-              <a:ea typeface="Calibri" panose="020F0502020204030204" pitchFamily="34" charset="0"/>
-              <a:cs typeface="Calibri" panose="020F0502020204030204" pitchFamily="34" charset="0"/>
-            </a:endParaRPr>
-          </a:p>
-          <a:p>
-            <a:r>
-              <a:rPr lang="en-US" sz="2000" dirty="0" smtClean="0">
-                <a:latin typeface="Calibri" panose="020F0502020204030204" pitchFamily="34" charset="0"/>
-                <a:ea typeface="Calibri" panose="020F0502020204030204" pitchFamily="34" charset="0"/>
-                <a:cs typeface="Calibri" panose="020F0502020204030204" pitchFamily="34" charset="0"/>
-              </a:rPr>
-              <a:t>Agent </a:t>
-            </a:r>
-            <a:r>
-              <a:rPr lang="en-US" sz="2000" dirty="0" smtClean="0">
-                <a:latin typeface="Calibri" panose="020F0502020204030204" pitchFamily="34" charset="0"/>
-                <a:ea typeface="Calibri" panose="020F0502020204030204" pitchFamily="34" charset="0"/>
-                <a:cs typeface="Calibri" panose="020F0502020204030204" pitchFamily="34" charset="0"/>
-              </a:rPr>
-              <a:t>Management Plane – agent control and observability hub</a:t>
-            </a:r>
-            <a:endParaRPr lang="en-US" sz="2000" dirty="0" smtClean="0">
-              <a:latin typeface="Calibri" panose="020F0502020204030204" pitchFamily="34" charset="0"/>
-              <a:ea typeface="Calibri" panose="020F0502020204030204" pitchFamily="34" charset="0"/>
-              <a:cs typeface="Calibri" panose="020F0502020204030204" pitchFamily="34" charset="0"/>
-            </a:endParaRPr>
+              <a:t>Agent Management Plane – agent control and observability hub</a:t>
+            </a:r>
           </a:p>
           <a:p>
             <a:pPr marL="342900" indent="-342900">
@@ -4896,7 +4732,7 @@
               <a:buChar char="•"/>
             </a:pPr>
             <a:r>
-              <a:rPr lang="en-US" dirty="0" smtClean="0">
+              <a:rPr lang="en-US" dirty="0">
                 <a:latin typeface="Calibri" panose="020F0502020204030204" pitchFamily="34" charset="0"/>
                 <a:ea typeface="Calibri" panose="020F0502020204030204" pitchFamily="34" charset="0"/>
                 <a:cs typeface="Calibri" panose="020F0502020204030204" pitchFamily="34" charset="0"/>
@@ -4910,7 +4746,7 @@
               <a:buChar char="•"/>
             </a:pPr>
             <a:r>
-              <a:rPr lang="en-US" dirty="0" smtClean="0">
+              <a:rPr lang="en-US" dirty="0">
                 <a:latin typeface="Calibri" panose="020F0502020204030204" pitchFamily="34" charset="0"/>
                 <a:ea typeface="Calibri" panose="020F0502020204030204" pitchFamily="34" charset="0"/>
                 <a:cs typeface="Calibri" panose="020F0502020204030204" pitchFamily="34" charset="0"/>
@@ -4924,7 +4760,7 @@
               <a:buChar char="•"/>
             </a:pPr>
             <a:r>
-              <a:rPr lang="en-US" dirty="0" smtClean="0">
+              <a:rPr lang="en-US" dirty="0">
                 <a:latin typeface="Calibri" panose="020F0502020204030204" pitchFamily="34" charset="0"/>
                 <a:ea typeface="Calibri" panose="020F0502020204030204" pitchFamily="34" charset="0"/>
                 <a:cs typeface="Calibri" panose="020F0502020204030204" pitchFamily="34" charset="0"/>
@@ -4937,7 +4773,7 @@
               <a:buFont typeface="Arial" panose="020B0604020202020204" pitchFamily="34" charset="0"/>
               <a:buChar char="•"/>
             </a:pPr>
-            <a:endParaRPr lang="en-US" dirty="0" smtClean="0">
+            <a:endParaRPr lang="en-US" dirty="0">
               <a:latin typeface="Calibri" panose="020F0502020204030204" pitchFamily="34" charset="0"/>
               <a:ea typeface="Calibri" panose="020F0502020204030204" pitchFamily="34" charset="0"/>
               <a:cs typeface="Calibri" panose="020F0502020204030204" pitchFamily="34" charset="0"/>
@@ -4948,7 +4784,7 @@
               <a:buFont typeface="Arial" panose="020B0604020202020204" pitchFamily="34" charset="0"/>
               <a:buChar char="•"/>
             </a:pPr>
-            <a:endParaRPr lang="en-US" sz="2000" dirty="0" smtClean="0">
+            <a:endParaRPr lang="en-US" sz="2000" dirty="0">
               <a:latin typeface="Calibri" panose="020F0502020204030204" pitchFamily="34" charset="0"/>
               <a:ea typeface="Calibri" panose="020F0502020204030204" pitchFamily="34" charset="0"/>
               <a:cs typeface="Calibri" panose="020F0502020204030204" pitchFamily="34" charset="0"/>
@@ -4956,7 +4792,7 @@
           </a:p>
           <a:p>
             <a:r>
-              <a:rPr lang="en-US" sz="2000" dirty="0" smtClean="0">
+              <a:rPr lang="en-US" sz="2000" dirty="0">
                 <a:latin typeface="Calibri" panose="020F0502020204030204" pitchFamily="34" charset="0"/>
                 <a:ea typeface="Calibri" panose="020F0502020204030204" pitchFamily="34" charset="0"/>
                 <a:cs typeface="Calibri" panose="020F0502020204030204" pitchFamily="34" charset="0"/>
@@ -4970,7 +4806,7 @@
               <a:buChar char="•"/>
             </a:pPr>
             <a:r>
-              <a:rPr lang="en-US" dirty="0" smtClean="0">
+              <a:rPr lang="en-US" dirty="0">
                 <a:latin typeface="Calibri" panose="020F0502020204030204" pitchFamily="34" charset="0"/>
                 <a:ea typeface="Calibri" panose="020F0502020204030204" pitchFamily="34" charset="0"/>
                 <a:cs typeface="Calibri" panose="020F0502020204030204" pitchFamily="34" charset="0"/>
@@ -4984,7 +4820,7 @@
               <a:buChar char="•"/>
             </a:pPr>
             <a:r>
-              <a:rPr lang="en-US" dirty="0" smtClean="0">
+              <a:rPr lang="en-US" dirty="0">
                 <a:latin typeface="Calibri" panose="020F0502020204030204" pitchFamily="34" charset="0"/>
                 <a:ea typeface="Calibri" panose="020F0502020204030204" pitchFamily="34" charset="0"/>
                 <a:cs typeface="Calibri" panose="020F0502020204030204" pitchFamily="34" charset="0"/>
@@ -4998,7 +4834,7 @@
               <a:buChar char="•"/>
             </a:pPr>
             <a:r>
-              <a:rPr lang="en-US" dirty="0" smtClean="0">
+              <a:rPr lang="en-US" dirty="0">
                 <a:latin typeface="Calibri" panose="020F0502020204030204" pitchFamily="34" charset="0"/>
                 <a:ea typeface="Calibri" panose="020F0502020204030204" pitchFamily="34" charset="0"/>
                 <a:cs typeface="Calibri" panose="020F0502020204030204" pitchFamily="34" charset="0"/>
@@ -5013,7 +4849,7 @@
           <p:cNvPr id="38" name="Text 32">
             <a:extLst>
               <a:ext uri="{FF2B5EF4-FFF2-40B4-BE49-F238E27FC236}">
-                <a16:creationId xmlns="" xmlns:a16="http://schemas.microsoft.com/office/drawing/2014/main" id="{DB643E20-E179-4E84-B69F-68EC3ED12F7C}"/>
+                <a16:creationId xmlns:a16="http://schemas.microsoft.com/office/drawing/2014/main" id="{DB643E20-E179-4E84-B69F-68EC3ED12F7C}"/>
               </a:ext>
             </a:extLst>
           </p:cNvPr>
@@ -5039,7 +4875,7 @@
               <a:buNone/>
             </a:pPr>
             <a:r>
-              <a:rPr lang="en-US" sz="1050" i="1" dirty="0" smtClean="0">
+              <a:rPr lang="en-US" sz="1050" i="1" dirty="0">
                 <a:solidFill>
                   <a:srgbClr val="5B6B78"/>
                 </a:solidFill>
@@ -5062,7 +4898,7 @@
           <p:cNvPr id="40" name="Shape 3">
             <a:extLst>
               <a:ext uri="{FF2B5EF4-FFF2-40B4-BE49-F238E27FC236}">
-                <a16:creationId xmlns="" xmlns:a16="http://schemas.microsoft.com/office/drawing/2014/main" id="{084A49AC-22B0-479D-84F4-E5240D126EB4}"/>
+                <a16:creationId xmlns:a16="http://schemas.microsoft.com/office/drawing/2014/main" id="{084A49AC-22B0-479D-84F4-E5240D126EB4}"/>
               </a:ext>
             </a:extLst>
           </p:cNvPr>
@@ -5095,7 +4931,7 @@
           <p:cNvPr id="42" name="Text 4">
             <a:extLst>
               <a:ext uri="{FF2B5EF4-FFF2-40B4-BE49-F238E27FC236}">
-                <a16:creationId xmlns="" xmlns:a16="http://schemas.microsoft.com/office/drawing/2014/main" id="{E14E1904-9F56-42DE-94AC-08636BE459DB}"/>
+                <a16:creationId xmlns:a16="http://schemas.microsoft.com/office/drawing/2014/main" id="{E14E1904-9F56-42DE-94AC-08636BE459DB}"/>
               </a:ext>
             </a:extLst>
           </p:cNvPr>
@@ -5129,18 +4965,7 @@
                 <a:ea typeface="Calibri" panose="020F0502020204030204" pitchFamily="34" charset="0"/>
                 <a:cs typeface="Calibri" panose="020F0502020204030204" pitchFamily="34" charset="0"/>
               </a:rPr>
-              <a:t>AGENT </a:t>
-            </a:r>
-            <a:r>
-              <a:rPr lang="en-US" sz="1050" b="1" kern="0" spc="150" dirty="0" smtClean="0">
-                <a:solidFill>
-                  <a:srgbClr val="065A82"/>
-                </a:solidFill>
-                <a:latin typeface="Calibri" panose="020F0502020204030204" pitchFamily="34" charset="0"/>
-                <a:ea typeface="Calibri" panose="020F0502020204030204" pitchFamily="34" charset="0"/>
-                <a:cs typeface="Calibri" panose="020F0502020204030204" pitchFamily="34" charset="0"/>
-              </a:rPr>
-              <a:t>MANAGEMENT PLANE</a:t>
+              <a:t>AGENT MANAGEMENT PLANE</a:t>
             </a:r>
             <a:endParaRPr lang="en-US" sz="1050" dirty="0">
               <a:latin typeface="Calibri" panose="020F0502020204030204" pitchFamily="34" charset="0"/>
@@ -5155,7 +4980,7 @@
           <p:cNvPr id="47" name="Shape 9">
             <a:extLst>
               <a:ext uri="{FF2B5EF4-FFF2-40B4-BE49-F238E27FC236}">
-                <a16:creationId xmlns="" xmlns:a16="http://schemas.microsoft.com/office/drawing/2014/main" id="{4C3E7FC3-82A4-44D7-9B20-FF42D54A4D31}"/>
+                <a16:creationId xmlns:a16="http://schemas.microsoft.com/office/drawing/2014/main" id="{4C3E7FC3-82A4-44D7-9B20-FF42D54A4D31}"/>
               </a:ext>
             </a:extLst>
           </p:cNvPr>
@@ -5188,7 +5013,7 @@
           <p:cNvPr id="48" name="Text 10">
             <a:extLst>
               <a:ext uri="{FF2B5EF4-FFF2-40B4-BE49-F238E27FC236}">
-                <a16:creationId xmlns="" xmlns:a16="http://schemas.microsoft.com/office/drawing/2014/main" id="{DE8F064D-56AD-4F90-AB08-0714FA4E4182}"/>
+                <a16:creationId xmlns:a16="http://schemas.microsoft.com/office/drawing/2014/main" id="{DE8F064D-56AD-4F90-AB08-0714FA4E4182}"/>
               </a:ext>
             </a:extLst>
           </p:cNvPr>
@@ -5237,7 +5062,7 @@
           <p:cNvPr id="49" name="Shape 11">
             <a:extLst>
               <a:ext uri="{FF2B5EF4-FFF2-40B4-BE49-F238E27FC236}">
-                <a16:creationId xmlns="" xmlns:a16="http://schemas.microsoft.com/office/drawing/2014/main" id="{50911C78-4C0C-4660-87F8-D05FE2DEFB5E}"/>
+                <a16:creationId xmlns:a16="http://schemas.microsoft.com/office/drawing/2014/main" id="{50911C78-4C0C-4660-87F8-D05FE2DEFB5E}"/>
               </a:ext>
             </a:extLst>
           </p:cNvPr>
@@ -5270,7 +5095,7 @@
           <p:cNvPr id="50" name="Text 12">
             <a:extLst>
               <a:ext uri="{FF2B5EF4-FFF2-40B4-BE49-F238E27FC236}">
-                <a16:creationId xmlns="" xmlns:a16="http://schemas.microsoft.com/office/drawing/2014/main" id="{C0211E05-C7AE-4C7E-916D-D648E59EAF77}"/>
+                <a16:creationId xmlns:a16="http://schemas.microsoft.com/office/drawing/2014/main" id="{C0211E05-C7AE-4C7E-916D-D648E59EAF77}"/>
               </a:ext>
             </a:extLst>
           </p:cNvPr>
@@ -5319,7 +5144,7 @@
           <p:cNvPr id="51" name="Shape 13">
             <a:extLst>
               <a:ext uri="{FF2B5EF4-FFF2-40B4-BE49-F238E27FC236}">
-                <a16:creationId xmlns="" xmlns:a16="http://schemas.microsoft.com/office/drawing/2014/main" id="{11A12F61-F2D3-4C92-92F2-93CF044584DF}"/>
+                <a16:creationId xmlns:a16="http://schemas.microsoft.com/office/drawing/2014/main" id="{11A12F61-F2D3-4C92-92F2-93CF044584DF}"/>
               </a:ext>
             </a:extLst>
           </p:cNvPr>
@@ -5352,7 +5177,7 @@
           <p:cNvPr id="52" name="Text 14">
             <a:extLst>
               <a:ext uri="{FF2B5EF4-FFF2-40B4-BE49-F238E27FC236}">
-                <a16:creationId xmlns="" xmlns:a16="http://schemas.microsoft.com/office/drawing/2014/main" id="{99537C58-24EC-4FCF-8EDF-6445F71A6305}"/>
+                <a16:creationId xmlns:a16="http://schemas.microsoft.com/office/drawing/2014/main" id="{99537C58-24EC-4FCF-8EDF-6445F71A6305}"/>
               </a:ext>
             </a:extLst>
           </p:cNvPr>
@@ -5401,7 +5226,7 @@
           <p:cNvPr id="54" name="Text 32">
             <a:extLst>
               <a:ext uri="{FF2B5EF4-FFF2-40B4-BE49-F238E27FC236}">
-                <a16:creationId xmlns="" xmlns:a16="http://schemas.microsoft.com/office/drawing/2014/main" id="{DB643E20-E179-4E84-B69F-68EC3ED12F7C}"/>
+                <a16:creationId xmlns:a16="http://schemas.microsoft.com/office/drawing/2014/main" id="{DB643E20-E179-4E84-B69F-68EC3ED12F7C}"/>
               </a:ext>
             </a:extLst>
           </p:cNvPr>
@@ -5427,7 +5252,7 @@
               <a:buNone/>
             </a:pPr>
             <a:r>
-              <a:rPr lang="en-US" sz="1050" i="1" dirty="0" smtClean="0">
+              <a:rPr lang="en-US" sz="1050" i="1" dirty="0">
                 <a:solidFill>
                   <a:srgbClr val="5B6B78"/>
                 </a:solidFill>
@@ -5450,7 +5275,7 @@
           <p:cNvPr id="55" name="Shape 5">
             <a:extLst>
               <a:ext uri="{FF2B5EF4-FFF2-40B4-BE49-F238E27FC236}">
-                <a16:creationId xmlns:a16="http://schemas.microsoft.com/office/drawing/2014/main" xmlns="" id="{311F6CCC-59F5-4E1D-90B0-63E7606D4AFD}"/>
+                <a16:creationId xmlns:a16="http://schemas.microsoft.com/office/drawing/2014/main" id="{311F6CCC-59F5-4E1D-90B0-63E7606D4AFD}"/>
               </a:ext>
             </a:extLst>
           </p:cNvPr>
@@ -5483,7 +5308,7 @@
           <p:cNvPr id="56" name="Text 6">
             <a:extLst>
               <a:ext uri="{FF2B5EF4-FFF2-40B4-BE49-F238E27FC236}">
-                <a16:creationId xmlns:a16="http://schemas.microsoft.com/office/drawing/2014/main" xmlns="" id="{3FFC70D4-DBA4-48C3-9A8E-E4EDAE9D7836}"/>
+                <a16:creationId xmlns:a16="http://schemas.microsoft.com/office/drawing/2014/main" id="{3FFC70D4-DBA4-48C3-9A8E-E4EDAE9D7836}"/>
               </a:ext>
             </a:extLst>
           </p:cNvPr>
@@ -5528,7 +5353,7 @@
           <p:cNvPr id="57" name="直接箭头连接符 56">
             <a:extLst>
               <a:ext uri="{FF2B5EF4-FFF2-40B4-BE49-F238E27FC236}">
-                <a16:creationId xmlns="" xmlns:a16="http://schemas.microsoft.com/office/drawing/2014/main" id="{C32315DC-1FC1-4A2E-AF69-4F5D5251C572}"/>
+                <a16:creationId xmlns:a16="http://schemas.microsoft.com/office/drawing/2014/main" id="{C32315DC-1FC1-4A2E-AF69-4F5D5251C572}"/>
               </a:ext>
             </a:extLst>
           </p:cNvPr>
@@ -5655,13 +5480,6 @@
   <p:clrMapOvr>
     <a:masterClrMapping/>
   </p:clrMapOvr>
-  <p:timing>
-    <p:tnLst>
-      <p:par>
-        <p:cTn id="1" dur="indefinite" restart="never" nodeType="tmRoot"/>
-      </p:par>
-    </p:tnLst>
-  </p:timing>
 </p:sld>
 </file>
 
@@ -5705,7 +5523,7 @@
           <a:lstStyle/>
           <a:p>
             <a:r>
-              <a:rPr lang="en-US" altLang="zh-CN" sz="3600" dirty="0" smtClean="0"/>
+              <a:rPr lang="en-US" altLang="zh-CN" sz="3600" dirty="0"/>
               <a:t>Deriving Requirements from Problem Statements-Agent Observability</a:t>
             </a:r>
             <a:endParaRPr lang="en-US" sz="3600" dirty="0"/>
@@ -5721,7 +5539,7 @@
           <p:nvPr>
             <p:extLst>
               <p:ext uri="{D42A27DB-BD31-4B8C-83A1-F6EECF244321}">
-                <p14:modId xmlns:p14="http://schemas.microsoft.com/office/powerpoint/2010/main" val="1413903433"/>
+                <p14:modId xmlns:p14="http://schemas.microsoft.com/office/powerpoint/2010/main" val="2136299550"/>
               </p:ext>
             </p:extLst>
           </p:nvPr>
@@ -5737,9 +5555,27 @@
                 <a:tableStyleId>{5C22544A-7EE6-4342-B048-85BDC9FD1C3A}</a:tableStyleId>
               </a:tblPr>
               <a:tblGrid>
-                <a:gridCol w="3727388"/>
-                <a:gridCol w="3326600"/>
-                <a:gridCol w="4128177"/>
+                <a:gridCol w="3727388">
+                  <a:extLst>
+                    <a:ext uri="{9D8B030D-6E8A-4147-A177-3AD203B41FA5}">
+                      <a16:colId xmlns:a16="http://schemas.microsoft.com/office/drawing/2014/main" val="20000"/>
+                    </a:ext>
+                  </a:extLst>
+                </a:gridCol>
+                <a:gridCol w="3326600">
+                  <a:extLst>
+                    <a:ext uri="{9D8B030D-6E8A-4147-A177-3AD203B41FA5}">
+                      <a16:colId xmlns:a16="http://schemas.microsoft.com/office/drawing/2014/main" val="20001"/>
+                    </a:ext>
+                  </a:extLst>
+                </a:gridCol>
+                <a:gridCol w="4128177">
+                  <a:extLst>
+                    <a:ext uri="{9D8B030D-6E8A-4147-A177-3AD203B41FA5}">
+                      <a16:colId xmlns:a16="http://schemas.microsoft.com/office/drawing/2014/main" val="20002"/>
+                    </a:ext>
+                  </a:extLst>
+                </a:gridCol>
               </a:tblGrid>
               <a:tr h="668706">
                 <a:tc>
@@ -5748,7 +5584,7 @@
                     <a:lstStyle/>
                     <a:p>
                       <a:r>
-                        <a:rPr lang="en-US" sz="1400" dirty="0" smtClean="0">
+                        <a:rPr lang="en-US" sz="1400" dirty="0">
                           <a:solidFill>
                             <a:schemeClr val="bg1"/>
                           </a:solidFill>
@@ -5756,7 +5592,7 @@
                         <a:t>Problem</a:t>
                       </a:r>
                       <a:r>
-                        <a:rPr lang="en-US" sz="1400" baseline="0" dirty="0" smtClean="0">
+                        <a:rPr lang="en-US" sz="1400" baseline="0" dirty="0">
                           <a:solidFill>
                             <a:schemeClr val="bg1"/>
                           </a:solidFill>
@@ -5766,7 +5602,7 @@
                     </a:p>
                     <a:p>
                       <a:r>
-                        <a:rPr lang="en-US" sz="1400" baseline="0" dirty="0" smtClean="0">
+                        <a:rPr lang="en-US" sz="1400" baseline="0" dirty="0">
                           <a:solidFill>
                             <a:schemeClr val="bg1"/>
                           </a:solidFill>
@@ -5774,7 +5610,7 @@
                         <a:t>I-D. </a:t>
                       </a:r>
                       <a:r>
-                        <a:rPr lang="en-US" sz="1400" baseline="0" dirty="0" err="1" smtClean="0">
+                        <a:rPr lang="en-US" sz="1400" baseline="0" dirty="0" err="1">
                           <a:solidFill>
                             <a:schemeClr val="bg1"/>
                           </a:solidFill>
@@ -5782,7 +5618,7 @@
                         <a:t>wnd</a:t>
                       </a:r>
                       <a:r>
-                        <a:rPr lang="en-US" sz="1400" baseline="0" dirty="0" smtClean="0">
+                        <a:rPr lang="en-US" sz="1400" baseline="0" dirty="0">
                           <a:solidFill>
                             <a:schemeClr val="bg1"/>
                           </a:solidFill>
@@ -5790,7 +5626,7 @@
                         <a:t>-opsawg-icon-</a:t>
                       </a:r>
                       <a:r>
-                        <a:rPr lang="en-US" sz="1400" baseline="0" dirty="0" err="1" smtClean="0">
+                        <a:rPr lang="en-US" sz="1400" baseline="0" dirty="0" err="1">
                           <a:solidFill>
                             <a:schemeClr val="bg1"/>
                           </a:solidFill>
@@ -5862,25 +5698,25 @@
                     <a:lstStyle/>
                     <a:p>
                       <a:r>
-                        <a:rPr lang="en-US" sz="1400" dirty="0" smtClean="0"/>
+                        <a:rPr lang="en-US" sz="1400" dirty="0"/>
                         <a:t>Essential Requirement</a:t>
                       </a:r>
                     </a:p>
                     <a:p>
                       <a:r>
-                        <a:rPr lang="en-US" sz="1400" dirty="0" smtClean="0"/>
+                        <a:rPr lang="en-US" sz="1400" dirty="0"/>
                         <a:t>I-D.</a:t>
                       </a:r>
                       <a:r>
-                        <a:rPr lang="en-US" sz="1400" baseline="0" dirty="0" smtClean="0"/>
+                        <a:rPr lang="en-US" sz="1400" baseline="0" dirty="0"/>
                         <a:t> </a:t>
                       </a:r>
                       <a:r>
-                        <a:rPr lang="en-US" sz="1400" baseline="0" dirty="0" err="1" smtClean="0"/>
+                        <a:rPr lang="en-US" sz="1400" baseline="0" dirty="0" err="1"/>
                         <a:t>mcw</a:t>
                       </a:r>
                       <a:r>
-                        <a:rPr lang="en-US" sz="1400" baseline="0" dirty="0" smtClean="0"/>
+                        <a:rPr lang="en-US" sz="1400" baseline="0" dirty="0"/>
                         <a:t>-opsawg-icon-requirements</a:t>
                       </a:r>
                       <a:endParaRPr lang="en-US" sz="1400" dirty="0"/>
@@ -5944,10 +5780,13 @@
                     <a:lstStyle/>
                     <a:p>
                       <a:r>
-                        <a:rPr lang="en-US" sz="1400" dirty="0" smtClean="0"/>
+                        <a:rPr lang="en-US" altLang="zh-CN" sz="1400" dirty="0"/>
+                        <a:t>Requirement </a:t>
+                      </a:r>
+                      <a:r>
+                        <a:rPr lang="en-US" sz="1400" dirty="0"/>
                         <a:t>Description</a:t>
                       </a:r>
-                      <a:endParaRPr lang="en-US" sz="1400" dirty="0"/>
                     </a:p>
                   </a:txBody>
                   <a:tcPr>
@@ -6002,6 +5841,11 @@
                     </a:solidFill>
                   </a:tcPr>
                 </a:tc>
+                <a:extLst>
+                  <a:ext uri="{0D108BD9-81ED-4DB2-BD59-A6C34878D82A}">
+                    <a16:rowId xmlns:a16="http://schemas.microsoft.com/office/drawing/2014/main" val="10000"/>
+                  </a:ext>
+                </a:extLst>
               </a:tr>
               <a:tr h="848115">
                 <a:tc>
@@ -6010,10 +5854,9 @@
                     <a:lstStyle/>
                     <a:p>
                       <a:r>
-                        <a:rPr lang="en-US" sz="1400" dirty="0" smtClean="0"/>
+                        <a:rPr lang="en-US" sz="1400" dirty="0"/>
                         <a:t>3.1.1 Limited Transparency in Planning and Decision-Making</a:t>
                       </a:r>
-                      <a:endParaRPr lang="en-US" sz="1400" dirty="0"/>
                     </a:p>
                   </a:txBody>
                   <a:tcPr>
@@ -6080,7 +5923,7 @@
                     <a:lstStyle/>
                     <a:p>
                       <a:r>
-                        <a:rPr lang="en-US" sz="1400" dirty="0" smtClean="0"/>
+                        <a:rPr lang="en-US" sz="1400" dirty="0"/>
                         <a:t>OBS-1: Execution Trajectory Capture</a:t>
                       </a:r>
                     </a:p>
@@ -6149,10 +5992,9 @@
                     <a:lstStyle/>
                     <a:p>
                       <a:r>
-                        <a:rPr lang="en-US" sz="1400" dirty="0" smtClean="0"/>
-                        <a:t>The full path visible, including the plan, the invoked tools/skills, generated configuration change, and the resulting state</a:t>
+                        <a:rPr lang="en-US" sz="1400" dirty="0"/>
+                        <a:t>The full path visible, including the plan, the invoked tools/skills, generated configuration change, and the resulting operational state</a:t>
                       </a:r>
-                      <a:endParaRPr lang="en-US" sz="1400" dirty="0"/>
                     </a:p>
                   </a:txBody>
                   <a:tcPr>
@@ -6213,6 +6055,11 @@
                     </a:solidFill>
                   </a:tcPr>
                 </a:tc>
+                <a:extLst>
+                  <a:ext uri="{0D108BD9-81ED-4DB2-BD59-A6C34878D82A}">
+                    <a16:rowId xmlns:a16="http://schemas.microsoft.com/office/drawing/2014/main" val="10001"/>
+                  </a:ext>
+                </a:extLst>
               </a:tr>
               <a:tr h="1095482">
                 <a:tc>
@@ -6221,19 +6068,19 @@
                     <a:lstStyle/>
                     <a:p>
                       <a:r>
-                        <a:rPr lang="en-US" sz="1400" dirty="0" smtClean="0"/>
+                        <a:rPr lang="en-US" sz="1400" dirty="0"/>
                         <a:t>5.1</a:t>
                       </a:r>
                       <a:r>
-                        <a:rPr lang="en-US" sz="1400" baseline="0" dirty="0" smtClean="0"/>
+                        <a:rPr lang="en-US" sz="1400" baseline="0" dirty="0"/>
                         <a:t> </a:t>
                       </a:r>
                       <a:r>
-                        <a:rPr lang="en-US" sz="1400" baseline="0" dirty="0" err="1" smtClean="0"/>
+                        <a:rPr lang="en-US" sz="1400" baseline="0" dirty="0" err="1"/>
                         <a:t>OpenTelemetry</a:t>
                       </a:r>
                       <a:r>
-                        <a:rPr lang="en-US" altLang="zh-CN" sz="1400" baseline="0" dirty="0" smtClean="0"/>
+                        <a:rPr lang="en-US" altLang="zh-CN" sz="1400" baseline="0" dirty="0"/>
                         <a:t> only captures the execution process, not the operational motivation.</a:t>
                       </a:r>
                       <a:endParaRPr lang="en-US" sz="1400" dirty="0"/>
@@ -6303,7 +6150,7 @@
                     <a:lstStyle/>
                     <a:p>
                       <a:r>
-                        <a:rPr lang="en-US" sz="1400" dirty="0" smtClean="0"/>
+                        <a:rPr lang="en-US" sz="1400" dirty="0"/>
                         <a:t>OBS-2: Reasoning Provenance Capture</a:t>
                       </a:r>
                     </a:p>
@@ -6372,7 +6219,7 @@
                     <a:lstStyle/>
                     <a:p>
                       <a:r>
-                        <a:rPr lang="en-US" sz="1400" dirty="0" smtClean="0"/>
+                        <a:rPr lang="en-US" sz="1400" dirty="0"/>
                         <a:t>Exposes why a decision was made — the operational signals (e.g., alarms, incidents, telemetry streams) and confidence level behind a specific network action.</a:t>
                       </a:r>
                     </a:p>
@@ -6435,6 +6282,11 @@
                     </a:solidFill>
                   </a:tcPr>
                 </a:tc>
+                <a:extLst>
+                  <a:ext uri="{0D108BD9-81ED-4DB2-BD59-A6C34878D82A}">
+                    <a16:rowId xmlns:a16="http://schemas.microsoft.com/office/drawing/2014/main" val="10002"/>
+                  </a:ext>
+                </a:extLst>
               </a:tr>
               <a:tr h="848115">
                 <a:tc>
@@ -6443,11 +6295,11 @@
                     <a:lstStyle/>
                     <a:p>
                       <a:r>
-                        <a:rPr lang="en-US" sz="1400" dirty="0" smtClean="0"/>
+                        <a:rPr lang="en-US" sz="1400" dirty="0"/>
                         <a:t>5.1 lacks</a:t>
                       </a:r>
                       <a:r>
-                        <a:rPr lang="en-US" sz="1400" baseline="0" dirty="0" smtClean="0"/>
+                        <a:rPr lang="en-US" sz="1400" baseline="0" dirty="0"/>
                         <a:t> native support for observing metrics such as an agent’s reasoning logic and internal confidence levels</a:t>
                       </a:r>
                       <a:endParaRPr lang="en-US" sz="1400" dirty="0"/>
@@ -6517,7 +6369,7 @@
                     <a:lstStyle/>
                     <a:p>
                       <a:r>
-                        <a:rPr lang="en-US" sz="1400" dirty="0" smtClean="0"/>
+                        <a:rPr lang="en-US" sz="1400" dirty="0"/>
                         <a:t>OBS-3: Operational Metrics Collection</a:t>
                       </a:r>
                     </a:p>
@@ -6586,10 +6438,9 @@
                     <a:lstStyle/>
                     <a:p>
                       <a:r>
-                        <a:rPr lang="en-US" sz="1400" dirty="0" smtClean="0"/>
-                        <a:t>Tracks an agent's own operational health and performance</a:t>
+                        <a:rPr lang="en-US" sz="1400" dirty="0"/>
+                        <a:t>Tracks an agent’s operational health and performance when performing specific network operations.</a:t>
                       </a:r>
-                      <a:endParaRPr lang="en-US" sz="1400" dirty="0"/>
                     </a:p>
                   </a:txBody>
                   <a:tcPr>
@@ -6650,6 +6501,11 @@
                     </a:solidFill>
                   </a:tcPr>
                 </a:tc>
+                <a:extLst>
+                  <a:ext uri="{0D108BD9-81ED-4DB2-BD59-A6C34878D82A}">
+                    <a16:rowId xmlns:a16="http://schemas.microsoft.com/office/drawing/2014/main" val="10003"/>
+                  </a:ext>
+                </a:extLst>
               </a:tr>
               <a:tr h="704897">
                 <a:tc>
@@ -6658,10 +6514,9 @@
                     <a:lstStyle/>
                     <a:p>
                       <a:r>
-                        <a:rPr lang="en-US" sz="1400" dirty="0" smtClean="0"/>
+                        <a:rPr lang="en-US" sz="1400" dirty="0"/>
                         <a:t>3.1.2. Ambiguity of Accountability Attribution</a:t>
                       </a:r>
-                      <a:endParaRPr lang="en-US" sz="1400" dirty="0"/>
                     </a:p>
                   </a:txBody>
                   <a:tcPr>
@@ -6728,7 +6583,7 @@
                     <a:lstStyle/>
                     <a:p>
                       <a:r>
-                        <a:rPr lang="en-US" sz="1400" dirty="0" smtClean="0"/>
+                        <a:rPr lang="en-US" sz="1400" dirty="0"/>
                         <a:t>OBS-4: Auditability and Accountability</a:t>
                       </a:r>
                     </a:p>
@@ -6797,10 +6652,9 @@
                     <a:lstStyle/>
                     <a:p>
                       <a:r>
-                        <a:rPr lang="en-US" sz="1400" dirty="0" smtClean="0"/>
+                        <a:rPr lang="en-US" sz="1400" dirty="0"/>
                         <a:t>attribution of failures to responsible entities</a:t>
                       </a:r>
-                      <a:endParaRPr lang="en-US" sz="1400" dirty="0"/>
                     </a:p>
                   </a:txBody>
                   <a:tcPr>
@@ -6861,6 +6715,11 @@
                     </a:solidFill>
                   </a:tcPr>
                 </a:tc>
+                <a:extLst>
+                  <a:ext uri="{0D108BD9-81ED-4DB2-BD59-A6C34878D82A}">
+                    <a16:rowId xmlns:a16="http://schemas.microsoft.com/office/drawing/2014/main" val="10004"/>
+                  </a:ext>
+                </a:extLst>
               </a:tr>
             </a:tbl>
           </a:graphicData>
@@ -6895,11 +6754,6 @@
               </a:rPr>
               <a:t>See what agents did, why they did it, and how they're performing.</a:t>
             </a:r>
-            <a:endParaRPr lang="en-US" altLang="zh-CN" sz="2400" dirty="0">
-              <a:latin typeface="Calibri" panose="020F0502020204030204" pitchFamily="34" charset="0"/>
-              <a:ea typeface="Calibri" panose="020F0502020204030204" pitchFamily="34" charset="0"/>
-              <a:cs typeface="Calibri" panose="020F0502020204030204" pitchFamily="34" charset="0"/>
-            </a:endParaRPr>
           </a:p>
         </p:txBody>
       </p:sp>
@@ -6913,13 +6767,6 @@
   <p:clrMapOvr>
     <a:masterClrMapping/>
   </p:clrMapOvr>
-  <p:timing>
-    <p:tnLst>
-      <p:par>
-        <p:cTn id="1" dur="indefinite" restart="never" nodeType="tmRoot"/>
-      </p:par>
-    </p:tnLst>
-  </p:timing>
 </p:sld>
 </file>
 
@@ -6952,7 +6799,7 @@
         </p:nvSpPr>
         <p:spPr>
           <a:xfrm>
-            <a:off x="802689" y="6939"/>
+            <a:off x="802689" y="-50211"/>
             <a:ext cx="10515600" cy="1325563"/>
           </a:xfrm>
         </p:spPr>
@@ -6963,7 +6810,7 @@
           <a:lstStyle/>
           <a:p>
             <a:r>
-              <a:rPr lang="en-US" altLang="zh-CN" sz="3600" dirty="0" smtClean="0"/>
+              <a:rPr lang="en-US" altLang="zh-CN" sz="3600" dirty="0"/>
               <a:t>Deriving Requirements from Problem Statements-Agent Control</a:t>
             </a:r>
             <a:endParaRPr lang="en-US" sz="3600" dirty="0"/>
@@ -6979,14 +6826,14 @@
           <p:nvPr>
             <p:extLst>
               <p:ext uri="{D42A27DB-BD31-4B8C-83A1-F6EECF244321}">
-                <p14:modId xmlns:p14="http://schemas.microsoft.com/office/powerpoint/2010/main" val="1823474629"/>
+                <p14:modId xmlns:p14="http://schemas.microsoft.com/office/powerpoint/2010/main" val="3913032503"/>
               </p:ext>
             </p:extLst>
           </p:nvPr>
         </p:nvGraphicFramePr>
         <p:xfrm>
-          <a:off x="664714" y="1722777"/>
-          <a:ext cx="11182165" cy="4913399"/>
+          <a:off x="321471" y="1368743"/>
+          <a:ext cx="11549058" cy="5275897"/>
         </p:xfrm>
         <a:graphic>
           <a:graphicData uri="http://schemas.openxmlformats.org/drawingml/2006/table">
@@ -6995,18 +6842,36 @@
                 <a:tableStyleId>{5C22544A-7EE6-4342-B048-85BDC9FD1C3A}</a:tableStyleId>
               </a:tblPr>
               <a:tblGrid>
-                <a:gridCol w="3727388"/>
-                <a:gridCol w="3326600"/>
-                <a:gridCol w="4128177"/>
+                <a:gridCol w="3751714">
+                  <a:extLst>
+                    <a:ext uri="{9D8B030D-6E8A-4147-A177-3AD203B41FA5}">
+                      <a16:colId xmlns:a16="http://schemas.microsoft.com/office/drawing/2014/main" val="20000"/>
+                    </a:ext>
+                  </a:extLst>
+                </a:gridCol>
+                <a:gridCol w="3348310">
+                  <a:extLst>
+                    <a:ext uri="{9D8B030D-6E8A-4147-A177-3AD203B41FA5}">
+                      <a16:colId xmlns:a16="http://schemas.microsoft.com/office/drawing/2014/main" val="20001"/>
+                    </a:ext>
+                  </a:extLst>
+                </a:gridCol>
+                <a:gridCol w="4449034">
+                  <a:extLst>
+                    <a:ext uri="{9D8B030D-6E8A-4147-A177-3AD203B41FA5}">
+                      <a16:colId xmlns:a16="http://schemas.microsoft.com/office/drawing/2014/main" val="20002"/>
+                    </a:ext>
+                  </a:extLst>
+                </a:gridCol>
               </a:tblGrid>
-              <a:tr h="523782">
+              <a:tr h="615287">
                 <a:tc>
                   <a:txBody>
                     <a:bodyPr/>
                     <a:lstStyle/>
                     <a:p>
                       <a:r>
-                        <a:rPr lang="en-US" sz="1050" dirty="0" smtClean="0">
+                        <a:rPr lang="en-US" sz="1400" dirty="0">
                           <a:solidFill>
                             <a:schemeClr val="bg1"/>
                           </a:solidFill>
@@ -7014,7 +6879,7 @@
                         <a:t>Problem</a:t>
                       </a:r>
                       <a:r>
-                        <a:rPr lang="en-US" sz="1050" baseline="0" dirty="0" smtClean="0">
+                        <a:rPr lang="en-US" sz="1400" baseline="0" dirty="0">
                           <a:solidFill>
                             <a:schemeClr val="bg1"/>
                           </a:solidFill>
@@ -7024,7 +6889,7 @@
                     </a:p>
                     <a:p>
                       <a:r>
-                        <a:rPr lang="en-US" sz="1050" baseline="0" dirty="0" smtClean="0">
+                        <a:rPr lang="en-US" sz="1400" baseline="0" dirty="0">
                           <a:solidFill>
                             <a:schemeClr val="bg1"/>
                           </a:solidFill>
@@ -7032,7 +6897,7 @@
                         <a:t>I-D. </a:t>
                       </a:r>
                       <a:r>
-                        <a:rPr lang="en-US" sz="1050" baseline="0" dirty="0" err="1" smtClean="0">
+                        <a:rPr lang="en-US" sz="1400" baseline="0" dirty="0" err="1">
                           <a:solidFill>
                             <a:schemeClr val="bg1"/>
                           </a:solidFill>
@@ -7040,7 +6905,7 @@
                         <a:t>wnd</a:t>
                       </a:r>
                       <a:r>
-                        <a:rPr lang="en-US" sz="1050" baseline="0" dirty="0" smtClean="0">
+                        <a:rPr lang="en-US" sz="1400" baseline="0" dirty="0">
                           <a:solidFill>
                             <a:schemeClr val="bg1"/>
                           </a:solidFill>
@@ -7048,14 +6913,14 @@
                         <a:t>-opsawg-icon-</a:t>
                       </a:r>
                       <a:r>
-                        <a:rPr lang="en-US" sz="1050" baseline="0" dirty="0" err="1" smtClean="0">
+                        <a:rPr lang="en-US" sz="1400" baseline="0" dirty="0" err="1">
                           <a:solidFill>
                             <a:schemeClr val="bg1"/>
                           </a:solidFill>
                         </a:rPr>
                         <a:t>ps</a:t>
                       </a:r>
-                      <a:endParaRPr lang="en-US" sz="1050" dirty="0">
+                      <a:endParaRPr lang="en-US" sz="1400" dirty="0">
                         <a:solidFill>
                           <a:schemeClr val="bg1"/>
                         </a:solidFill>
@@ -7120,28 +6985,28 @@
                     <a:lstStyle/>
                     <a:p>
                       <a:r>
-                        <a:rPr lang="en-US" sz="1050" dirty="0" smtClean="0"/>
+                        <a:rPr lang="en-US" sz="1400" dirty="0"/>
                         <a:t>Essential Requirement</a:t>
                       </a:r>
                     </a:p>
                     <a:p>
                       <a:r>
-                        <a:rPr lang="en-US" sz="1050" dirty="0" smtClean="0"/>
+                        <a:rPr lang="en-US" sz="1400" dirty="0"/>
                         <a:t>I-D.</a:t>
                       </a:r>
                       <a:r>
-                        <a:rPr lang="en-US" sz="1050" baseline="0" dirty="0" smtClean="0"/>
+                        <a:rPr lang="en-US" sz="1400" baseline="0" dirty="0"/>
                         <a:t> </a:t>
                       </a:r>
                       <a:r>
-                        <a:rPr lang="en-US" sz="1050" baseline="0" dirty="0" err="1" smtClean="0"/>
+                        <a:rPr lang="en-US" sz="1400" baseline="0" dirty="0" err="1"/>
                         <a:t>mcw</a:t>
                       </a:r>
                       <a:r>
-                        <a:rPr lang="en-US" sz="1050" baseline="0" dirty="0" smtClean="0"/>
+                        <a:rPr lang="en-US" sz="1400" baseline="0" dirty="0"/>
                         <a:t>-opsawg-icon-requirements</a:t>
                       </a:r>
-                      <a:endParaRPr lang="en-US" sz="1050" dirty="0"/>
+                      <a:endParaRPr lang="en-US" sz="1400" dirty="0"/>
                     </a:p>
                   </a:txBody>
                   <a:tcPr>
@@ -7202,10 +7067,9 @@
                     <a:lstStyle/>
                     <a:p>
                       <a:r>
-                        <a:rPr lang="en-US" sz="1050" dirty="0" smtClean="0"/>
+                        <a:rPr lang="en-US" sz="1400" dirty="0"/>
                         <a:t>Description</a:t>
                       </a:r>
-                      <a:endParaRPr lang="en-US" sz="1050" dirty="0"/>
                     </a:p>
                   </a:txBody>
                   <a:tcPr>
@@ -7260,22 +7124,27 @@
                     </a:solidFill>
                   </a:tcPr>
                 </a:tc>
+                <a:extLst>
+                  <a:ext uri="{0D108BD9-81ED-4DB2-BD59-A6C34878D82A}">
+                    <a16:rowId xmlns:a16="http://schemas.microsoft.com/office/drawing/2014/main" val="10000"/>
+                  </a:ext>
+                </a:extLst>
               </a:tr>
-              <a:tr h="848115">
+              <a:tr h="996281">
                 <a:tc>
                   <a:txBody>
                     <a:bodyPr/>
                     <a:lstStyle/>
                     <a:p>
                       <a:r>
-                        <a:rPr lang="en-US" sz="1050" dirty="0" smtClean="0"/>
+                        <a:rPr lang="en-US" sz="1400" dirty="0"/>
                         <a:t>3.2.2</a:t>
                       </a:r>
                       <a:r>
-                        <a:rPr lang="en-US" sz="1050" baseline="0" dirty="0" smtClean="0"/>
+                        <a:rPr lang="en-US" sz="1400" baseline="0" dirty="0"/>
                         <a:t> Static IAM Limitation</a:t>
                       </a:r>
-                      <a:endParaRPr lang="en-US" sz="1050" dirty="0"/>
+                      <a:endParaRPr lang="en-US" sz="1400" dirty="0"/>
                     </a:p>
                   </a:txBody>
                   <a:tcPr>
@@ -7342,12 +7211,12 @@
                     <a:lstStyle/>
                     <a:p>
                       <a:r>
-                        <a:rPr lang="en-US" sz="1050" dirty="0" smtClean="0"/>
+                        <a:rPr lang="en-US" sz="1400" dirty="0"/>
                         <a:t>CTL-1: Access &amp; Permission</a:t>
                       </a:r>
                     </a:p>
                     <a:p>
-                      <a:endParaRPr lang="en-US" sz="1050" dirty="0" smtClean="0"/>
+                      <a:endParaRPr lang="en-US" sz="1400" dirty="0"/>
                     </a:p>
                   </a:txBody>
                   <a:tcPr>
@@ -7414,8 +7283,8 @@
                     <a:lstStyle/>
                     <a:p>
                       <a:r>
-                        <a:rPr lang="en-US" sz="1050" dirty="0" smtClean="0"/>
-                        <a:t>Limits each agent's operational scope to specific network domains/areas, devices, protocols and tools as well as network configuration access control (e.g., datastores, modules, nodes, RPCs, etc.)</a:t>
+                        <a:rPr lang="en-US" sz="1400" dirty="0"/>
+                        <a:t>Limits each agent's operational access scope to specific network domains/areas, devices, protocols and tools as well as network configuration (e.g., datastores, modules, nodes, RPCs.)</a:t>
                       </a:r>
                     </a:p>
                   </a:txBody>
@@ -7477,18 +7346,22 @@
                     </a:solidFill>
                   </a:tcPr>
                 </a:tc>
+                <a:extLst>
+                  <a:ext uri="{0D108BD9-81ED-4DB2-BD59-A6C34878D82A}">
+                    <a16:rowId xmlns:a16="http://schemas.microsoft.com/office/drawing/2014/main" val="10001"/>
+                  </a:ext>
+                </a:extLst>
               </a:tr>
-              <a:tr h="368126">
+              <a:tr h="859316">
                 <a:tc>
                   <a:txBody>
                     <a:bodyPr/>
                     <a:lstStyle/>
                     <a:p>
                       <a:r>
-                        <a:rPr lang="en-US" sz="1050" dirty="0" smtClean="0"/>
+                        <a:rPr lang="en-US" sz="1400" dirty="0"/>
                         <a:t>3.2.1. Inadequacy of Deterministic Constraints</a:t>
                       </a:r>
-                      <a:endParaRPr lang="en-US" sz="1050" dirty="0"/>
                     </a:p>
                   </a:txBody>
                   <a:tcPr>
@@ -7555,12 +7428,12 @@
                     <a:lstStyle/>
                     <a:p>
                       <a:r>
-                        <a:rPr lang="en-US" sz="1050" dirty="0" smtClean="0"/>
+                        <a:rPr lang="en-US" sz="1400" dirty="0"/>
                         <a:t>CTL-2: Intent Validation &amp; Alignment</a:t>
                       </a:r>
                     </a:p>
                     <a:p>
-                      <a:endParaRPr lang="en-US" sz="1050" dirty="0" smtClean="0"/>
+                      <a:endParaRPr lang="en-US" sz="1400" dirty="0"/>
                     </a:p>
                   </a:txBody>
                   <a:tcPr>
@@ -7627,12 +7500,12 @@
                     <a:lstStyle/>
                     <a:p>
                       <a:r>
-                        <a:rPr lang="en-US" sz="1050" dirty="0" smtClean="0"/>
+                        <a:rPr lang="en-US" sz="1400" dirty="0"/>
                         <a:t>Requires the agent to check that what it is about to configure actually matches the operational intent it was given, before committing.</a:t>
                       </a:r>
                     </a:p>
                     <a:p>
-                      <a:endParaRPr lang="en-US" sz="1050" dirty="0" smtClean="0"/>
+                      <a:endParaRPr lang="en-US" sz="1400" dirty="0"/>
                     </a:p>
                   </a:txBody>
                   <a:tcPr>
@@ -7693,18 +7566,22 @@
                     </a:solidFill>
                   </a:tcPr>
                 </a:tc>
+                <a:extLst>
+                  <a:ext uri="{0D108BD9-81ED-4DB2-BD59-A6C34878D82A}">
+                    <a16:rowId xmlns:a16="http://schemas.microsoft.com/office/drawing/2014/main" val="10002"/>
+                  </a:ext>
+                </a:extLst>
               </a:tr>
-              <a:tr h="524669">
+              <a:tr h="616329">
                 <a:tc>
                   <a:txBody>
                     <a:bodyPr/>
                     <a:lstStyle/>
                     <a:p>
                       <a:r>
-                        <a:rPr lang="en-US" sz="1050" dirty="0" smtClean="0"/>
+                        <a:rPr lang="en-US" sz="1400" dirty="0"/>
                         <a:t>3.2.1. Inadequacy of Deterministic Constraints</a:t>
                       </a:r>
-                      <a:endParaRPr lang="en-US" sz="1050" dirty="0"/>
                     </a:p>
                   </a:txBody>
                   <a:tcPr>
@@ -7771,12 +7648,12 @@
                     <a:lstStyle/>
                     <a:p>
                       <a:r>
-                        <a:rPr lang="en-US" sz="1050" dirty="0" smtClean="0"/>
-                        <a:t>CTL-3: Temporal &amp; Data/Context Validity</a:t>
+                        <a:rPr lang="en-US" sz="1400" dirty="0"/>
+                        <a:t>CTL-3: Temporal Validity</a:t>
                       </a:r>
                     </a:p>
                     <a:p>
-                      <a:endParaRPr lang="en-US" sz="1050" dirty="0" smtClean="0"/>
+                      <a:endParaRPr lang="en-US" sz="1400" dirty="0"/>
                     </a:p>
                   </a:txBody>
                   <a:tcPr>
@@ -7843,12 +7720,12 @@
                     <a:lstStyle/>
                     <a:p>
                       <a:r>
-                        <a:rPr lang="en-US" sz="1050" dirty="0" smtClean="0"/>
-                        <a:t>Ties an agent's actions to a valid operating window and to network state that is still current.</a:t>
+                        <a:rPr lang="en-US" sz="1400" dirty="0"/>
+                        <a:t>Ties an agent's actions to a valid operating window.</a:t>
                       </a:r>
                     </a:p>
                     <a:p>
-                      <a:endParaRPr lang="en-US" sz="1050" dirty="0" smtClean="0"/>
+                      <a:endParaRPr lang="en-US" sz="1400" dirty="0"/>
                     </a:p>
                   </a:txBody>
                   <a:tcPr>
@@ -7909,20 +7786,25 @@
                     </a:solidFill>
                   </a:tcPr>
                 </a:tc>
+                <a:extLst>
+                  <a:ext uri="{0D108BD9-81ED-4DB2-BD59-A6C34878D82A}">
+                    <a16:rowId xmlns:a16="http://schemas.microsoft.com/office/drawing/2014/main" val="10003"/>
+                  </a:ext>
+                </a:extLst>
               </a:tr>
-              <a:tr h="541538">
+              <a:tr h="671341">
                 <a:tc>
                   <a:txBody>
                     <a:bodyPr/>
                     <a:lstStyle/>
                     <a:p>
                       <a:r>
-                        <a:rPr lang="en-US" sz="1050" dirty="0" smtClean="0"/>
+                        <a:rPr lang="en-US" sz="1400" dirty="0"/>
                         <a:t>3.2.2 Static IAM Limitation</a:t>
                       </a:r>
                     </a:p>
                     <a:p>
-                      <a:endParaRPr lang="en-US" sz="1050" dirty="0"/>
+                      <a:endParaRPr lang="en-US" sz="1400" dirty="0"/>
                     </a:p>
                   </a:txBody>
                   <a:tcPr>
@@ -7989,12 +7871,12 @@
                     <a:lstStyle/>
                     <a:p>
                       <a:r>
-                        <a:rPr lang="en-US" sz="1050" dirty="0" smtClean="0"/>
+                        <a:rPr lang="en-US" sz="1400" dirty="0"/>
                         <a:t>CTL-4: Authorization &amp; Approval</a:t>
                       </a:r>
                     </a:p>
                     <a:p>
-                      <a:endParaRPr lang="en-US" sz="1050" dirty="0" smtClean="0"/>
+                      <a:endParaRPr lang="en-US" sz="1400" dirty="0"/>
                     </a:p>
                   </a:txBody>
                   <a:tcPr>
@@ -8061,12 +7943,12 @@
                     <a:lstStyle/>
                     <a:p>
                       <a:r>
-                        <a:rPr lang="en-US" sz="1050" dirty="0" smtClean="0"/>
+                        <a:rPr lang="en-US" sz="1400" dirty="0"/>
                         <a:t>Specifies of some network operations as requiring a human decision before execution.</a:t>
                       </a:r>
                     </a:p>
                     <a:p>
-                      <a:endParaRPr lang="en-US" sz="1050" dirty="0" smtClean="0"/>
+                      <a:endParaRPr lang="en-US" sz="1400" dirty="0"/>
                     </a:p>
                   </a:txBody>
                   <a:tcPr>
@@ -8127,20 +8009,34 @@
                     </a:solidFill>
                   </a:tcPr>
                 </a:tc>
+                <a:extLst>
+                  <a:ext uri="{0D108BD9-81ED-4DB2-BD59-A6C34878D82A}">
+                    <a16:rowId xmlns:a16="http://schemas.microsoft.com/office/drawing/2014/main" val="10004"/>
+                  </a:ext>
+                </a:extLst>
               </a:tr>
-              <a:tr h="399580">
+              <a:tr h="1286863">
                 <a:tc>
                   <a:txBody>
                     <a:bodyPr/>
                     <a:lstStyle/>
                     <a:p>
                       <a:r>
-                        <a:rPr lang="en-US" sz="1050" dirty="0" smtClean="0"/>
-                        <a:t>3.2.1. Inadequacy of Deterministic Constraints</a:t>
+                        <a:rPr lang="en-US" sz="1400" dirty="0"/>
+                        <a:t>3.2.2. Static IAM Limitation</a:t>
                       </a:r>
                     </a:p>
                     <a:p>
-                      <a:endParaRPr lang="en-US" sz="1050" dirty="0"/>
+                      <a:r>
+                        <a:rPr lang="en-US" sz="1400" dirty="0"/>
+                        <a:t>3.2.3. Fragmentation Across Heterogeneous Integration Layers</a:t>
+                      </a:r>
+                    </a:p>
+                    <a:p>
+                      <a:r>
+                        <a:rPr lang="en-US" sz="1400" dirty="0"/>
+                        <a:t>3.2.4. Multi-Vendor Dependency Risks</a:t>
+                      </a:r>
                     </a:p>
                   </a:txBody>
                   <a:tcPr>
@@ -8207,12 +8103,9 @@
                     <a:lstStyle/>
                     <a:p>
                       <a:r>
-                        <a:rPr lang="en-US" sz="1050" dirty="0" smtClean="0"/>
-                        <a:t>CTL-5: Failure &amp; Liveness</a:t>
+                        <a:rPr lang="en-US" sz="1400" dirty="0"/>
+                        <a:t>CTL-5: Global and Dynamic Boundary Adaptation</a:t>
                       </a:r>
-                    </a:p>
-                    <a:p>
-                      <a:endParaRPr lang="en-US" sz="1050" dirty="0" smtClean="0"/>
                     </a:p>
                   </a:txBody>
                   <a:tcPr>
@@ -8279,12 +8172,35 @@
                     <a:lstStyle/>
                     <a:p>
                       <a:r>
-                        <a:rPr lang="en-US" sz="1050" dirty="0" smtClean="0"/>
-                        <a:t>Defines what an agent does when it encounters predefined failure, and requires it to continuously report its liveness.</a:t>
+                        <a:rPr lang="en-US" sz="1400" dirty="0"/>
+                        <a:t>Supports the injection of global coordination control policies</a:t>
                       </a:r>
                     </a:p>
                     <a:p>
-                      <a:endParaRPr lang="en-US" sz="1050" dirty="0" smtClean="0"/>
+                      <a:r>
+                        <a:rPr lang="en-US" sz="1400" dirty="0"/>
+                        <a:t>across multi-agent environments, and enable dynamic adjustment</a:t>
+                      </a:r>
+                      <a:r>
+                        <a:rPr lang="en-US" sz="1400" baseline="0" dirty="0"/>
+                        <a:t> </a:t>
+                      </a:r>
+                      <a:r>
+                        <a:rPr lang="en-US" sz="1400" dirty="0"/>
+                        <a:t>of operational bounds (</a:t>
+                      </a:r>
+                      <a:r>
+                        <a:rPr lang="en-US" altLang="zh-CN" sz="1400" dirty="0"/>
+                        <a:t>e.g., tighten the agent's permissible access from RW to</a:t>
+                      </a:r>
+                      <a:r>
+                        <a:rPr lang="en-US" altLang="zh-CN" sz="1400" baseline="0" dirty="0"/>
+                        <a:t> RO</a:t>
+                      </a:r>
+                      <a:r>
+                        <a:rPr lang="en-US" sz="1400" dirty="0"/>
+                        <a:t>) based on the network's current operational state.</a:t>
+                      </a:r>
                     </a:p>
                   </a:txBody>
                   <a:tcPr>
@@ -8345,250 +8261,11 @@
                     </a:solidFill>
                   </a:tcPr>
                 </a:tc>
-              </a:tr>
-              <a:tr h="1095482">
-                <a:tc>
-                  <a:txBody>
-                    <a:bodyPr/>
-                    <a:lstStyle/>
-                    <a:p>
-                      <a:r>
-                        <a:rPr lang="en-US" sz="1050" dirty="0" smtClean="0"/>
-                        <a:t>3.2.2. Static IAM Limitation</a:t>
-                      </a:r>
-                    </a:p>
-                    <a:p>
-                      <a:r>
-                        <a:rPr lang="en-US" sz="1050" dirty="0" smtClean="0"/>
-                        <a:t>3.2.3. Fragmentation Across Heterogeneous Integration Layers</a:t>
-                      </a:r>
-                    </a:p>
-                    <a:p>
-                      <a:r>
-                        <a:rPr lang="en-US" sz="1050" dirty="0" smtClean="0"/>
-                        <a:t>3.2.4. Multi-Vendor Dependency Risks</a:t>
-                      </a:r>
-                      <a:endParaRPr lang="en-US" sz="1050" dirty="0"/>
-                    </a:p>
-                  </a:txBody>
-                  <a:tcPr>
-                    <a:lnL w="12700" cap="flat" cmpd="sng" algn="ctr">
-                      <a:solidFill>
-                        <a:schemeClr val="bg1">
-                          <a:lumMod val="50000"/>
-                        </a:schemeClr>
-                      </a:solidFill>
-                      <a:prstDash val="solid"/>
-                      <a:round/>
-                      <a:headEnd type="none" w="med" len="med"/>
-                      <a:tailEnd type="none" w="med" len="med"/>
-                    </a:lnL>
-                    <a:lnR w="12700" cap="flat" cmpd="sng" algn="ctr">
-                      <a:solidFill>
-                        <a:schemeClr val="bg1">
-                          <a:lumMod val="50000"/>
-                        </a:schemeClr>
-                      </a:solidFill>
-                      <a:prstDash val="solid"/>
-                      <a:round/>
-                      <a:headEnd type="none" w="med" len="med"/>
-                      <a:tailEnd type="none" w="med" len="med"/>
-                    </a:lnR>
-                    <a:lnT w="12700" cap="flat" cmpd="sng" algn="ctr">
-                      <a:solidFill>
-                        <a:schemeClr val="bg1">
-                          <a:lumMod val="50000"/>
-                        </a:schemeClr>
-                      </a:solidFill>
-                      <a:prstDash val="solid"/>
-                      <a:round/>
-                      <a:headEnd type="none" w="med" len="med"/>
-                      <a:tailEnd type="none" w="med" len="med"/>
-                    </a:lnT>
-                    <a:lnB w="12700" cap="flat" cmpd="sng" algn="ctr">
-                      <a:solidFill>
-                        <a:schemeClr val="bg1">
-                          <a:lumMod val="50000"/>
-                        </a:schemeClr>
-                      </a:solidFill>
-                      <a:prstDash val="solid"/>
-                      <a:round/>
-                      <a:headEnd type="none" w="med" len="med"/>
-                      <a:tailEnd type="none" w="med" len="med"/>
-                    </a:lnB>
-                    <a:lnTlToBr w="12700" cmpd="sng">
-                      <a:noFill/>
-                      <a:prstDash val="solid"/>
-                    </a:lnTlToBr>
-                    <a:lnBlToTr w="12700" cmpd="sng">
-                      <a:noFill/>
-                      <a:prstDash val="solid"/>
-                    </a:lnBlToTr>
-                    <a:solidFill>
-                      <a:schemeClr val="bg1"/>
-                    </a:solidFill>
-                  </a:tcPr>
-                </a:tc>
-                <a:tc>
-                  <a:txBody>
-                    <a:bodyPr/>
-                    <a:lstStyle/>
-                    <a:p>
-                      <a:r>
-                        <a:rPr lang="en-US" sz="1050" dirty="0" smtClean="0"/>
-                        <a:t>CTL-6: Global and Dynamic Boundary Adaptation</a:t>
-                      </a:r>
-                    </a:p>
-                  </a:txBody>
-                  <a:tcPr>
-                    <a:lnL w="12700" cap="flat" cmpd="sng" algn="ctr">
-                      <a:solidFill>
-                        <a:schemeClr val="bg1">
-                          <a:lumMod val="50000"/>
-                        </a:schemeClr>
-                      </a:solidFill>
-                      <a:prstDash val="solid"/>
-                      <a:round/>
-                      <a:headEnd type="none" w="med" len="med"/>
-                      <a:tailEnd type="none" w="med" len="med"/>
-                    </a:lnL>
-                    <a:lnR w="12700" cap="flat" cmpd="sng" algn="ctr">
-                      <a:solidFill>
-                        <a:schemeClr val="bg1">
-                          <a:lumMod val="50000"/>
-                        </a:schemeClr>
-                      </a:solidFill>
-                      <a:prstDash val="solid"/>
-                      <a:round/>
-                      <a:headEnd type="none" w="med" len="med"/>
-                      <a:tailEnd type="none" w="med" len="med"/>
-                    </a:lnR>
-                    <a:lnT w="12700" cap="flat" cmpd="sng" algn="ctr">
-                      <a:solidFill>
-                        <a:schemeClr val="bg1">
-                          <a:lumMod val="50000"/>
-                        </a:schemeClr>
-                      </a:solidFill>
-                      <a:prstDash val="solid"/>
-                      <a:round/>
-                      <a:headEnd type="none" w="med" len="med"/>
-                      <a:tailEnd type="none" w="med" len="med"/>
-                    </a:lnT>
-                    <a:lnB w="12700" cap="flat" cmpd="sng" algn="ctr">
-                      <a:solidFill>
-                        <a:schemeClr val="bg1">
-                          <a:lumMod val="50000"/>
-                        </a:schemeClr>
-                      </a:solidFill>
-                      <a:prstDash val="solid"/>
-                      <a:round/>
-                      <a:headEnd type="none" w="med" len="med"/>
-                      <a:tailEnd type="none" w="med" len="med"/>
-                    </a:lnB>
-                    <a:lnTlToBr w="12700" cmpd="sng">
-                      <a:noFill/>
-                      <a:prstDash val="solid"/>
-                    </a:lnTlToBr>
-                    <a:lnBlToTr w="12700" cmpd="sng">
-                      <a:noFill/>
-                      <a:prstDash val="solid"/>
-                    </a:lnBlToTr>
-                    <a:solidFill>
-                      <a:schemeClr val="bg1"/>
-                    </a:solidFill>
-                  </a:tcPr>
-                </a:tc>
-                <a:tc>
-                  <a:txBody>
-                    <a:bodyPr/>
-                    <a:lstStyle/>
-                    <a:p>
-                      <a:r>
-                        <a:rPr lang="en-US" sz="1050" dirty="0" smtClean="0"/>
-                        <a:t>Supports the injection of global coordination control policies</a:t>
-                      </a:r>
-                    </a:p>
-                    <a:p>
-                      <a:r>
-                        <a:rPr lang="en-US" sz="1050" dirty="0" smtClean="0"/>
-                        <a:t>across multi-agent environments, and enable dynamic adjustment</a:t>
-                      </a:r>
-                      <a:r>
-                        <a:rPr lang="en-US" sz="1050" baseline="0" dirty="0" smtClean="0"/>
-                        <a:t> </a:t>
-                      </a:r>
-                      <a:r>
-                        <a:rPr lang="en-US" sz="1050" dirty="0" smtClean="0"/>
-                        <a:t>(e.g., tighten the agent's permissible access from RW to</a:t>
-                      </a:r>
-                      <a:r>
-                        <a:rPr lang="en-US" sz="1050" baseline="0" dirty="0" smtClean="0"/>
-                        <a:t> RO</a:t>
-                      </a:r>
-                      <a:r>
-                        <a:rPr lang="en-US" sz="1050" dirty="0" smtClean="0"/>
-                        <a:t>) of operational bounds based on the network's current operational state.</a:t>
-                      </a:r>
-                    </a:p>
-                  </a:txBody>
-                  <a:tcPr>
-                    <a:lnL w="12700" cap="flat" cmpd="sng" algn="ctr">
-                      <a:solidFill>
-                        <a:schemeClr val="bg1">
-                          <a:lumMod val="50000"/>
-                        </a:schemeClr>
-                      </a:solidFill>
-                      <a:prstDash val="solid"/>
-                      <a:round/>
-                      <a:headEnd type="none" w="med" len="med"/>
-                      <a:tailEnd type="none" w="med" len="med"/>
-                    </a:lnL>
-                    <a:lnR w="12700" cap="flat" cmpd="sng" algn="ctr">
-                      <a:solidFill>
-                        <a:schemeClr val="bg1">
-                          <a:lumMod val="50000"/>
-                        </a:schemeClr>
-                      </a:solidFill>
-                      <a:prstDash val="solid"/>
-                      <a:round/>
-                      <a:headEnd type="none" w="med" len="med"/>
-                      <a:tailEnd type="none" w="med" len="med"/>
-                    </a:lnR>
-                    <a:lnT w="12700" cap="flat" cmpd="sng" algn="ctr">
-                      <a:solidFill>
-                        <a:schemeClr val="bg1">
-                          <a:lumMod val="50000"/>
-                        </a:schemeClr>
-                      </a:solidFill>
-                      <a:prstDash val="solid"/>
-                      <a:round/>
-                      <a:headEnd type="none" w="med" len="med"/>
-                      <a:tailEnd type="none" w="med" len="med"/>
-                    </a:lnT>
-                    <a:lnB w="12700" cap="flat" cmpd="sng" algn="ctr">
-                      <a:solidFill>
-                        <a:schemeClr val="bg1">
-                          <a:lumMod val="50000"/>
-                        </a:schemeClr>
-                      </a:solidFill>
-                      <a:prstDash val="solid"/>
-                      <a:round/>
-                      <a:headEnd type="none" w="med" len="med"/>
-                      <a:tailEnd type="none" w="med" len="med"/>
-                    </a:lnB>
-                    <a:lnTlToBr w="12700" cmpd="sng">
-                      <a:noFill/>
-                      <a:prstDash val="solid"/>
-                    </a:lnTlToBr>
-                    <a:lnBlToTr w="12700" cmpd="sng">
-                      <a:noFill/>
-                      <a:prstDash val="solid"/>
-                    </a:lnBlToTr>
-                    <a:solidFill>
-                      <a:schemeClr val="bg1"/>
-                    </a:solidFill>
-                  </a:tcPr>
-                </a:tc>
+                <a:extLst>
+                  <a:ext uri="{0D108BD9-81ED-4DB2-BD59-A6C34878D82A}">
+                    <a16:rowId xmlns:a16="http://schemas.microsoft.com/office/drawing/2014/main" val="10006"/>
+                  </a:ext>
+                </a:extLst>
               </a:tr>
             </a:tbl>
           </a:graphicData>
@@ -8602,7 +8279,7 @@
         </p:nvSpPr>
         <p:spPr>
           <a:xfrm>
-            <a:off x="664714" y="1332502"/>
+            <a:off x="583071" y="968633"/>
             <a:ext cx="3830600" cy="400110"/>
           </a:xfrm>
           <a:prstGeom prst="rect">
@@ -8621,21 +8298,8 @@
                 <a:ea typeface="Calibri" panose="020F0502020204030204" pitchFamily="34" charset="0"/>
                 <a:cs typeface="Calibri" panose="020F0502020204030204" pitchFamily="34" charset="0"/>
               </a:rPr>
-              <a:t>Set a boundary for agent </a:t>
-            </a:r>
-            <a:r>
-              <a:rPr lang="en-US" altLang="zh-CN" sz="2000" dirty="0" smtClean="0">
-                <a:latin typeface="Calibri" panose="020F0502020204030204" pitchFamily="34" charset="0"/>
-                <a:ea typeface="Calibri" panose="020F0502020204030204" pitchFamily="34" charset="0"/>
-                <a:cs typeface="Calibri" panose="020F0502020204030204" pitchFamily="34" charset="0"/>
-              </a:rPr>
-              <a:t>behaviors</a:t>
-            </a:r>
-            <a:endParaRPr lang="en-US" altLang="zh-CN" sz="2000" dirty="0">
-              <a:latin typeface="Calibri" panose="020F0502020204030204" pitchFamily="34" charset="0"/>
-              <a:ea typeface="Calibri" panose="020F0502020204030204" pitchFamily="34" charset="0"/>
-              <a:cs typeface="Calibri" panose="020F0502020204030204" pitchFamily="34" charset="0"/>
-            </a:endParaRPr>
+              <a:t>Set a boundary for agent behaviors</a:t>
+            </a:r>
           </a:p>
         </p:txBody>
       </p:sp>
@@ -8649,13 +8313,6 @@
   <p:clrMapOvr>
     <a:masterClrMapping/>
   </p:clrMapOvr>
-  <p:timing>
-    <p:tnLst>
-      <p:par>
-        <p:cTn id="1" dur="indefinite" restart="never" nodeType="tmRoot"/>
-      </p:par>
-    </p:tnLst>
-  </p:timing>
 </p:sld>
 </file>
 
@@ -8699,7 +8356,7 @@
           <a:lstStyle/>
           <a:p>
             <a:r>
-              <a:rPr lang="en-US" altLang="zh-CN" sz="3600" dirty="0" smtClean="0"/>
+              <a:rPr lang="en-US" altLang="zh-CN" sz="3600" dirty="0"/>
               <a:t>Deriving Requirements from Problem Statements-Agent Intervention</a:t>
             </a:r>
             <a:endParaRPr lang="en-US" sz="3600" dirty="0"/>
@@ -8715,14 +8372,14 @@
           <p:nvPr>
             <p:extLst>
               <p:ext uri="{D42A27DB-BD31-4B8C-83A1-F6EECF244321}">
-                <p14:modId xmlns:p14="http://schemas.microsoft.com/office/powerpoint/2010/main" val="4178013609"/>
+                <p14:modId xmlns:p14="http://schemas.microsoft.com/office/powerpoint/2010/main" val="3719484320"/>
               </p:ext>
             </p:extLst>
           </p:nvPr>
         </p:nvGraphicFramePr>
         <p:xfrm>
           <a:off x="427052" y="1510229"/>
-          <a:ext cx="11495659" cy="5154636"/>
+          <a:ext cx="11574448" cy="5168157"/>
         </p:xfrm>
         <a:graphic>
           <a:graphicData uri="http://schemas.openxmlformats.org/drawingml/2006/table">
@@ -8731,18 +8388,36 @@
                 <a:tableStyleId>{5C22544A-7EE6-4342-B048-85BDC9FD1C3A}</a:tableStyleId>
               </a:tblPr>
               <a:tblGrid>
-                <a:gridCol w="4011783"/>
-                <a:gridCol w="3239965"/>
-                <a:gridCol w="4243911"/>
+                <a:gridCol w="4039279">
+                  <a:extLst>
+                    <a:ext uri="{9D8B030D-6E8A-4147-A177-3AD203B41FA5}">
+                      <a16:colId xmlns:a16="http://schemas.microsoft.com/office/drawing/2014/main" val="20000"/>
+                    </a:ext>
+                  </a:extLst>
+                </a:gridCol>
+                <a:gridCol w="3262171">
+                  <a:extLst>
+                    <a:ext uri="{9D8B030D-6E8A-4147-A177-3AD203B41FA5}">
+                      <a16:colId xmlns:a16="http://schemas.microsoft.com/office/drawing/2014/main" val="20001"/>
+                    </a:ext>
+                  </a:extLst>
+                </a:gridCol>
+                <a:gridCol w="4272998">
+                  <a:extLst>
+                    <a:ext uri="{9D8B030D-6E8A-4147-A177-3AD203B41FA5}">
+                      <a16:colId xmlns:a16="http://schemas.microsoft.com/office/drawing/2014/main" val="20002"/>
+                    </a:ext>
+                  </a:extLst>
+                </a:gridCol>
               </a:tblGrid>
-              <a:tr h="544193">
+              <a:tr h="566598">
                 <a:tc>
                   <a:txBody>
                     <a:bodyPr/>
                     <a:lstStyle/>
                     <a:p>
                       <a:r>
-                        <a:rPr lang="en-US" sz="1400" dirty="0" smtClean="0">
+                        <a:rPr lang="en-US" sz="1400" dirty="0">
                           <a:solidFill>
                             <a:schemeClr val="bg1"/>
                           </a:solidFill>
@@ -8750,7 +8425,7 @@
                         <a:t>Problem</a:t>
                       </a:r>
                       <a:r>
-                        <a:rPr lang="en-US" sz="1400" baseline="0" dirty="0" smtClean="0">
+                        <a:rPr lang="en-US" sz="1400" baseline="0" dirty="0">
                           <a:solidFill>
                             <a:schemeClr val="bg1"/>
                           </a:solidFill>
@@ -8760,7 +8435,7 @@
                     </a:p>
                     <a:p>
                       <a:r>
-                        <a:rPr lang="en-US" sz="1400" baseline="0" dirty="0" smtClean="0">
+                        <a:rPr lang="en-US" sz="1400" baseline="0" dirty="0">
                           <a:solidFill>
                             <a:schemeClr val="bg1"/>
                           </a:solidFill>
@@ -8768,7 +8443,7 @@
                         <a:t>I-D. </a:t>
                       </a:r>
                       <a:r>
-                        <a:rPr lang="en-US" sz="1400" baseline="0" dirty="0" err="1" smtClean="0">
+                        <a:rPr lang="en-US" sz="1400" baseline="0" dirty="0" err="1">
                           <a:solidFill>
                             <a:schemeClr val="bg1"/>
                           </a:solidFill>
@@ -8776,7 +8451,7 @@
                         <a:t>wnd</a:t>
                       </a:r>
                       <a:r>
-                        <a:rPr lang="en-US" sz="1400" baseline="0" dirty="0" smtClean="0">
+                        <a:rPr lang="en-US" sz="1400" baseline="0" dirty="0">
                           <a:solidFill>
                             <a:schemeClr val="bg1"/>
                           </a:solidFill>
@@ -8784,7 +8459,7 @@
                         <a:t>-opsawg-icon-</a:t>
                       </a:r>
                       <a:r>
-                        <a:rPr lang="en-US" sz="1400" baseline="0" dirty="0" err="1" smtClean="0">
+                        <a:rPr lang="en-US" sz="1400" baseline="0" dirty="0" err="1">
                           <a:solidFill>
                             <a:schemeClr val="bg1"/>
                           </a:solidFill>
@@ -8856,25 +8531,25 @@
                     <a:lstStyle/>
                     <a:p>
                       <a:r>
-                        <a:rPr lang="en-US" sz="1400" dirty="0" smtClean="0"/>
+                        <a:rPr lang="en-US" sz="1400" dirty="0"/>
                         <a:t>Essential Requirement</a:t>
                       </a:r>
                     </a:p>
                     <a:p>
                       <a:r>
-                        <a:rPr lang="en-US" sz="1400" dirty="0" smtClean="0"/>
+                        <a:rPr lang="en-US" sz="1400" dirty="0"/>
                         <a:t>I-D.</a:t>
                       </a:r>
                       <a:r>
-                        <a:rPr lang="en-US" sz="1400" baseline="0" dirty="0" smtClean="0"/>
+                        <a:rPr lang="en-US" sz="1400" baseline="0" dirty="0"/>
                         <a:t> </a:t>
                       </a:r>
                       <a:r>
-                        <a:rPr lang="en-US" sz="1400" baseline="0" dirty="0" err="1" smtClean="0"/>
+                        <a:rPr lang="en-US" sz="1400" baseline="0" dirty="0" err="1"/>
                         <a:t>mcw</a:t>
                       </a:r>
                       <a:r>
-                        <a:rPr lang="en-US" sz="1400" baseline="0" dirty="0" smtClean="0"/>
+                        <a:rPr lang="en-US" sz="1400" baseline="0" dirty="0"/>
                         <a:t>-opsawg-icon-requirements</a:t>
                       </a:r>
                       <a:endParaRPr lang="en-US" sz="1400" dirty="0"/>
@@ -8938,10 +8613,9 @@
                     <a:lstStyle/>
                     <a:p>
                       <a:r>
-                        <a:rPr lang="en-US" sz="1400" dirty="0" smtClean="0"/>
+                        <a:rPr lang="en-US" sz="1400" dirty="0"/>
                         <a:t>Description</a:t>
                       </a:r>
-                      <a:endParaRPr lang="en-US" sz="1400" dirty="0"/>
                     </a:p>
                   </a:txBody>
                   <a:tcPr>
@@ -8996,38 +8670,43 @@
                     </a:solidFill>
                   </a:tcPr>
                 </a:tc>
+                <a:extLst>
+                  <a:ext uri="{0D108BD9-81ED-4DB2-BD59-A6C34878D82A}">
+                    <a16:rowId xmlns:a16="http://schemas.microsoft.com/office/drawing/2014/main" val="10000"/>
+                  </a:ext>
+                </a:extLst>
               </a:tr>
-              <a:tr h="2202523">
+              <a:tr h="2094503">
                 <a:tc>
                   <a:txBody>
                     <a:bodyPr/>
                     <a:lstStyle/>
                     <a:p>
                       <a:r>
-                        <a:rPr lang="en-US" sz="1400" dirty="0" smtClean="0"/>
+                        <a:rPr lang="en-US" sz="1400" dirty="0"/>
                         <a:t>3.3.1</a:t>
                       </a:r>
                       <a:r>
-                        <a:rPr lang="en-US" sz="1400" baseline="0" dirty="0" smtClean="0"/>
+                        <a:rPr lang="en-US" sz="1400" baseline="0" dirty="0"/>
                         <a:t> lack of human oversight Essential human oversight capabilities including execution interruption</a:t>
                       </a:r>
-                      <a:endParaRPr lang="en-US" sz="1400" dirty="0" smtClean="0"/>
+                      <a:endParaRPr lang="en-US" sz="1400" dirty="0"/>
                     </a:p>
                     <a:p>
                       <a:r>
-                        <a:rPr lang="en-US" sz="1400" dirty="0" smtClean="0"/>
+                        <a:rPr lang="en-US" sz="1400" dirty="0"/>
                         <a:t>5.5 absence of an interface that allows an authorized authority outside the framework or outside the agent application to signal intervention;</a:t>
                       </a:r>
                       <a:r>
-                        <a:rPr lang="en-US" sz="1400" baseline="0" dirty="0" smtClean="0"/>
+                        <a:rPr lang="en-US" sz="1400" baseline="0" dirty="0"/>
                         <a:t> </a:t>
                       </a:r>
                       <a:r>
-                        <a:rPr lang="en-US" sz="1400" dirty="0" smtClean="0"/>
+                        <a:rPr lang="en-US" sz="1400" dirty="0"/>
                         <a:t>current practice of</a:t>
                       </a:r>
                       <a:r>
-                        <a:rPr lang="en-US" sz="1400" baseline="0" dirty="0" smtClean="0"/>
+                        <a:rPr lang="en-US" sz="1400" baseline="0" dirty="0"/>
                         <a:t> intervention lacks soft redirect, scope restriction, checkpoint, task suspension, rollback, hard termination</a:t>
                       </a:r>
                     </a:p>
@@ -9096,12 +8775,12 @@
                     <a:lstStyle/>
                     <a:p>
                       <a:r>
-                        <a:rPr lang="en-US" sz="1400" dirty="0" smtClean="0"/>
+                        <a:rPr lang="en-US" sz="1400" dirty="0"/>
                         <a:t>INT-1: Execution Interruption</a:t>
                       </a:r>
                     </a:p>
                     <a:p>
-                      <a:endParaRPr lang="en-US" sz="1400" dirty="0" smtClean="0"/>
+                      <a:endParaRPr lang="en-US" sz="1400" dirty="0"/>
                     </a:p>
                   </a:txBody>
                   <a:tcPr>
@@ -9168,10 +8847,9 @@
                     <a:lstStyle/>
                     <a:p>
                       <a:r>
-                        <a:rPr lang="en-US" sz="1400" dirty="0" smtClean="0"/>
+                        <a:rPr lang="en-US" sz="1400" dirty="0"/>
                         <a:t>stop or redirect a running agent's runtime execution. Guarantees an agent can be paused/stopped from outside its own decision loop, even if the agent itself is unresponsive or stuck.</a:t>
                       </a:r>
-                      <a:endParaRPr lang="en-US" sz="1400" dirty="0"/>
                     </a:p>
                   </a:txBody>
                   <a:tcPr>
@@ -9232,25 +8910,29 @@
                     </a:solidFill>
                   </a:tcPr>
                 </a:tc>
+                <a:extLst>
+                  <a:ext uri="{0D108BD9-81ED-4DB2-BD59-A6C34878D82A}">
+                    <a16:rowId xmlns:a16="http://schemas.microsoft.com/office/drawing/2014/main" val="10001"/>
+                  </a:ext>
+                </a:extLst>
               </a:tr>
-              <a:tr h="935318">
+              <a:tr h="983782">
                 <a:tc>
                   <a:txBody>
                     <a:bodyPr/>
                     <a:lstStyle/>
                     <a:p>
                       <a:r>
-                        <a:rPr lang="en-US" sz="1400" dirty="0" smtClean="0"/>
+                        <a:rPr lang="en-US" sz="1400" dirty="0"/>
                         <a:t>3.3.1. Lack of Human Oversight</a:t>
                       </a:r>
                       <a:br>
-                        <a:rPr lang="en-US" sz="1400" dirty="0" smtClean="0"/>
+                        <a:rPr lang="en-US" sz="1400" dirty="0"/>
                       </a:br>
                       <a:r>
-                        <a:rPr lang="en-US" sz="1400" dirty="0" smtClean="0"/>
+                        <a:rPr lang="en-US" sz="1400" dirty="0"/>
                         <a:t>Essential human oversight capabilities including deterministic transaction rollback and Recovery</a:t>
                       </a:r>
-                      <a:endParaRPr lang="en-US" sz="1400" dirty="0"/>
                     </a:p>
                   </a:txBody>
                   <a:tcPr>
@@ -9317,12 +8999,12 @@
                     <a:lstStyle/>
                     <a:p>
                       <a:r>
-                        <a:rPr lang="en-US" sz="1400" dirty="0" smtClean="0"/>
+                        <a:rPr lang="en-US" sz="1400" dirty="0"/>
                         <a:t>INT-2: Rollback and Recovery</a:t>
                       </a:r>
                     </a:p>
                     <a:p>
-                      <a:endParaRPr lang="en-US" sz="1400" dirty="0" smtClean="0"/>
+                      <a:endParaRPr lang="en-US" sz="1400" dirty="0"/>
                     </a:p>
                   </a:txBody>
                   <a:tcPr>
@@ -9389,8 +9071,8 @@
                     <a:lstStyle/>
                     <a:p>
                       <a:r>
-                        <a:rPr lang="en-US" sz="1400" dirty="0" smtClean="0"/>
-                        <a:t>Able to reverse the operations performed by the agent on the network based on different rollback granularity: workflow level, task level, and context level.</a:t>
+                        <a:rPr lang="en-US" sz="1400" dirty="0"/>
+                        <a:t>Able to reverse the operations performed by the agent on the network based on different rollback granularities: workflow level, task level, and context level.</a:t>
                       </a:r>
                     </a:p>
                   </a:txBody>
@@ -9452,15 +9134,20 @@
                     </a:solidFill>
                   </a:tcPr>
                 </a:tc>
+                <a:extLst>
+                  <a:ext uri="{0D108BD9-81ED-4DB2-BD59-A6C34878D82A}">
+                    <a16:rowId xmlns:a16="http://schemas.microsoft.com/office/drawing/2014/main" val="10002"/>
+                  </a:ext>
+                </a:extLst>
               </a:tr>
-              <a:tr h="724117">
+              <a:tr h="761637">
                 <a:tc>
                   <a:txBody>
                     <a:bodyPr/>
                     <a:lstStyle/>
                     <a:p>
                       <a:r>
-                        <a:rPr lang="en-US" sz="1400" kern="1200" dirty="0" smtClean="0">
+                        <a:rPr lang="en-US" sz="1400" kern="1200" dirty="0">
                           <a:solidFill>
                             <a:schemeClr val="dk1"/>
                           </a:solidFill>
@@ -9471,7 +9158,7 @@
                         <a:t>3.3.1. Lack of Human Oversight</a:t>
                       </a:r>
                       <a:br>
-                        <a:rPr lang="en-US" sz="1400" kern="1200" dirty="0" smtClean="0">
+                        <a:rPr lang="en-US" sz="1400" kern="1200" dirty="0">
                           <a:solidFill>
                             <a:schemeClr val="dk1"/>
                           </a:solidFill>
@@ -9481,7 +9168,7 @@
                         </a:rPr>
                       </a:br>
                       <a:r>
-                        <a:rPr lang="en-US" sz="1400" kern="1200" dirty="0" smtClean="0">
+                        <a:rPr lang="en-US" sz="1400" kern="1200" dirty="0">
                           <a:solidFill>
                             <a:schemeClr val="dk1"/>
                           </a:solidFill>
@@ -9492,7 +9179,7 @@
                         <a:t>Essential</a:t>
                       </a:r>
                       <a:r>
-                        <a:rPr lang="en-US" sz="1400" kern="1200" baseline="0" dirty="0" smtClean="0">
+                        <a:rPr lang="en-US" sz="1400" kern="1200" baseline="0" dirty="0">
                           <a:solidFill>
                             <a:schemeClr val="dk1"/>
                           </a:solidFill>
@@ -9576,7 +9263,7 @@
                     <a:lstStyle/>
                     <a:p>
                       <a:r>
-                        <a:rPr lang="en-US" sz="1400" kern="1200" dirty="0" smtClean="0">
+                        <a:rPr lang="en-US" sz="1400" kern="1200" dirty="0">
                           <a:solidFill>
                             <a:schemeClr val="dk1"/>
                           </a:solidFill>
@@ -9655,8 +9342,8 @@
                     <a:lstStyle/>
                     <a:p>
                       <a:r>
-                        <a:rPr lang="en-US" sz="1400" dirty="0" smtClean="0"/>
-                        <a:t>Moves a decision the current agent can't or shouldn't make alone up to someone with broader authority, without losing context.</a:t>
+                        <a:rPr lang="en-US" sz="1400" dirty="0"/>
+                        <a:t>Moves a decision the current agent can't or shouldn't make alone up to someone with broader authority, without losing operational context.</a:t>
                       </a:r>
                     </a:p>
                   </a:txBody>
@@ -9718,15 +9405,20 @@
                     </a:solidFill>
                   </a:tcPr>
                 </a:tc>
+                <a:extLst>
+                  <a:ext uri="{0D108BD9-81ED-4DB2-BD59-A6C34878D82A}">
+                    <a16:rowId xmlns:a16="http://schemas.microsoft.com/office/drawing/2014/main" val="10003"/>
+                  </a:ext>
+                </a:extLst>
               </a:tr>
-              <a:tr h="724117">
+              <a:tr h="761637">
                 <a:tc>
                   <a:txBody>
                     <a:bodyPr/>
                     <a:lstStyle/>
                     <a:p>
                       <a:r>
-                        <a:rPr lang="en-US" sz="1400" dirty="0" smtClean="0"/>
+                        <a:rPr lang="en-US" sz="1400" dirty="0"/>
                         <a:t>4.6 Intervention and Control is concerned with ensuring actions can be corrected or reversed when necessary.</a:t>
                       </a:r>
                     </a:p>
@@ -9795,12 +9487,12 @@
                     <a:lstStyle/>
                     <a:p>
                       <a:r>
-                        <a:rPr lang="en-US" sz="1400" dirty="0" smtClean="0"/>
+                        <a:rPr lang="en-US" sz="1400" dirty="0"/>
                         <a:t>INT-4: Correction</a:t>
                       </a:r>
                     </a:p>
                     <a:p>
-                      <a:endParaRPr lang="en-US" sz="1400" dirty="0" smtClean="0"/>
+                      <a:endParaRPr lang="en-US" sz="1400" dirty="0"/>
                     </a:p>
                   </a:txBody>
                   <a:tcPr>
@@ -9867,7 +9559,7 @@
                     <a:lstStyle/>
                     <a:p>
                       <a:r>
-                        <a:rPr lang="en-US" sz="1400" dirty="0" smtClean="0"/>
+                        <a:rPr lang="en-US" sz="1400" dirty="0"/>
                         <a:t>Allows a supervisor to fix what went wrong, e.g., the intent, the data, or the plan instead of only being able to accept or reject the agent's output.</a:t>
                       </a:r>
                     </a:p>
@@ -9930,6 +9622,11 @@
                     </a:solidFill>
                   </a:tcPr>
                 </a:tc>
+                <a:extLst>
+                  <a:ext uri="{0D108BD9-81ED-4DB2-BD59-A6C34878D82A}">
+                    <a16:rowId xmlns:a16="http://schemas.microsoft.com/office/drawing/2014/main" val="10004"/>
+                  </a:ext>
+                </a:extLst>
               </a:tr>
             </a:tbl>
           </a:graphicData>
@@ -9964,11 +9661,6 @@
               </a:rPr>
               <a:t>Emergency runtime interruption when the agent deviates from expected behaviors.</a:t>
             </a:r>
-            <a:endParaRPr lang="en-US" altLang="zh-CN" dirty="0">
-              <a:latin typeface="Calibri" panose="020F0502020204030204" pitchFamily="34" charset="0"/>
-              <a:ea typeface="Calibri" panose="020F0502020204030204" pitchFamily="34" charset="0"/>
-              <a:cs typeface="Calibri" panose="020F0502020204030204" pitchFamily="34" charset="0"/>
-            </a:endParaRPr>
           </a:p>
         </p:txBody>
       </p:sp>
@@ -9982,13 +9674,6 @@
   <p:clrMapOvr>
     <a:masterClrMapping/>
   </p:clrMapOvr>
-  <p:timing>
-    <p:tnLst>
-      <p:par>
-        <p:cTn id="1" dur="indefinite" restart="never" nodeType="tmRoot"/>
-      </p:par>
-    </p:tnLst>
-  </p:timing>
 </p:sld>
 </file>
 
@@ -10051,18 +9736,13 @@
           </a:lstStyle>
           <a:p>
             <a:r>
-              <a:rPr lang="en-US" sz="4400" dirty="0" smtClean="0">
+              <a:rPr lang="en-US" sz="4400" dirty="0">
                 <a:latin typeface="Calibri" panose="020F0502020204030204" pitchFamily="34" charset="0"/>
                 <a:ea typeface="Calibri" panose="020F0502020204030204" pitchFamily="34" charset="0"/>
                 <a:cs typeface="Calibri" panose="020F0502020204030204" pitchFamily="34" charset="0"/>
               </a:rPr>
               <a:t>Comments, Questions, Concerns?</a:t>
             </a:r>
-            <a:endParaRPr lang="en-US" sz="4400" dirty="0">
-              <a:latin typeface="Calibri" panose="020F0502020204030204" pitchFamily="34" charset="0"/>
-              <a:ea typeface="Calibri" panose="020F0502020204030204" pitchFamily="34" charset="0"/>
-              <a:cs typeface="Calibri" panose="020F0502020204030204" pitchFamily="34" charset="0"/>
-            </a:endParaRPr>
           </a:p>
         </p:txBody>
       </p:sp>
@@ -10076,13 +9756,6 @@
   <p:clrMapOvr>
     <a:masterClrMapping/>
   </p:clrMapOvr>
-  <p:timing>
-    <p:tnLst>
-      <p:par>
-        <p:cTn id="1" dur="indefinite" restart="never" nodeType="tmRoot"/>
-      </p:par>
-    </p:tnLst>
-  </p:timing>
 </p:sld>
 </file>
 
